--- a/assets/icons/icons.pptx
+++ b/assets/icons/icons.pptx
@@ -6,6 +6,7 @@
   </p:sldMasterIdLst>
   <p:sldIdLst>
     <p:sldId id="256" r:id="rId2"/>
+    <p:sldId id="257" r:id="rId3"/>
   </p:sldIdLst>
   <p:sldSz cx="12192000" cy="6858000"/>
   <p:notesSz cx="6858000" cy="9144000"/>
@@ -104,6 +105,11 @@
       </a:defRPr>
     </a:lvl9pPr>
   </p:defaultTextStyle>
+  <p:extLst>
+    <p:ext uri="{EFAFB233-063F-42B5-8137-9DF3F51BA10A}">
+      <p15:sldGuideLst xmlns:p15="http://schemas.microsoft.com/office/powerpoint/2012/main"/>
+    </p:ext>
+  </p:extLst>
 </p:presentation>
 </file>
 
@@ -254,7 +260,7 @@
           <a:p>
             <a:fld id="{0D0BA784-F1F0-42FC-8C0B-86986BCEAFFF}" type="datetimeFigureOut">
               <a:rPr lang="ko-KR" altLang="en-US" smtClean="0"/>
-              <a:t>2025-11-02</a:t>
+              <a:t>2025-12-06</a:t>
             </a:fld>
             <a:endParaRPr lang="ko-KR" altLang="en-US"/>
           </a:p>
@@ -452,7 +458,7 @@
           <a:p>
             <a:fld id="{0D0BA784-F1F0-42FC-8C0B-86986BCEAFFF}" type="datetimeFigureOut">
               <a:rPr lang="ko-KR" altLang="en-US" smtClean="0"/>
-              <a:t>2025-11-02</a:t>
+              <a:t>2025-12-06</a:t>
             </a:fld>
             <a:endParaRPr lang="ko-KR" altLang="en-US"/>
           </a:p>
@@ -660,7 +666,7 @@
           <a:p>
             <a:fld id="{0D0BA784-F1F0-42FC-8C0B-86986BCEAFFF}" type="datetimeFigureOut">
               <a:rPr lang="ko-KR" altLang="en-US" smtClean="0"/>
-              <a:t>2025-11-02</a:t>
+              <a:t>2025-12-06</a:t>
             </a:fld>
             <a:endParaRPr lang="ko-KR" altLang="en-US"/>
           </a:p>
@@ -858,7 +864,7 @@
           <a:p>
             <a:fld id="{0D0BA784-F1F0-42FC-8C0B-86986BCEAFFF}" type="datetimeFigureOut">
               <a:rPr lang="ko-KR" altLang="en-US" smtClean="0"/>
-              <a:t>2025-11-02</a:t>
+              <a:t>2025-12-06</a:t>
             </a:fld>
             <a:endParaRPr lang="ko-KR" altLang="en-US"/>
           </a:p>
@@ -1133,7 +1139,7 @@
           <a:p>
             <a:fld id="{0D0BA784-F1F0-42FC-8C0B-86986BCEAFFF}" type="datetimeFigureOut">
               <a:rPr lang="ko-KR" altLang="en-US" smtClean="0"/>
-              <a:t>2025-11-02</a:t>
+              <a:t>2025-12-06</a:t>
             </a:fld>
             <a:endParaRPr lang="ko-KR" altLang="en-US"/>
           </a:p>
@@ -1398,7 +1404,7 @@
           <a:p>
             <a:fld id="{0D0BA784-F1F0-42FC-8C0B-86986BCEAFFF}" type="datetimeFigureOut">
               <a:rPr lang="ko-KR" altLang="en-US" smtClean="0"/>
-              <a:t>2025-11-02</a:t>
+              <a:t>2025-12-06</a:t>
             </a:fld>
             <a:endParaRPr lang="ko-KR" altLang="en-US"/>
           </a:p>
@@ -1810,7 +1816,7 @@
           <a:p>
             <a:fld id="{0D0BA784-F1F0-42FC-8C0B-86986BCEAFFF}" type="datetimeFigureOut">
               <a:rPr lang="ko-KR" altLang="en-US" smtClean="0"/>
-              <a:t>2025-11-02</a:t>
+              <a:t>2025-12-06</a:t>
             </a:fld>
             <a:endParaRPr lang="ko-KR" altLang="en-US"/>
           </a:p>
@@ -1951,7 +1957,7 @@
           <a:p>
             <a:fld id="{0D0BA784-F1F0-42FC-8C0B-86986BCEAFFF}" type="datetimeFigureOut">
               <a:rPr lang="ko-KR" altLang="en-US" smtClean="0"/>
-              <a:t>2025-11-02</a:t>
+              <a:t>2025-12-06</a:t>
             </a:fld>
             <a:endParaRPr lang="ko-KR" altLang="en-US"/>
           </a:p>
@@ -2064,7 +2070,7 @@
           <a:p>
             <a:fld id="{0D0BA784-F1F0-42FC-8C0B-86986BCEAFFF}" type="datetimeFigureOut">
               <a:rPr lang="ko-KR" altLang="en-US" smtClean="0"/>
-              <a:t>2025-11-02</a:t>
+              <a:t>2025-12-06</a:t>
             </a:fld>
             <a:endParaRPr lang="ko-KR" altLang="en-US"/>
           </a:p>
@@ -2375,7 +2381,7 @@
           <a:p>
             <a:fld id="{0D0BA784-F1F0-42FC-8C0B-86986BCEAFFF}" type="datetimeFigureOut">
               <a:rPr lang="ko-KR" altLang="en-US" smtClean="0"/>
-              <a:t>2025-11-02</a:t>
+              <a:t>2025-12-06</a:t>
             </a:fld>
             <a:endParaRPr lang="ko-KR" altLang="en-US"/>
           </a:p>
@@ -2663,7 +2669,7 @@
           <a:p>
             <a:fld id="{0D0BA784-F1F0-42FC-8C0B-86986BCEAFFF}" type="datetimeFigureOut">
               <a:rPr lang="ko-KR" altLang="en-US" smtClean="0"/>
-              <a:t>2025-11-02</a:t>
+              <a:t>2025-12-06</a:t>
             </a:fld>
             <a:endParaRPr lang="ko-KR" altLang="en-US"/>
           </a:p>
@@ -2904,7 +2910,7 @@
           <a:p>
             <a:fld id="{0D0BA784-F1F0-42FC-8C0B-86986BCEAFFF}" type="datetimeFigureOut">
               <a:rPr lang="ko-KR" altLang="en-US" smtClean="0"/>
-              <a:t>2025-11-02</a:t>
+              <a:t>2025-12-06</a:t>
             </a:fld>
             <a:endParaRPr lang="ko-KR" altLang="en-US"/>
           </a:p>
@@ -3430,6 +3436,170 @@
     <p:extLst>
       <p:ext uri="{BB962C8B-B14F-4D97-AF65-F5344CB8AC3E}">
         <p14:creationId xmlns:p14="http://schemas.microsoft.com/office/powerpoint/2010/main" val="4086045882"/>
+      </p:ext>
+    </p:extLst>
+  </p:cSld>
+  <p:clrMapOvr>
+    <a:masterClrMapping/>
+  </p:clrMapOvr>
+</p:sld>
+</file>
+
+<file path=ppt/slides/slide2.xml><?xml version="1.0" encoding="utf-8"?>
+<p:sld xmlns:a="http://schemas.openxmlformats.org/drawingml/2006/main" xmlns:r="http://schemas.openxmlformats.org/officeDocument/2006/relationships" xmlns:p="http://schemas.openxmlformats.org/presentationml/2006/main">
+  <p:cSld>
+    <p:spTree>
+      <p:nvGrpSpPr>
+        <p:cNvPr id="1" name="">
+          <a:extLst>
+            <a:ext uri="{FF2B5EF4-FFF2-40B4-BE49-F238E27FC236}">
+              <a16:creationId xmlns:a16="http://schemas.microsoft.com/office/drawing/2014/main" id="{205EE812-6D13-88F4-F357-F0D1BD75C93E}"/>
+            </a:ext>
+          </a:extLst>
+        </p:cNvPr>
+        <p:cNvGrpSpPr/>
+        <p:nvPr/>
+      </p:nvGrpSpPr>
+      <p:grpSpPr>
+        <a:xfrm>
+          <a:off x="0" y="0"/>
+          <a:ext cx="0" cy="0"/>
+          <a:chOff x="0" y="0"/>
+          <a:chExt cx="0" cy="0"/>
+        </a:xfrm>
+      </p:grpSpPr>
+      <p:sp>
+        <p:nvSpPr>
+          <p:cNvPr id="4" name="사각형: 둥근 모서리 3">
+            <a:extLst>
+              <a:ext uri="{FF2B5EF4-FFF2-40B4-BE49-F238E27FC236}">
+                <a16:creationId xmlns:a16="http://schemas.microsoft.com/office/drawing/2014/main" id="{0A980D8A-CCF9-A514-8E53-8E3AD43DD988}"/>
+              </a:ext>
+            </a:extLst>
+          </p:cNvPr>
+          <p:cNvSpPr/>
+          <p:nvPr/>
+        </p:nvSpPr>
+        <p:spPr>
+          <a:xfrm>
+            <a:off x="1379483" y="1742089"/>
+            <a:ext cx="2520000" cy="2520000"/>
+          </a:xfrm>
+          <a:prstGeom prst="roundRect">
+            <a:avLst/>
+          </a:prstGeom>
+          <a:solidFill>
+            <a:schemeClr val="bg1"/>
+          </a:solidFill>
+          <a:ln w="76200">
+            <a:solidFill>
+              <a:schemeClr val="tx1"/>
+            </a:solidFill>
+          </a:ln>
+          <a:effectLst>
+            <a:outerShdw blurRad="44450" dist="27940" dir="5400000" algn="ctr">
+              <a:srgbClr val="000000">
+                <a:alpha val="32000"/>
+              </a:srgbClr>
+            </a:outerShdw>
+          </a:effectLst>
+          <a:scene3d>
+            <a:camera prst="orthographicFront">
+              <a:rot lat="0" lon="0" rev="0"/>
+            </a:camera>
+            <a:lightRig rig="balanced" dir="t">
+              <a:rot lat="0" lon="0" rev="8700000"/>
+            </a:lightRig>
+          </a:scene3d>
+          <a:sp3d>
+            <a:bevelT w="190500" h="38100"/>
+          </a:sp3d>
+        </p:spPr>
+        <p:style>
+          <a:lnRef idx="2">
+            <a:schemeClr val="accent1">
+              <a:shade val="15000"/>
+            </a:schemeClr>
+          </a:lnRef>
+          <a:fillRef idx="1">
+            <a:schemeClr val="accent1"/>
+          </a:fillRef>
+          <a:effectRef idx="0">
+            <a:schemeClr val="accent1"/>
+          </a:effectRef>
+          <a:fontRef idx="minor">
+            <a:schemeClr val="lt1"/>
+          </a:fontRef>
+        </p:style>
+        <p:txBody>
+          <a:bodyPr vert="horz" rtlCol="0" anchor="ctr"/>
+          <a:lstStyle/>
+          <a:p>
+            <a:pPr algn="ctr"/>
+            <a:r>
+              <a:rPr lang="ja-JP" altLang="en-US" sz="7200" b="1" dirty="0">
+                <a:ln>
+                  <a:solidFill>
+                    <a:schemeClr val="tx1"/>
+                  </a:solidFill>
+                </a:ln>
+                <a:solidFill>
+                  <a:schemeClr val="tx1"/>
+                </a:solidFill>
+                <a:latin typeface="BIZ UDGothic" panose="020B0400000000000000" pitchFamily="33" charset="-128"/>
+                <a:ea typeface="BIZ UDGothic" panose="020B0400000000000000" pitchFamily="33" charset="-128"/>
+              </a:rPr>
+              <a:t>コト</a:t>
+            </a:r>
+            <a:endParaRPr lang="en-US" altLang="ja-JP" sz="7200" b="1" dirty="0">
+              <a:ln>
+                <a:solidFill>
+                  <a:schemeClr val="tx1"/>
+                </a:solidFill>
+              </a:ln>
+              <a:solidFill>
+                <a:schemeClr val="tx1"/>
+              </a:solidFill>
+              <a:latin typeface="BIZ UDGothic" panose="020B0400000000000000" pitchFamily="33" charset="-128"/>
+              <a:ea typeface="BIZ UDGothic" panose="020B0400000000000000" pitchFamily="33" charset="-128"/>
+            </a:endParaRPr>
+          </a:p>
+          <a:p>
+            <a:pPr algn="ctr"/>
+            <a:r>
+              <a:rPr lang="ja-JP" altLang="en-US" sz="5400" b="1" dirty="0">
+                <a:ln>
+                  <a:solidFill>
+                    <a:schemeClr val="tx1"/>
+                  </a:solidFill>
+                </a:ln>
+                <a:solidFill>
+                  <a:schemeClr val="tx1"/>
+                </a:solidFill>
+                <a:latin typeface="BIZ UDGothic" panose="020B0400000000000000" pitchFamily="33" charset="-128"/>
+                <a:ea typeface="BIZ UDGothic" panose="020B0400000000000000" pitchFamily="33" charset="-128"/>
+              </a:rPr>
+              <a:t>バンク</a:t>
+            </a:r>
+            <a:endParaRPr lang="ko-KR" altLang="en-US" sz="5400" b="1" dirty="0">
+              <a:ln>
+                <a:solidFill>
+                  <a:schemeClr val="tx1"/>
+                </a:solidFill>
+              </a:ln>
+              <a:solidFill>
+                <a:schemeClr val="tx1"/>
+              </a:solidFill>
+              <a:latin typeface="BIZ UDGothic" panose="020B0400000000000000" pitchFamily="33" charset="-128"/>
+              <a:ea typeface="HY견명조" panose="02030600000101010101" pitchFamily="18" charset="-127"/>
+            </a:endParaRPr>
+          </a:p>
+        </p:txBody>
+      </p:sp>
+    </p:spTree>
+    <p:extLst>
+      <p:ext uri="{BB962C8B-B14F-4D97-AF65-F5344CB8AC3E}">
+        <p14:creationId xmlns:p14="http://schemas.microsoft.com/office/powerpoint/2010/main" val="3772490247"/>
       </p:ext>
     </p:extLst>
   </p:cSld>

--- a/assets/icons/icons.pptx
+++ b/assets/icons/icons.pptx
@@ -6,7 +6,9 @@
   </p:sldMasterIdLst>
   <p:sldIdLst>
     <p:sldId id="256" r:id="rId2"/>
-    <p:sldId id="257" r:id="rId3"/>
+    <p:sldId id="258" r:id="rId3"/>
+    <p:sldId id="259" r:id="rId4"/>
+    <p:sldId id="257" r:id="rId5"/>
   </p:sldIdLst>
   <p:sldSz cx="12192000" cy="6858000"/>
   <p:notesSz cx="6858000" cy="9144000"/>
@@ -3446,6 +3448,825 @@
 </file>
 
 <file path=ppt/slides/slide2.xml><?xml version="1.0" encoding="utf-8"?>
+<p:sld xmlns:a="http://schemas.openxmlformats.org/drawingml/2006/main" xmlns:r="http://schemas.openxmlformats.org/officeDocument/2006/relationships" xmlns:p="http://schemas.openxmlformats.org/presentationml/2006/main">
+  <p:cSld>
+    <p:spTree>
+      <p:nvGrpSpPr>
+        <p:cNvPr id="1" name="">
+          <a:extLst>
+            <a:ext uri="{FF2B5EF4-FFF2-40B4-BE49-F238E27FC236}">
+              <a16:creationId xmlns:a16="http://schemas.microsoft.com/office/drawing/2014/main" id="{8BA72CC5-0ADB-78D5-816E-B59F62239180}"/>
+            </a:ext>
+          </a:extLst>
+        </p:cNvPr>
+        <p:cNvGrpSpPr/>
+        <p:nvPr/>
+      </p:nvGrpSpPr>
+      <p:grpSpPr>
+        <a:xfrm>
+          <a:off x="0" y="0"/>
+          <a:ext cx="0" cy="0"/>
+          <a:chOff x="0" y="0"/>
+          <a:chExt cx="0" cy="0"/>
+        </a:xfrm>
+      </p:grpSpPr>
+      <p:sp>
+        <p:nvSpPr>
+          <p:cNvPr id="4" name="사각형: 둥근 모서리 3">
+            <a:extLst>
+              <a:ext uri="{FF2B5EF4-FFF2-40B4-BE49-F238E27FC236}">
+                <a16:creationId xmlns:a16="http://schemas.microsoft.com/office/drawing/2014/main" id="{AC5FB18D-4F0B-4BB8-1A9E-E208BA41DFD6}"/>
+              </a:ext>
+            </a:extLst>
+          </p:cNvPr>
+          <p:cNvSpPr/>
+          <p:nvPr/>
+        </p:nvSpPr>
+        <p:spPr>
+          <a:xfrm>
+            <a:off x="1379483" y="1742089"/>
+            <a:ext cx="3240000" cy="3240000"/>
+          </a:xfrm>
+          <a:prstGeom prst="roundRect">
+            <a:avLst/>
+          </a:prstGeom>
+          <a:gradFill flip="none" rotWithShape="1">
+            <a:gsLst>
+              <a:gs pos="30000">
+                <a:schemeClr val="bg1"/>
+              </a:gs>
+              <a:gs pos="0">
+                <a:srgbClr val="FFFF00"/>
+              </a:gs>
+              <a:gs pos="100000">
+                <a:schemeClr val="accent5">
+                  <a:lumMod val="60000"/>
+                  <a:lumOff val="40000"/>
+                </a:schemeClr>
+              </a:gs>
+            </a:gsLst>
+            <a:path path="circle">
+              <a:fillToRect l="50000" t="50000" r="50000" b="50000"/>
+            </a:path>
+            <a:tileRect/>
+          </a:gradFill>
+          <a:ln w="76200">
+            <a:noFill/>
+          </a:ln>
+          <a:effectLst>
+            <a:outerShdw blurRad="44450" dist="27940" dir="5400000" algn="ctr">
+              <a:srgbClr val="000000">
+                <a:alpha val="32000"/>
+              </a:srgbClr>
+            </a:outerShdw>
+          </a:effectLst>
+          <a:scene3d>
+            <a:camera prst="orthographicFront">
+              <a:rot lat="0" lon="0" rev="0"/>
+            </a:camera>
+            <a:lightRig rig="balanced" dir="t">
+              <a:rot lat="0" lon="0" rev="8700000"/>
+            </a:lightRig>
+          </a:scene3d>
+          <a:sp3d>
+            <a:bevelT w="190500" h="38100"/>
+          </a:sp3d>
+        </p:spPr>
+        <p:style>
+          <a:lnRef idx="2">
+            <a:schemeClr val="accent1">
+              <a:shade val="15000"/>
+            </a:schemeClr>
+          </a:lnRef>
+          <a:fillRef idx="1">
+            <a:schemeClr val="accent1"/>
+          </a:fillRef>
+          <a:effectRef idx="0">
+            <a:schemeClr val="accent1"/>
+          </a:effectRef>
+          <a:fontRef idx="minor">
+            <a:schemeClr val="lt1"/>
+          </a:fontRef>
+        </p:style>
+        <p:txBody>
+          <a:bodyPr vert="horz" rtlCol="0" anchor="ctr"/>
+          <a:lstStyle/>
+          <a:p>
+            <a:pPr algn="ctr"/>
+            <a:r>
+              <a:rPr lang="ja-JP" altLang="en-US" sz="17300" b="1" dirty="0">
+                <a:effectLst>
+                  <a:glow rad="114300">
+                    <a:schemeClr val="accent2">
+                      <a:satMod val="175000"/>
+                    </a:schemeClr>
+                  </a:glow>
+                </a:effectLst>
+                <a:latin typeface="Noto Sans JP" panose="020B0200000000000000" pitchFamily="34" charset="-128"/>
+                <a:ea typeface="Noto Sans JP" panose="020B0200000000000000" pitchFamily="34" charset="-128"/>
+              </a:rPr>
+              <a:t>仏</a:t>
+            </a:r>
+            <a:endParaRPr lang="ko-KR" altLang="en-US" sz="17300" b="1" dirty="0">
+              <a:effectLst>
+                <a:glow rad="114300">
+                  <a:schemeClr val="accent2">
+                    <a:satMod val="175000"/>
+                  </a:schemeClr>
+                </a:glow>
+              </a:effectLst>
+              <a:latin typeface="Noto Sans JP" panose="020B0200000000000000" pitchFamily="34" charset="-128"/>
+              <a:ea typeface="HY견명조" panose="02030600000101010101" pitchFamily="18" charset="-127"/>
+            </a:endParaRPr>
+          </a:p>
+        </p:txBody>
+      </p:sp>
+    </p:spTree>
+    <p:extLst>
+      <p:ext uri="{BB962C8B-B14F-4D97-AF65-F5344CB8AC3E}">
+        <p14:creationId xmlns:p14="http://schemas.microsoft.com/office/powerpoint/2010/main" val="3225541338"/>
+      </p:ext>
+    </p:extLst>
+  </p:cSld>
+  <p:clrMapOvr>
+    <a:masterClrMapping/>
+  </p:clrMapOvr>
+</p:sld>
+</file>
+
+<file path=ppt/slides/slide3.xml><?xml version="1.0" encoding="utf-8"?>
+<p:sld xmlns:a="http://schemas.openxmlformats.org/drawingml/2006/main" xmlns:r="http://schemas.openxmlformats.org/officeDocument/2006/relationships" xmlns:p="http://schemas.openxmlformats.org/presentationml/2006/main">
+  <p:cSld>
+    <p:spTree>
+      <p:nvGrpSpPr>
+        <p:cNvPr id="1" name="">
+          <a:extLst>
+            <a:ext uri="{FF2B5EF4-FFF2-40B4-BE49-F238E27FC236}">
+              <a16:creationId xmlns:a16="http://schemas.microsoft.com/office/drawing/2014/main" id="{0BAAAD03-ADDF-A38E-7A8F-8FDA97BA4C06}"/>
+            </a:ext>
+          </a:extLst>
+        </p:cNvPr>
+        <p:cNvGrpSpPr/>
+        <p:nvPr/>
+      </p:nvGrpSpPr>
+      <p:grpSpPr>
+        <a:xfrm>
+          <a:off x="0" y="0"/>
+          <a:ext cx="0" cy="0"/>
+          <a:chOff x="0" y="0"/>
+          <a:chExt cx="0" cy="0"/>
+        </a:xfrm>
+      </p:grpSpPr>
+      <p:grpSp>
+        <p:nvGrpSpPr>
+          <p:cNvPr id="20" name="그룹 19">
+            <a:extLst>
+              <a:ext uri="{FF2B5EF4-FFF2-40B4-BE49-F238E27FC236}">
+                <a16:creationId xmlns:a16="http://schemas.microsoft.com/office/drawing/2014/main" id="{C7B13D25-A07D-A04D-4D63-C40C359EF65D}"/>
+              </a:ext>
+            </a:extLst>
+          </p:cNvPr>
+          <p:cNvGrpSpPr/>
+          <p:nvPr/>
+        </p:nvGrpSpPr>
+        <p:grpSpPr>
+          <a:xfrm>
+            <a:off x="8049744" y="1724420"/>
+            <a:ext cx="2520000" cy="2520000"/>
+            <a:chOff x="8049744" y="1724420"/>
+            <a:chExt cx="2520000" cy="2520000"/>
+          </a:xfrm>
+        </p:grpSpPr>
+        <p:sp>
+          <p:nvSpPr>
+            <p:cNvPr id="2" name="사각형: 둥근 모서리 1">
+              <a:extLst>
+                <a:ext uri="{FF2B5EF4-FFF2-40B4-BE49-F238E27FC236}">
+                  <a16:creationId xmlns:a16="http://schemas.microsoft.com/office/drawing/2014/main" id="{063BE20E-58CD-2FAE-601D-EFE967BAC962}"/>
+                </a:ext>
+              </a:extLst>
+            </p:cNvPr>
+            <p:cNvSpPr/>
+            <p:nvPr/>
+          </p:nvSpPr>
+          <p:spPr>
+            <a:xfrm>
+              <a:off x="8049744" y="1724420"/>
+              <a:ext cx="2520000" cy="2520000"/>
+            </a:xfrm>
+            <a:custGeom>
+              <a:avLst/>
+              <a:gdLst>
+                <a:gd name="connsiteX0" fmla="*/ 0 w 2520000"/>
+                <a:gd name="connsiteY0" fmla="*/ 420008 h 2520000"/>
+                <a:gd name="connsiteX1" fmla="*/ 420008 w 2520000"/>
+                <a:gd name="connsiteY1" fmla="*/ 0 h 2520000"/>
+                <a:gd name="connsiteX2" fmla="*/ 1013602 w 2520000"/>
+                <a:gd name="connsiteY2" fmla="*/ 0 h 2520000"/>
+                <a:gd name="connsiteX3" fmla="*/ 1556797 w 2520000"/>
+                <a:gd name="connsiteY3" fmla="*/ 0 h 2520000"/>
+                <a:gd name="connsiteX4" fmla="*/ 2099992 w 2520000"/>
+                <a:gd name="connsiteY4" fmla="*/ 0 h 2520000"/>
+                <a:gd name="connsiteX5" fmla="*/ 2520000 w 2520000"/>
+                <a:gd name="connsiteY5" fmla="*/ 420008 h 2520000"/>
+                <a:gd name="connsiteX6" fmla="*/ 2520000 w 2520000"/>
+                <a:gd name="connsiteY6" fmla="*/ 946403 h 2520000"/>
+                <a:gd name="connsiteX7" fmla="*/ 2520000 w 2520000"/>
+                <a:gd name="connsiteY7" fmla="*/ 1472798 h 2520000"/>
+                <a:gd name="connsiteX8" fmla="*/ 2520000 w 2520000"/>
+                <a:gd name="connsiteY8" fmla="*/ 2099992 h 2520000"/>
+                <a:gd name="connsiteX9" fmla="*/ 2099992 w 2520000"/>
+                <a:gd name="connsiteY9" fmla="*/ 2520000 h 2520000"/>
+                <a:gd name="connsiteX10" fmla="*/ 1539997 w 2520000"/>
+                <a:gd name="connsiteY10" fmla="*/ 2520000 h 2520000"/>
+                <a:gd name="connsiteX11" fmla="*/ 996803 w 2520000"/>
+                <a:gd name="connsiteY11" fmla="*/ 2520000 h 2520000"/>
+                <a:gd name="connsiteX12" fmla="*/ 420008 w 2520000"/>
+                <a:gd name="connsiteY12" fmla="*/ 2520000 h 2520000"/>
+                <a:gd name="connsiteX13" fmla="*/ 0 w 2520000"/>
+                <a:gd name="connsiteY13" fmla="*/ 2099992 h 2520000"/>
+                <a:gd name="connsiteX14" fmla="*/ 0 w 2520000"/>
+                <a:gd name="connsiteY14" fmla="*/ 1539997 h 2520000"/>
+                <a:gd name="connsiteX15" fmla="*/ 0 w 2520000"/>
+                <a:gd name="connsiteY15" fmla="*/ 946403 h 2520000"/>
+                <a:gd name="connsiteX16" fmla="*/ 0 w 2520000"/>
+                <a:gd name="connsiteY16" fmla="*/ 420008 h 2520000"/>
+              </a:gdLst>
+              <a:ahLst/>
+              <a:cxnLst>
+                <a:cxn ang="0">
+                  <a:pos x="connsiteX0" y="connsiteY0"/>
+                </a:cxn>
+                <a:cxn ang="0">
+                  <a:pos x="connsiteX1" y="connsiteY1"/>
+                </a:cxn>
+                <a:cxn ang="0">
+                  <a:pos x="connsiteX2" y="connsiteY2"/>
+                </a:cxn>
+                <a:cxn ang="0">
+                  <a:pos x="connsiteX3" y="connsiteY3"/>
+                </a:cxn>
+                <a:cxn ang="0">
+                  <a:pos x="connsiteX4" y="connsiteY4"/>
+                </a:cxn>
+                <a:cxn ang="0">
+                  <a:pos x="connsiteX5" y="connsiteY5"/>
+                </a:cxn>
+                <a:cxn ang="0">
+                  <a:pos x="connsiteX6" y="connsiteY6"/>
+                </a:cxn>
+                <a:cxn ang="0">
+                  <a:pos x="connsiteX7" y="connsiteY7"/>
+                </a:cxn>
+                <a:cxn ang="0">
+                  <a:pos x="connsiteX8" y="connsiteY8"/>
+                </a:cxn>
+                <a:cxn ang="0">
+                  <a:pos x="connsiteX9" y="connsiteY9"/>
+                </a:cxn>
+                <a:cxn ang="0">
+                  <a:pos x="connsiteX10" y="connsiteY10"/>
+                </a:cxn>
+                <a:cxn ang="0">
+                  <a:pos x="connsiteX11" y="connsiteY11"/>
+                </a:cxn>
+                <a:cxn ang="0">
+                  <a:pos x="connsiteX12" y="connsiteY12"/>
+                </a:cxn>
+                <a:cxn ang="0">
+                  <a:pos x="connsiteX13" y="connsiteY13"/>
+                </a:cxn>
+                <a:cxn ang="0">
+                  <a:pos x="connsiteX14" y="connsiteY14"/>
+                </a:cxn>
+                <a:cxn ang="0">
+                  <a:pos x="connsiteX15" y="connsiteY15"/>
+                </a:cxn>
+                <a:cxn ang="0">
+                  <a:pos x="connsiteX16" y="connsiteY16"/>
+                </a:cxn>
+              </a:cxnLst>
+              <a:rect l="l" t="t" r="r" b="b"/>
+              <a:pathLst>
+                <a:path w="2520000" h="2520000" extrusionOk="0">
+                  <a:moveTo>
+                    <a:pt x="0" y="420008"/>
+                  </a:moveTo>
+                  <a:cubicBezTo>
+                    <a:pt x="-45326" y="160086"/>
+                    <a:pt x="143561" y="16695"/>
+                    <a:pt x="420008" y="0"/>
+                  </a:cubicBezTo>
+                  <a:cubicBezTo>
+                    <a:pt x="653209" y="-56486"/>
+                    <a:pt x="885468" y="66495"/>
+                    <a:pt x="1013602" y="0"/>
+                  </a:cubicBezTo>
+                  <a:cubicBezTo>
+                    <a:pt x="1141736" y="-66495"/>
+                    <a:pt x="1310357" y="38782"/>
+                    <a:pt x="1556797" y="0"/>
+                  </a:cubicBezTo>
+                  <a:cubicBezTo>
+                    <a:pt x="1803237" y="-38782"/>
+                    <a:pt x="1925840" y="20913"/>
+                    <a:pt x="2099992" y="0"/>
+                  </a:cubicBezTo>
+                  <a:cubicBezTo>
+                    <a:pt x="2316048" y="-51239"/>
+                    <a:pt x="2527444" y="160498"/>
+                    <a:pt x="2520000" y="420008"/>
+                  </a:cubicBezTo>
+                  <a:cubicBezTo>
+                    <a:pt x="2569423" y="539364"/>
+                    <a:pt x="2468112" y="756359"/>
+                    <a:pt x="2520000" y="946403"/>
+                  </a:cubicBezTo>
+                  <a:cubicBezTo>
+                    <a:pt x="2571888" y="1136448"/>
+                    <a:pt x="2461746" y="1218830"/>
+                    <a:pt x="2520000" y="1472798"/>
+                  </a:cubicBezTo>
+                  <a:cubicBezTo>
+                    <a:pt x="2578254" y="1726767"/>
+                    <a:pt x="2506215" y="1908108"/>
+                    <a:pt x="2520000" y="2099992"/>
+                  </a:cubicBezTo>
+                  <a:cubicBezTo>
+                    <a:pt x="2564723" y="2342709"/>
+                    <a:pt x="2282798" y="2512049"/>
+                    <a:pt x="2099992" y="2520000"/>
+                  </a:cubicBezTo>
+                  <a:cubicBezTo>
+                    <a:pt x="1845349" y="2521648"/>
+                    <a:pt x="1777363" y="2509924"/>
+                    <a:pt x="1539997" y="2520000"/>
+                  </a:cubicBezTo>
+                  <a:cubicBezTo>
+                    <a:pt x="1302631" y="2530076"/>
+                    <a:pt x="1197662" y="2494234"/>
+                    <a:pt x="996803" y="2520000"/>
+                  </a:cubicBezTo>
+                  <a:cubicBezTo>
+                    <a:pt x="795944" y="2545766"/>
+                    <a:pt x="605703" y="2470922"/>
+                    <a:pt x="420008" y="2520000"/>
+                  </a:cubicBezTo>
+                  <a:cubicBezTo>
+                    <a:pt x="218684" y="2481963"/>
+                    <a:pt x="-34708" y="2318539"/>
+                    <a:pt x="0" y="2099992"/>
+                  </a:cubicBezTo>
+                  <a:cubicBezTo>
+                    <a:pt x="-27929" y="1835233"/>
+                    <a:pt x="43180" y="1712808"/>
+                    <a:pt x="0" y="1539997"/>
+                  </a:cubicBezTo>
+                  <a:cubicBezTo>
+                    <a:pt x="-43180" y="1367186"/>
+                    <a:pt x="22602" y="1113970"/>
+                    <a:pt x="0" y="946403"/>
+                  </a:cubicBezTo>
+                  <a:cubicBezTo>
+                    <a:pt x="-22602" y="778836"/>
+                    <a:pt x="56563" y="623039"/>
+                    <a:pt x="0" y="420008"/>
+                  </a:cubicBezTo>
+                  <a:close/>
+                </a:path>
+              </a:pathLst>
+            </a:custGeom>
+            <a:solidFill>
+              <a:schemeClr val="accent4"/>
+            </a:solidFill>
+            <a:ln w="152400" cmpd="sng">
+              <a:solidFill>
+                <a:srgbClr val="002060"/>
+              </a:solidFill>
+              <a:prstDash val="solid"/>
+              <a:extLst>
+                <a:ext uri="{C807C97D-BFC1-408E-A445-0C87EB9F89A2}">
+                  <ask:lineSketchStyleProps xmlns:ask="http://schemas.microsoft.com/office/drawing/2018/sketchyshapes" sd="1219033472">
+                    <a:prstGeom prst="roundRect">
+                      <a:avLst/>
+                    </a:prstGeom>
+                    <ask:type>
+                      <ask:lineSketchScribble/>
+                    </ask:type>
+                  </ask:lineSketchStyleProps>
+                </a:ext>
+              </a:extLst>
+            </a:ln>
+            <a:effectLst>
+              <a:outerShdw blurRad="44450" dist="27940" dir="5400000" algn="ctr">
+                <a:srgbClr val="000000">
+                  <a:alpha val="32000"/>
+                </a:srgbClr>
+              </a:outerShdw>
+            </a:effectLst>
+            <a:scene3d>
+              <a:camera prst="orthographicFront">
+                <a:rot lat="0" lon="0" rev="0"/>
+              </a:camera>
+              <a:lightRig rig="balanced" dir="t">
+                <a:rot lat="0" lon="0" rev="8700000"/>
+              </a:lightRig>
+            </a:scene3d>
+            <a:sp3d/>
+          </p:spPr>
+          <p:style>
+            <a:lnRef idx="2">
+              <a:schemeClr val="accent1">
+                <a:shade val="15000"/>
+              </a:schemeClr>
+            </a:lnRef>
+            <a:fillRef idx="1">
+              <a:schemeClr val="accent1"/>
+            </a:fillRef>
+            <a:effectRef idx="0">
+              <a:schemeClr val="accent1"/>
+            </a:effectRef>
+            <a:fontRef idx="minor">
+              <a:schemeClr val="lt1"/>
+            </a:fontRef>
+          </p:style>
+          <p:txBody>
+            <a:bodyPr vert="horz" rtlCol="0" anchor="ctr"/>
+            <a:lstStyle/>
+            <a:p>
+              <a:pPr algn="ctr"/>
+              <a:endParaRPr lang="ko-KR" altLang="en-US" sz="14400" dirty="0">
+                <a:solidFill>
+                  <a:schemeClr val="tx1"/>
+                </a:solidFill>
+                <a:effectLst>
+                  <a:glow rad="101600">
+                    <a:schemeClr val="accent2">
+                      <a:satMod val="175000"/>
+                      <a:alpha val="40000"/>
+                    </a:schemeClr>
+                  </a:glow>
+                </a:effectLst>
+                <a:latin typeface="dingliehakkafont" panose="03000503000000000000" pitchFamily="66" charset="-122"/>
+                <a:ea typeface="HY견명조" panose="02030600000101010101" pitchFamily="18" charset="-127"/>
+              </a:endParaRPr>
+            </a:p>
+          </p:txBody>
+        </p:sp>
+        <p:sp>
+          <p:nvSpPr>
+            <p:cNvPr id="3" name="타원 2">
+              <a:extLst>
+                <a:ext uri="{FF2B5EF4-FFF2-40B4-BE49-F238E27FC236}">
+                  <a16:creationId xmlns:a16="http://schemas.microsoft.com/office/drawing/2014/main" id="{FDE286E7-1051-FDE0-D888-589A3ABB752B}"/>
+                </a:ext>
+              </a:extLst>
+            </p:cNvPr>
+            <p:cNvSpPr/>
+            <p:nvPr/>
+          </p:nvSpPr>
+          <p:spPr>
+            <a:xfrm>
+              <a:off x="8409744" y="2084420"/>
+              <a:ext cx="1800000" cy="1800000"/>
+            </a:xfrm>
+            <a:prstGeom prst="ellipse">
+              <a:avLst/>
+            </a:prstGeom>
+            <a:solidFill>
+              <a:schemeClr val="accent1">
+                <a:lumMod val="60000"/>
+                <a:lumOff val="40000"/>
+              </a:schemeClr>
+            </a:solidFill>
+            <a:ln w="57150">
+              <a:solidFill>
+                <a:schemeClr val="bg1"/>
+              </a:solidFill>
+            </a:ln>
+          </p:spPr>
+          <p:style>
+            <a:lnRef idx="2">
+              <a:schemeClr val="accent1">
+                <a:shade val="15000"/>
+              </a:schemeClr>
+            </a:lnRef>
+            <a:fillRef idx="1">
+              <a:schemeClr val="accent1"/>
+            </a:fillRef>
+            <a:effectRef idx="0">
+              <a:schemeClr val="accent1"/>
+            </a:effectRef>
+            <a:fontRef idx="minor">
+              <a:schemeClr val="lt1"/>
+            </a:fontRef>
+          </p:style>
+          <p:txBody>
+            <a:bodyPr rtlCol="0" anchor="ctr"/>
+            <a:lstStyle/>
+            <a:p>
+              <a:pPr algn="ctr"/>
+              <a:endParaRPr lang="ko-KR" altLang="en-US" dirty="0"/>
+            </a:p>
+          </p:txBody>
+        </p:sp>
+        <p:sp>
+          <p:nvSpPr>
+            <p:cNvPr id="5" name="타원 4">
+              <a:extLst>
+                <a:ext uri="{FF2B5EF4-FFF2-40B4-BE49-F238E27FC236}">
+                  <a16:creationId xmlns:a16="http://schemas.microsoft.com/office/drawing/2014/main" id="{25EBAAF1-DB76-4954-105C-5D277537B8F3}"/>
+                </a:ext>
+              </a:extLst>
+            </p:cNvPr>
+            <p:cNvSpPr/>
+            <p:nvPr/>
+          </p:nvSpPr>
+          <p:spPr>
+            <a:xfrm>
+              <a:off x="8859744" y="2084420"/>
+              <a:ext cx="900000" cy="1799999"/>
+            </a:xfrm>
+            <a:prstGeom prst="ellipse">
+              <a:avLst/>
+            </a:prstGeom>
+            <a:noFill/>
+            <a:ln w="76200">
+              <a:solidFill>
+                <a:schemeClr val="bg1"/>
+              </a:solidFill>
+            </a:ln>
+          </p:spPr>
+          <p:style>
+            <a:lnRef idx="2">
+              <a:schemeClr val="accent1">
+                <a:shade val="15000"/>
+              </a:schemeClr>
+            </a:lnRef>
+            <a:fillRef idx="1">
+              <a:schemeClr val="accent1"/>
+            </a:fillRef>
+            <a:effectRef idx="0">
+              <a:schemeClr val="accent1"/>
+            </a:effectRef>
+            <a:fontRef idx="minor">
+              <a:schemeClr val="lt1"/>
+            </a:fontRef>
+          </p:style>
+          <p:txBody>
+            <a:bodyPr rtlCol="0" anchor="ctr"/>
+            <a:lstStyle/>
+            <a:p>
+              <a:pPr algn="ctr"/>
+              <a:endParaRPr lang="ko-KR" altLang="en-US"/>
+            </a:p>
+          </p:txBody>
+        </p:sp>
+        <p:cxnSp>
+          <p:nvCxnSpPr>
+            <p:cNvPr id="7" name="직선 연결선 6">
+              <a:extLst>
+                <a:ext uri="{FF2B5EF4-FFF2-40B4-BE49-F238E27FC236}">
+                  <a16:creationId xmlns:a16="http://schemas.microsoft.com/office/drawing/2014/main" id="{7C802082-961F-D766-E082-71A0C035BBD1}"/>
+                </a:ext>
+              </a:extLst>
+            </p:cNvPr>
+            <p:cNvCxnSpPr>
+              <a:stCxn id="5" idx="0"/>
+              <a:endCxn id="5" idx="4"/>
+            </p:cNvCxnSpPr>
+            <p:nvPr/>
+          </p:nvCxnSpPr>
+          <p:spPr>
+            <a:xfrm>
+              <a:off x="9309744" y="2084420"/>
+              <a:ext cx="0" cy="1799999"/>
+            </a:xfrm>
+            <a:prstGeom prst="line">
+              <a:avLst/>
+            </a:prstGeom>
+            <a:ln w="76200">
+              <a:solidFill>
+                <a:schemeClr val="bg1"/>
+              </a:solidFill>
+            </a:ln>
+          </p:spPr>
+          <p:style>
+            <a:lnRef idx="2">
+              <a:schemeClr val="accent1"/>
+            </a:lnRef>
+            <a:fillRef idx="0">
+              <a:schemeClr val="accent1"/>
+            </a:fillRef>
+            <a:effectRef idx="1">
+              <a:schemeClr val="accent1"/>
+            </a:effectRef>
+            <a:fontRef idx="minor">
+              <a:schemeClr val="tx1"/>
+            </a:fontRef>
+          </p:style>
+        </p:cxnSp>
+        <p:cxnSp>
+          <p:nvCxnSpPr>
+            <p:cNvPr id="8" name="직선 연결선 7">
+              <a:extLst>
+                <a:ext uri="{FF2B5EF4-FFF2-40B4-BE49-F238E27FC236}">
+                  <a16:creationId xmlns:a16="http://schemas.microsoft.com/office/drawing/2014/main" id="{45C5994F-4BA6-161B-DFFE-D647393898BD}"/>
+                </a:ext>
+              </a:extLst>
+            </p:cNvPr>
+            <p:cNvCxnSpPr>
+              <a:cxnSpLocks/>
+              <a:stCxn id="3" idx="1"/>
+              <a:endCxn id="3" idx="7"/>
+            </p:cNvCxnSpPr>
+            <p:nvPr/>
+          </p:nvCxnSpPr>
+          <p:spPr>
+            <a:xfrm>
+              <a:off x="8673348" y="2348024"/>
+              <a:ext cx="1272792" cy="0"/>
+            </a:xfrm>
+            <a:prstGeom prst="line">
+              <a:avLst/>
+            </a:prstGeom>
+            <a:ln w="76200">
+              <a:solidFill>
+                <a:schemeClr val="bg1"/>
+              </a:solidFill>
+            </a:ln>
+          </p:spPr>
+          <p:style>
+            <a:lnRef idx="2">
+              <a:schemeClr val="accent1"/>
+            </a:lnRef>
+            <a:fillRef idx="0">
+              <a:schemeClr val="accent1"/>
+            </a:fillRef>
+            <a:effectRef idx="1">
+              <a:schemeClr val="accent1"/>
+            </a:effectRef>
+            <a:fontRef idx="minor">
+              <a:schemeClr val="tx1"/>
+            </a:fontRef>
+          </p:style>
+        </p:cxnSp>
+        <p:cxnSp>
+          <p:nvCxnSpPr>
+            <p:cNvPr id="11" name="직선 연결선 10">
+              <a:extLst>
+                <a:ext uri="{FF2B5EF4-FFF2-40B4-BE49-F238E27FC236}">
+                  <a16:creationId xmlns:a16="http://schemas.microsoft.com/office/drawing/2014/main" id="{03E6D015-B85A-5C3E-D700-AFC5CB77ABCD}"/>
+                </a:ext>
+              </a:extLst>
+            </p:cNvPr>
+            <p:cNvCxnSpPr>
+              <a:cxnSpLocks/>
+              <a:stCxn id="3" idx="2"/>
+              <a:endCxn id="3" idx="6"/>
+            </p:cNvCxnSpPr>
+            <p:nvPr/>
+          </p:nvCxnSpPr>
+          <p:spPr>
+            <a:xfrm>
+              <a:off x="8409744" y="2984420"/>
+              <a:ext cx="1800000" cy="0"/>
+            </a:xfrm>
+            <a:prstGeom prst="line">
+              <a:avLst/>
+            </a:prstGeom>
+            <a:ln w="76200">
+              <a:solidFill>
+                <a:schemeClr val="bg1"/>
+              </a:solidFill>
+            </a:ln>
+          </p:spPr>
+          <p:style>
+            <a:lnRef idx="2">
+              <a:schemeClr val="accent1"/>
+            </a:lnRef>
+            <a:fillRef idx="0">
+              <a:schemeClr val="accent1"/>
+            </a:fillRef>
+            <a:effectRef idx="1">
+              <a:schemeClr val="accent1"/>
+            </a:effectRef>
+            <a:fontRef idx="minor">
+              <a:schemeClr val="tx1"/>
+            </a:fontRef>
+          </p:style>
+        </p:cxnSp>
+        <p:cxnSp>
+          <p:nvCxnSpPr>
+            <p:cNvPr id="15" name="직선 연결선 14">
+              <a:extLst>
+                <a:ext uri="{FF2B5EF4-FFF2-40B4-BE49-F238E27FC236}">
+                  <a16:creationId xmlns:a16="http://schemas.microsoft.com/office/drawing/2014/main" id="{25DFD62B-7C67-7832-35E7-4BB4F5197C74}"/>
+                </a:ext>
+              </a:extLst>
+            </p:cNvPr>
+            <p:cNvCxnSpPr>
+              <a:cxnSpLocks/>
+              <a:stCxn id="3" idx="3"/>
+              <a:endCxn id="3" idx="5"/>
+            </p:cNvCxnSpPr>
+            <p:nvPr/>
+          </p:nvCxnSpPr>
+          <p:spPr>
+            <a:xfrm>
+              <a:off x="8673348" y="3620816"/>
+              <a:ext cx="1272792" cy="0"/>
+            </a:xfrm>
+            <a:prstGeom prst="line">
+              <a:avLst/>
+            </a:prstGeom>
+            <a:ln w="76200">
+              <a:solidFill>
+                <a:schemeClr val="bg1"/>
+              </a:solidFill>
+            </a:ln>
+          </p:spPr>
+          <p:style>
+            <a:lnRef idx="2">
+              <a:schemeClr val="accent1"/>
+            </a:lnRef>
+            <a:fillRef idx="0">
+              <a:schemeClr val="accent1"/>
+            </a:fillRef>
+            <a:effectRef idx="1">
+              <a:schemeClr val="accent1"/>
+            </a:effectRef>
+            <a:fontRef idx="minor">
+              <a:schemeClr val="tx1"/>
+            </a:fontRef>
+          </p:style>
+        </p:cxnSp>
+        <p:sp>
+          <p:nvSpPr>
+            <p:cNvPr id="18" name="TextBox 17">
+              <a:extLst>
+                <a:ext uri="{FF2B5EF4-FFF2-40B4-BE49-F238E27FC236}">
+                  <a16:creationId xmlns:a16="http://schemas.microsoft.com/office/drawing/2014/main" id="{769C3976-D543-1842-C495-31E6C8E01D4D}"/>
+                </a:ext>
+              </a:extLst>
+            </p:cNvPr>
+            <p:cNvSpPr txBox="1"/>
+            <p:nvPr/>
+          </p:nvSpPr>
+          <p:spPr>
+            <a:xfrm>
+              <a:off x="8409754" y="1832628"/>
+              <a:ext cx="1799990" cy="2308324"/>
+            </a:xfrm>
+            <a:prstGeom prst="rect">
+              <a:avLst/>
+            </a:prstGeom>
+            <a:noFill/>
+          </p:spPr>
+          <p:txBody>
+            <a:bodyPr wrap="square" rtlCol="0">
+              <a:spAutoFit/>
+            </a:bodyPr>
+            <a:lstStyle/>
+            <a:p>
+              <a:pPr algn="ctr"/>
+              <a:r>
+                <a:rPr lang="ko-KR" altLang="en-US" sz="14400" b="1" dirty="0">
+                  <a:latin typeface="HY중고딕" panose="02030600000101010101" pitchFamily="18" charset="-127"/>
+                  <a:ea typeface="HY중고딕" panose="02030600000101010101" pitchFamily="18" charset="-127"/>
+                </a:rPr>
+                <a:t>地</a:t>
+              </a:r>
+              <a:endParaRPr lang="ko-KR" altLang="en-US" sz="17300" b="1" dirty="0">
+                <a:effectLst>
+                  <a:glow rad="101600">
+                    <a:schemeClr val="accent2">
+                      <a:satMod val="175000"/>
+                      <a:alpha val="40000"/>
+                    </a:schemeClr>
+                  </a:glow>
+                </a:effectLst>
+                <a:latin typeface="HY중고딕" panose="02030600000101010101" pitchFamily="18" charset="-127"/>
+                <a:ea typeface="HY중고딕" panose="02030600000101010101" pitchFamily="18" charset="-127"/>
+              </a:endParaRPr>
+            </a:p>
+          </p:txBody>
+        </p:sp>
+      </p:grpSp>
+    </p:spTree>
+    <p:extLst>
+      <p:ext uri="{BB962C8B-B14F-4D97-AF65-F5344CB8AC3E}">
+        <p14:creationId xmlns:p14="http://schemas.microsoft.com/office/powerpoint/2010/main" val="1391910095"/>
+      </p:ext>
+    </p:extLst>
+  </p:cSld>
+  <p:clrMapOvr>
+    <a:masterClrMapping/>
+  </p:clrMapOvr>
+</p:sld>
+</file>
+
+<file path=ppt/slides/slide4.xml><?xml version="1.0" encoding="utf-8"?>
 <p:sld xmlns:a="http://schemas.openxmlformats.org/drawingml/2006/main" xmlns:r="http://schemas.openxmlformats.org/officeDocument/2006/relationships" xmlns:p="http://schemas.openxmlformats.org/presentationml/2006/main">
   <p:cSld>
     <p:spTree>

--- a/assets/icons/icons.pptx
+++ b/assets/icons/icons.pptx
@@ -2,21 +2,25 @@
 <file path=ppt/presentation.xml><?xml version="1.0" encoding="utf-8"?>
 <p:presentation xmlns:a="http://schemas.openxmlformats.org/drawingml/2006/main" xmlns:r="http://schemas.openxmlformats.org/officeDocument/2006/relationships" xmlns:p="http://schemas.openxmlformats.org/presentationml/2006/main" saveSubsetFonts="1">
   <p:sldMasterIdLst>
-    <p:sldMasterId id="2147483648" r:id="rId1"/>
+    <p:sldMasterId id="2147483660" r:id="rId1"/>
   </p:sldMasterIdLst>
   <p:sldIdLst>
     <p:sldId id="256" r:id="rId2"/>
     <p:sldId id="258" r:id="rId3"/>
     <p:sldId id="259" r:id="rId4"/>
     <p:sldId id="257" r:id="rId5"/>
+    <p:sldId id="260" r:id="rId6"/>
+    <p:sldId id="261" r:id="rId7"/>
+    <p:sldId id="262" r:id="rId8"/>
+    <p:sldId id="263" r:id="rId9"/>
   </p:sldIdLst>
-  <p:sldSz cx="12192000" cy="6858000"/>
+  <p:sldSz cx="2519363" cy="2519363"/>
   <p:notesSz cx="6858000" cy="9144000"/>
   <p:defaultTextStyle>
     <a:defPPr>
-      <a:defRPr lang="ko-KR"/>
+      <a:defRPr lang="en-US"/>
     </a:defPPr>
-    <a:lvl1pPr marL="0" algn="l" defTabSz="914400" rtl="0" eaLnBrk="1" latinLnBrk="1" hangingPunct="1">
+    <a:lvl1pPr marL="0" algn="l" defTabSz="457200" rtl="0" eaLnBrk="1" latinLnBrk="0" hangingPunct="1">
       <a:defRPr sz="1800" kern="1200">
         <a:solidFill>
           <a:schemeClr val="tx1"/>
@@ -26,7 +30,7 @@
         <a:cs typeface="+mn-cs"/>
       </a:defRPr>
     </a:lvl1pPr>
-    <a:lvl2pPr marL="457200" algn="l" defTabSz="914400" rtl="0" eaLnBrk="1" latinLnBrk="1" hangingPunct="1">
+    <a:lvl2pPr marL="457200" algn="l" defTabSz="457200" rtl="0" eaLnBrk="1" latinLnBrk="0" hangingPunct="1">
       <a:defRPr sz="1800" kern="1200">
         <a:solidFill>
           <a:schemeClr val="tx1"/>
@@ -36,7 +40,7 @@
         <a:cs typeface="+mn-cs"/>
       </a:defRPr>
     </a:lvl2pPr>
-    <a:lvl3pPr marL="914400" algn="l" defTabSz="914400" rtl="0" eaLnBrk="1" latinLnBrk="1" hangingPunct="1">
+    <a:lvl3pPr marL="914400" algn="l" defTabSz="457200" rtl="0" eaLnBrk="1" latinLnBrk="0" hangingPunct="1">
       <a:defRPr sz="1800" kern="1200">
         <a:solidFill>
           <a:schemeClr val="tx1"/>
@@ -46,7 +50,7 @@
         <a:cs typeface="+mn-cs"/>
       </a:defRPr>
     </a:lvl3pPr>
-    <a:lvl4pPr marL="1371600" algn="l" defTabSz="914400" rtl="0" eaLnBrk="1" latinLnBrk="1" hangingPunct="1">
+    <a:lvl4pPr marL="1371600" algn="l" defTabSz="457200" rtl="0" eaLnBrk="1" latinLnBrk="0" hangingPunct="1">
       <a:defRPr sz="1800" kern="1200">
         <a:solidFill>
           <a:schemeClr val="tx1"/>
@@ -56,7 +60,7 @@
         <a:cs typeface="+mn-cs"/>
       </a:defRPr>
     </a:lvl4pPr>
-    <a:lvl5pPr marL="1828800" algn="l" defTabSz="914400" rtl="0" eaLnBrk="1" latinLnBrk="1" hangingPunct="1">
+    <a:lvl5pPr marL="1828800" algn="l" defTabSz="457200" rtl="0" eaLnBrk="1" latinLnBrk="0" hangingPunct="1">
       <a:defRPr sz="1800" kern="1200">
         <a:solidFill>
           <a:schemeClr val="tx1"/>
@@ -66,7 +70,7 @@
         <a:cs typeface="+mn-cs"/>
       </a:defRPr>
     </a:lvl5pPr>
-    <a:lvl6pPr marL="2286000" algn="l" defTabSz="914400" rtl="0" eaLnBrk="1" latinLnBrk="1" hangingPunct="1">
+    <a:lvl6pPr marL="2286000" algn="l" defTabSz="457200" rtl="0" eaLnBrk="1" latinLnBrk="0" hangingPunct="1">
       <a:defRPr sz="1800" kern="1200">
         <a:solidFill>
           <a:schemeClr val="tx1"/>
@@ -76,7 +80,7 @@
         <a:cs typeface="+mn-cs"/>
       </a:defRPr>
     </a:lvl6pPr>
-    <a:lvl7pPr marL="2743200" algn="l" defTabSz="914400" rtl="0" eaLnBrk="1" latinLnBrk="1" hangingPunct="1">
+    <a:lvl7pPr marL="2743200" algn="l" defTabSz="457200" rtl="0" eaLnBrk="1" latinLnBrk="0" hangingPunct="1">
       <a:defRPr sz="1800" kern="1200">
         <a:solidFill>
           <a:schemeClr val="tx1"/>
@@ -86,7 +90,7 @@
         <a:cs typeface="+mn-cs"/>
       </a:defRPr>
     </a:lvl7pPr>
-    <a:lvl8pPr marL="3200400" algn="l" defTabSz="914400" rtl="0" eaLnBrk="1" latinLnBrk="1" hangingPunct="1">
+    <a:lvl8pPr marL="3200400" algn="l" defTabSz="457200" rtl="0" eaLnBrk="1" latinLnBrk="0" hangingPunct="1">
       <a:defRPr sz="1800" kern="1200">
         <a:solidFill>
           <a:schemeClr val="tx1"/>
@@ -96,7 +100,7 @@
         <a:cs typeface="+mn-cs"/>
       </a:defRPr>
     </a:lvl8pPr>
-    <a:lvl9pPr marL="3657600" algn="l" defTabSz="914400" rtl="0" eaLnBrk="1" latinLnBrk="1" hangingPunct="1">
+    <a:lvl9pPr marL="3657600" algn="l" defTabSz="457200" rtl="0" eaLnBrk="1" latinLnBrk="0" hangingPunct="1">
       <a:defRPr sz="1800" kern="1200">
         <a:solidFill>
           <a:schemeClr val="tx1"/>
@@ -134,13 +138,7 @@
       </p:grpSpPr>
       <p:sp>
         <p:nvSpPr>
-          <p:cNvPr id="2" name="제목 1">
-            <a:extLst>
-              <a:ext uri="{FF2B5EF4-FFF2-40B4-BE49-F238E27FC236}">
-                <a16:creationId xmlns:a16="http://schemas.microsoft.com/office/drawing/2014/main" id="{DADFC578-3FB1-761D-B8AD-A05398604206}"/>
-              </a:ext>
-            </a:extLst>
-          </p:cNvPr>
+          <p:cNvPr id="2" name="Title 1"/>
           <p:cNvSpPr>
             <a:spLocks noGrp="1"/>
           </p:cNvSpPr>
@@ -150,15 +148,15 @@
         </p:nvSpPr>
         <p:spPr>
           <a:xfrm>
-            <a:off x="1524000" y="1122363"/>
-            <a:ext cx="9144000" cy="2387600"/>
+            <a:off x="188952" y="412312"/>
+            <a:ext cx="2141459" cy="877112"/>
           </a:xfrm>
         </p:spPr>
         <p:txBody>
           <a:bodyPr anchor="b"/>
           <a:lstStyle>
             <a:lvl1pPr algn="ctr">
-              <a:defRPr sz="6000"/>
+              <a:defRPr sz="1653"/>
             </a:lvl1pPr>
           </a:lstStyle>
           <a:p>
@@ -166,18 +164,13 @@
               <a:rPr lang="ko-KR" altLang="en-US"/>
               <a:t>마스터 제목 스타일 편집</a:t>
             </a:r>
-          </a:p>
-        </p:txBody>
-      </p:sp>
-      <p:sp>
-        <p:nvSpPr>
-          <p:cNvPr id="3" name="부제목 2">
-            <a:extLst>
-              <a:ext uri="{FF2B5EF4-FFF2-40B4-BE49-F238E27FC236}">
-                <a16:creationId xmlns:a16="http://schemas.microsoft.com/office/drawing/2014/main" id="{CF9C3C08-1851-6FEA-6018-2BC33D631245}"/>
-              </a:ext>
-            </a:extLst>
-          </p:cNvPr>
+            <a:endParaRPr lang="en-US" dirty="0"/>
+          </a:p>
+        </p:txBody>
+      </p:sp>
+      <p:sp>
+        <p:nvSpPr>
+          <p:cNvPr id="3" name="Subtitle 2"/>
           <p:cNvSpPr>
             <a:spLocks noGrp="1"/>
           </p:cNvSpPr>
@@ -187,8 +180,8 @@
         </p:nvSpPr>
         <p:spPr>
           <a:xfrm>
-            <a:off x="1524000" y="3602038"/>
-            <a:ext cx="9144000" cy="1655762"/>
+            <a:off x="314921" y="1323249"/>
+            <a:ext cx="1889522" cy="608263"/>
           </a:xfrm>
         </p:spPr>
         <p:txBody>
@@ -196,39 +189,39 @@
           <a:lstStyle>
             <a:lvl1pPr marL="0" indent="0" algn="ctr">
               <a:buNone/>
-              <a:defRPr sz="2400"/>
+              <a:defRPr sz="661"/>
             </a:lvl1pPr>
-            <a:lvl2pPr marL="457200" indent="0" algn="ctr">
-              <a:buNone/>
-              <a:defRPr sz="2000"/>
+            <a:lvl2pPr marL="125959" indent="0" algn="ctr">
+              <a:buNone/>
+              <a:defRPr sz="551"/>
             </a:lvl2pPr>
-            <a:lvl3pPr marL="914400" indent="0" algn="ctr">
-              <a:buNone/>
-              <a:defRPr sz="1800"/>
+            <a:lvl3pPr marL="251917" indent="0" algn="ctr">
+              <a:buNone/>
+              <a:defRPr sz="496"/>
             </a:lvl3pPr>
-            <a:lvl4pPr marL="1371600" indent="0" algn="ctr">
-              <a:buNone/>
-              <a:defRPr sz="1600"/>
+            <a:lvl4pPr marL="377876" indent="0" algn="ctr">
+              <a:buNone/>
+              <a:defRPr sz="441"/>
             </a:lvl4pPr>
-            <a:lvl5pPr marL="1828800" indent="0" algn="ctr">
-              <a:buNone/>
-              <a:defRPr sz="1600"/>
+            <a:lvl5pPr marL="503834" indent="0" algn="ctr">
+              <a:buNone/>
+              <a:defRPr sz="441"/>
             </a:lvl5pPr>
-            <a:lvl6pPr marL="2286000" indent="0" algn="ctr">
-              <a:buNone/>
-              <a:defRPr sz="1600"/>
+            <a:lvl6pPr marL="629793" indent="0" algn="ctr">
+              <a:buNone/>
+              <a:defRPr sz="441"/>
             </a:lvl6pPr>
-            <a:lvl7pPr marL="2743200" indent="0" algn="ctr">
-              <a:buNone/>
-              <a:defRPr sz="1600"/>
+            <a:lvl7pPr marL="755752" indent="0" algn="ctr">
+              <a:buNone/>
+              <a:defRPr sz="441"/>
             </a:lvl7pPr>
-            <a:lvl8pPr marL="3200400" indent="0" algn="ctr">
-              <a:buNone/>
-              <a:defRPr sz="1600"/>
+            <a:lvl8pPr marL="881710" indent="0" algn="ctr">
+              <a:buNone/>
+              <a:defRPr sz="441"/>
             </a:lvl8pPr>
-            <a:lvl9pPr marL="3657600" indent="0" algn="ctr">
-              <a:buNone/>
-              <a:defRPr sz="1600"/>
+            <a:lvl9pPr marL="1007669" indent="0" algn="ctr">
+              <a:buNone/>
+              <a:defRPr sz="441"/>
             </a:lvl9pPr>
           </a:lstStyle>
           <a:p>
@@ -236,18 +229,13 @@
               <a:rPr lang="ko-KR" altLang="en-US"/>
               <a:t>클릭하여 마스터 부제목 스타일 편집</a:t>
             </a:r>
-          </a:p>
-        </p:txBody>
-      </p:sp>
-      <p:sp>
-        <p:nvSpPr>
-          <p:cNvPr id="4" name="날짜 개체 틀 3">
-            <a:extLst>
-              <a:ext uri="{FF2B5EF4-FFF2-40B4-BE49-F238E27FC236}">
-                <a16:creationId xmlns:a16="http://schemas.microsoft.com/office/drawing/2014/main" id="{63C6A9E7-9DCA-971D-BB19-977F8CB2C937}"/>
-              </a:ext>
-            </a:extLst>
-          </p:cNvPr>
+            <a:endParaRPr lang="en-US" dirty="0"/>
+          </a:p>
+        </p:txBody>
+      </p:sp>
+      <p:sp>
+        <p:nvSpPr>
+          <p:cNvPr id="4" name="Date Placeholder 3"/>
           <p:cNvSpPr>
             <a:spLocks noGrp="1"/>
           </p:cNvSpPr>
@@ -262,7 +250,7 @@
           <a:p>
             <a:fld id="{0D0BA784-F1F0-42FC-8C0B-86986BCEAFFF}" type="datetimeFigureOut">
               <a:rPr lang="ko-KR" altLang="en-US" smtClean="0"/>
-              <a:t>2025-12-06</a:t>
+              <a:t>2025-12-31</a:t>
             </a:fld>
             <a:endParaRPr lang="ko-KR" altLang="en-US"/>
           </a:p>
@@ -270,13 +258,7 @@
       </p:sp>
       <p:sp>
         <p:nvSpPr>
-          <p:cNvPr id="5" name="바닥글 개체 틀 4">
-            <a:extLst>
-              <a:ext uri="{FF2B5EF4-FFF2-40B4-BE49-F238E27FC236}">
-                <a16:creationId xmlns:a16="http://schemas.microsoft.com/office/drawing/2014/main" id="{C5C4CECC-F2E4-908A-C2D7-33C5A90162BE}"/>
-              </a:ext>
-            </a:extLst>
-          </p:cNvPr>
+          <p:cNvPr id="5" name="Footer Placeholder 4"/>
           <p:cNvSpPr>
             <a:spLocks noGrp="1"/>
           </p:cNvSpPr>
@@ -295,13 +277,7 @@
       </p:sp>
       <p:sp>
         <p:nvSpPr>
-          <p:cNvPr id="6" name="슬라이드 번호 개체 틀 5">
-            <a:extLst>
-              <a:ext uri="{FF2B5EF4-FFF2-40B4-BE49-F238E27FC236}">
-                <a16:creationId xmlns:a16="http://schemas.microsoft.com/office/drawing/2014/main" id="{F132C30C-CE03-D345-4DEE-A5483315D300}"/>
-              </a:ext>
-            </a:extLst>
-          </p:cNvPr>
+          <p:cNvPr id="6" name="Slide Number Placeholder 5"/>
           <p:cNvSpPr>
             <a:spLocks noGrp="1"/>
           </p:cNvSpPr>
@@ -325,7 +301,7 @@
     </p:spTree>
     <p:extLst>
       <p:ext uri="{BB962C8B-B14F-4D97-AF65-F5344CB8AC3E}">
-        <p14:creationId xmlns:p14="http://schemas.microsoft.com/office/powerpoint/2010/main" val="2537744806"/>
+        <p14:creationId xmlns:p14="http://schemas.microsoft.com/office/powerpoint/2010/main" val="3787312209"/>
       </p:ext>
     </p:extLst>
   </p:cSld>
@@ -354,13 +330,7 @@
       </p:grpSpPr>
       <p:sp>
         <p:nvSpPr>
-          <p:cNvPr id="2" name="제목 1">
-            <a:extLst>
-              <a:ext uri="{FF2B5EF4-FFF2-40B4-BE49-F238E27FC236}">
-                <a16:creationId xmlns:a16="http://schemas.microsoft.com/office/drawing/2014/main" id="{57BDD9E7-9E09-2C34-2E5F-6C999DC05A1B}"/>
-              </a:ext>
-            </a:extLst>
-          </p:cNvPr>
+          <p:cNvPr id="2" name="Title 1"/>
           <p:cNvSpPr>
             <a:spLocks noGrp="1"/>
           </p:cNvSpPr>
@@ -377,18 +347,13 @@
               <a:rPr lang="ko-KR" altLang="en-US"/>
               <a:t>마스터 제목 스타일 편집</a:t>
             </a:r>
-          </a:p>
-        </p:txBody>
-      </p:sp>
-      <p:sp>
-        <p:nvSpPr>
-          <p:cNvPr id="3" name="세로 텍스트 개체 틀 2">
-            <a:extLst>
-              <a:ext uri="{FF2B5EF4-FFF2-40B4-BE49-F238E27FC236}">
-                <a16:creationId xmlns:a16="http://schemas.microsoft.com/office/drawing/2014/main" id="{1B9E3830-78D9-9C3D-6ADA-4671EE42F03F}"/>
-              </a:ext>
-            </a:extLst>
-          </p:cNvPr>
+            <a:endParaRPr lang="en-US" dirty="0"/>
+          </a:p>
+        </p:txBody>
+      </p:sp>
+      <p:sp>
+        <p:nvSpPr>
+          <p:cNvPr id="3" name="Vertical Text Placeholder 2"/>
           <p:cNvSpPr>
             <a:spLocks noGrp="1"/>
           </p:cNvSpPr>
@@ -434,18 +399,13 @@
               <a:rPr lang="ko-KR" altLang="en-US"/>
               <a:t>다섯 번째 수준</a:t>
             </a:r>
-          </a:p>
-        </p:txBody>
-      </p:sp>
-      <p:sp>
-        <p:nvSpPr>
-          <p:cNvPr id="4" name="날짜 개체 틀 3">
-            <a:extLst>
-              <a:ext uri="{FF2B5EF4-FFF2-40B4-BE49-F238E27FC236}">
-                <a16:creationId xmlns:a16="http://schemas.microsoft.com/office/drawing/2014/main" id="{879CAC2A-2215-A70B-0D1F-05F5371B99BA}"/>
-              </a:ext>
-            </a:extLst>
-          </p:cNvPr>
+            <a:endParaRPr lang="en-US" dirty="0"/>
+          </a:p>
+        </p:txBody>
+      </p:sp>
+      <p:sp>
+        <p:nvSpPr>
+          <p:cNvPr id="4" name="Date Placeholder 3"/>
           <p:cNvSpPr>
             <a:spLocks noGrp="1"/>
           </p:cNvSpPr>
@@ -460,7 +420,7 @@
           <a:p>
             <a:fld id="{0D0BA784-F1F0-42FC-8C0B-86986BCEAFFF}" type="datetimeFigureOut">
               <a:rPr lang="ko-KR" altLang="en-US" smtClean="0"/>
-              <a:t>2025-12-06</a:t>
+              <a:t>2025-12-31</a:t>
             </a:fld>
             <a:endParaRPr lang="ko-KR" altLang="en-US"/>
           </a:p>
@@ -468,13 +428,7 @@
       </p:sp>
       <p:sp>
         <p:nvSpPr>
-          <p:cNvPr id="5" name="바닥글 개체 틀 4">
-            <a:extLst>
-              <a:ext uri="{FF2B5EF4-FFF2-40B4-BE49-F238E27FC236}">
-                <a16:creationId xmlns:a16="http://schemas.microsoft.com/office/drawing/2014/main" id="{A10B46BA-166B-1FC6-351F-C47FAFBAE2CA}"/>
-              </a:ext>
-            </a:extLst>
-          </p:cNvPr>
+          <p:cNvPr id="5" name="Footer Placeholder 4"/>
           <p:cNvSpPr>
             <a:spLocks noGrp="1"/>
           </p:cNvSpPr>
@@ -493,13 +447,7 @@
       </p:sp>
       <p:sp>
         <p:nvSpPr>
-          <p:cNvPr id="6" name="슬라이드 번호 개체 틀 5">
-            <a:extLst>
-              <a:ext uri="{FF2B5EF4-FFF2-40B4-BE49-F238E27FC236}">
-                <a16:creationId xmlns:a16="http://schemas.microsoft.com/office/drawing/2014/main" id="{24F541D4-E714-1D00-D620-0AE98A9A5EC2}"/>
-              </a:ext>
-            </a:extLst>
-          </p:cNvPr>
+          <p:cNvPr id="6" name="Slide Number Placeholder 5"/>
           <p:cNvSpPr>
             <a:spLocks noGrp="1"/>
           </p:cNvSpPr>
@@ -523,7 +471,7 @@
     </p:spTree>
     <p:extLst>
       <p:ext uri="{BB962C8B-B14F-4D97-AF65-F5344CB8AC3E}">
-        <p14:creationId xmlns:p14="http://schemas.microsoft.com/office/powerpoint/2010/main" val="2799091302"/>
+        <p14:creationId xmlns:p14="http://schemas.microsoft.com/office/powerpoint/2010/main" val="802552404"/>
       </p:ext>
     </p:extLst>
   </p:cSld>
@@ -552,13 +500,7 @@
       </p:grpSpPr>
       <p:sp>
         <p:nvSpPr>
-          <p:cNvPr id="2" name="세로 제목 1">
-            <a:extLst>
-              <a:ext uri="{FF2B5EF4-FFF2-40B4-BE49-F238E27FC236}">
-                <a16:creationId xmlns:a16="http://schemas.microsoft.com/office/drawing/2014/main" id="{F1129542-4428-160F-902B-2F3235DC2479}"/>
-              </a:ext>
-            </a:extLst>
-          </p:cNvPr>
+          <p:cNvPr id="2" name="Vertical Title 1"/>
           <p:cNvSpPr>
             <a:spLocks noGrp="1"/>
           </p:cNvSpPr>
@@ -568,8 +510,8 @@
         </p:nvSpPr>
         <p:spPr>
           <a:xfrm>
-            <a:off x="8724900" y="365125"/>
-            <a:ext cx="2628900" cy="5811838"/>
+            <a:off x="1802919" y="134133"/>
+            <a:ext cx="543238" cy="2135044"/>
           </a:xfrm>
         </p:spPr>
         <p:txBody>
@@ -580,18 +522,13 @@
               <a:rPr lang="ko-KR" altLang="en-US"/>
               <a:t>마스터 제목 스타일 편집</a:t>
             </a:r>
-          </a:p>
-        </p:txBody>
-      </p:sp>
-      <p:sp>
-        <p:nvSpPr>
-          <p:cNvPr id="3" name="세로 텍스트 개체 틀 2">
-            <a:extLst>
-              <a:ext uri="{FF2B5EF4-FFF2-40B4-BE49-F238E27FC236}">
-                <a16:creationId xmlns:a16="http://schemas.microsoft.com/office/drawing/2014/main" id="{0717A561-8C1D-2EBF-24C7-9E2609176C2C}"/>
-              </a:ext>
-            </a:extLst>
-          </p:cNvPr>
+            <a:endParaRPr lang="en-US" dirty="0"/>
+          </a:p>
+        </p:txBody>
+      </p:sp>
+      <p:sp>
+        <p:nvSpPr>
+          <p:cNvPr id="3" name="Vertical Text Placeholder 2"/>
           <p:cNvSpPr>
             <a:spLocks noGrp="1"/>
           </p:cNvSpPr>
@@ -601,8 +538,8 @@
         </p:nvSpPr>
         <p:spPr>
           <a:xfrm>
-            <a:off x="838200" y="365125"/>
-            <a:ext cx="7734300" cy="5811838"/>
+            <a:off x="173206" y="134133"/>
+            <a:ext cx="1598221" cy="2135044"/>
           </a:xfrm>
         </p:spPr>
         <p:txBody>
@@ -642,18 +579,13 @@
               <a:rPr lang="ko-KR" altLang="en-US"/>
               <a:t>다섯 번째 수준</a:t>
             </a:r>
-          </a:p>
-        </p:txBody>
-      </p:sp>
-      <p:sp>
-        <p:nvSpPr>
-          <p:cNvPr id="4" name="날짜 개체 틀 3">
-            <a:extLst>
-              <a:ext uri="{FF2B5EF4-FFF2-40B4-BE49-F238E27FC236}">
-                <a16:creationId xmlns:a16="http://schemas.microsoft.com/office/drawing/2014/main" id="{267B041F-2FD6-8101-109A-F3B47CC1C0FE}"/>
-              </a:ext>
-            </a:extLst>
-          </p:cNvPr>
+            <a:endParaRPr lang="en-US" dirty="0"/>
+          </a:p>
+        </p:txBody>
+      </p:sp>
+      <p:sp>
+        <p:nvSpPr>
+          <p:cNvPr id="4" name="Date Placeholder 3"/>
           <p:cNvSpPr>
             <a:spLocks noGrp="1"/>
           </p:cNvSpPr>
@@ -668,7 +600,7 @@
           <a:p>
             <a:fld id="{0D0BA784-F1F0-42FC-8C0B-86986BCEAFFF}" type="datetimeFigureOut">
               <a:rPr lang="ko-KR" altLang="en-US" smtClean="0"/>
-              <a:t>2025-12-06</a:t>
+              <a:t>2025-12-31</a:t>
             </a:fld>
             <a:endParaRPr lang="ko-KR" altLang="en-US"/>
           </a:p>
@@ -676,13 +608,7 @@
       </p:sp>
       <p:sp>
         <p:nvSpPr>
-          <p:cNvPr id="5" name="바닥글 개체 틀 4">
-            <a:extLst>
-              <a:ext uri="{FF2B5EF4-FFF2-40B4-BE49-F238E27FC236}">
-                <a16:creationId xmlns:a16="http://schemas.microsoft.com/office/drawing/2014/main" id="{4593B14A-23A5-ECCE-8651-3E63655AE1BD}"/>
-              </a:ext>
-            </a:extLst>
-          </p:cNvPr>
+          <p:cNvPr id="5" name="Footer Placeholder 4"/>
           <p:cNvSpPr>
             <a:spLocks noGrp="1"/>
           </p:cNvSpPr>
@@ -701,13 +627,7 @@
       </p:sp>
       <p:sp>
         <p:nvSpPr>
-          <p:cNvPr id="6" name="슬라이드 번호 개체 틀 5">
-            <a:extLst>
-              <a:ext uri="{FF2B5EF4-FFF2-40B4-BE49-F238E27FC236}">
-                <a16:creationId xmlns:a16="http://schemas.microsoft.com/office/drawing/2014/main" id="{0D1DF9C7-98CC-E535-C761-0BACB9BBD4C9}"/>
-              </a:ext>
-            </a:extLst>
-          </p:cNvPr>
+          <p:cNvPr id="6" name="Slide Number Placeholder 5"/>
           <p:cNvSpPr>
             <a:spLocks noGrp="1"/>
           </p:cNvSpPr>
@@ -731,7 +651,7 @@
     </p:spTree>
     <p:extLst>
       <p:ext uri="{BB962C8B-B14F-4D97-AF65-F5344CB8AC3E}">
-        <p14:creationId xmlns:p14="http://schemas.microsoft.com/office/powerpoint/2010/main" val="136514870"/>
+        <p14:creationId xmlns:p14="http://schemas.microsoft.com/office/powerpoint/2010/main" val="3342164167"/>
       </p:ext>
     </p:extLst>
   </p:cSld>
@@ -760,13 +680,7 @@
       </p:grpSpPr>
       <p:sp>
         <p:nvSpPr>
-          <p:cNvPr id="2" name="제목 1">
-            <a:extLst>
-              <a:ext uri="{FF2B5EF4-FFF2-40B4-BE49-F238E27FC236}">
-                <a16:creationId xmlns:a16="http://schemas.microsoft.com/office/drawing/2014/main" id="{6E4C13E9-B7D3-467E-6F8F-18B74CD1A3EE}"/>
-              </a:ext>
-            </a:extLst>
-          </p:cNvPr>
+          <p:cNvPr id="2" name="Title 1"/>
           <p:cNvSpPr>
             <a:spLocks noGrp="1"/>
           </p:cNvSpPr>
@@ -783,18 +697,13 @@
               <a:rPr lang="ko-KR" altLang="en-US"/>
               <a:t>마스터 제목 스타일 편집</a:t>
             </a:r>
-          </a:p>
-        </p:txBody>
-      </p:sp>
-      <p:sp>
-        <p:nvSpPr>
-          <p:cNvPr id="3" name="내용 개체 틀 2">
-            <a:extLst>
-              <a:ext uri="{FF2B5EF4-FFF2-40B4-BE49-F238E27FC236}">
-                <a16:creationId xmlns:a16="http://schemas.microsoft.com/office/drawing/2014/main" id="{09A33F3E-4570-5D2C-B33B-77B5C02AD9B5}"/>
-              </a:ext>
-            </a:extLst>
-          </p:cNvPr>
+            <a:endParaRPr lang="en-US" dirty="0"/>
+          </a:p>
+        </p:txBody>
+      </p:sp>
+      <p:sp>
+        <p:nvSpPr>
+          <p:cNvPr id="3" name="Content Placeholder 2"/>
           <p:cNvSpPr>
             <a:spLocks noGrp="1"/>
           </p:cNvSpPr>
@@ -840,18 +749,13 @@
               <a:rPr lang="ko-KR" altLang="en-US"/>
               <a:t>다섯 번째 수준</a:t>
             </a:r>
-          </a:p>
-        </p:txBody>
-      </p:sp>
-      <p:sp>
-        <p:nvSpPr>
-          <p:cNvPr id="4" name="날짜 개체 틀 3">
-            <a:extLst>
-              <a:ext uri="{FF2B5EF4-FFF2-40B4-BE49-F238E27FC236}">
-                <a16:creationId xmlns:a16="http://schemas.microsoft.com/office/drawing/2014/main" id="{B401B6E9-9BEA-E5C1-4C63-57122E724C2F}"/>
-              </a:ext>
-            </a:extLst>
-          </p:cNvPr>
+            <a:endParaRPr lang="en-US" dirty="0"/>
+          </a:p>
+        </p:txBody>
+      </p:sp>
+      <p:sp>
+        <p:nvSpPr>
+          <p:cNvPr id="4" name="Date Placeholder 3"/>
           <p:cNvSpPr>
             <a:spLocks noGrp="1"/>
           </p:cNvSpPr>
@@ -866,7 +770,7 @@
           <a:p>
             <a:fld id="{0D0BA784-F1F0-42FC-8C0B-86986BCEAFFF}" type="datetimeFigureOut">
               <a:rPr lang="ko-KR" altLang="en-US" smtClean="0"/>
-              <a:t>2025-12-06</a:t>
+              <a:t>2025-12-31</a:t>
             </a:fld>
             <a:endParaRPr lang="ko-KR" altLang="en-US"/>
           </a:p>
@@ -874,13 +778,7 @@
       </p:sp>
       <p:sp>
         <p:nvSpPr>
-          <p:cNvPr id="5" name="바닥글 개체 틀 4">
-            <a:extLst>
-              <a:ext uri="{FF2B5EF4-FFF2-40B4-BE49-F238E27FC236}">
-                <a16:creationId xmlns:a16="http://schemas.microsoft.com/office/drawing/2014/main" id="{5937104A-FB18-5136-CE1A-1AFBAB1E1FEF}"/>
-              </a:ext>
-            </a:extLst>
-          </p:cNvPr>
+          <p:cNvPr id="5" name="Footer Placeholder 4"/>
           <p:cNvSpPr>
             <a:spLocks noGrp="1"/>
           </p:cNvSpPr>
@@ -899,13 +797,7 @@
       </p:sp>
       <p:sp>
         <p:nvSpPr>
-          <p:cNvPr id="6" name="슬라이드 번호 개체 틀 5">
-            <a:extLst>
-              <a:ext uri="{FF2B5EF4-FFF2-40B4-BE49-F238E27FC236}">
-                <a16:creationId xmlns:a16="http://schemas.microsoft.com/office/drawing/2014/main" id="{CA29C34C-FA81-A680-1C60-25D1F5B659EB}"/>
-              </a:ext>
-            </a:extLst>
-          </p:cNvPr>
+          <p:cNvPr id="6" name="Slide Number Placeholder 5"/>
           <p:cNvSpPr>
             <a:spLocks noGrp="1"/>
           </p:cNvSpPr>
@@ -929,7 +821,7 @@
     </p:spTree>
     <p:extLst>
       <p:ext uri="{BB962C8B-B14F-4D97-AF65-F5344CB8AC3E}">
-        <p14:creationId xmlns:p14="http://schemas.microsoft.com/office/powerpoint/2010/main" val="3377546977"/>
+        <p14:creationId xmlns:p14="http://schemas.microsoft.com/office/powerpoint/2010/main" val="1142628577"/>
       </p:ext>
     </p:extLst>
   </p:cSld>
@@ -958,13 +850,7 @@
       </p:grpSpPr>
       <p:sp>
         <p:nvSpPr>
-          <p:cNvPr id="2" name="제목 1">
-            <a:extLst>
-              <a:ext uri="{FF2B5EF4-FFF2-40B4-BE49-F238E27FC236}">
-                <a16:creationId xmlns:a16="http://schemas.microsoft.com/office/drawing/2014/main" id="{225D2997-00F2-103F-42DF-62AB330C2FC2}"/>
-              </a:ext>
-            </a:extLst>
-          </p:cNvPr>
+          <p:cNvPr id="2" name="Title 1"/>
           <p:cNvSpPr>
             <a:spLocks noGrp="1"/>
           </p:cNvSpPr>
@@ -974,15 +860,15 @@
         </p:nvSpPr>
         <p:spPr>
           <a:xfrm>
-            <a:off x="831850" y="1709738"/>
-            <a:ext cx="10515600" cy="2852737"/>
+            <a:off x="171894" y="628092"/>
+            <a:ext cx="2172951" cy="1047985"/>
           </a:xfrm>
         </p:spPr>
         <p:txBody>
           <a:bodyPr anchor="b"/>
           <a:lstStyle>
             <a:lvl1pPr>
-              <a:defRPr sz="6000"/>
+              <a:defRPr sz="1653"/>
             </a:lvl1pPr>
           </a:lstStyle>
           <a:p>
@@ -990,18 +876,13 @@
               <a:rPr lang="ko-KR" altLang="en-US"/>
               <a:t>마스터 제목 스타일 편집</a:t>
             </a:r>
-          </a:p>
-        </p:txBody>
-      </p:sp>
-      <p:sp>
-        <p:nvSpPr>
-          <p:cNvPr id="3" name="텍스트 개체 틀 2">
-            <a:extLst>
-              <a:ext uri="{FF2B5EF4-FFF2-40B4-BE49-F238E27FC236}">
-                <a16:creationId xmlns:a16="http://schemas.microsoft.com/office/drawing/2014/main" id="{0E2B722F-C98D-B787-1812-28A9AF0BF372}"/>
-              </a:ext>
-            </a:extLst>
-          </p:cNvPr>
+            <a:endParaRPr lang="en-US" dirty="0"/>
+          </a:p>
+        </p:txBody>
+      </p:sp>
+      <p:sp>
+        <p:nvSpPr>
+          <p:cNvPr id="3" name="Text Placeholder 2"/>
           <p:cNvSpPr>
             <a:spLocks noGrp="1"/>
           </p:cNvSpPr>
@@ -1011,8 +892,8 @@
         </p:nvSpPr>
         <p:spPr>
           <a:xfrm>
-            <a:off x="831850" y="4589463"/>
-            <a:ext cx="10515600" cy="1500187"/>
+            <a:off x="171894" y="1685991"/>
+            <a:ext cx="2172951" cy="551110"/>
           </a:xfrm>
         </p:spPr>
         <p:txBody>
@@ -1020,7 +901,7 @@
           <a:lstStyle>
             <a:lvl1pPr marL="0" indent="0">
               <a:buNone/>
-              <a:defRPr sz="2400">
+              <a:defRPr sz="661">
                 <a:solidFill>
                   <a:schemeClr val="tx1">
                     <a:tint val="82000"/>
@@ -1028,9 +909,9 @@
                 </a:solidFill>
               </a:defRPr>
             </a:lvl1pPr>
-            <a:lvl2pPr marL="457200" indent="0">
-              <a:buNone/>
-              <a:defRPr sz="2000">
+            <a:lvl2pPr marL="125959" indent="0">
+              <a:buNone/>
+              <a:defRPr sz="551">
                 <a:solidFill>
                   <a:schemeClr val="tx1">
                     <a:tint val="82000"/>
@@ -1038,9 +919,9 @@
                 </a:solidFill>
               </a:defRPr>
             </a:lvl2pPr>
-            <a:lvl3pPr marL="914400" indent="0">
-              <a:buNone/>
-              <a:defRPr sz="1800">
+            <a:lvl3pPr marL="251917" indent="0">
+              <a:buNone/>
+              <a:defRPr sz="496">
                 <a:solidFill>
                   <a:schemeClr val="tx1">
                     <a:tint val="82000"/>
@@ -1048,9 +929,9 @@
                 </a:solidFill>
               </a:defRPr>
             </a:lvl3pPr>
-            <a:lvl4pPr marL="1371600" indent="0">
-              <a:buNone/>
-              <a:defRPr sz="1600">
+            <a:lvl4pPr marL="377876" indent="0">
+              <a:buNone/>
+              <a:defRPr sz="441">
                 <a:solidFill>
                   <a:schemeClr val="tx1">
                     <a:tint val="82000"/>
@@ -1058,9 +939,9 @@
                 </a:solidFill>
               </a:defRPr>
             </a:lvl4pPr>
-            <a:lvl5pPr marL="1828800" indent="0">
-              <a:buNone/>
-              <a:defRPr sz="1600">
+            <a:lvl5pPr marL="503834" indent="0">
+              <a:buNone/>
+              <a:defRPr sz="441">
                 <a:solidFill>
                   <a:schemeClr val="tx1">
                     <a:tint val="82000"/>
@@ -1068,9 +949,9 @@
                 </a:solidFill>
               </a:defRPr>
             </a:lvl5pPr>
-            <a:lvl6pPr marL="2286000" indent="0">
-              <a:buNone/>
-              <a:defRPr sz="1600">
+            <a:lvl6pPr marL="629793" indent="0">
+              <a:buNone/>
+              <a:defRPr sz="441">
                 <a:solidFill>
                   <a:schemeClr val="tx1">
                     <a:tint val="82000"/>
@@ -1078,9 +959,9 @@
                 </a:solidFill>
               </a:defRPr>
             </a:lvl6pPr>
-            <a:lvl7pPr marL="2743200" indent="0">
-              <a:buNone/>
-              <a:defRPr sz="1600">
+            <a:lvl7pPr marL="755752" indent="0">
+              <a:buNone/>
+              <a:defRPr sz="441">
                 <a:solidFill>
                   <a:schemeClr val="tx1">
                     <a:tint val="82000"/>
@@ -1088,9 +969,9 @@
                 </a:solidFill>
               </a:defRPr>
             </a:lvl7pPr>
-            <a:lvl8pPr marL="3200400" indent="0">
-              <a:buNone/>
-              <a:defRPr sz="1600">
+            <a:lvl8pPr marL="881710" indent="0">
+              <a:buNone/>
+              <a:defRPr sz="441">
                 <a:solidFill>
                   <a:schemeClr val="tx1">
                     <a:tint val="82000"/>
@@ -1098,9 +979,9 @@
                 </a:solidFill>
               </a:defRPr>
             </a:lvl8pPr>
-            <a:lvl9pPr marL="3657600" indent="0">
-              <a:buNone/>
-              <a:defRPr sz="1600">
+            <a:lvl9pPr marL="1007669" indent="0">
+              <a:buNone/>
+              <a:defRPr sz="441">
                 <a:solidFill>
                   <a:schemeClr val="tx1">
                     <a:tint val="82000"/>
@@ -1120,13 +1001,7 @@
       </p:sp>
       <p:sp>
         <p:nvSpPr>
-          <p:cNvPr id="4" name="날짜 개체 틀 3">
-            <a:extLst>
-              <a:ext uri="{FF2B5EF4-FFF2-40B4-BE49-F238E27FC236}">
-                <a16:creationId xmlns:a16="http://schemas.microsoft.com/office/drawing/2014/main" id="{D84309DF-3479-F3D8-9FC4-A2378E827AEA}"/>
-              </a:ext>
-            </a:extLst>
-          </p:cNvPr>
+          <p:cNvPr id="4" name="Date Placeholder 3"/>
           <p:cNvSpPr>
             <a:spLocks noGrp="1"/>
           </p:cNvSpPr>
@@ -1141,7 +1016,7 @@
           <a:p>
             <a:fld id="{0D0BA784-F1F0-42FC-8C0B-86986BCEAFFF}" type="datetimeFigureOut">
               <a:rPr lang="ko-KR" altLang="en-US" smtClean="0"/>
-              <a:t>2025-12-06</a:t>
+              <a:t>2025-12-31</a:t>
             </a:fld>
             <a:endParaRPr lang="ko-KR" altLang="en-US"/>
           </a:p>
@@ -1149,13 +1024,7 @@
       </p:sp>
       <p:sp>
         <p:nvSpPr>
-          <p:cNvPr id="5" name="바닥글 개체 틀 4">
-            <a:extLst>
-              <a:ext uri="{FF2B5EF4-FFF2-40B4-BE49-F238E27FC236}">
-                <a16:creationId xmlns:a16="http://schemas.microsoft.com/office/drawing/2014/main" id="{6A0DD29D-4543-B95A-FA0B-1C24C50E6283}"/>
-              </a:ext>
-            </a:extLst>
-          </p:cNvPr>
+          <p:cNvPr id="5" name="Footer Placeholder 4"/>
           <p:cNvSpPr>
             <a:spLocks noGrp="1"/>
           </p:cNvSpPr>
@@ -1174,13 +1043,7 @@
       </p:sp>
       <p:sp>
         <p:nvSpPr>
-          <p:cNvPr id="6" name="슬라이드 번호 개체 틀 5">
-            <a:extLst>
-              <a:ext uri="{FF2B5EF4-FFF2-40B4-BE49-F238E27FC236}">
-                <a16:creationId xmlns:a16="http://schemas.microsoft.com/office/drawing/2014/main" id="{1105CDAB-38B5-5E33-929D-9EF6CC0AF260}"/>
-              </a:ext>
-            </a:extLst>
-          </p:cNvPr>
+          <p:cNvPr id="6" name="Slide Number Placeholder 5"/>
           <p:cNvSpPr>
             <a:spLocks noGrp="1"/>
           </p:cNvSpPr>
@@ -1204,7 +1067,7 @@
     </p:spTree>
     <p:extLst>
       <p:ext uri="{BB962C8B-B14F-4D97-AF65-F5344CB8AC3E}">
-        <p14:creationId xmlns:p14="http://schemas.microsoft.com/office/powerpoint/2010/main" val="3729374699"/>
+        <p14:creationId xmlns:p14="http://schemas.microsoft.com/office/powerpoint/2010/main" val="59370069"/>
       </p:ext>
     </p:extLst>
   </p:cSld>
@@ -1233,13 +1096,7 @@
       </p:grpSpPr>
       <p:sp>
         <p:nvSpPr>
-          <p:cNvPr id="2" name="제목 1">
-            <a:extLst>
-              <a:ext uri="{FF2B5EF4-FFF2-40B4-BE49-F238E27FC236}">
-                <a16:creationId xmlns:a16="http://schemas.microsoft.com/office/drawing/2014/main" id="{3A81EBDC-6365-5309-9797-5E97D64E533D}"/>
-              </a:ext>
-            </a:extLst>
-          </p:cNvPr>
+          <p:cNvPr id="2" name="Title 1"/>
           <p:cNvSpPr>
             <a:spLocks noGrp="1"/>
           </p:cNvSpPr>
@@ -1256,18 +1113,13 @@
               <a:rPr lang="ko-KR" altLang="en-US"/>
               <a:t>마스터 제목 스타일 편집</a:t>
             </a:r>
-          </a:p>
-        </p:txBody>
-      </p:sp>
-      <p:sp>
-        <p:nvSpPr>
-          <p:cNvPr id="3" name="내용 개체 틀 2">
-            <a:extLst>
-              <a:ext uri="{FF2B5EF4-FFF2-40B4-BE49-F238E27FC236}">
-                <a16:creationId xmlns:a16="http://schemas.microsoft.com/office/drawing/2014/main" id="{BEC3F6B5-EF70-187E-F9E1-0F6F8583D921}"/>
-              </a:ext>
-            </a:extLst>
-          </p:cNvPr>
+            <a:endParaRPr lang="en-US" dirty="0"/>
+          </a:p>
+        </p:txBody>
+      </p:sp>
+      <p:sp>
+        <p:nvSpPr>
+          <p:cNvPr id="3" name="Content Placeholder 2"/>
           <p:cNvSpPr>
             <a:spLocks noGrp="1"/>
           </p:cNvSpPr>
@@ -1277,8 +1129,8 @@
         </p:nvSpPr>
         <p:spPr>
           <a:xfrm>
-            <a:off x="838200" y="1825625"/>
-            <a:ext cx="5181600" cy="4351338"/>
+            <a:off x="173206" y="670664"/>
+            <a:ext cx="1070729" cy="1598513"/>
           </a:xfrm>
         </p:spPr>
         <p:txBody>
@@ -1318,18 +1170,13 @@
               <a:rPr lang="ko-KR" altLang="en-US"/>
               <a:t>다섯 번째 수준</a:t>
             </a:r>
-          </a:p>
-        </p:txBody>
-      </p:sp>
-      <p:sp>
-        <p:nvSpPr>
-          <p:cNvPr id="4" name="내용 개체 틀 3">
-            <a:extLst>
-              <a:ext uri="{FF2B5EF4-FFF2-40B4-BE49-F238E27FC236}">
-                <a16:creationId xmlns:a16="http://schemas.microsoft.com/office/drawing/2014/main" id="{12E247D4-F126-B54E-0E90-A9E858D0A884}"/>
-              </a:ext>
-            </a:extLst>
-          </p:cNvPr>
+            <a:endParaRPr lang="en-US" dirty="0"/>
+          </a:p>
+        </p:txBody>
+      </p:sp>
+      <p:sp>
+        <p:nvSpPr>
+          <p:cNvPr id="4" name="Content Placeholder 3"/>
           <p:cNvSpPr>
             <a:spLocks noGrp="1"/>
           </p:cNvSpPr>
@@ -1339,8 +1186,8 @@
         </p:nvSpPr>
         <p:spPr>
           <a:xfrm>
-            <a:off x="6172200" y="1825625"/>
-            <a:ext cx="5181600" cy="4351338"/>
+            <a:off x="1275428" y="670664"/>
+            <a:ext cx="1070729" cy="1598513"/>
           </a:xfrm>
         </p:spPr>
         <p:txBody>
@@ -1380,18 +1227,13 @@
               <a:rPr lang="ko-KR" altLang="en-US"/>
               <a:t>다섯 번째 수준</a:t>
             </a:r>
-          </a:p>
-        </p:txBody>
-      </p:sp>
-      <p:sp>
-        <p:nvSpPr>
-          <p:cNvPr id="5" name="날짜 개체 틀 4">
-            <a:extLst>
-              <a:ext uri="{FF2B5EF4-FFF2-40B4-BE49-F238E27FC236}">
-                <a16:creationId xmlns:a16="http://schemas.microsoft.com/office/drawing/2014/main" id="{1AC2C7B9-5B28-5DC6-4EE6-9F0546CA94A2}"/>
-              </a:ext>
-            </a:extLst>
-          </p:cNvPr>
+            <a:endParaRPr lang="en-US" dirty="0"/>
+          </a:p>
+        </p:txBody>
+      </p:sp>
+      <p:sp>
+        <p:nvSpPr>
+          <p:cNvPr id="5" name="Date Placeholder 4"/>
           <p:cNvSpPr>
             <a:spLocks noGrp="1"/>
           </p:cNvSpPr>
@@ -1406,7 +1248,7 @@
           <a:p>
             <a:fld id="{0D0BA784-F1F0-42FC-8C0B-86986BCEAFFF}" type="datetimeFigureOut">
               <a:rPr lang="ko-KR" altLang="en-US" smtClean="0"/>
-              <a:t>2025-12-06</a:t>
+              <a:t>2025-12-31</a:t>
             </a:fld>
             <a:endParaRPr lang="ko-KR" altLang="en-US"/>
           </a:p>
@@ -1414,13 +1256,7 @@
       </p:sp>
       <p:sp>
         <p:nvSpPr>
-          <p:cNvPr id="6" name="바닥글 개체 틀 5">
-            <a:extLst>
-              <a:ext uri="{FF2B5EF4-FFF2-40B4-BE49-F238E27FC236}">
-                <a16:creationId xmlns:a16="http://schemas.microsoft.com/office/drawing/2014/main" id="{934C9642-0551-E90A-D0BE-6851ACB90F42}"/>
-              </a:ext>
-            </a:extLst>
-          </p:cNvPr>
+          <p:cNvPr id="6" name="Footer Placeholder 5"/>
           <p:cNvSpPr>
             <a:spLocks noGrp="1"/>
           </p:cNvSpPr>
@@ -1439,13 +1275,7 @@
       </p:sp>
       <p:sp>
         <p:nvSpPr>
-          <p:cNvPr id="7" name="슬라이드 번호 개체 틀 6">
-            <a:extLst>
-              <a:ext uri="{FF2B5EF4-FFF2-40B4-BE49-F238E27FC236}">
-                <a16:creationId xmlns:a16="http://schemas.microsoft.com/office/drawing/2014/main" id="{C2F2C228-8C4F-64EB-0857-407CF3D6DB3F}"/>
-              </a:ext>
-            </a:extLst>
-          </p:cNvPr>
+          <p:cNvPr id="7" name="Slide Number Placeholder 6"/>
           <p:cNvSpPr>
             <a:spLocks noGrp="1"/>
           </p:cNvSpPr>
@@ -1469,7 +1299,7 @@
     </p:spTree>
     <p:extLst>
       <p:ext uri="{BB962C8B-B14F-4D97-AF65-F5344CB8AC3E}">
-        <p14:creationId xmlns:p14="http://schemas.microsoft.com/office/powerpoint/2010/main" val="1737951973"/>
+        <p14:creationId xmlns:p14="http://schemas.microsoft.com/office/powerpoint/2010/main" val="3457992994"/>
       </p:ext>
     </p:extLst>
   </p:cSld>
@@ -1498,13 +1328,7 @@
       </p:grpSpPr>
       <p:sp>
         <p:nvSpPr>
-          <p:cNvPr id="2" name="제목 1">
-            <a:extLst>
-              <a:ext uri="{FF2B5EF4-FFF2-40B4-BE49-F238E27FC236}">
-                <a16:creationId xmlns:a16="http://schemas.microsoft.com/office/drawing/2014/main" id="{F4C99874-5B39-43C7-5C45-6A5D1A34F6CD}"/>
-              </a:ext>
-            </a:extLst>
-          </p:cNvPr>
+          <p:cNvPr id="2" name="Title 1"/>
           <p:cNvSpPr>
             <a:spLocks noGrp="1"/>
           </p:cNvSpPr>
@@ -1514,8 +1338,8 @@
         </p:nvSpPr>
         <p:spPr>
           <a:xfrm>
-            <a:off x="839788" y="365125"/>
-            <a:ext cx="10515600" cy="1325563"/>
+            <a:off x="173534" y="134133"/>
+            <a:ext cx="2172951" cy="486960"/>
           </a:xfrm>
         </p:spPr>
         <p:txBody>
@@ -1526,18 +1350,13 @@
               <a:rPr lang="ko-KR" altLang="en-US"/>
               <a:t>마스터 제목 스타일 편집</a:t>
             </a:r>
-          </a:p>
-        </p:txBody>
-      </p:sp>
-      <p:sp>
-        <p:nvSpPr>
-          <p:cNvPr id="3" name="텍스트 개체 틀 2">
-            <a:extLst>
-              <a:ext uri="{FF2B5EF4-FFF2-40B4-BE49-F238E27FC236}">
-                <a16:creationId xmlns:a16="http://schemas.microsoft.com/office/drawing/2014/main" id="{33D9C128-4512-BD4A-35C8-BDDC4F936A24}"/>
-              </a:ext>
-            </a:extLst>
-          </p:cNvPr>
+            <a:endParaRPr lang="en-US" dirty="0"/>
+          </a:p>
+        </p:txBody>
+      </p:sp>
+      <p:sp>
+        <p:nvSpPr>
+          <p:cNvPr id="3" name="Text Placeholder 2"/>
           <p:cNvSpPr>
             <a:spLocks noGrp="1"/>
           </p:cNvSpPr>
@@ -1547,8 +1366,8 @@
         </p:nvSpPr>
         <p:spPr>
           <a:xfrm>
-            <a:off x="839788" y="1681163"/>
-            <a:ext cx="5157787" cy="823912"/>
+            <a:off x="173535" y="617594"/>
+            <a:ext cx="1065808" cy="302673"/>
           </a:xfrm>
         </p:spPr>
         <p:txBody>
@@ -1556,39 +1375,39 @@
           <a:lstStyle>
             <a:lvl1pPr marL="0" indent="0">
               <a:buNone/>
-              <a:defRPr sz="2400" b="1"/>
+              <a:defRPr sz="661" b="1"/>
             </a:lvl1pPr>
-            <a:lvl2pPr marL="457200" indent="0">
-              <a:buNone/>
-              <a:defRPr sz="2000" b="1"/>
+            <a:lvl2pPr marL="125959" indent="0">
+              <a:buNone/>
+              <a:defRPr sz="551" b="1"/>
             </a:lvl2pPr>
-            <a:lvl3pPr marL="914400" indent="0">
-              <a:buNone/>
-              <a:defRPr sz="1800" b="1"/>
+            <a:lvl3pPr marL="251917" indent="0">
+              <a:buNone/>
+              <a:defRPr sz="496" b="1"/>
             </a:lvl3pPr>
-            <a:lvl4pPr marL="1371600" indent="0">
-              <a:buNone/>
-              <a:defRPr sz="1600" b="1"/>
+            <a:lvl4pPr marL="377876" indent="0">
+              <a:buNone/>
+              <a:defRPr sz="441" b="1"/>
             </a:lvl4pPr>
-            <a:lvl5pPr marL="1828800" indent="0">
-              <a:buNone/>
-              <a:defRPr sz="1600" b="1"/>
+            <a:lvl5pPr marL="503834" indent="0">
+              <a:buNone/>
+              <a:defRPr sz="441" b="1"/>
             </a:lvl5pPr>
-            <a:lvl6pPr marL="2286000" indent="0">
-              <a:buNone/>
-              <a:defRPr sz="1600" b="1"/>
+            <a:lvl6pPr marL="629793" indent="0">
+              <a:buNone/>
+              <a:defRPr sz="441" b="1"/>
             </a:lvl6pPr>
-            <a:lvl7pPr marL="2743200" indent="0">
-              <a:buNone/>
-              <a:defRPr sz="1600" b="1"/>
+            <a:lvl7pPr marL="755752" indent="0">
+              <a:buNone/>
+              <a:defRPr sz="441" b="1"/>
             </a:lvl7pPr>
-            <a:lvl8pPr marL="3200400" indent="0">
-              <a:buNone/>
-              <a:defRPr sz="1600" b="1"/>
+            <a:lvl8pPr marL="881710" indent="0">
+              <a:buNone/>
+              <a:defRPr sz="441" b="1"/>
             </a:lvl8pPr>
-            <a:lvl9pPr marL="3657600" indent="0">
-              <a:buNone/>
-              <a:defRPr sz="1600" b="1"/>
+            <a:lvl9pPr marL="1007669" indent="0">
+              <a:buNone/>
+              <a:defRPr sz="441" b="1"/>
             </a:lvl9pPr>
           </a:lstStyle>
           <a:p>
@@ -1602,13 +1421,7 @@
       </p:sp>
       <p:sp>
         <p:nvSpPr>
-          <p:cNvPr id="4" name="내용 개체 틀 3">
-            <a:extLst>
-              <a:ext uri="{FF2B5EF4-FFF2-40B4-BE49-F238E27FC236}">
-                <a16:creationId xmlns:a16="http://schemas.microsoft.com/office/drawing/2014/main" id="{28735009-006C-76D8-5ED0-E7C517055EA5}"/>
-              </a:ext>
-            </a:extLst>
-          </p:cNvPr>
+          <p:cNvPr id="4" name="Content Placeholder 3"/>
           <p:cNvSpPr>
             <a:spLocks noGrp="1"/>
           </p:cNvSpPr>
@@ -1618,8 +1431,8 @@
         </p:nvSpPr>
         <p:spPr>
           <a:xfrm>
-            <a:off x="839788" y="2505075"/>
-            <a:ext cx="5157787" cy="3684588"/>
+            <a:off x="173535" y="920267"/>
+            <a:ext cx="1065808" cy="1353575"/>
           </a:xfrm>
         </p:spPr>
         <p:txBody>
@@ -1659,18 +1472,13 @@
               <a:rPr lang="ko-KR" altLang="en-US"/>
               <a:t>다섯 번째 수준</a:t>
             </a:r>
-          </a:p>
-        </p:txBody>
-      </p:sp>
-      <p:sp>
-        <p:nvSpPr>
-          <p:cNvPr id="5" name="텍스트 개체 틀 4">
-            <a:extLst>
-              <a:ext uri="{FF2B5EF4-FFF2-40B4-BE49-F238E27FC236}">
-                <a16:creationId xmlns:a16="http://schemas.microsoft.com/office/drawing/2014/main" id="{707ADA8C-F5C6-1A7B-FF2E-60E7D5E5FDF2}"/>
-              </a:ext>
-            </a:extLst>
-          </p:cNvPr>
+            <a:endParaRPr lang="en-US" dirty="0"/>
+          </a:p>
+        </p:txBody>
+      </p:sp>
+      <p:sp>
+        <p:nvSpPr>
+          <p:cNvPr id="5" name="Text Placeholder 4"/>
           <p:cNvSpPr>
             <a:spLocks noGrp="1"/>
           </p:cNvSpPr>
@@ -1680,8 +1488,8 @@
         </p:nvSpPr>
         <p:spPr>
           <a:xfrm>
-            <a:off x="6172200" y="1681163"/>
-            <a:ext cx="5183188" cy="823912"/>
+            <a:off x="1275428" y="617594"/>
+            <a:ext cx="1071057" cy="302673"/>
           </a:xfrm>
         </p:spPr>
         <p:txBody>
@@ -1689,39 +1497,39 @@
           <a:lstStyle>
             <a:lvl1pPr marL="0" indent="0">
               <a:buNone/>
-              <a:defRPr sz="2400" b="1"/>
+              <a:defRPr sz="661" b="1"/>
             </a:lvl1pPr>
-            <a:lvl2pPr marL="457200" indent="0">
-              <a:buNone/>
-              <a:defRPr sz="2000" b="1"/>
+            <a:lvl2pPr marL="125959" indent="0">
+              <a:buNone/>
+              <a:defRPr sz="551" b="1"/>
             </a:lvl2pPr>
-            <a:lvl3pPr marL="914400" indent="0">
-              <a:buNone/>
-              <a:defRPr sz="1800" b="1"/>
+            <a:lvl3pPr marL="251917" indent="0">
+              <a:buNone/>
+              <a:defRPr sz="496" b="1"/>
             </a:lvl3pPr>
-            <a:lvl4pPr marL="1371600" indent="0">
-              <a:buNone/>
-              <a:defRPr sz="1600" b="1"/>
+            <a:lvl4pPr marL="377876" indent="0">
+              <a:buNone/>
+              <a:defRPr sz="441" b="1"/>
             </a:lvl4pPr>
-            <a:lvl5pPr marL="1828800" indent="0">
-              <a:buNone/>
-              <a:defRPr sz="1600" b="1"/>
+            <a:lvl5pPr marL="503834" indent="0">
+              <a:buNone/>
+              <a:defRPr sz="441" b="1"/>
             </a:lvl5pPr>
-            <a:lvl6pPr marL="2286000" indent="0">
-              <a:buNone/>
-              <a:defRPr sz="1600" b="1"/>
+            <a:lvl6pPr marL="629793" indent="0">
+              <a:buNone/>
+              <a:defRPr sz="441" b="1"/>
             </a:lvl6pPr>
-            <a:lvl7pPr marL="2743200" indent="0">
-              <a:buNone/>
-              <a:defRPr sz="1600" b="1"/>
+            <a:lvl7pPr marL="755752" indent="0">
+              <a:buNone/>
+              <a:defRPr sz="441" b="1"/>
             </a:lvl7pPr>
-            <a:lvl8pPr marL="3200400" indent="0">
-              <a:buNone/>
-              <a:defRPr sz="1600" b="1"/>
+            <a:lvl8pPr marL="881710" indent="0">
+              <a:buNone/>
+              <a:defRPr sz="441" b="1"/>
             </a:lvl8pPr>
-            <a:lvl9pPr marL="3657600" indent="0">
-              <a:buNone/>
-              <a:defRPr sz="1600" b="1"/>
+            <a:lvl9pPr marL="1007669" indent="0">
+              <a:buNone/>
+              <a:defRPr sz="441" b="1"/>
             </a:lvl9pPr>
           </a:lstStyle>
           <a:p>
@@ -1735,13 +1543,7 @@
       </p:sp>
       <p:sp>
         <p:nvSpPr>
-          <p:cNvPr id="6" name="내용 개체 틀 5">
-            <a:extLst>
-              <a:ext uri="{FF2B5EF4-FFF2-40B4-BE49-F238E27FC236}">
-                <a16:creationId xmlns:a16="http://schemas.microsoft.com/office/drawing/2014/main" id="{CF209DD9-7D36-76D2-4DFE-5B207EBA065C}"/>
-              </a:ext>
-            </a:extLst>
-          </p:cNvPr>
+          <p:cNvPr id="6" name="Content Placeholder 5"/>
           <p:cNvSpPr>
             <a:spLocks noGrp="1"/>
           </p:cNvSpPr>
@@ -1751,8 +1553,8 @@
         </p:nvSpPr>
         <p:spPr>
           <a:xfrm>
-            <a:off x="6172200" y="2505075"/>
-            <a:ext cx="5183188" cy="3684588"/>
+            <a:off x="1275428" y="920267"/>
+            <a:ext cx="1071057" cy="1353575"/>
           </a:xfrm>
         </p:spPr>
         <p:txBody>
@@ -1792,18 +1594,13 @@
               <a:rPr lang="ko-KR" altLang="en-US"/>
               <a:t>다섯 번째 수준</a:t>
             </a:r>
-          </a:p>
-        </p:txBody>
-      </p:sp>
-      <p:sp>
-        <p:nvSpPr>
-          <p:cNvPr id="7" name="날짜 개체 틀 6">
-            <a:extLst>
-              <a:ext uri="{FF2B5EF4-FFF2-40B4-BE49-F238E27FC236}">
-                <a16:creationId xmlns:a16="http://schemas.microsoft.com/office/drawing/2014/main" id="{0C6A8070-9753-AD3E-E158-A7B681C11DFF}"/>
-              </a:ext>
-            </a:extLst>
-          </p:cNvPr>
+            <a:endParaRPr lang="en-US" dirty="0"/>
+          </a:p>
+        </p:txBody>
+      </p:sp>
+      <p:sp>
+        <p:nvSpPr>
+          <p:cNvPr id="7" name="Date Placeholder 6"/>
           <p:cNvSpPr>
             <a:spLocks noGrp="1"/>
           </p:cNvSpPr>
@@ -1818,7 +1615,7 @@
           <a:p>
             <a:fld id="{0D0BA784-F1F0-42FC-8C0B-86986BCEAFFF}" type="datetimeFigureOut">
               <a:rPr lang="ko-KR" altLang="en-US" smtClean="0"/>
-              <a:t>2025-12-06</a:t>
+              <a:t>2025-12-31</a:t>
             </a:fld>
             <a:endParaRPr lang="ko-KR" altLang="en-US"/>
           </a:p>
@@ -1826,13 +1623,7 @@
       </p:sp>
       <p:sp>
         <p:nvSpPr>
-          <p:cNvPr id="8" name="바닥글 개체 틀 7">
-            <a:extLst>
-              <a:ext uri="{FF2B5EF4-FFF2-40B4-BE49-F238E27FC236}">
-                <a16:creationId xmlns:a16="http://schemas.microsoft.com/office/drawing/2014/main" id="{F3572AC4-DE72-45DA-010F-E08360E8F65C}"/>
-              </a:ext>
-            </a:extLst>
-          </p:cNvPr>
+          <p:cNvPr id="8" name="Footer Placeholder 7"/>
           <p:cNvSpPr>
             <a:spLocks noGrp="1"/>
           </p:cNvSpPr>
@@ -1851,13 +1642,7 @@
       </p:sp>
       <p:sp>
         <p:nvSpPr>
-          <p:cNvPr id="9" name="슬라이드 번호 개체 틀 8">
-            <a:extLst>
-              <a:ext uri="{FF2B5EF4-FFF2-40B4-BE49-F238E27FC236}">
-                <a16:creationId xmlns:a16="http://schemas.microsoft.com/office/drawing/2014/main" id="{B5B78DF8-656E-1D57-FC1F-F990B63E4DE9}"/>
-              </a:ext>
-            </a:extLst>
-          </p:cNvPr>
+          <p:cNvPr id="9" name="Slide Number Placeholder 8"/>
           <p:cNvSpPr>
             <a:spLocks noGrp="1"/>
           </p:cNvSpPr>
@@ -1881,7 +1666,7 @@
     </p:spTree>
     <p:extLst>
       <p:ext uri="{BB962C8B-B14F-4D97-AF65-F5344CB8AC3E}">
-        <p14:creationId xmlns:p14="http://schemas.microsoft.com/office/powerpoint/2010/main" val="3023686248"/>
+        <p14:creationId xmlns:p14="http://schemas.microsoft.com/office/powerpoint/2010/main" val="1640513645"/>
       </p:ext>
     </p:extLst>
   </p:cSld>
@@ -1910,13 +1695,7 @@
       </p:grpSpPr>
       <p:sp>
         <p:nvSpPr>
-          <p:cNvPr id="2" name="제목 1">
-            <a:extLst>
-              <a:ext uri="{FF2B5EF4-FFF2-40B4-BE49-F238E27FC236}">
-                <a16:creationId xmlns:a16="http://schemas.microsoft.com/office/drawing/2014/main" id="{1BAA30EC-D549-ADDF-3396-A5BDB3FB5377}"/>
-              </a:ext>
-            </a:extLst>
-          </p:cNvPr>
+          <p:cNvPr id="2" name="Title 1"/>
           <p:cNvSpPr>
             <a:spLocks noGrp="1"/>
           </p:cNvSpPr>
@@ -1933,18 +1712,13 @@
               <a:rPr lang="ko-KR" altLang="en-US"/>
               <a:t>마스터 제목 스타일 편집</a:t>
             </a:r>
-          </a:p>
-        </p:txBody>
-      </p:sp>
-      <p:sp>
-        <p:nvSpPr>
-          <p:cNvPr id="3" name="날짜 개체 틀 2">
-            <a:extLst>
-              <a:ext uri="{FF2B5EF4-FFF2-40B4-BE49-F238E27FC236}">
-                <a16:creationId xmlns:a16="http://schemas.microsoft.com/office/drawing/2014/main" id="{BAC80CAA-3A29-FBAB-4897-6AA57E9CCA99}"/>
-              </a:ext>
-            </a:extLst>
-          </p:cNvPr>
+            <a:endParaRPr lang="en-US" dirty="0"/>
+          </a:p>
+        </p:txBody>
+      </p:sp>
+      <p:sp>
+        <p:nvSpPr>
+          <p:cNvPr id="3" name="Date Placeholder 2"/>
           <p:cNvSpPr>
             <a:spLocks noGrp="1"/>
           </p:cNvSpPr>
@@ -1959,7 +1733,7 @@
           <a:p>
             <a:fld id="{0D0BA784-F1F0-42FC-8C0B-86986BCEAFFF}" type="datetimeFigureOut">
               <a:rPr lang="ko-KR" altLang="en-US" smtClean="0"/>
-              <a:t>2025-12-06</a:t>
+              <a:t>2025-12-31</a:t>
             </a:fld>
             <a:endParaRPr lang="ko-KR" altLang="en-US"/>
           </a:p>
@@ -1967,13 +1741,7 @@
       </p:sp>
       <p:sp>
         <p:nvSpPr>
-          <p:cNvPr id="4" name="바닥글 개체 틀 3">
-            <a:extLst>
-              <a:ext uri="{FF2B5EF4-FFF2-40B4-BE49-F238E27FC236}">
-                <a16:creationId xmlns:a16="http://schemas.microsoft.com/office/drawing/2014/main" id="{CE04E279-01E0-F63D-27AB-82E0BDF5F639}"/>
-              </a:ext>
-            </a:extLst>
-          </p:cNvPr>
+          <p:cNvPr id="4" name="Footer Placeholder 3"/>
           <p:cNvSpPr>
             <a:spLocks noGrp="1"/>
           </p:cNvSpPr>
@@ -1992,13 +1760,7 @@
       </p:sp>
       <p:sp>
         <p:nvSpPr>
-          <p:cNvPr id="5" name="슬라이드 번호 개체 틀 4">
-            <a:extLst>
-              <a:ext uri="{FF2B5EF4-FFF2-40B4-BE49-F238E27FC236}">
-                <a16:creationId xmlns:a16="http://schemas.microsoft.com/office/drawing/2014/main" id="{D552E34E-898E-A882-9C37-EEF16E0AF7FB}"/>
-              </a:ext>
-            </a:extLst>
-          </p:cNvPr>
+          <p:cNvPr id="5" name="Slide Number Placeholder 4"/>
           <p:cNvSpPr>
             <a:spLocks noGrp="1"/>
           </p:cNvSpPr>
@@ -2022,7 +1784,7 @@
     </p:spTree>
     <p:extLst>
       <p:ext uri="{BB962C8B-B14F-4D97-AF65-F5344CB8AC3E}">
-        <p14:creationId xmlns:p14="http://schemas.microsoft.com/office/powerpoint/2010/main" val="1069410916"/>
+        <p14:creationId xmlns:p14="http://schemas.microsoft.com/office/powerpoint/2010/main" val="3058940502"/>
       </p:ext>
     </p:extLst>
   </p:cSld>
@@ -2051,13 +1813,7 @@
       </p:grpSpPr>
       <p:sp>
         <p:nvSpPr>
-          <p:cNvPr id="2" name="날짜 개체 틀 1">
-            <a:extLst>
-              <a:ext uri="{FF2B5EF4-FFF2-40B4-BE49-F238E27FC236}">
-                <a16:creationId xmlns:a16="http://schemas.microsoft.com/office/drawing/2014/main" id="{C4ACD15C-A9D3-BF5F-F632-B976B6B782EA}"/>
-              </a:ext>
-            </a:extLst>
-          </p:cNvPr>
+          <p:cNvPr id="2" name="Date Placeholder 1"/>
           <p:cNvSpPr>
             <a:spLocks noGrp="1"/>
           </p:cNvSpPr>
@@ -2072,7 +1828,7 @@
           <a:p>
             <a:fld id="{0D0BA784-F1F0-42FC-8C0B-86986BCEAFFF}" type="datetimeFigureOut">
               <a:rPr lang="ko-KR" altLang="en-US" smtClean="0"/>
-              <a:t>2025-12-06</a:t>
+              <a:t>2025-12-31</a:t>
             </a:fld>
             <a:endParaRPr lang="ko-KR" altLang="en-US"/>
           </a:p>
@@ -2080,13 +1836,7 @@
       </p:sp>
       <p:sp>
         <p:nvSpPr>
-          <p:cNvPr id="3" name="바닥글 개체 틀 2">
-            <a:extLst>
-              <a:ext uri="{FF2B5EF4-FFF2-40B4-BE49-F238E27FC236}">
-                <a16:creationId xmlns:a16="http://schemas.microsoft.com/office/drawing/2014/main" id="{BF89D6AC-D716-D174-B315-9D77E1996A0C}"/>
-              </a:ext>
-            </a:extLst>
-          </p:cNvPr>
+          <p:cNvPr id="3" name="Footer Placeholder 2"/>
           <p:cNvSpPr>
             <a:spLocks noGrp="1"/>
           </p:cNvSpPr>
@@ -2105,13 +1855,7 @@
       </p:sp>
       <p:sp>
         <p:nvSpPr>
-          <p:cNvPr id="4" name="슬라이드 번호 개체 틀 3">
-            <a:extLst>
-              <a:ext uri="{FF2B5EF4-FFF2-40B4-BE49-F238E27FC236}">
-                <a16:creationId xmlns:a16="http://schemas.microsoft.com/office/drawing/2014/main" id="{674467E2-F174-8FE6-FB00-2ABC0F252B3D}"/>
-              </a:ext>
-            </a:extLst>
-          </p:cNvPr>
+          <p:cNvPr id="4" name="Slide Number Placeholder 3"/>
           <p:cNvSpPr>
             <a:spLocks noGrp="1"/>
           </p:cNvSpPr>
@@ -2135,7 +1879,7 @@
     </p:spTree>
     <p:extLst>
       <p:ext uri="{BB962C8B-B14F-4D97-AF65-F5344CB8AC3E}">
-        <p14:creationId xmlns:p14="http://schemas.microsoft.com/office/powerpoint/2010/main" val="1779024811"/>
+        <p14:creationId xmlns:p14="http://schemas.microsoft.com/office/powerpoint/2010/main" val="3871836430"/>
       </p:ext>
     </p:extLst>
   </p:cSld>
@@ -2164,13 +1908,7 @@
       </p:grpSpPr>
       <p:sp>
         <p:nvSpPr>
-          <p:cNvPr id="2" name="제목 1">
-            <a:extLst>
-              <a:ext uri="{FF2B5EF4-FFF2-40B4-BE49-F238E27FC236}">
-                <a16:creationId xmlns:a16="http://schemas.microsoft.com/office/drawing/2014/main" id="{DBF5C670-B055-0476-0DF8-E5B5335208E6}"/>
-              </a:ext>
-            </a:extLst>
-          </p:cNvPr>
+          <p:cNvPr id="2" name="Title 1"/>
           <p:cNvSpPr>
             <a:spLocks noGrp="1"/>
           </p:cNvSpPr>
@@ -2180,15 +1918,15 @@
         </p:nvSpPr>
         <p:spPr>
           <a:xfrm>
-            <a:off x="839788" y="457200"/>
-            <a:ext cx="3932237" cy="1600200"/>
+            <a:off x="173534" y="167958"/>
+            <a:ext cx="812560" cy="587851"/>
           </a:xfrm>
         </p:spPr>
         <p:txBody>
           <a:bodyPr anchor="b"/>
           <a:lstStyle>
             <a:lvl1pPr>
-              <a:defRPr sz="3200"/>
+              <a:defRPr sz="882"/>
             </a:lvl1pPr>
           </a:lstStyle>
           <a:p>
@@ -2196,18 +1934,13 @@
               <a:rPr lang="ko-KR" altLang="en-US"/>
               <a:t>마스터 제목 스타일 편집</a:t>
             </a:r>
-          </a:p>
-        </p:txBody>
-      </p:sp>
-      <p:sp>
-        <p:nvSpPr>
-          <p:cNvPr id="3" name="내용 개체 틀 2">
-            <a:extLst>
-              <a:ext uri="{FF2B5EF4-FFF2-40B4-BE49-F238E27FC236}">
-                <a16:creationId xmlns:a16="http://schemas.microsoft.com/office/drawing/2014/main" id="{341E6306-1FBC-39B3-6BA5-6D0F0977F236}"/>
-              </a:ext>
-            </a:extLst>
-          </p:cNvPr>
+            <a:endParaRPr lang="en-US" dirty="0"/>
+          </a:p>
+        </p:txBody>
+      </p:sp>
+      <p:sp>
+        <p:nvSpPr>
+          <p:cNvPr id="3" name="Content Placeholder 2"/>
           <p:cNvSpPr>
             <a:spLocks noGrp="1"/>
           </p:cNvSpPr>
@@ -2217,39 +1950,39 @@
         </p:nvSpPr>
         <p:spPr>
           <a:xfrm>
-            <a:off x="5183188" y="987425"/>
-            <a:ext cx="6172200" cy="4873625"/>
+            <a:off x="1071057" y="362742"/>
+            <a:ext cx="1275428" cy="1790381"/>
           </a:xfrm>
         </p:spPr>
         <p:txBody>
           <a:bodyPr/>
           <a:lstStyle>
             <a:lvl1pPr>
-              <a:defRPr sz="3200"/>
+              <a:defRPr sz="882"/>
             </a:lvl1pPr>
             <a:lvl2pPr>
-              <a:defRPr sz="2800"/>
+              <a:defRPr sz="771"/>
             </a:lvl2pPr>
             <a:lvl3pPr>
-              <a:defRPr sz="2400"/>
+              <a:defRPr sz="661"/>
             </a:lvl3pPr>
             <a:lvl4pPr>
-              <a:defRPr sz="2000"/>
+              <a:defRPr sz="551"/>
             </a:lvl4pPr>
             <a:lvl5pPr>
-              <a:defRPr sz="2000"/>
+              <a:defRPr sz="551"/>
             </a:lvl5pPr>
             <a:lvl6pPr>
-              <a:defRPr sz="2000"/>
+              <a:defRPr sz="551"/>
             </a:lvl6pPr>
             <a:lvl7pPr>
-              <a:defRPr sz="2000"/>
+              <a:defRPr sz="551"/>
             </a:lvl7pPr>
             <a:lvl8pPr>
-              <a:defRPr sz="2000"/>
+              <a:defRPr sz="551"/>
             </a:lvl8pPr>
             <a:lvl9pPr>
-              <a:defRPr sz="2000"/>
+              <a:defRPr sz="551"/>
             </a:lvl9pPr>
           </a:lstStyle>
           <a:p>
@@ -2286,18 +2019,13 @@
               <a:rPr lang="ko-KR" altLang="en-US"/>
               <a:t>다섯 번째 수준</a:t>
             </a:r>
-          </a:p>
-        </p:txBody>
-      </p:sp>
-      <p:sp>
-        <p:nvSpPr>
-          <p:cNvPr id="4" name="텍스트 개체 틀 3">
-            <a:extLst>
-              <a:ext uri="{FF2B5EF4-FFF2-40B4-BE49-F238E27FC236}">
-                <a16:creationId xmlns:a16="http://schemas.microsoft.com/office/drawing/2014/main" id="{78DE00A3-AA57-1507-1F04-0979235BBAFF}"/>
-              </a:ext>
-            </a:extLst>
-          </p:cNvPr>
+            <a:endParaRPr lang="en-US" dirty="0"/>
+          </a:p>
+        </p:txBody>
+      </p:sp>
+      <p:sp>
+        <p:nvSpPr>
+          <p:cNvPr id="4" name="Text Placeholder 3"/>
           <p:cNvSpPr>
             <a:spLocks noGrp="1"/>
           </p:cNvSpPr>
@@ -2307,8 +2035,8 @@
         </p:nvSpPr>
         <p:spPr>
           <a:xfrm>
-            <a:off x="839788" y="2057400"/>
-            <a:ext cx="3932237" cy="3811588"/>
+            <a:off x="173534" y="755809"/>
+            <a:ext cx="812560" cy="1400229"/>
           </a:xfrm>
         </p:spPr>
         <p:txBody>
@@ -2316,39 +2044,39 @@
           <a:lstStyle>
             <a:lvl1pPr marL="0" indent="0">
               <a:buNone/>
-              <a:defRPr sz="1600"/>
+              <a:defRPr sz="441"/>
             </a:lvl1pPr>
-            <a:lvl2pPr marL="457200" indent="0">
-              <a:buNone/>
-              <a:defRPr sz="1400"/>
+            <a:lvl2pPr marL="125959" indent="0">
+              <a:buNone/>
+              <a:defRPr sz="386"/>
             </a:lvl2pPr>
-            <a:lvl3pPr marL="914400" indent="0">
-              <a:buNone/>
-              <a:defRPr sz="1200"/>
+            <a:lvl3pPr marL="251917" indent="0">
+              <a:buNone/>
+              <a:defRPr sz="331"/>
             </a:lvl3pPr>
-            <a:lvl4pPr marL="1371600" indent="0">
-              <a:buNone/>
-              <a:defRPr sz="1000"/>
+            <a:lvl4pPr marL="377876" indent="0">
+              <a:buNone/>
+              <a:defRPr sz="276"/>
             </a:lvl4pPr>
-            <a:lvl5pPr marL="1828800" indent="0">
-              <a:buNone/>
-              <a:defRPr sz="1000"/>
+            <a:lvl5pPr marL="503834" indent="0">
+              <a:buNone/>
+              <a:defRPr sz="276"/>
             </a:lvl5pPr>
-            <a:lvl6pPr marL="2286000" indent="0">
-              <a:buNone/>
-              <a:defRPr sz="1000"/>
+            <a:lvl6pPr marL="629793" indent="0">
+              <a:buNone/>
+              <a:defRPr sz="276"/>
             </a:lvl6pPr>
-            <a:lvl7pPr marL="2743200" indent="0">
-              <a:buNone/>
-              <a:defRPr sz="1000"/>
+            <a:lvl7pPr marL="755752" indent="0">
+              <a:buNone/>
+              <a:defRPr sz="276"/>
             </a:lvl7pPr>
-            <a:lvl8pPr marL="3200400" indent="0">
-              <a:buNone/>
-              <a:defRPr sz="1000"/>
+            <a:lvl8pPr marL="881710" indent="0">
+              <a:buNone/>
+              <a:defRPr sz="276"/>
             </a:lvl8pPr>
-            <a:lvl9pPr marL="3657600" indent="0">
-              <a:buNone/>
-              <a:defRPr sz="1000"/>
+            <a:lvl9pPr marL="1007669" indent="0">
+              <a:buNone/>
+              <a:defRPr sz="276"/>
             </a:lvl9pPr>
           </a:lstStyle>
           <a:p>
@@ -2362,13 +2090,7 @@
       </p:sp>
       <p:sp>
         <p:nvSpPr>
-          <p:cNvPr id="5" name="날짜 개체 틀 4">
-            <a:extLst>
-              <a:ext uri="{FF2B5EF4-FFF2-40B4-BE49-F238E27FC236}">
-                <a16:creationId xmlns:a16="http://schemas.microsoft.com/office/drawing/2014/main" id="{909D1786-CC98-CEEA-C8C4-C133853DBF0F}"/>
-              </a:ext>
-            </a:extLst>
-          </p:cNvPr>
+          <p:cNvPr id="5" name="Date Placeholder 4"/>
           <p:cNvSpPr>
             <a:spLocks noGrp="1"/>
           </p:cNvSpPr>
@@ -2383,7 +2105,7 @@
           <a:p>
             <a:fld id="{0D0BA784-F1F0-42FC-8C0B-86986BCEAFFF}" type="datetimeFigureOut">
               <a:rPr lang="ko-KR" altLang="en-US" smtClean="0"/>
-              <a:t>2025-12-06</a:t>
+              <a:t>2025-12-31</a:t>
             </a:fld>
             <a:endParaRPr lang="ko-KR" altLang="en-US"/>
           </a:p>
@@ -2391,13 +2113,7 @@
       </p:sp>
       <p:sp>
         <p:nvSpPr>
-          <p:cNvPr id="6" name="바닥글 개체 틀 5">
-            <a:extLst>
-              <a:ext uri="{FF2B5EF4-FFF2-40B4-BE49-F238E27FC236}">
-                <a16:creationId xmlns:a16="http://schemas.microsoft.com/office/drawing/2014/main" id="{9BF6B23F-3F5F-2C9E-9A87-0E474278CDE0}"/>
-              </a:ext>
-            </a:extLst>
-          </p:cNvPr>
+          <p:cNvPr id="6" name="Footer Placeholder 5"/>
           <p:cNvSpPr>
             <a:spLocks noGrp="1"/>
           </p:cNvSpPr>
@@ -2416,13 +2132,7 @@
       </p:sp>
       <p:sp>
         <p:nvSpPr>
-          <p:cNvPr id="7" name="슬라이드 번호 개체 틀 6">
-            <a:extLst>
-              <a:ext uri="{FF2B5EF4-FFF2-40B4-BE49-F238E27FC236}">
-                <a16:creationId xmlns:a16="http://schemas.microsoft.com/office/drawing/2014/main" id="{64CE032B-75FF-6ABB-5622-319499F4AF31}"/>
-              </a:ext>
-            </a:extLst>
-          </p:cNvPr>
+          <p:cNvPr id="7" name="Slide Number Placeholder 6"/>
           <p:cNvSpPr>
             <a:spLocks noGrp="1"/>
           </p:cNvSpPr>
@@ -2446,7 +2156,7 @@
     </p:spTree>
     <p:extLst>
       <p:ext uri="{BB962C8B-B14F-4D97-AF65-F5344CB8AC3E}">
-        <p14:creationId xmlns:p14="http://schemas.microsoft.com/office/powerpoint/2010/main" val="2357794481"/>
+        <p14:creationId xmlns:p14="http://schemas.microsoft.com/office/powerpoint/2010/main" val="530286649"/>
       </p:ext>
     </p:extLst>
   </p:cSld>
@@ -2475,13 +2185,7 @@
       </p:grpSpPr>
       <p:sp>
         <p:nvSpPr>
-          <p:cNvPr id="2" name="제목 1">
-            <a:extLst>
-              <a:ext uri="{FF2B5EF4-FFF2-40B4-BE49-F238E27FC236}">
-                <a16:creationId xmlns:a16="http://schemas.microsoft.com/office/drawing/2014/main" id="{1C451478-9AE7-F58F-25EA-C43D761D55D3}"/>
-              </a:ext>
-            </a:extLst>
-          </p:cNvPr>
+          <p:cNvPr id="2" name="Title 1"/>
           <p:cNvSpPr>
             <a:spLocks noGrp="1"/>
           </p:cNvSpPr>
@@ -2491,15 +2195,15 @@
         </p:nvSpPr>
         <p:spPr>
           <a:xfrm>
-            <a:off x="839788" y="457200"/>
-            <a:ext cx="3932237" cy="1600200"/>
+            <a:off x="173534" y="167958"/>
+            <a:ext cx="812560" cy="587851"/>
           </a:xfrm>
         </p:spPr>
         <p:txBody>
           <a:bodyPr anchor="b"/>
           <a:lstStyle>
             <a:lvl1pPr>
-              <a:defRPr sz="3200"/>
+              <a:defRPr sz="882"/>
             </a:lvl1pPr>
           </a:lstStyle>
           <a:p>
@@ -2507,20 +2211,15 @@
               <a:rPr lang="ko-KR" altLang="en-US"/>
               <a:t>마스터 제목 스타일 편집</a:t>
             </a:r>
-          </a:p>
-        </p:txBody>
-      </p:sp>
-      <p:sp>
-        <p:nvSpPr>
-          <p:cNvPr id="3" name="그림 개체 틀 2">
-            <a:extLst>
-              <a:ext uri="{FF2B5EF4-FFF2-40B4-BE49-F238E27FC236}">
-                <a16:creationId xmlns:a16="http://schemas.microsoft.com/office/drawing/2014/main" id="{80FD013E-06BA-E9DD-EBDD-AD0676D6CFD5}"/>
-              </a:ext>
-            </a:extLst>
-          </p:cNvPr>
-          <p:cNvSpPr>
-            <a:spLocks noGrp="1"/>
+            <a:endParaRPr lang="en-US" dirty="0"/>
+          </a:p>
+        </p:txBody>
+      </p:sp>
+      <p:sp>
+        <p:nvSpPr>
+          <p:cNvPr id="3" name="Picture Placeholder 2"/>
+          <p:cNvSpPr>
+            <a:spLocks noGrp="1" noChangeAspect="1"/>
           </p:cNvSpPr>
           <p:nvPr>
             <p:ph type="pic" idx="1"/>
@@ -2528,8 +2227,73 @@
         </p:nvSpPr>
         <p:spPr>
           <a:xfrm>
-            <a:off x="5183188" y="987425"/>
-            <a:ext cx="6172200" cy="4873625"/>
+            <a:off x="1071057" y="362742"/>
+            <a:ext cx="1275428" cy="1790381"/>
+          </a:xfrm>
+        </p:spPr>
+        <p:txBody>
+          <a:bodyPr anchor="t"/>
+          <a:lstStyle>
+            <a:lvl1pPr marL="0" indent="0">
+              <a:buNone/>
+              <a:defRPr sz="882"/>
+            </a:lvl1pPr>
+            <a:lvl2pPr marL="125959" indent="0">
+              <a:buNone/>
+              <a:defRPr sz="771"/>
+            </a:lvl2pPr>
+            <a:lvl3pPr marL="251917" indent="0">
+              <a:buNone/>
+              <a:defRPr sz="661"/>
+            </a:lvl3pPr>
+            <a:lvl4pPr marL="377876" indent="0">
+              <a:buNone/>
+              <a:defRPr sz="551"/>
+            </a:lvl4pPr>
+            <a:lvl5pPr marL="503834" indent="0">
+              <a:buNone/>
+              <a:defRPr sz="551"/>
+            </a:lvl5pPr>
+            <a:lvl6pPr marL="629793" indent="0">
+              <a:buNone/>
+              <a:defRPr sz="551"/>
+            </a:lvl6pPr>
+            <a:lvl7pPr marL="755752" indent="0">
+              <a:buNone/>
+              <a:defRPr sz="551"/>
+            </a:lvl7pPr>
+            <a:lvl8pPr marL="881710" indent="0">
+              <a:buNone/>
+              <a:defRPr sz="551"/>
+            </a:lvl8pPr>
+            <a:lvl9pPr marL="1007669" indent="0">
+              <a:buNone/>
+              <a:defRPr sz="551"/>
+            </a:lvl9pPr>
+          </a:lstStyle>
+          <a:p>
+            <a:r>
+              <a:rPr lang="ko-KR" altLang="en-US"/>
+              <a:t>그림을 추가하려면 아이콘을 클릭하십시오</a:t>
+            </a:r>
+            <a:endParaRPr lang="en-US" dirty="0"/>
+          </a:p>
+        </p:txBody>
+      </p:sp>
+      <p:sp>
+        <p:nvSpPr>
+          <p:cNvPr id="4" name="Text Placeholder 3"/>
+          <p:cNvSpPr>
+            <a:spLocks noGrp="1"/>
+          </p:cNvSpPr>
+          <p:nvPr>
+            <p:ph type="body" sz="half" idx="2"/>
+          </p:nvPr>
+        </p:nvSpPr>
+        <p:spPr>
+          <a:xfrm>
+            <a:off x="173534" y="755809"/>
+            <a:ext cx="812560" cy="1400229"/>
           </a:xfrm>
         </p:spPr>
         <p:txBody>
@@ -2537,109 +2301,42 @@
           <a:lstStyle>
             <a:lvl1pPr marL="0" indent="0">
               <a:buNone/>
-              <a:defRPr sz="3200"/>
+              <a:defRPr sz="441"/>
             </a:lvl1pPr>
-            <a:lvl2pPr marL="457200" indent="0">
-              <a:buNone/>
-              <a:defRPr sz="2800"/>
+            <a:lvl2pPr marL="125959" indent="0">
+              <a:buNone/>
+              <a:defRPr sz="386"/>
             </a:lvl2pPr>
-            <a:lvl3pPr marL="914400" indent="0">
-              <a:buNone/>
-              <a:defRPr sz="2400"/>
+            <a:lvl3pPr marL="251917" indent="0">
+              <a:buNone/>
+              <a:defRPr sz="331"/>
             </a:lvl3pPr>
-            <a:lvl4pPr marL="1371600" indent="0">
-              <a:buNone/>
-              <a:defRPr sz="2000"/>
+            <a:lvl4pPr marL="377876" indent="0">
+              <a:buNone/>
+              <a:defRPr sz="276"/>
             </a:lvl4pPr>
-            <a:lvl5pPr marL="1828800" indent="0">
-              <a:buNone/>
-              <a:defRPr sz="2000"/>
+            <a:lvl5pPr marL="503834" indent="0">
+              <a:buNone/>
+              <a:defRPr sz="276"/>
             </a:lvl5pPr>
-            <a:lvl6pPr marL="2286000" indent="0">
-              <a:buNone/>
-              <a:defRPr sz="2000"/>
+            <a:lvl6pPr marL="629793" indent="0">
+              <a:buNone/>
+              <a:defRPr sz="276"/>
             </a:lvl6pPr>
-            <a:lvl7pPr marL="2743200" indent="0">
-              <a:buNone/>
-              <a:defRPr sz="2000"/>
+            <a:lvl7pPr marL="755752" indent="0">
+              <a:buNone/>
+              <a:defRPr sz="276"/>
             </a:lvl7pPr>
-            <a:lvl8pPr marL="3200400" indent="0">
-              <a:buNone/>
-              <a:defRPr sz="2000"/>
+            <a:lvl8pPr marL="881710" indent="0">
+              <a:buNone/>
+              <a:defRPr sz="276"/>
             </a:lvl8pPr>
-            <a:lvl9pPr marL="3657600" indent="0">
-              <a:buNone/>
-              <a:defRPr sz="2000"/>
+            <a:lvl9pPr marL="1007669" indent="0">
+              <a:buNone/>
+              <a:defRPr sz="276"/>
             </a:lvl9pPr>
           </a:lstStyle>
           <a:p>
-            <a:endParaRPr lang="ko-KR" altLang="en-US"/>
-          </a:p>
-        </p:txBody>
-      </p:sp>
-      <p:sp>
-        <p:nvSpPr>
-          <p:cNvPr id="4" name="텍스트 개체 틀 3">
-            <a:extLst>
-              <a:ext uri="{FF2B5EF4-FFF2-40B4-BE49-F238E27FC236}">
-                <a16:creationId xmlns:a16="http://schemas.microsoft.com/office/drawing/2014/main" id="{B007FC1D-C049-8F61-A21E-2ADDF6B16FA5}"/>
-              </a:ext>
-            </a:extLst>
-          </p:cNvPr>
-          <p:cNvSpPr>
-            <a:spLocks noGrp="1"/>
-          </p:cNvSpPr>
-          <p:nvPr>
-            <p:ph type="body" sz="half" idx="2"/>
-          </p:nvPr>
-        </p:nvSpPr>
-        <p:spPr>
-          <a:xfrm>
-            <a:off x="839788" y="2057400"/>
-            <a:ext cx="3932237" cy="3811588"/>
-          </a:xfrm>
-        </p:spPr>
-        <p:txBody>
-          <a:bodyPr/>
-          <a:lstStyle>
-            <a:lvl1pPr marL="0" indent="0">
-              <a:buNone/>
-              <a:defRPr sz="1600"/>
-            </a:lvl1pPr>
-            <a:lvl2pPr marL="457200" indent="0">
-              <a:buNone/>
-              <a:defRPr sz="1400"/>
-            </a:lvl2pPr>
-            <a:lvl3pPr marL="914400" indent="0">
-              <a:buNone/>
-              <a:defRPr sz="1200"/>
-            </a:lvl3pPr>
-            <a:lvl4pPr marL="1371600" indent="0">
-              <a:buNone/>
-              <a:defRPr sz="1000"/>
-            </a:lvl4pPr>
-            <a:lvl5pPr marL="1828800" indent="0">
-              <a:buNone/>
-              <a:defRPr sz="1000"/>
-            </a:lvl5pPr>
-            <a:lvl6pPr marL="2286000" indent="0">
-              <a:buNone/>
-              <a:defRPr sz="1000"/>
-            </a:lvl6pPr>
-            <a:lvl7pPr marL="2743200" indent="0">
-              <a:buNone/>
-              <a:defRPr sz="1000"/>
-            </a:lvl7pPr>
-            <a:lvl8pPr marL="3200400" indent="0">
-              <a:buNone/>
-              <a:defRPr sz="1000"/>
-            </a:lvl8pPr>
-            <a:lvl9pPr marL="3657600" indent="0">
-              <a:buNone/>
-              <a:defRPr sz="1000"/>
-            </a:lvl9pPr>
-          </a:lstStyle>
-          <a:p>
             <a:pPr lvl="0"/>
             <a:r>
               <a:rPr lang="ko-KR" altLang="en-US"/>
@@ -2650,13 +2347,7 @@
       </p:sp>
       <p:sp>
         <p:nvSpPr>
-          <p:cNvPr id="5" name="날짜 개체 틀 4">
-            <a:extLst>
-              <a:ext uri="{FF2B5EF4-FFF2-40B4-BE49-F238E27FC236}">
-                <a16:creationId xmlns:a16="http://schemas.microsoft.com/office/drawing/2014/main" id="{A6473A34-B02A-9F87-2354-574D498A8D06}"/>
-              </a:ext>
-            </a:extLst>
-          </p:cNvPr>
+          <p:cNvPr id="5" name="Date Placeholder 4"/>
           <p:cNvSpPr>
             <a:spLocks noGrp="1"/>
           </p:cNvSpPr>
@@ -2671,7 +2362,7 @@
           <a:p>
             <a:fld id="{0D0BA784-F1F0-42FC-8C0B-86986BCEAFFF}" type="datetimeFigureOut">
               <a:rPr lang="ko-KR" altLang="en-US" smtClean="0"/>
-              <a:t>2025-12-06</a:t>
+              <a:t>2025-12-31</a:t>
             </a:fld>
             <a:endParaRPr lang="ko-KR" altLang="en-US"/>
           </a:p>
@@ -2679,13 +2370,7 @@
       </p:sp>
       <p:sp>
         <p:nvSpPr>
-          <p:cNvPr id="6" name="바닥글 개체 틀 5">
-            <a:extLst>
-              <a:ext uri="{FF2B5EF4-FFF2-40B4-BE49-F238E27FC236}">
-                <a16:creationId xmlns:a16="http://schemas.microsoft.com/office/drawing/2014/main" id="{24E05EBA-18B9-3155-7DDE-5325E34F7A70}"/>
-              </a:ext>
-            </a:extLst>
-          </p:cNvPr>
+          <p:cNvPr id="6" name="Footer Placeholder 5"/>
           <p:cNvSpPr>
             <a:spLocks noGrp="1"/>
           </p:cNvSpPr>
@@ -2704,13 +2389,7 @@
       </p:sp>
       <p:sp>
         <p:nvSpPr>
-          <p:cNvPr id="7" name="슬라이드 번호 개체 틀 6">
-            <a:extLst>
-              <a:ext uri="{FF2B5EF4-FFF2-40B4-BE49-F238E27FC236}">
-                <a16:creationId xmlns:a16="http://schemas.microsoft.com/office/drawing/2014/main" id="{1F0EF8F0-A3BE-E7D2-758D-5FC876F1C605}"/>
-              </a:ext>
-            </a:extLst>
-          </p:cNvPr>
+          <p:cNvPr id="7" name="Slide Number Placeholder 6"/>
           <p:cNvSpPr>
             <a:spLocks noGrp="1"/>
           </p:cNvSpPr>
@@ -2734,7 +2413,7 @@
     </p:spTree>
     <p:extLst>
       <p:ext uri="{BB962C8B-B14F-4D97-AF65-F5344CB8AC3E}">
-        <p14:creationId xmlns:p14="http://schemas.microsoft.com/office/powerpoint/2010/main" val="3565515010"/>
+        <p14:creationId xmlns:p14="http://schemas.microsoft.com/office/powerpoint/2010/main" val="770002701"/>
       </p:ext>
     </p:extLst>
   </p:cSld>
@@ -2768,13 +2447,7 @@
       </p:grpSpPr>
       <p:sp>
         <p:nvSpPr>
-          <p:cNvPr id="2" name="제목 개체 틀 1">
-            <a:extLst>
-              <a:ext uri="{FF2B5EF4-FFF2-40B4-BE49-F238E27FC236}">
-                <a16:creationId xmlns:a16="http://schemas.microsoft.com/office/drawing/2014/main" id="{E88546DC-8BCC-C6B2-1ED2-FC86833B17ED}"/>
-              </a:ext>
-            </a:extLst>
-          </p:cNvPr>
+          <p:cNvPr id="2" name="Title Placeholder 1"/>
           <p:cNvSpPr>
             <a:spLocks noGrp="1"/>
           </p:cNvSpPr>
@@ -2784,8 +2457,8 @@
         </p:nvSpPr>
         <p:spPr>
           <a:xfrm>
-            <a:off x="838200" y="365125"/>
-            <a:ext cx="10515600" cy="1325563"/>
+            <a:off x="173206" y="134133"/>
+            <a:ext cx="2172951" cy="486960"/>
           </a:xfrm>
           <a:prstGeom prst="rect">
             <a:avLst/>
@@ -2801,18 +2474,13 @@
               <a:rPr lang="ko-KR" altLang="en-US"/>
               <a:t>마스터 제목 스타일 편집</a:t>
             </a:r>
-          </a:p>
-        </p:txBody>
-      </p:sp>
-      <p:sp>
-        <p:nvSpPr>
-          <p:cNvPr id="3" name="텍스트 개체 틀 2">
-            <a:extLst>
-              <a:ext uri="{FF2B5EF4-FFF2-40B4-BE49-F238E27FC236}">
-                <a16:creationId xmlns:a16="http://schemas.microsoft.com/office/drawing/2014/main" id="{00CE3C40-1ECE-BBCD-7C7C-742CAB9CD7B9}"/>
-              </a:ext>
-            </a:extLst>
-          </p:cNvPr>
+            <a:endParaRPr lang="en-US" dirty="0"/>
+          </a:p>
+        </p:txBody>
+      </p:sp>
+      <p:sp>
+        <p:nvSpPr>
+          <p:cNvPr id="3" name="Text Placeholder 2"/>
           <p:cNvSpPr>
             <a:spLocks noGrp="1"/>
           </p:cNvSpPr>
@@ -2822,8 +2490,8 @@
         </p:nvSpPr>
         <p:spPr>
           <a:xfrm>
-            <a:off x="838200" y="1825625"/>
-            <a:ext cx="10515600" cy="4351338"/>
+            <a:off x="173206" y="670664"/>
+            <a:ext cx="2172951" cy="1598513"/>
           </a:xfrm>
           <a:prstGeom prst="rect">
             <a:avLst/>
@@ -2868,18 +2536,13 @@
               <a:rPr lang="ko-KR" altLang="en-US"/>
               <a:t>다섯 번째 수준</a:t>
             </a:r>
-          </a:p>
-        </p:txBody>
-      </p:sp>
-      <p:sp>
-        <p:nvSpPr>
-          <p:cNvPr id="4" name="날짜 개체 틀 3">
-            <a:extLst>
-              <a:ext uri="{FF2B5EF4-FFF2-40B4-BE49-F238E27FC236}">
-                <a16:creationId xmlns:a16="http://schemas.microsoft.com/office/drawing/2014/main" id="{2EBE733E-05D4-2E8A-11DD-DF59897090BD}"/>
-              </a:ext>
-            </a:extLst>
-          </p:cNvPr>
+            <a:endParaRPr lang="en-US" dirty="0"/>
+          </a:p>
+        </p:txBody>
+      </p:sp>
+      <p:sp>
+        <p:nvSpPr>
+          <p:cNvPr id="4" name="Date Placeholder 3"/>
           <p:cNvSpPr>
             <a:spLocks noGrp="1"/>
           </p:cNvSpPr>
@@ -2889,8 +2552,8 @@
         </p:nvSpPr>
         <p:spPr>
           <a:xfrm>
-            <a:off x="838200" y="6356350"/>
-            <a:ext cx="2743200" cy="365125"/>
+            <a:off x="173206" y="2335077"/>
+            <a:ext cx="566857" cy="134133"/>
           </a:xfrm>
           <a:prstGeom prst="rect">
             <a:avLst/>
@@ -2900,7 +2563,7 @@
           <a:bodyPr vert="horz" lIns="91440" tIns="45720" rIns="91440" bIns="45720" rtlCol="0" anchor="ctr"/>
           <a:lstStyle>
             <a:lvl1pPr algn="l">
-              <a:defRPr sz="1200">
+              <a:defRPr sz="331">
                 <a:solidFill>
                   <a:schemeClr val="tx1">
                     <a:tint val="82000"/>
@@ -2912,7 +2575,7 @@
           <a:p>
             <a:fld id="{0D0BA784-F1F0-42FC-8C0B-86986BCEAFFF}" type="datetimeFigureOut">
               <a:rPr lang="ko-KR" altLang="en-US" smtClean="0"/>
-              <a:t>2025-12-06</a:t>
+              <a:t>2025-12-31</a:t>
             </a:fld>
             <a:endParaRPr lang="ko-KR" altLang="en-US"/>
           </a:p>
@@ -2920,13 +2583,7 @@
       </p:sp>
       <p:sp>
         <p:nvSpPr>
-          <p:cNvPr id="5" name="바닥글 개체 틀 4">
-            <a:extLst>
-              <a:ext uri="{FF2B5EF4-FFF2-40B4-BE49-F238E27FC236}">
-                <a16:creationId xmlns:a16="http://schemas.microsoft.com/office/drawing/2014/main" id="{9D45E9DD-99C0-6D6B-B121-B25BE25D6D0A}"/>
-              </a:ext>
-            </a:extLst>
-          </p:cNvPr>
+          <p:cNvPr id="5" name="Footer Placeholder 4"/>
           <p:cNvSpPr>
             <a:spLocks noGrp="1"/>
           </p:cNvSpPr>
@@ -2936,8 +2593,8 @@
         </p:nvSpPr>
         <p:spPr>
           <a:xfrm>
-            <a:off x="4038600" y="6356350"/>
-            <a:ext cx="4114800" cy="365125"/>
+            <a:off x="834539" y="2335077"/>
+            <a:ext cx="850285" cy="134133"/>
           </a:xfrm>
           <a:prstGeom prst="rect">
             <a:avLst/>
@@ -2947,7 +2604,7 @@
           <a:bodyPr vert="horz" lIns="91440" tIns="45720" rIns="91440" bIns="45720" rtlCol="0" anchor="ctr"/>
           <a:lstStyle>
             <a:lvl1pPr algn="ctr">
-              <a:defRPr sz="1200">
+              <a:defRPr sz="331">
                 <a:solidFill>
                   <a:schemeClr val="tx1">
                     <a:tint val="82000"/>
@@ -2963,13 +2620,7 @@
       </p:sp>
       <p:sp>
         <p:nvSpPr>
-          <p:cNvPr id="6" name="슬라이드 번호 개체 틀 5">
-            <a:extLst>
-              <a:ext uri="{FF2B5EF4-FFF2-40B4-BE49-F238E27FC236}">
-                <a16:creationId xmlns:a16="http://schemas.microsoft.com/office/drawing/2014/main" id="{677A82C2-8D78-23F8-479E-1FE3E26FE51C}"/>
-              </a:ext>
-            </a:extLst>
-          </p:cNvPr>
+          <p:cNvPr id="6" name="Slide Number Placeholder 5"/>
           <p:cNvSpPr>
             <a:spLocks noGrp="1"/>
           </p:cNvSpPr>
@@ -2979,8 +2630,8 @@
         </p:nvSpPr>
         <p:spPr>
           <a:xfrm>
-            <a:off x="8610600" y="6356350"/>
-            <a:ext cx="2743200" cy="365125"/>
+            <a:off x="1779300" y="2335077"/>
+            <a:ext cx="566857" cy="134133"/>
           </a:xfrm>
           <a:prstGeom prst="rect">
             <a:avLst/>
@@ -2990,7 +2641,7 @@
           <a:bodyPr vert="horz" lIns="91440" tIns="45720" rIns="91440" bIns="45720" rtlCol="0" anchor="ctr"/>
           <a:lstStyle>
             <a:lvl1pPr algn="r">
-              <a:defRPr sz="1200">
+              <a:defRPr sz="331">
                 <a:solidFill>
                   <a:schemeClr val="tx1">
                     <a:tint val="82000"/>
@@ -3011,27 +2662,27 @@
     </p:spTree>
     <p:extLst>
       <p:ext uri="{BB962C8B-B14F-4D97-AF65-F5344CB8AC3E}">
-        <p14:creationId xmlns:p14="http://schemas.microsoft.com/office/powerpoint/2010/main" val="1951085485"/>
+        <p14:creationId xmlns:p14="http://schemas.microsoft.com/office/powerpoint/2010/main" val="491889464"/>
       </p:ext>
     </p:extLst>
   </p:cSld>
   <p:clrMap bg1="lt1" tx1="dk1" bg2="lt2" tx2="dk2" accent1="accent1" accent2="accent2" accent3="accent3" accent4="accent4" accent5="accent5" accent6="accent6" hlink="hlink" folHlink="folHlink"/>
   <p:sldLayoutIdLst>
-    <p:sldLayoutId id="2147483649" r:id="rId1"/>
-    <p:sldLayoutId id="2147483650" r:id="rId2"/>
-    <p:sldLayoutId id="2147483651" r:id="rId3"/>
-    <p:sldLayoutId id="2147483652" r:id="rId4"/>
-    <p:sldLayoutId id="2147483653" r:id="rId5"/>
-    <p:sldLayoutId id="2147483654" r:id="rId6"/>
-    <p:sldLayoutId id="2147483655" r:id="rId7"/>
-    <p:sldLayoutId id="2147483656" r:id="rId8"/>
-    <p:sldLayoutId id="2147483657" r:id="rId9"/>
-    <p:sldLayoutId id="2147483658" r:id="rId10"/>
-    <p:sldLayoutId id="2147483659" r:id="rId11"/>
+    <p:sldLayoutId id="2147483661" r:id="rId1"/>
+    <p:sldLayoutId id="2147483662" r:id="rId2"/>
+    <p:sldLayoutId id="2147483663" r:id="rId3"/>
+    <p:sldLayoutId id="2147483664" r:id="rId4"/>
+    <p:sldLayoutId id="2147483665" r:id="rId5"/>
+    <p:sldLayoutId id="2147483666" r:id="rId6"/>
+    <p:sldLayoutId id="2147483667" r:id="rId7"/>
+    <p:sldLayoutId id="2147483668" r:id="rId8"/>
+    <p:sldLayoutId id="2147483669" r:id="rId9"/>
+    <p:sldLayoutId id="2147483670" r:id="rId10"/>
+    <p:sldLayoutId id="2147483671" r:id="rId11"/>
   </p:sldLayoutIdLst>
   <p:txStyles>
     <p:titleStyle>
-      <a:lvl1pPr algn="l" defTabSz="914400" rtl="0" eaLnBrk="1" latinLnBrk="1" hangingPunct="1">
+      <a:lvl1pPr algn="l" defTabSz="251917" rtl="0" eaLnBrk="1" latinLnBrk="1" hangingPunct="1">
         <a:lnSpc>
           <a:spcPct val="90000"/>
         </a:lnSpc>
@@ -3039,7 +2690,7 @@
           <a:spcPct val="0"/>
         </a:spcBef>
         <a:buNone/>
-        <a:defRPr sz="4400" kern="1200">
+        <a:defRPr sz="1212" kern="1200">
           <a:solidFill>
             <a:schemeClr val="tx1"/>
           </a:solidFill>
@@ -3050,16 +2701,16 @@
       </a:lvl1pPr>
     </p:titleStyle>
     <p:bodyStyle>
-      <a:lvl1pPr marL="228600" indent="-228600" algn="l" defTabSz="914400" rtl="0" eaLnBrk="1" latinLnBrk="1" hangingPunct="1">
+      <a:lvl1pPr marL="62979" indent="-62979" algn="l" defTabSz="251917" rtl="0" eaLnBrk="1" latinLnBrk="1" hangingPunct="1">
         <a:lnSpc>
           <a:spcPct val="90000"/>
         </a:lnSpc>
         <a:spcBef>
-          <a:spcPts val="1000"/>
+          <a:spcPts val="276"/>
         </a:spcBef>
         <a:buFont typeface="Arial" panose="020B0604020202020204" pitchFamily="34" charset="0"/>
         <a:buChar char="•"/>
-        <a:defRPr sz="2800" kern="1200">
+        <a:defRPr sz="771" kern="1200">
           <a:solidFill>
             <a:schemeClr val="tx1"/>
           </a:solidFill>
@@ -3068,16 +2719,16 @@
           <a:cs typeface="+mn-cs"/>
         </a:defRPr>
       </a:lvl1pPr>
-      <a:lvl2pPr marL="685800" indent="-228600" algn="l" defTabSz="914400" rtl="0" eaLnBrk="1" latinLnBrk="1" hangingPunct="1">
+      <a:lvl2pPr marL="188938" indent="-62979" algn="l" defTabSz="251917" rtl="0" eaLnBrk="1" latinLnBrk="1" hangingPunct="1">
         <a:lnSpc>
           <a:spcPct val="90000"/>
         </a:lnSpc>
         <a:spcBef>
-          <a:spcPts val="500"/>
+          <a:spcPts val="138"/>
         </a:spcBef>
         <a:buFont typeface="Arial" panose="020B0604020202020204" pitchFamily="34" charset="0"/>
         <a:buChar char="•"/>
-        <a:defRPr sz="2400" kern="1200">
+        <a:defRPr sz="661" kern="1200">
           <a:solidFill>
             <a:schemeClr val="tx1"/>
           </a:solidFill>
@@ -3086,16 +2737,16 @@
           <a:cs typeface="+mn-cs"/>
         </a:defRPr>
       </a:lvl2pPr>
-      <a:lvl3pPr marL="1143000" indent="-228600" algn="l" defTabSz="914400" rtl="0" eaLnBrk="1" latinLnBrk="1" hangingPunct="1">
+      <a:lvl3pPr marL="314897" indent="-62979" algn="l" defTabSz="251917" rtl="0" eaLnBrk="1" latinLnBrk="1" hangingPunct="1">
         <a:lnSpc>
           <a:spcPct val="90000"/>
         </a:lnSpc>
         <a:spcBef>
-          <a:spcPts val="500"/>
+          <a:spcPts val="138"/>
         </a:spcBef>
         <a:buFont typeface="Arial" panose="020B0604020202020204" pitchFamily="34" charset="0"/>
         <a:buChar char="•"/>
-        <a:defRPr sz="2000" kern="1200">
+        <a:defRPr sz="551" kern="1200">
           <a:solidFill>
             <a:schemeClr val="tx1"/>
           </a:solidFill>
@@ -3104,16 +2755,16 @@
           <a:cs typeface="+mn-cs"/>
         </a:defRPr>
       </a:lvl3pPr>
-      <a:lvl4pPr marL="1600200" indent="-228600" algn="l" defTabSz="914400" rtl="0" eaLnBrk="1" latinLnBrk="1" hangingPunct="1">
+      <a:lvl4pPr marL="440855" indent="-62979" algn="l" defTabSz="251917" rtl="0" eaLnBrk="1" latinLnBrk="1" hangingPunct="1">
         <a:lnSpc>
           <a:spcPct val="90000"/>
         </a:lnSpc>
         <a:spcBef>
-          <a:spcPts val="500"/>
+          <a:spcPts val="138"/>
         </a:spcBef>
         <a:buFont typeface="Arial" panose="020B0604020202020204" pitchFamily="34" charset="0"/>
         <a:buChar char="•"/>
-        <a:defRPr sz="1800" kern="1200">
+        <a:defRPr sz="496" kern="1200">
           <a:solidFill>
             <a:schemeClr val="tx1"/>
           </a:solidFill>
@@ -3122,16 +2773,16 @@
           <a:cs typeface="+mn-cs"/>
         </a:defRPr>
       </a:lvl4pPr>
-      <a:lvl5pPr marL="2057400" indent="-228600" algn="l" defTabSz="914400" rtl="0" eaLnBrk="1" latinLnBrk="1" hangingPunct="1">
+      <a:lvl5pPr marL="566814" indent="-62979" algn="l" defTabSz="251917" rtl="0" eaLnBrk="1" latinLnBrk="1" hangingPunct="1">
         <a:lnSpc>
           <a:spcPct val="90000"/>
         </a:lnSpc>
         <a:spcBef>
-          <a:spcPts val="500"/>
+          <a:spcPts val="138"/>
         </a:spcBef>
         <a:buFont typeface="Arial" panose="020B0604020202020204" pitchFamily="34" charset="0"/>
         <a:buChar char="•"/>
-        <a:defRPr sz="1800" kern="1200">
+        <a:defRPr sz="496" kern="1200">
           <a:solidFill>
             <a:schemeClr val="tx1"/>
           </a:solidFill>
@@ -3140,16 +2791,16 @@
           <a:cs typeface="+mn-cs"/>
         </a:defRPr>
       </a:lvl5pPr>
-      <a:lvl6pPr marL="2514600" indent="-228600" algn="l" defTabSz="914400" rtl="0" eaLnBrk="1" latinLnBrk="1" hangingPunct="1">
+      <a:lvl6pPr marL="692772" indent="-62979" algn="l" defTabSz="251917" rtl="0" eaLnBrk="1" latinLnBrk="1" hangingPunct="1">
         <a:lnSpc>
           <a:spcPct val="90000"/>
         </a:lnSpc>
         <a:spcBef>
-          <a:spcPts val="500"/>
+          <a:spcPts val="138"/>
         </a:spcBef>
         <a:buFont typeface="Arial" panose="020B0604020202020204" pitchFamily="34" charset="0"/>
         <a:buChar char="•"/>
-        <a:defRPr sz="1800" kern="1200">
+        <a:defRPr sz="496" kern="1200">
           <a:solidFill>
             <a:schemeClr val="tx1"/>
           </a:solidFill>
@@ -3158,16 +2809,16 @@
           <a:cs typeface="+mn-cs"/>
         </a:defRPr>
       </a:lvl6pPr>
-      <a:lvl7pPr marL="2971800" indent="-228600" algn="l" defTabSz="914400" rtl="0" eaLnBrk="1" latinLnBrk="1" hangingPunct="1">
+      <a:lvl7pPr marL="818731" indent="-62979" algn="l" defTabSz="251917" rtl="0" eaLnBrk="1" latinLnBrk="1" hangingPunct="1">
         <a:lnSpc>
           <a:spcPct val="90000"/>
         </a:lnSpc>
         <a:spcBef>
-          <a:spcPts val="500"/>
+          <a:spcPts val="138"/>
         </a:spcBef>
         <a:buFont typeface="Arial" panose="020B0604020202020204" pitchFamily="34" charset="0"/>
         <a:buChar char="•"/>
-        <a:defRPr sz="1800" kern="1200">
+        <a:defRPr sz="496" kern="1200">
           <a:solidFill>
             <a:schemeClr val="tx1"/>
           </a:solidFill>
@@ -3176,16 +2827,16 @@
           <a:cs typeface="+mn-cs"/>
         </a:defRPr>
       </a:lvl7pPr>
-      <a:lvl8pPr marL="3429000" indent="-228600" algn="l" defTabSz="914400" rtl="0" eaLnBrk="1" latinLnBrk="1" hangingPunct="1">
+      <a:lvl8pPr marL="944690" indent="-62979" algn="l" defTabSz="251917" rtl="0" eaLnBrk="1" latinLnBrk="1" hangingPunct="1">
         <a:lnSpc>
           <a:spcPct val="90000"/>
         </a:lnSpc>
         <a:spcBef>
-          <a:spcPts val="500"/>
+          <a:spcPts val="138"/>
         </a:spcBef>
         <a:buFont typeface="Arial" panose="020B0604020202020204" pitchFamily="34" charset="0"/>
         <a:buChar char="•"/>
-        <a:defRPr sz="1800" kern="1200">
+        <a:defRPr sz="496" kern="1200">
           <a:solidFill>
             <a:schemeClr val="tx1"/>
           </a:solidFill>
@@ -3194,16 +2845,16 @@
           <a:cs typeface="+mn-cs"/>
         </a:defRPr>
       </a:lvl8pPr>
-      <a:lvl9pPr marL="3886200" indent="-228600" algn="l" defTabSz="914400" rtl="0" eaLnBrk="1" latinLnBrk="1" hangingPunct="1">
+      <a:lvl9pPr marL="1070648" indent="-62979" algn="l" defTabSz="251917" rtl="0" eaLnBrk="1" latinLnBrk="1" hangingPunct="1">
         <a:lnSpc>
           <a:spcPct val="90000"/>
         </a:lnSpc>
         <a:spcBef>
-          <a:spcPts val="500"/>
+          <a:spcPts val="138"/>
         </a:spcBef>
         <a:buFont typeface="Arial" panose="020B0604020202020204" pitchFamily="34" charset="0"/>
         <a:buChar char="•"/>
-        <a:defRPr sz="1800" kern="1200">
+        <a:defRPr sz="496" kern="1200">
           <a:solidFill>
             <a:schemeClr val="tx1"/>
           </a:solidFill>
@@ -3215,10 +2866,10 @@
     </p:bodyStyle>
     <p:otherStyle>
       <a:defPPr>
-        <a:defRPr lang="ko-KR"/>
+        <a:defRPr lang="en-US"/>
       </a:defPPr>
-      <a:lvl1pPr marL="0" algn="l" defTabSz="914400" rtl="0" eaLnBrk="1" latinLnBrk="1" hangingPunct="1">
-        <a:defRPr sz="1800" kern="1200">
+      <a:lvl1pPr marL="0" algn="l" defTabSz="251917" rtl="0" eaLnBrk="1" latinLnBrk="1" hangingPunct="1">
+        <a:defRPr sz="496" kern="1200">
           <a:solidFill>
             <a:schemeClr val="tx1"/>
           </a:solidFill>
@@ -3227,8 +2878,8 @@
           <a:cs typeface="+mn-cs"/>
         </a:defRPr>
       </a:lvl1pPr>
-      <a:lvl2pPr marL="457200" algn="l" defTabSz="914400" rtl="0" eaLnBrk="1" latinLnBrk="1" hangingPunct="1">
-        <a:defRPr sz="1800" kern="1200">
+      <a:lvl2pPr marL="125959" algn="l" defTabSz="251917" rtl="0" eaLnBrk="1" latinLnBrk="1" hangingPunct="1">
+        <a:defRPr sz="496" kern="1200">
           <a:solidFill>
             <a:schemeClr val="tx1"/>
           </a:solidFill>
@@ -3237,8 +2888,8 @@
           <a:cs typeface="+mn-cs"/>
         </a:defRPr>
       </a:lvl2pPr>
-      <a:lvl3pPr marL="914400" algn="l" defTabSz="914400" rtl="0" eaLnBrk="1" latinLnBrk="1" hangingPunct="1">
-        <a:defRPr sz="1800" kern="1200">
+      <a:lvl3pPr marL="251917" algn="l" defTabSz="251917" rtl="0" eaLnBrk="1" latinLnBrk="1" hangingPunct="1">
+        <a:defRPr sz="496" kern="1200">
           <a:solidFill>
             <a:schemeClr val="tx1"/>
           </a:solidFill>
@@ -3247,8 +2898,8 @@
           <a:cs typeface="+mn-cs"/>
         </a:defRPr>
       </a:lvl3pPr>
-      <a:lvl4pPr marL="1371600" algn="l" defTabSz="914400" rtl="0" eaLnBrk="1" latinLnBrk="1" hangingPunct="1">
-        <a:defRPr sz="1800" kern="1200">
+      <a:lvl4pPr marL="377876" algn="l" defTabSz="251917" rtl="0" eaLnBrk="1" latinLnBrk="1" hangingPunct="1">
+        <a:defRPr sz="496" kern="1200">
           <a:solidFill>
             <a:schemeClr val="tx1"/>
           </a:solidFill>
@@ -3257,8 +2908,8 @@
           <a:cs typeface="+mn-cs"/>
         </a:defRPr>
       </a:lvl4pPr>
-      <a:lvl5pPr marL="1828800" algn="l" defTabSz="914400" rtl="0" eaLnBrk="1" latinLnBrk="1" hangingPunct="1">
-        <a:defRPr sz="1800" kern="1200">
+      <a:lvl5pPr marL="503834" algn="l" defTabSz="251917" rtl="0" eaLnBrk="1" latinLnBrk="1" hangingPunct="1">
+        <a:defRPr sz="496" kern="1200">
           <a:solidFill>
             <a:schemeClr val="tx1"/>
           </a:solidFill>
@@ -3267,8 +2918,8 @@
           <a:cs typeface="+mn-cs"/>
         </a:defRPr>
       </a:lvl5pPr>
-      <a:lvl6pPr marL="2286000" algn="l" defTabSz="914400" rtl="0" eaLnBrk="1" latinLnBrk="1" hangingPunct="1">
-        <a:defRPr sz="1800" kern="1200">
+      <a:lvl6pPr marL="629793" algn="l" defTabSz="251917" rtl="0" eaLnBrk="1" latinLnBrk="1" hangingPunct="1">
+        <a:defRPr sz="496" kern="1200">
           <a:solidFill>
             <a:schemeClr val="tx1"/>
           </a:solidFill>
@@ -3277,8 +2928,8 @@
           <a:cs typeface="+mn-cs"/>
         </a:defRPr>
       </a:lvl6pPr>
-      <a:lvl7pPr marL="2743200" algn="l" defTabSz="914400" rtl="0" eaLnBrk="1" latinLnBrk="1" hangingPunct="1">
-        <a:defRPr sz="1800" kern="1200">
+      <a:lvl7pPr marL="755752" algn="l" defTabSz="251917" rtl="0" eaLnBrk="1" latinLnBrk="1" hangingPunct="1">
+        <a:defRPr sz="496" kern="1200">
           <a:solidFill>
             <a:schemeClr val="tx1"/>
           </a:solidFill>
@@ -3287,8 +2938,8 @@
           <a:cs typeface="+mn-cs"/>
         </a:defRPr>
       </a:lvl7pPr>
-      <a:lvl8pPr marL="3200400" algn="l" defTabSz="914400" rtl="0" eaLnBrk="1" latinLnBrk="1" hangingPunct="1">
-        <a:defRPr sz="1800" kern="1200">
+      <a:lvl8pPr marL="881710" algn="l" defTabSz="251917" rtl="0" eaLnBrk="1" latinLnBrk="1" hangingPunct="1">
+        <a:defRPr sz="496" kern="1200">
           <a:solidFill>
             <a:schemeClr val="tx1"/>
           </a:solidFill>
@@ -3297,8 +2948,8 @@
           <a:cs typeface="+mn-cs"/>
         </a:defRPr>
       </a:lvl8pPr>
-      <a:lvl9pPr marL="3657600" algn="l" defTabSz="914400" rtl="0" eaLnBrk="1" latinLnBrk="1" hangingPunct="1">
-        <a:defRPr sz="1800" kern="1200">
+      <a:lvl9pPr marL="1007669" algn="l" defTabSz="251917" rtl="0" eaLnBrk="1" latinLnBrk="1" hangingPunct="1">
+        <a:defRPr sz="496" kern="1200">
           <a:solidFill>
             <a:schemeClr val="tx1"/>
           </a:solidFill>
@@ -3343,7 +2994,7 @@
         </p:nvSpPr>
         <p:spPr>
           <a:xfrm>
-            <a:off x="1379483" y="1742089"/>
+            <a:off x="-637" y="0"/>
             <a:ext cx="2520000" cy="2520000"/>
           </a:xfrm>
           <a:prstGeom prst="roundRect">
@@ -3484,8 +3135,8 @@
         </p:nvSpPr>
         <p:spPr>
           <a:xfrm>
-            <a:off x="1379483" y="1742089"/>
-            <a:ext cx="3240000" cy="3240000"/>
+            <a:off x="-1" y="0"/>
+            <a:ext cx="2519363" cy="2519363"/>
           </a:xfrm>
           <a:prstGeom prst="roundRect">
             <a:avLst/>
@@ -3554,7 +3205,7 @@
           <a:p>
             <a:pPr algn="ctr"/>
             <a:r>
-              <a:rPr lang="ja-JP" altLang="en-US" sz="17300" b="1" dirty="0">
+              <a:rPr lang="ja-JP" altLang="en-US" sz="14400" b="1" dirty="0">
                 <a:effectLst>
                   <a:glow rad="114300">
                     <a:schemeClr val="accent2">
@@ -3567,7 +3218,7 @@
               </a:rPr>
               <a:t>仏</a:t>
             </a:r>
-            <a:endParaRPr lang="ko-KR" altLang="en-US" sz="17300" b="1" dirty="0">
+            <a:endParaRPr lang="ko-KR" altLang="en-US" sz="14400" b="1" dirty="0">
               <a:effectLst>
                 <a:glow rad="114300">
                   <a:schemeClr val="accent2">
@@ -3631,8 +3282,8 @@
         </p:nvGrpSpPr>
         <p:grpSpPr>
           <a:xfrm>
-            <a:off x="8049744" y="1724420"/>
-            <a:ext cx="2520000" cy="2520000"/>
+            <a:off x="94129" y="98012"/>
+            <a:ext cx="2340000" cy="2340000"/>
             <a:chOff x="8049744" y="1724420"/>
             <a:chExt cx="2520000" cy="2520000"/>
           </a:xfrm>
@@ -3657,98 +3308,184 @@
             <a:custGeom>
               <a:avLst/>
               <a:gdLst>
-                <a:gd name="connsiteX0" fmla="*/ 0 w 2520000"/>
-                <a:gd name="connsiteY0" fmla="*/ 420008 h 2520000"/>
-                <a:gd name="connsiteX1" fmla="*/ 420008 w 2520000"/>
-                <a:gd name="connsiteY1" fmla="*/ 0 h 2520000"/>
-                <a:gd name="connsiteX2" fmla="*/ 1013602 w 2520000"/>
-                <a:gd name="connsiteY2" fmla="*/ 0 h 2520000"/>
-                <a:gd name="connsiteX3" fmla="*/ 1556797 w 2520000"/>
-                <a:gd name="connsiteY3" fmla="*/ 0 h 2520000"/>
-                <a:gd name="connsiteX4" fmla="*/ 2099992 w 2520000"/>
-                <a:gd name="connsiteY4" fmla="*/ 0 h 2520000"/>
-                <a:gd name="connsiteX5" fmla="*/ 2520000 w 2520000"/>
-                <a:gd name="connsiteY5" fmla="*/ 420008 h 2520000"/>
-                <a:gd name="connsiteX6" fmla="*/ 2520000 w 2520000"/>
-                <a:gd name="connsiteY6" fmla="*/ 946403 h 2520000"/>
-                <a:gd name="connsiteX7" fmla="*/ 2520000 w 2520000"/>
-                <a:gd name="connsiteY7" fmla="*/ 1472798 h 2520000"/>
-                <a:gd name="connsiteX8" fmla="*/ 2520000 w 2520000"/>
-                <a:gd name="connsiteY8" fmla="*/ 2099992 h 2520000"/>
-                <a:gd name="connsiteX9" fmla="*/ 2099992 w 2520000"/>
-                <a:gd name="connsiteY9" fmla="*/ 2520000 h 2520000"/>
-                <a:gd name="connsiteX10" fmla="*/ 1539997 w 2520000"/>
-                <a:gd name="connsiteY10" fmla="*/ 2520000 h 2520000"/>
-                <a:gd name="connsiteX11" fmla="*/ 996803 w 2520000"/>
-                <a:gd name="connsiteY11" fmla="*/ 2520000 h 2520000"/>
-                <a:gd name="connsiteX12" fmla="*/ 420008 w 2520000"/>
-                <a:gd name="connsiteY12" fmla="*/ 2520000 h 2520000"/>
-                <a:gd name="connsiteX13" fmla="*/ 0 w 2520000"/>
-                <a:gd name="connsiteY13" fmla="*/ 2099992 h 2520000"/>
-                <a:gd name="connsiteX14" fmla="*/ 0 w 2520000"/>
-                <a:gd name="connsiteY14" fmla="*/ 1539997 h 2520000"/>
-                <a:gd name="connsiteX15" fmla="*/ 0 w 2520000"/>
-                <a:gd name="connsiteY15" fmla="*/ 946403 h 2520000"/>
-                <a:gd name="connsiteX16" fmla="*/ 0 w 2520000"/>
-                <a:gd name="connsiteY16" fmla="*/ 420008 h 2520000"/>
+                <a:gd name="csX0" fmla="*/ 0 w 2520000"/>
+                <a:gd name="csY0" fmla="*/ 420008 h 2520000"/>
+                <a:gd name="csX1" fmla="*/ 420008 w 2520000"/>
+                <a:gd name="csY1" fmla="*/ 0 h 2520000"/>
+                <a:gd name="csX2" fmla="*/ 946403 w 2520000"/>
+                <a:gd name="csY2" fmla="*/ 0 h 2520000"/>
+                <a:gd name="csX3" fmla="*/ 1506398 w 2520000"/>
+                <a:gd name="csY3" fmla="*/ 0 h 2520000"/>
+                <a:gd name="csX4" fmla="*/ 2099992 w 2520000"/>
+                <a:gd name="csY4" fmla="*/ 0 h 2520000"/>
+                <a:gd name="csX5" fmla="*/ 2520000 w 2520000"/>
+                <a:gd name="csY5" fmla="*/ 420008 h 2520000"/>
+                <a:gd name="csX6" fmla="*/ 2520000 w 2520000"/>
+                <a:gd name="csY6" fmla="*/ 980003 h 2520000"/>
+                <a:gd name="csX7" fmla="*/ 2520000 w 2520000"/>
+                <a:gd name="csY7" fmla="*/ 1539997 h 2520000"/>
+                <a:gd name="csX8" fmla="*/ 2520000 w 2520000"/>
+                <a:gd name="csY8" fmla="*/ 2099992 h 2520000"/>
+                <a:gd name="csX9" fmla="*/ 2099992 w 2520000"/>
+                <a:gd name="csY9" fmla="*/ 2520000 h 2520000"/>
+                <a:gd name="csX10" fmla="*/ 1556797 w 2520000"/>
+                <a:gd name="csY10" fmla="*/ 2520000 h 2520000"/>
+                <a:gd name="csX11" fmla="*/ 1047202 w 2520000"/>
+                <a:gd name="csY11" fmla="*/ 2520000 h 2520000"/>
+                <a:gd name="csX12" fmla="*/ 420008 w 2520000"/>
+                <a:gd name="csY12" fmla="*/ 2520000 h 2520000"/>
+                <a:gd name="csX13" fmla="*/ 0 w 2520000"/>
+                <a:gd name="csY13" fmla="*/ 2099992 h 2520000"/>
+                <a:gd name="csX14" fmla="*/ 0 w 2520000"/>
+                <a:gd name="csY14" fmla="*/ 1539997 h 2520000"/>
+                <a:gd name="csX15" fmla="*/ 0 w 2520000"/>
+                <a:gd name="csY15" fmla="*/ 963203 h 2520000"/>
+                <a:gd name="csX16" fmla="*/ 0 w 2520000"/>
+                <a:gd name="csY16" fmla="*/ 420008 h 2520000"/>
               </a:gdLst>
               <a:ahLst/>
               <a:cxnLst>
                 <a:cxn ang="0">
-                  <a:pos x="connsiteX0" y="connsiteY0"/>
+                  <a:pos x="csX0" y="csY0"/>
                 </a:cxn>
                 <a:cxn ang="0">
-                  <a:pos x="connsiteX1" y="connsiteY1"/>
+                  <a:pos x="csX1" y="csY1"/>
                 </a:cxn>
                 <a:cxn ang="0">
-                  <a:pos x="connsiteX2" y="connsiteY2"/>
+                  <a:pos x="csX2" y="csY2"/>
                 </a:cxn>
                 <a:cxn ang="0">
-                  <a:pos x="connsiteX3" y="connsiteY3"/>
+                  <a:pos x="csX3" y="csY3"/>
                 </a:cxn>
                 <a:cxn ang="0">
-                  <a:pos x="connsiteX4" y="connsiteY4"/>
+                  <a:pos x="csX4" y="csY4"/>
                 </a:cxn>
                 <a:cxn ang="0">
-                  <a:pos x="connsiteX5" y="connsiteY5"/>
+                  <a:pos x="csX5" y="csY5"/>
                 </a:cxn>
                 <a:cxn ang="0">
-                  <a:pos x="connsiteX6" y="connsiteY6"/>
+                  <a:pos x="csX6" y="csY6"/>
                 </a:cxn>
                 <a:cxn ang="0">
-                  <a:pos x="connsiteX7" y="connsiteY7"/>
+                  <a:pos x="csX7" y="csY7"/>
                 </a:cxn>
                 <a:cxn ang="0">
-                  <a:pos x="connsiteX8" y="connsiteY8"/>
+                  <a:pos x="csX8" y="csY8"/>
                 </a:cxn>
                 <a:cxn ang="0">
-                  <a:pos x="connsiteX9" y="connsiteY9"/>
+                  <a:pos x="csX9" y="csY9"/>
                 </a:cxn>
                 <a:cxn ang="0">
-                  <a:pos x="connsiteX10" y="connsiteY10"/>
+                  <a:pos x="csX10" y="csY10"/>
                 </a:cxn>
                 <a:cxn ang="0">
-                  <a:pos x="connsiteX11" y="connsiteY11"/>
+                  <a:pos x="csX11" y="csY11"/>
                 </a:cxn>
                 <a:cxn ang="0">
-                  <a:pos x="connsiteX12" y="connsiteY12"/>
+                  <a:pos x="csX12" y="csY12"/>
                 </a:cxn>
                 <a:cxn ang="0">
-                  <a:pos x="connsiteX13" y="connsiteY13"/>
+                  <a:pos x="csX13" y="csY13"/>
                 </a:cxn>
                 <a:cxn ang="0">
-                  <a:pos x="connsiteX14" y="connsiteY14"/>
+                  <a:pos x="csX14" y="csY14"/>
                 </a:cxn>
                 <a:cxn ang="0">
-                  <a:pos x="connsiteX15" y="connsiteY15"/>
+                  <a:pos x="csX15" y="csY15"/>
                 </a:cxn>
                 <a:cxn ang="0">
-                  <a:pos x="connsiteX16" y="connsiteY16"/>
+                  <a:pos x="csX16" y="csY16"/>
                 </a:cxn>
               </a:cxnLst>
               <a:rect l="l" t="t" r="r" b="b"/>
               <a:pathLst>
-                <a:path w="2520000" h="2520000" extrusionOk="0">
+                <a:path w="2520000" h="2520000" fill="none" extrusionOk="0">
+                  <a:moveTo>
+                    <a:pt x="0" y="420008"/>
+                  </a:moveTo>
+                  <a:cubicBezTo>
+                    <a:pt x="-30004" y="241692"/>
+                    <a:pt x="200606" y="9335"/>
+                    <a:pt x="420008" y="0"/>
+                  </a:cubicBezTo>
+                  <a:cubicBezTo>
+                    <a:pt x="675385" y="-13292"/>
+                    <a:pt x="785493" y="29675"/>
+                    <a:pt x="946403" y="0"/>
+                  </a:cubicBezTo>
+                  <a:cubicBezTo>
+                    <a:pt x="1107313" y="-29675"/>
+                    <a:pt x="1269974" y="25168"/>
+                    <a:pt x="1506398" y="0"/>
+                  </a:cubicBezTo>
+                  <a:cubicBezTo>
+                    <a:pt x="1742823" y="-25168"/>
+                    <a:pt x="1934449" y="51341"/>
+                    <a:pt x="2099992" y="0"/>
+                  </a:cubicBezTo>
+                  <a:cubicBezTo>
+                    <a:pt x="2330343" y="-43492"/>
+                    <a:pt x="2569120" y="198286"/>
+                    <a:pt x="2520000" y="420008"/>
+                  </a:cubicBezTo>
+                  <a:cubicBezTo>
+                    <a:pt x="2520803" y="686229"/>
+                    <a:pt x="2455198" y="794568"/>
+                    <a:pt x="2520000" y="980003"/>
+                  </a:cubicBezTo>
+                  <a:cubicBezTo>
+                    <a:pt x="2584802" y="1165439"/>
+                    <a:pt x="2460966" y="1415878"/>
+                    <a:pt x="2520000" y="1539997"/>
+                  </a:cubicBezTo>
+                  <a:cubicBezTo>
+                    <a:pt x="2579034" y="1664116"/>
+                    <a:pt x="2518635" y="1928852"/>
+                    <a:pt x="2520000" y="2099992"/>
+                  </a:cubicBezTo>
+                  <a:cubicBezTo>
+                    <a:pt x="2517513" y="2280344"/>
+                    <a:pt x="2378520" y="2549335"/>
+                    <a:pt x="2099992" y="2520000"/>
+                  </a:cubicBezTo>
+                  <a:cubicBezTo>
+                    <a:pt x="1918608" y="2533035"/>
+                    <a:pt x="1698468" y="2466751"/>
+                    <a:pt x="1556797" y="2520000"/>
+                  </a:cubicBezTo>
+                  <a:cubicBezTo>
+                    <a:pt x="1415127" y="2573249"/>
+                    <a:pt x="1168418" y="2506144"/>
+                    <a:pt x="1047202" y="2520000"/>
+                  </a:cubicBezTo>
+                  <a:cubicBezTo>
+                    <a:pt x="925986" y="2533856"/>
+                    <a:pt x="705166" y="2461513"/>
+                    <a:pt x="420008" y="2520000"/>
+                  </a:cubicBezTo>
+                  <a:cubicBezTo>
+                    <a:pt x="207786" y="2538307"/>
+                    <a:pt x="15052" y="2322956"/>
+                    <a:pt x="0" y="2099992"/>
+                  </a:cubicBezTo>
+                  <a:cubicBezTo>
+                    <a:pt x="-36598" y="1888719"/>
+                    <a:pt x="18403" y="1729192"/>
+                    <a:pt x="0" y="1539997"/>
+                  </a:cubicBezTo>
+                  <a:cubicBezTo>
+                    <a:pt x="-18403" y="1350802"/>
+                    <a:pt x="36564" y="1097771"/>
+                    <a:pt x="0" y="963203"/>
+                  </a:cubicBezTo>
+                  <a:cubicBezTo>
+                    <a:pt x="-36564" y="828635"/>
+                    <a:pt x="14506" y="608528"/>
+                    <a:pt x="0" y="420008"/>
+                  </a:cubicBezTo>
+                  <a:close/>
+                </a:path>
+                <a:path w="2520000" h="2520000" stroke="0" extrusionOk="0">
                   <a:moveTo>
                     <a:pt x="0" y="420008"/>
                   </a:moveTo>
@@ -4303,8 +4040,8 @@
         </p:nvSpPr>
         <p:spPr>
           <a:xfrm>
-            <a:off x="1379483" y="1742089"/>
-            <a:ext cx="2520000" cy="2520000"/>
+            <a:off x="39398" y="40056"/>
+            <a:ext cx="2448000" cy="2448000"/>
           </a:xfrm>
           <a:prstGeom prst="roundRect">
             <a:avLst/>
@@ -4358,7 +4095,7 @@
           <a:p>
             <a:pPr algn="ctr"/>
             <a:r>
-              <a:rPr lang="ja-JP" altLang="en-US" sz="7200" b="1" dirty="0">
+              <a:rPr lang="ja-JP" altLang="en-US" sz="6600" b="1" dirty="0">
                 <a:ln>
                   <a:solidFill>
                     <a:schemeClr val="tx1"/>
@@ -4372,7 +4109,7 @@
               </a:rPr>
               <a:t>コト</a:t>
             </a:r>
-            <a:endParaRPr lang="en-US" altLang="ja-JP" sz="7200" b="1" dirty="0">
+            <a:endParaRPr lang="en-US" altLang="ja-JP" sz="6600" b="1" dirty="0">
               <a:ln>
                 <a:solidFill>
                   <a:schemeClr val="tx1"/>
@@ -4388,7 +4125,7 @@
           <a:p>
             <a:pPr algn="ctr"/>
             <a:r>
-              <a:rPr lang="ja-JP" altLang="en-US" sz="5400" b="1" dirty="0">
+              <a:rPr lang="ja-JP" altLang="en-US" sz="4800" b="1" dirty="0">
                 <a:ln>
                   <a:solidFill>
                     <a:schemeClr val="tx1"/>
@@ -4402,7 +4139,7 @@
               </a:rPr>
               <a:t>バンク</a:t>
             </a:r>
-            <a:endParaRPr lang="ko-KR" altLang="en-US" sz="5400" b="1" dirty="0">
+            <a:endParaRPr lang="ko-KR" altLang="en-US" sz="4800" b="1" dirty="0">
               <a:ln>
                 <a:solidFill>
                   <a:schemeClr val="tx1"/>
@@ -4430,10 +4167,949 @@
 </p:sld>
 </file>
 
+<file path=ppt/slides/slide5.xml><?xml version="1.0" encoding="utf-8"?>
+<p:sld xmlns:a="http://schemas.openxmlformats.org/drawingml/2006/main" xmlns:r="http://schemas.openxmlformats.org/officeDocument/2006/relationships" xmlns:p="http://schemas.openxmlformats.org/presentationml/2006/main">
+  <p:cSld>
+    <p:spTree>
+      <p:nvGrpSpPr>
+        <p:cNvPr id="1" name="">
+          <a:extLst>
+            <a:ext uri="{FF2B5EF4-FFF2-40B4-BE49-F238E27FC236}">
+              <a16:creationId xmlns:a16="http://schemas.microsoft.com/office/drawing/2014/main" id="{B005274D-6E51-AD52-77A0-2CF7A7178866}"/>
+            </a:ext>
+          </a:extLst>
+        </p:cNvPr>
+        <p:cNvGrpSpPr/>
+        <p:nvPr/>
+      </p:nvGrpSpPr>
+      <p:grpSpPr>
+        <a:xfrm>
+          <a:off x="0" y="0"/>
+          <a:ext cx="0" cy="0"/>
+          <a:chOff x="0" y="0"/>
+          <a:chExt cx="0" cy="0"/>
+        </a:xfrm>
+      </p:grpSpPr>
+      <p:sp>
+        <p:nvSpPr>
+          <p:cNvPr id="4" name="사각형: 둥근 모서리 3">
+            <a:extLst>
+              <a:ext uri="{FF2B5EF4-FFF2-40B4-BE49-F238E27FC236}">
+                <a16:creationId xmlns:a16="http://schemas.microsoft.com/office/drawing/2014/main" id="{8EF805CA-E9FB-36A5-D076-1F0057DDB6AD}"/>
+              </a:ext>
+            </a:extLst>
+          </p:cNvPr>
+          <p:cNvSpPr/>
+          <p:nvPr/>
+        </p:nvSpPr>
+        <p:spPr>
+          <a:xfrm>
+            <a:off x="35681" y="35681"/>
+            <a:ext cx="2448000" cy="2448000"/>
+          </a:xfrm>
+          <a:prstGeom prst="roundRect">
+            <a:avLst/>
+          </a:prstGeom>
+          <a:solidFill>
+            <a:schemeClr val="bg1"/>
+          </a:solidFill>
+          <a:ln w="76200">
+            <a:solidFill>
+              <a:schemeClr val="accent6">
+                <a:lumMod val="75000"/>
+              </a:schemeClr>
+            </a:solidFill>
+          </a:ln>
+          <a:effectLst>
+            <a:outerShdw blurRad="44450" dist="27940" dir="5400000" algn="ctr">
+              <a:srgbClr val="000000">
+                <a:alpha val="32000"/>
+              </a:srgbClr>
+            </a:outerShdw>
+          </a:effectLst>
+          <a:scene3d>
+            <a:camera prst="orthographicFront">
+              <a:rot lat="0" lon="0" rev="0"/>
+            </a:camera>
+            <a:lightRig rig="balanced" dir="t">
+              <a:rot lat="0" lon="0" rev="8700000"/>
+            </a:lightRig>
+          </a:scene3d>
+          <a:sp3d>
+            <a:bevelT w="190500" h="38100"/>
+          </a:sp3d>
+        </p:spPr>
+        <p:style>
+          <a:lnRef idx="2">
+            <a:schemeClr val="accent1">
+              <a:shade val="15000"/>
+            </a:schemeClr>
+          </a:lnRef>
+          <a:fillRef idx="1">
+            <a:schemeClr val="accent1"/>
+          </a:fillRef>
+          <a:effectRef idx="0">
+            <a:schemeClr val="accent1"/>
+          </a:effectRef>
+          <a:fontRef idx="minor">
+            <a:schemeClr val="lt1"/>
+          </a:fontRef>
+        </p:style>
+        <p:txBody>
+          <a:bodyPr vert="horz" rtlCol="0" anchor="ctr"/>
+          <a:lstStyle/>
+          <a:p>
+            <a:pPr algn="ctr"/>
+            <a:r>
+              <a:rPr lang="ko-KR" altLang="en-US" sz="7200" dirty="0">
+                <a:ln>
+                  <a:solidFill>
+                    <a:schemeClr val="accent6">
+                      <a:lumMod val="75000"/>
+                    </a:schemeClr>
+                  </a:solidFill>
+                </a:ln>
+                <a:solidFill>
+                  <a:schemeClr val="accent6">
+                    <a:lumMod val="75000"/>
+                  </a:schemeClr>
+                </a:solidFill>
+                <a:latin typeface="HY중고딕" panose="02030600000101010101" pitchFamily="18" charset="-127"/>
+                <a:ea typeface="HY중고딕" panose="02030600000101010101" pitchFamily="18" charset="-127"/>
+              </a:rPr>
+              <a:t>新漢語林</a:t>
+            </a:r>
+          </a:p>
+        </p:txBody>
+      </p:sp>
+    </p:spTree>
+    <p:extLst>
+      <p:ext uri="{BB962C8B-B14F-4D97-AF65-F5344CB8AC3E}">
+        <p14:creationId xmlns:p14="http://schemas.microsoft.com/office/powerpoint/2010/main" val="81148741"/>
+      </p:ext>
+    </p:extLst>
+  </p:cSld>
+  <p:clrMapOvr>
+    <a:masterClrMapping/>
+  </p:clrMapOvr>
+</p:sld>
+</file>
+
+<file path=ppt/slides/slide6.xml><?xml version="1.0" encoding="utf-8"?>
+<p:sld xmlns:a="http://schemas.openxmlformats.org/drawingml/2006/main" xmlns:r="http://schemas.openxmlformats.org/officeDocument/2006/relationships" xmlns:p="http://schemas.openxmlformats.org/presentationml/2006/main">
+  <p:cSld>
+    <p:spTree>
+      <p:nvGrpSpPr>
+        <p:cNvPr id="1" name="">
+          <a:extLst>
+            <a:ext uri="{FF2B5EF4-FFF2-40B4-BE49-F238E27FC236}">
+              <a16:creationId xmlns:a16="http://schemas.microsoft.com/office/drawing/2014/main" id="{877BBBE9-1FD2-1D34-4BF3-629733D321B2}"/>
+            </a:ext>
+          </a:extLst>
+        </p:cNvPr>
+        <p:cNvGrpSpPr/>
+        <p:nvPr/>
+      </p:nvGrpSpPr>
+      <p:grpSpPr>
+        <a:xfrm>
+          <a:off x="0" y="0"/>
+          <a:ext cx="0" cy="0"/>
+          <a:chOff x="0" y="0"/>
+          <a:chExt cx="0" cy="0"/>
+        </a:xfrm>
+      </p:grpSpPr>
+      <p:sp>
+        <p:nvSpPr>
+          <p:cNvPr id="4" name="사각형: 둥근 모서리 3">
+            <a:extLst>
+              <a:ext uri="{FF2B5EF4-FFF2-40B4-BE49-F238E27FC236}">
+                <a16:creationId xmlns:a16="http://schemas.microsoft.com/office/drawing/2014/main" id="{7259DB72-88A4-E524-C54E-6E30DC3F5599}"/>
+              </a:ext>
+            </a:extLst>
+          </p:cNvPr>
+          <p:cNvSpPr/>
+          <p:nvPr/>
+        </p:nvSpPr>
+        <p:spPr>
+          <a:xfrm>
+            <a:off x="35681" y="35681"/>
+            <a:ext cx="2448000" cy="2448000"/>
+          </a:xfrm>
+          <a:prstGeom prst="roundRect">
+            <a:avLst/>
+          </a:prstGeom>
+          <a:solidFill>
+            <a:schemeClr val="bg1"/>
+          </a:solidFill>
+          <a:ln w="76200">
+            <a:solidFill>
+              <a:srgbClr val="FF0000"/>
+            </a:solidFill>
+          </a:ln>
+          <a:effectLst>
+            <a:outerShdw blurRad="44450" dist="27940" dir="5400000" algn="ctr">
+              <a:srgbClr val="000000">
+                <a:alpha val="32000"/>
+              </a:srgbClr>
+            </a:outerShdw>
+          </a:effectLst>
+          <a:scene3d>
+            <a:camera prst="orthographicFront">
+              <a:rot lat="0" lon="0" rev="0"/>
+            </a:camera>
+            <a:lightRig rig="balanced" dir="t">
+              <a:rot lat="0" lon="0" rev="8700000"/>
+            </a:lightRig>
+          </a:scene3d>
+          <a:sp3d>
+            <a:bevelT w="190500" h="38100"/>
+          </a:sp3d>
+        </p:spPr>
+        <p:style>
+          <a:lnRef idx="2">
+            <a:schemeClr val="accent1">
+              <a:shade val="15000"/>
+            </a:schemeClr>
+          </a:lnRef>
+          <a:fillRef idx="1">
+            <a:schemeClr val="accent1"/>
+          </a:fillRef>
+          <a:effectRef idx="0">
+            <a:schemeClr val="accent1"/>
+          </a:effectRef>
+          <a:fontRef idx="minor">
+            <a:schemeClr val="lt1"/>
+          </a:fontRef>
+        </p:style>
+        <p:txBody>
+          <a:bodyPr vert="horz" rtlCol="0" anchor="ctr"/>
+          <a:lstStyle/>
+          <a:p>
+            <a:pPr algn="ctr"/>
+            <a:endParaRPr lang="ko-KR" altLang="en-US" dirty="0">
+              <a:ln>
+                <a:solidFill>
+                  <a:schemeClr val="tx1"/>
+                </a:solidFill>
+              </a:ln>
+              <a:solidFill>
+                <a:srgbClr val="C00000"/>
+              </a:solidFill>
+              <a:latin typeface="HY중고딕" panose="02030600000101010101" pitchFamily="18" charset="-127"/>
+              <a:ea typeface="HY중고딕" panose="02030600000101010101" pitchFamily="18" charset="-127"/>
+            </a:endParaRPr>
+          </a:p>
+        </p:txBody>
+      </p:sp>
+      <p:sp>
+        <p:nvSpPr>
+          <p:cNvPr id="3" name="TextBox 2">
+            <a:extLst>
+              <a:ext uri="{FF2B5EF4-FFF2-40B4-BE49-F238E27FC236}">
+                <a16:creationId xmlns:a16="http://schemas.microsoft.com/office/drawing/2014/main" id="{34AC8BEF-25A3-027D-153F-534DCAC8BFE1}"/>
+              </a:ext>
+            </a:extLst>
+          </p:cNvPr>
+          <p:cNvSpPr txBox="1"/>
+          <p:nvPr/>
+        </p:nvSpPr>
+        <p:spPr>
+          <a:xfrm>
+            <a:off x="811272" y="784464"/>
+            <a:ext cx="493370" cy="1862048"/>
+          </a:xfrm>
+          <a:prstGeom prst="rect">
+            <a:avLst/>
+          </a:prstGeom>
+          <a:noFill/>
+          <a:ln>
+            <a:noFill/>
+          </a:ln>
+        </p:spPr>
+        <p:txBody>
+          <a:bodyPr wrap="square">
+            <a:spAutoFit/>
+          </a:bodyPr>
+          <a:lstStyle/>
+          <a:p>
+            <a:r>
+              <a:rPr lang="ko-KR" altLang="en-US" sz="11500" dirty="0">
+                <a:ln>
+                  <a:solidFill>
+                    <a:srgbClr val="C00000"/>
+                  </a:solidFill>
+                </a:ln>
+                <a:solidFill>
+                  <a:srgbClr val="C00000"/>
+                </a:solidFill>
+                <a:latin typeface="HY중고딕" panose="02030600000101010101" pitchFamily="18" charset="-127"/>
+                <a:ea typeface="HY중고딕" panose="02030600000101010101" pitchFamily="18" charset="-127"/>
+              </a:rPr>
+              <a:t>通</a:t>
+            </a:r>
+            <a:endParaRPr lang="ko-KR" altLang="en-US" sz="11500" dirty="0">
+              <a:ln>
+                <a:solidFill>
+                  <a:srgbClr val="C00000"/>
+                </a:solidFill>
+              </a:ln>
+              <a:solidFill>
+                <a:srgbClr val="C00000"/>
+              </a:solidFill>
+            </a:endParaRPr>
+          </a:p>
+        </p:txBody>
+      </p:sp>
+      <p:sp>
+        <p:nvSpPr>
+          <p:cNvPr id="6" name="TextBox 5">
+            <a:extLst>
+              <a:ext uri="{FF2B5EF4-FFF2-40B4-BE49-F238E27FC236}">
+                <a16:creationId xmlns:a16="http://schemas.microsoft.com/office/drawing/2014/main" id="{2C6BFC0E-0179-5ECF-737D-ACB815D4CD69}"/>
+              </a:ext>
+            </a:extLst>
+          </p:cNvPr>
+          <p:cNvSpPr txBox="1"/>
+          <p:nvPr/>
+        </p:nvSpPr>
+        <p:spPr>
+          <a:xfrm>
+            <a:off x="524834" y="-186668"/>
+            <a:ext cx="779808" cy="1862048"/>
+          </a:xfrm>
+          <a:prstGeom prst="rect">
+            <a:avLst/>
+          </a:prstGeom>
+          <a:noFill/>
+        </p:spPr>
+        <p:txBody>
+          <a:bodyPr wrap="square">
+            <a:spAutoFit/>
+          </a:bodyPr>
+          <a:lstStyle/>
+          <a:p>
+            <a:pPr algn="ctr"/>
+            <a:r>
+              <a:rPr lang="ko-KR" altLang="en-US" sz="11500" dirty="0">
+                <a:ln>
+                  <a:solidFill>
+                    <a:srgbClr val="C00000"/>
+                  </a:solidFill>
+                </a:ln>
+                <a:solidFill>
+                  <a:srgbClr val="C00000"/>
+                </a:solidFill>
+                <a:latin typeface="HY중고딕" panose="02030600000101010101" pitchFamily="18" charset="-127"/>
+                <a:ea typeface="HY중고딕" panose="02030600000101010101" pitchFamily="18" charset="-127"/>
+              </a:rPr>
+              <a:t>字</a:t>
+            </a:r>
+          </a:p>
+        </p:txBody>
+      </p:sp>
+    </p:spTree>
+    <p:extLst>
+      <p:ext uri="{BB962C8B-B14F-4D97-AF65-F5344CB8AC3E}">
+        <p14:creationId xmlns:p14="http://schemas.microsoft.com/office/powerpoint/2010/main" val="2355900373"/>
+      </p:ext>
+    </p:extLst>
+  </p:cSld>
+  <p:clrMapOvr>
+    <a:masterClrMapping/>
+  </p:clrMapOvr>
+</p:sld>
+</file>
+
+<file path=ppt/slides/slide7.xml><?xml version="1.0" encoding="utf-8"?>
+<p:sld xmlns:a="http://schemas.openxmlformats.org/drawingml/2006/main" xmlns:r="http://schemas.openxmlformats.org/officeDocument/2006/relationships" xmlns:p="http://schemas.openxmlformats.org/presentationml/2006/main">
+  <p:cSld>
+    <p:spTree>
+      <p:nvGrpSpPr>
+        <p:cNvPr id="1" name="">
+          <a:extLst>
+            <a:ext uri="{FF2B5EF4-FFF2-40B4-BE49-F238E27FC236}">
+              <a16:creationId xmlns:a16="http://schemas.microsoft.com/office/drawing/2014/main" id="{5CD7EB10-39ED-B2C3-CBBD-D47DC00DC376}"/>
+            </a:ext>
+          </a:extLst>
+        </p:cNvPr>
+        <p:cNvGrpSpPr/>
+        <p:nvPr/>
+      </p:nvGrpSpPr>
+      <p:grpSpPr>
+        <a:xfrm>
+          <a:off x="0" y="0"/>
+          <a:ext cx="0" cy="0"/>
+          <a:chOff x="0" y="0"/>
+          <a:chExt cx="0" cy="0"/>
+        </a:xfrm>
+      </p:grpSpPr>
+      <p:sp>
+        <p:nvSpPr>
+          <p:cNvPr id="4" name="사각형: 둥근 모서리 3">
+            <a:extLst>
+              <a:ext uri="{FF2B5EF4-FFF2-40B4-BE49-F238E27FC236}">
+                <a16:creationId xmlns:a16="http://schemas.microsoft.com/office/drawing/2014/main" id="{98412AD9-8530-A7AA-1B9A-266E2EDCDCD0}"/>
+              </a:ext>
+            </a:extLst>
+          </p:cNvPr>
+          <p:cNvSpPr/>
+          <p:nvPr/>
+        </p:nvSpPr>
+        <p:spPr>
+          <a:xfrm>
+            <a:off x="35681" y="35681"/>
+            <a:ext cx="2448000" cy="2448000"/>
+          </a:xfrm>
+          <a:prstGeom prst="roundRect">
+            <a:avLst/>
+          </a:prstGeom>
+          <a:solidFill>
+            <a:schemeClr val="bg1"/>
+          </a:solidFill>
+          <a:ln w="76200">
+            <a:solidFill>
+              <a:schemeClr val="accent4">
+                <a:lumMod val="75000"/>
+              </a:schemeClr>
+            </a:solidFill>
+          </a:ln>
+          <a:effectLst>
+            <a:outerShdw blurRad="44450" dist="27940" dir="5400000" algn="ctr">
+              <a:srgbClr val="000000">
+                <a:alpha val="32000"/>
+              </a:srgbClr>
+            </a:outerShdw>
+          </a:effectLst>
+          <a:scene3d>
+            <a:camera prst="orthographicFront">
+              <a:rot lat="0" lon="0" rev="0"/>
+            </a:camera>
+            <a:lightRig rig="balanced" dir="t">
+              <a:rot lat="0" lon="0" rev="8700000"/>
+            </a:lightRig>
+          </a:scene3d>
+          <a:sp3d>
+            <a:bevelT w="190500" h="38100"/>
+          </a:sp3d>
+        </p:spPr>
+        <p:style>
+          <a:lnRef idx="2">
+            <a:schemeClr val="accent1">
+              <a:shade val="15000"/>
+            </a:schemeClr>
+          </a:lnRef>
+          <a:fillRef idx="1">
+            <a:schemeClr val="accent1"/>
+          </a:fillRef>
+          <a:effectRef idx="0">
+            <a:schemeClr val="accent1"/>
+          </a:effectRef>
+          <a:fontRef idx="minor">
+            <a:schemeClr val="lt1"/>
+          </a:fontRef>
+        </p:style>
+        <p:txBody>
+          <a:bodyPr vert="horz" rtlCol="0" anchor="ctr">
+            <a:prstTxWarp prst="textPlain">
+              <a:avLst/>
+            </a:prstTxWarp>
+          </a:bodyPr>
+          <a:lstStyle/>
+          <a:p>
+            <a:pPr algn="ctr"/>
+            <a:endParaRPr lang="ko-KR" altLang="en-US" dirty="0">
+              <a:ln>
+                <a:solidFill>
+                  <a:schemeClr val="tx1"/>
+                </a:solidFill>
+              </a:ln>
+              <a:solidFill>
+                <a:schemeClr val="tx1"/>
+              </a:solidFill>
+              <a:latin typeface="HY중고딕" panose="02030600000101010101" pitchFamily="18" charset="-127"/>
+              <a:ea typeface="HY중고딕" panose="02030600000101010101" pitchFamily="18" charset="-127"/>
+            </a:endParaRPr>
+          </a:p>
+        </p:txBody>
+      </p:sp>
+      <p:sp>
+        <p:nvSpPr>
+          <p:cNvPr id="8" name="TextBox 7">
+            <a:extLst>
+              <a:ext uri="{FF2B5EF4-FFF2-40B4-BE49-F238E27FC236}">
+                <a16:creationId xmlns:a16="http://schemas.microsoft.com/office/drawing/2014/main" id="{9C5F2C53-B2FF-FD53-85F5-B02C95C7CDE2}"/>
+              </a:ext>
+            </a:extLst>
+          </p:cNvPr>
+          <p:cNvSpPr txBox="1"/>
+          <p:nvPr/>
+        </p:nvSpPr>
+        <p:spPr>
+          <a:xfrm>
+            <a:off x="72368" y="-83218"/>
+            <a:ext cx="942130" cy="1323439"/>
+          </a:xfrm>
+          <a:prstGeom prst="rect">
+            <a:avLst/>
+          </a:prstGeom>
+          <a:noFill/>
+        </p:spPr>
+        <p:txBody>
+          <a:bodyPr wrap="square">
+            <a:spAutoFit/>
+          </a:bodyPr>
+          <a:lstStyle/>
+          <a:p>
+            <a:r>
+              <a:rPr lang="ko-KR" altLang="en-US" sz="8000" dirty="0">
+                <a:ln>
+                  <a:solidFill>
+                    <a:schemeClr val="accent4">
+                      <a:lumMod val="50000"/>
+                    </a:schemeClr>
+                  </a:solidFill>
+                </a:ln>
+                <a:solidFill>
+                  <a:srgbClr val="0070C0"/>
+                </a:solidFill>
+                <a:latin typeface="HY중고딕" panose="02030600000101010101" pitchFamily="18" charset="-127"/>
+                <a:ea typeface="HY중고딕" panose="02030600000101010101" pitchFamily="18" charset="-127"/>
+              </a:rPr>
+              <a:t>新</a:t>
+            </a:r>
+          </a:p>
+        </p:txBody>
+      </p:sp>
+      <p:sp>
+        <p:nvSpPr>
+          <p:cNvPr id="10" name="TextBox 9">
+            <a:extLst>
+              <a:ext uri="{FF2B5EF4-FFF2-40B4-BE49-F238E27FC236}">
+                <a16:creationId xmlns:a16="http://schemas.microsoft.com/office/drawing/2014/main" id="{CACA7EC9-D5DE-9060-7714-21874591270E}"/>
+              </a:ext>
+            </a:extLst>
+          </p:cNvPr>
+          <p:cNvSpPr txBox="1"/>
+          <p:nvPr/>
+        </p:nvSpPr>
+        <p:spPr>
+          <a:xfrm>
+            <a:off x="602964" y="674275"/>
+            <a:ext cx="1313434" cy="1323439"/>
+          </a:xfrm>
+          <a:prstGeom prst="rect">
+            <a:avLst/>
+          </a:prstGeom>
+          <a:noFill/>
+        </p:spPr>
+        <p:txBody>
+          <a:bodyPr wrap="square">
+            <a:spAutoFit/>
+          </a:bodyPr>
+          <a:lstStyle/>
+          <a:p>
+            <a:r>
+              <a:rPr lang="ko-KR" altLang="en-US" sz="8000" b="1" dirty="0">
+                <a:ln>
+                  <a:solidFill>
+                    <a:schemeClr val="accent4">
+                      <a:lumMod val="50000"/>
+                    </a:schemeClr>
+                  </a:solidFill>
+                </a:ln>
+                <a:solidFill>
+                  <a:srgbClr val="0070C0"/>
+                </a:solidFill>
+                <a:latin typeface="HY중고딕" panose="02030600000101010101" pitchFamily="18" charset="-127"/>
+                <a:ea typeface="HY중고딕" panose="02030600000101010101" pitchFamily="18" charset="-127"/>
+              </a:rPr>
+              <a:t>字</a:t>
+            </a:r>
+            <a:endParaRPr lang="ko-KR" altLang="en-US" sz="8000" dirty="0"/>
+          </a:p>
+        </p:txBody>
+      </p:sp>
+      <p:sp>
+        <p:nvSpPr>
+          <p:cNvPr id="3" name="TextBox 2">
+            <a:extLst>
+              <a:ext uri="{FF2B5EF4-FFF2-40B4-BE49-F238E27FC236}">
+                <a16:creationId xmlns:a16="http://schemas.microsoft.com/office/drawing/2014/main" id="{2B2ED0F8-E2A5-0020-55D1-F529FBE252AC}"/>
+              </a:ext>
+            </a:extLst>
+          </p:cNvPr>
+          <p:cNvSpPr txBox="1"/>
+          <p:nvPr/>
+        </p:nvSpPr>
+        <p:spPr>
+          <a:xfrm>
+            <a:off x="1259681" y="1240221"/>
+            <a:ext cx="1224000" cy="1323439"/>
+          </a:xfrm>
+          <a:prstGeom prst="rect">
+            <a:avLst/>
+          </a:prstGeom>
+          <a:noFill/>
+        </p:spPr>
+        <p:txBody>
+          <a:bodyPr wrap="square" anchor="ctr">
+            <a:spAutoFit/>
+          </a:bodyPr>
+          <a:lstStyle/>
+          <a:p>
+            <a:r>
+              <a:rPr lang="ko-KR" altLang="en-US" sz="8000" b="1" dirty="0">
+                <a:ln>
+                  <a:solidFill>
+                    <a:schemeClr val="accent4">
+                      <a:lumMod val="50000"/>
+                    </a:schemeClr>
+                  </a:solidFill>
+                </a:ln>
+                <a:solidFill>
+                  <a:srgbClr val="0070C0"/>
+                </a:solidFill>
+                <a:latin typeface="HY중고딕" panose="02030600000101010101" pitchFamily="18" charset="-127"/>
+                <a:ea typeface="HY중고딕" panose="02030600000101010101" pitchFamily="18" charset="-127"/>
+              </a:rPr>
+              <a:t>源</a:t>
+            </a:r>
+            <a:endParaRPr lang="ko-KR" altLang="en-US" sz="8000" b="1" dirty="0">
+              <a:ln>
+                <a:solidFill>
+                  <a:schemeClr val="accent4">
+                    <a:lumMod val="50000"/>
+                  </a:schemeClr>
+                </a:solidFill>
+              </a:ln>
+              <a:solidFill>
+                <a:srgbClr val="0070C0"/>
+              </a:solidFill>
+            </a:endParaRPr>
+          </a:p>
+        </p:txBody>
+      </p:sp>
+    </p:spTree>
+    <p:extLst>
+      <p:ext uri="{BB962C8B-B14F-4D97-AF65-F5344CB8AC3E}">
+        <p14:creationId xmlns:p14="http://schemas.microsoft.com/office/powerpoint/2010/main" val="1897177749"/>
+      </p:ext>
+    </p:extLst>
+  </p:cSld>
+  <p:clrMapOvr>
+    <a:masterClrMapping/>
+  </p:clrMapOvr>
+</p:sld>
+</file>
+
+<file path=ppt/slides/slide8.xml><?xml version="1.0" encoding="utf-8"?>
+<p:sld xmlns:a="http://schemas.openxmlformats.org/drawingml/2006/main" xmlns:r="http://schemas.openxmlformats.org/officeDocument/2006/relationships" xmlns:p="http://schemas.openxmlformats.org/presentationml/2006/main">
+  <p:cSld>
+    <p:spTree>
+      <p:nvGrpSpPr>
+        <p:cNvPr id="1" name="">
+          <a:extLst>
+            <a:ext uri="{FF2B5EF4-FFF2-40B4-BE49-F238E27FC236}">
+              <a16:creationId xmlns:a16="http://schemas.microsoft.com/office/drawing/2014/main" id="{7DAF7AF4-F129-3E92-36D8-D908D7C0C9ED}"/>
+            </a:ext>
+          </a:extLst>
+        </p:cNvPr>
+        <p:cNvGrpSpPr/>
+        <p:nvPr/>
+      </p:nvGrpSpPr>
+      <p:grpSpPr>
+        <a:xfrm>
+          <a:off x="0" y="0"/>
+          <a:ext cx="0" cy="0"/>
+          <a:chOff x="0" y="0"/>
+          <a:chExt cx="0" cy="0"/>
+        </a:xfrm>
+      </p:grpSpPr>
+      <p:sp>
+        <p:nvSpPr>
+          <p:cNvPr id="4" name="사각형: 둥근 모서리 3">
+            <a:extLst>
+              <a:ext uri="{FF2B5EF4-FFF2-40B4-BE49-F238E27FC236}">
+                <a16:creationId xmlns:a16="http://schemas.microsoft.com/office/drawing/2014/main" id="{86DB814C-93D6-4673-25C3-0BBB5F62A490}"/>
+              </a:ext>
+            </a:extLst>
+          </p:cNvPr>
+          <p:cNvSpPr/>
+          <p:nvPr/>
+        </p:nvSpPr>
+        <p:spPr>
+          <a:xfrm>
+            <a:off x="35681" y="35681"/>
+            <a:ext cx="2448000" cy="2448000"/>
+          </a:xfrm>
+          <a:prstGeom prst="roundRect">
+            <a:avLst/>
+          </a:prstGeom>
+          <a:solidFill>
+            <a:schemeClr val="bg1"/>
+          </a:solidFill>
+          <a:ln w="76200">
+            <a:solidFill>
+              <a:schemeClr val="accent5">
+                <a:lumMod val="60000"/>
+                <a:lumOff val="40000"/>
+              </a:schemeClr>
+            </a:solidFill>
+          </a:ln>
+          <a:effectLst>
+            <a:outerShdw blurRad="44450" dist="27940" dir="5400000" algn="ctr">
+              <a:srgbClr val="000000">
+                <a:alpha val="32000"/>
+              </a:srgbClr>
+            </a:outerShdw>
+          </a:effectLst>
+          <a:scene3d>
+            <a:camera prst="orthographicFront">
+              <a:rot lat="0" lon="0" rev="0"/>
+            </a:camera>
+            <a:lightRig rig="balanced" dir="t">
+              <a:rot lat="0" lon="0" rev="8700000"/>
+            </a:lightRig>
+          </a:scene3d>
+          <a:sp3d>
+            <a:bevelT w="190500" h="38100"/>
+          </a:sp3d>
+        </p:spPr>
+        <p:style>
+          <a:lnRef idx="2">
+            <a:schemeClr val="accent1">
+              <a:shade val="15000"/>
+            </a:schemeClr>
+          </a:lnRef>
+          <a:fillRef idx="1">
+            <a:schemeClr val="accent1"/>
+          </a:fillRef>
+          <a:effectRef idx="0">
+            <a:schemeClr val="accent1"/>
+          </a:effectRef>
+          <a:fontRef idx="minor">
+            <a:schemeClr val="lt1"/>
+          </a:fontRef>
+        </p:style>
+        <p:txBody>
+          <a:bodyPr vert="horz" rtlCol="0" anchor="ctr">
+            <a:prstTxWarp prst="textPlain">
+              <a:avLst/>
+            </a:prstTxWarp>
+          </a:bodyPr>
+          <a:lstStyle/>
+          <a:p>
+            <a:pPr algn="ctr"/>
+            <a:endParaRPr lang="ko-KR" altLang="en-US" dirty="0">
+              <a:ln>
+                <a:solidFill>
+                  <a:schemeClr val="tx1"/>
+                </a:solidFill>
+              </a:ln>
+              <a:solidFill>
+                <a:schemeClr val="tx1"/>
+              </a:solidFill>
+              <a:latin typeface="HY중고딕" panose="02030600000101010101" pitchFamily="18" charset="-127"/>
+              <a:ea typeface="HY중고딕" panose="02030600000101010101" pitchFamily="18" charset="-127"/>
+            </a:endParaRPr>
+          </a:p>
+        </p:txBody>
+      </p:sp>
+      <p:sp>
+        <p:nvSpPr>
+          <p:cNvPr id="8" name="TextBox 7">
+            <a:extLst>
+              <a:ext uri="{FF2B5EF4-FFF2-40B4-BE49-F238E27FC236}">
+                <a16:creationId xmlns:a16="http://schemas.microsoft.com/office/drawing/2014/main" id="{FF6968C8-3F71-F879-D728-21298FD22676}"/>
+              </a:ext>
+            </a:extLst>
+          </p:cNvPr>
+          <p:cNvSpPr txBox="1"/>
+          <p:nvPr/>
+        </p:nvSpPr>
+        <p:spPr>
+          <a:xfrm>
+            <a:off x="72368" y="-83218"/>
+            <a:ext cx="942130" cy="1323439"/>
+          </a:xfrm>
+          <a:prstGeom prst="rect">
+            <a:avLst/>
+          </a:prstGeom>
+          <a:noFill/>
+        </p:spPr>
+        <p:txBody>
+          <a:bodyPr wrap="square">
+            <a:spAutoFit/>
+          </a:bodyPr>
+          <a:lstStyle/>
+          <a:p>
+            <a:r>
+              <a:rPr lang="ko-KR" altLang="en-US" sz="8000" dirty="0">
+                <a:ln>
+                  <a:solidFill>
+                    <a:schemeClr val="accent5">
+                      <a:lumMod val="50000"/>
+                    </a:schemeClr>
+                  </a:solidFill>
+                </a:ln>
+                <a:solidFill>
+                  <a:schemeClr val="accent5">
+                    <a:lumMod val="75000"/>
+                  </a:schemeClr>
+                </a:solidFill>
+                <a:latin typeface="HY중고딕" panose="02030600000101010101" pitchFamily="18" charset="-127"/>
+                <a:ea typeface="HY중고딕" panose="02030600000101010101" pitchFamily="18" charset="-127"/>
+              </a:rPr>
+              <a:t>漢</a:t>
+            </a:r>
+          </a:p>
+        </p:txBody>
+      </p:sp>
+      <p:sp>
+        <p:nvSpPr>
+          <p:cNvPr id="10" name="TextBox 9">
+            <a:extLst>
+              <a:ext uri="{FF2B5EF4-FFF2-40B4-BE49-F238E27FC236}">
+                <a16:creationId xmlns:a16="http://schemas.microsoft.com/office/drawing/2014/main" id="{35A788DE-AF61-6988-180D-5EFA11E021BB}"/>
+              </a:ext>
+            </a:extLst>
+          </p:cNvPr>
+          <p:cNvSpPr txBox="1"/>
+          <p:nvPr/>
+        </p:nvSpPr>
+        <p:spPr>
+          <a:xfrm>
+            <a:off x="602964" y="674275"/>
+            <a:ext cx="1313434" cy="1323439"/>
+          </a:xfrm>
+          <a:prstGeom prst="rect">
+            <a:avLst/>
+          </a:prstGeom>
+          <a:noFill/>
+        </p:spPr>
+        <p:txBody>
+          <a:bodyPr wrap="square">
+            <a:spAutoFit/>
+          </a:bodyPr>
+          <a:lstStyle/>
+          <a:p>
+            <a:r>
+              <a:rPr lang="ko-KR" altLang="en-US" sz="8000" b="1" dirty="0">
+                <a:ln>
+                  <a:solidFill>
+                    <a:schemeClr val="accent5">
+                      <a:lumMod val="50000"/>
+                    </a:schemeClr>
+                  </a:solidFill>
+                </a:ln>
+                <a:solidFill>
+                  <a:schemeClr val="accent5">
+                    <a:lumMod val="75000"/>
+                  </a:schemeClr>
+                </a:solidFill>
+                <a:latin typeface="HY중고딕" panose="02030600000101010101" pitchFamily="18" charset="-127"/>
+                <a:ea typeface="HY중고딕" panose="02030600000101010101" pitchFamily="18" charset="-127"/>
+              </a:rPr>
+              <a:t>字</a:t>
+            </a:r>
+            <a:endParaRPr lang="ko-KR" altLang="en-US" sz="8000" dirty="0">
+              <a:ln>
+                <a:solidFill>
+                  <a:schemeClr val="accent5">
+                    <a:lumMod val="50000"/>
+                  </a:schemeClr>
+                </a:solidFill>
+              </a:ln>
+              <a:solidFill>
+                <a:schemeClr val="accent5">
+                  <a:lumMod val="75000"/>
+                </a:schemeClr>
+              </a:solidFill>
+            </a:endParaRPr>
+          </a:p>
+        </p:txBody>
+      </p:sp>
+      <p:sp>
+        <p:nvSpPr>
+          <p:cNvPr id="3" name="TextBox 2">
+            <a:extLst>
+              <a:ext uri="{FF2B5EF4-FFF2-40B4-BE49-F238E27FC236}">
+                <a16:creationId xmlns:a16="http://schemas.microsoft.com/office/drawing/2014/main" id="{98FB1599-02F1-2C81-56CC-36E18F3AF8CE}"/>
+              </a:ext>
+            </a:extLst>
+          </p:cNvPr>
+          <p:cNvSpPr txBox="1"/>
+          <p:nvPr/>
+        </p:nvSpPr>
+        <p:spPr>
+          <a:xfrm>
+            <a:off x="1259681" y="1240221"/>
+            <a:ext cx="1224000" cy="1323439"/>
+          </a:xfrm>
+          <a:prstGeom prst="rect">
+            <a:avLst/>
+          </a:prstGeom>
+          <a:noFill/>
+        </p:spPr>
+        <p:txBody>
+          <a:bodyPr wrap="square" anchor="ctr">
+            <a:spAutoFit/>
+          </a:bodyPr>
+          <a:lstStyle/>
+          <a:p>
+            <a:r>
+              <a:rPr lang="ko-KR" altLang="en-US" sz="8000" b="1" dirty="0">
+                <a:ln>
+                  <a:solidFill>
+                    <a:schemeClr val="accent5">
+                      <a:lumMod val="50000"/>
+                    </a:schemeClr>
+                  </a:solidFill>
+                </a:ln>
+                <a:solidFill>
+                  <a:schemeClr val="accent5">
+                    <a:lumMod val="75000"/>
+                  </a:schemeClr>
+                </a:solidFill>
+                <a:latin typeface="HY중고딕" panose="02030600000101010101" pitchFamily="18" charset="-127"/>
+                <a:ea typeface="HY중고딕" panose="02030600000101010101" pitchFamily="18" charset="-127"/>
+              </a:rPr>
+              <a:t>源</a:t>
+            </a:r>
+            <a:endParaRPr lang="ko-KR" altLang="en-US" sz="8000" b="1" dirty="0">
+              <a:ln>
+                <a:solidFill>
+                  <a:schemeClr val="accent5">
+                    <a:lumMod val="50000"/>
+                  </a:schemeClr>
+                </a:solidFill>
+              </a:ln>
+              <a:solidFill>
+                <a:schemeClr val="accent5">
+                  <a:lumMod val="75000"/>
+                </a:schemeClr>
+              </a:solidFill>
+            </a:endParaRPr>
+          </a:p>
+        </p:txBody>
+      </p:sp>
+    </p:spTree>
+    <p:extLst>
+      <p:ext uri="{BB962C8B-B14F-4D97-AF65-F5344CB8AC3E}">
+        <p14:creationId xmlns:p14="http://schemas.microsoft.com/office/powerpoint/2010/main" val="2373946299"/>
+      </p:ext>
+    </p:extLst>
+  </p:cSld>
+  <p:clrMapOvr>
+    <a:masterClrMapping/>
+  </p:clrMapOvr>
+</p:sld>
+</file>
+
 <file path=ppt/theme/theme1.xml><?xml version="1.0" encoding="utf-8"?>
 <a:theme xmlns:a="http://schemas.openxmlformats.org/drawingml/2006/main" name="Office 테마">
   <a:themeElements>
-    <a:clrScheme name="Office">
+    <a:clrScheme name="Office 테마">
       <a:dk1>
         <a:sysClr val="windowText" lastClr="000000"/>
       </a:dk1>
@@ -4471,9 +5147,9 @@
         <a:srgbClr val="96607D"/>
       </a:folHlink>
     </a:clrScheme>
-    <a:fontScheme name="Office">
+    <a:fontScheme name="Office 테마">
       <a:majorFont>
-        <a:latin typeface="맑은 고딕" panose="02110004020202020204"/>
+        <a:latin typeface="Aptos Display" panose="02110004020202020204"/>
         <a:ea typeface=""/>
         <a:cs typeface=""/>
         <a:font script="Jpan" typeface="游ゴシック Light"/>
@@ -4525,7 +5201,7 @@
         <a:font script="Tfng" typeface="Ebrima"/>
       </a:majorFont>
       <a:minorFont>
-        <a:latin typeface="맑은 고딕" panose="02110004020202020204"/>
+        <a:latin typeface="Aptos" panose="02110004020202020204"/>
         <a:ea typeface=""/>
         <a:cs typeface=""/>
         <a:font script="Jpan" typeface="游ゴシック"/>
@@ -4577,7 +5253,7 @@
         <a:font script="Tfng" typeface="Ebrima"/>
       </a:minorFont>
     </a:fontScheme>
-    <a:fmtScheme name="Office">
+    <a:fmtScheme name="Office 테마">
       <a:fillStyleLst>
         <a:solidFill>
           <a:schemeClr val="phClr"/>

--- a/assets/icons/icons.pptx
+++ b/assets/icons/icons.pptx
@@ -13,6 +13,7 @@
     <p:sldId id="261" r:id="rId7"/>
     <p:sldId id="262" r:id="rId8"/>
     <p:sldId id="263" r:id="rId9"/>
+    <p:sldId id="264" r:id="rId10"/>
   </p:sldIdLst>
   <p:sldSz cx="2519363" cy="2519363"/>
   <p:notesSz cx="6858000" cy="9144000"/>
@@ -250,7 +251,7 @@
           <a:p>
             <a:fld id="{0D0BA784-F1F0-42FC-8C0B-86986BCEAFFF}" type="datetimeFigureOut">
               <a:rPr lang="ko-KR" altLang="en-US" smtClean="0"/>
-              <a:t>2025-12-31</a:t>
+              <a:t>02-15(Sun)</a:t>
             </a:fld>
             <a:endParaRPr lang="ko-KR" altLang="en-US"/>
           </a:p>
@@ -420,7 +421,7 @@
           <a:p>
             <a:fld id="{0D0BA784-F1F0-42FC-8C0B-86986BCEAFFF}" type="datetimeFigureOut">
               <a:rPr lang="ko-KR" altLang="en-US" smtClean="0"/>
-              <a:t>2025-12-31</a:t>
+              <a:t>02-15(Sun)</a:t>
             </a:fld>
             <a:endParaRPr lang="ko-KR" altLang="en-US"/>
           </a:p>
@@ -600,7 +601,7 @@
           <a:p>
             <a:fld id="{0D0BA784-F1F0-42FC-8C0B-86986BCEAFFF}" type="datetimeFigureOut">
               <a:rPr lang="ko-KR" altLang="en-US" smtClean="0"/>
-              <a:t>2025-12-31</a:t>
+              <a:t>02-15(Sun)</a:t>
             </a:fld>
             <a:endParaRPr lang="ko-KR" altLang="en-US"/>
           </a:p>
@@ -770,7 +771,7 @@
           <a:p>
             <a:fld id="{0D0BA784-F1F0-42FC-8C0B-86986BCEAFFF}" type="datetimeFigureOut">
               <a:rPr lang="ko-KR" altLang="en-US" smtClean="0"/>
-              <a:t>2025-12-31</a:t>
+              <a:t>02-15(Sun)</a:t>
             </a:fld>
             <a:endParaRPr lang="ko-KR" altLang="en-US"/>
           </a:p>
@@ -1016,7 +1017,7 @@
           <a:p>
             <a:fld id="{0D0BA784-F1F0-42FC-8C0B-86986BCEAFFF}" type="datetimeFigureOut">
               <a:rPr lang="ko-KR" altLang="en-US" smtClean="0"/>
-              <a:t>2025-12-31</a:t>
+              <a:t>02-15(Sun)</a:t>
             </a:fld>
             <a:endParaRPr lang="ko-KR" altLang="en-US"/>
           </a:p>
@@ -1248,7 +1249,7 @@
           <a:p>
             <a:fld id="{0D0BA784-F1F0-42FC-8C0B-86986BCEAFFF}" type="datetimeFigureOut">
               <a:rPr lang="ko-KR" altLang="en-US" smtClean="0"/>
-              <a:t>2025-12-31</a:t>
+              <a:t>02-15(Sun)</a:t>
             </a:fld>
             <a:endParaRPr lang="ko-KR" altLang="en-US"/>
           </a:p>
@@ -1615,7 +1616,7 @@
           <a:p>
             <a:fld id="{0D0BA784-F1F0-42FC-8C0B-86986BCEAFFF}" type="datetimeFigureOut">
               <a:rPr lang="ko-KR" altLang="en-US" smtClean="0"/>
-              <a:t>2025-12-31</a:t>
+              <a:t>02-15(Sun)</a:t>
             </a:fld>
             <a:endParaRPr lang="ko-KR" altLang="en-US"/>
           </a:p>
@@ -1733,7 +1734,7 @@
           <a:p>
             <a:fld id="{0D0BA784-F1F0-42FC-8C0B-86986BCEAFFF}" type="datetimeFigureOut">
               <a:rPr lang="ko-KR" altLang="en-US" smtClean="0"/>
-              <a:t>2025-12-31</a:t>
+              <a:t>02-15(Sun)</a:t>
             </a:fld>
             <a:endParaRPr lang="ko-KR" altLang="en-US"/>
           </a:p>
@@ -1828,7 +1829,7 @@
           <a:p>
             <a:fld id="{0D0BA784-F1F0-42FC-8C0B-86986BCEAFFF}" type="datetimeFigureOut">
               <a:rPr lang="ko-KR" altLang="en-US" smtClean="0"/>
-              <a:t>2025-12-31</a:t>
+              <a:t>02-15(Sun)</a:t>
             </a:fld>
             <a:endParaRPr lang="ko-KR" altLang="en-US"/>
           </a:p>
@@ -2105,7 +2106,7 @@
           <a:p>
             <a:fld id="{0D0BA784-F1F0-42FC-8C0B-86986BCEAFFF}" type="datetimeFigureOut">
               <a:rPr lang="ko-KR" altLang="en-US" smtClean="0"/>
-              <a:t>2025-12-31</a:t>
+              <a:t>02-15(Sun)</a:t>
             </a:fld>
             <a:endParaRPr lang="ko-KR" altLang="en-US"/>
           </a:p>
@@ -2362,7 +2363,7 @@
           <a:p>
             <a:fld id="{0D0BA784-F1F0-42FC-8C0B-86986BCEAFFF}" type="datetimeFigureOut">
               <a:rPr lang="ko-KR" altLang="en-US" smtClean="0"/>
-              <a:t>2025-12-31</a:t>
+              <a:t>02-15(Sun)</a:t>
             </a:fld>
             <a:endParaRPr lang="ko-KR" altLang="en-US"/>
           </a:p>
@@ -2575,7 +2576,7 @@
           <a:p>
             <a:fld id="{0D0BA784-F1F0-42FC-8C0B-86986BCEAFFF}" type="datetimeFigureOut">
               <a:rPr lang="ko-KR" altLang="en-US" smtClean="0"/>
-              <a:t>2025-12-31</a:t>
+              <a:t>02-15(Sun)</a:t>
             </a:fld>
             <a:endParaRPr lang="ko-KR" altLang="en-US"/>
           </a:p>
@@ -5106,6 +5107,197 @@
 </p:sld>
 </file>
 
+<file path=ppt/slides/slide9.xml><?xml version="1.0" encoding="utf-8"?>
+<p:sld xmlns:a="http://schemas.openxmlformats.org/drawingml/2006/main" xmlns:r="http://schemas.openxmlformats.org/officeDocument/2006/relationships" xmlns:p="http://schemas.openxmlformats.org/presentationml/2006/main">
+  <p:cSld>
+    <p:spTree>
+      <p:nvGrpSpPr>
+        <p:cNvPr id="1" name="">
+          <a:extLst>
+            <a:ext uri="{FF2B5EF4-FFF2-40B4-BE49-F238E27FC236}">
+              <a16:creationId xmlns:a16="http://schemas.microsoft.com/office/drawing/2014/main" id="{4CCE8FDF-CB90-B3CB-F987-CCC507B54496}"/>
+            </a:ext>
+          </a:extLst>
+        </p:cNvPr>
+        <p:cNvGrpSpPr/>
+        <p:nvPr/>
+      </p:nvGrpSpPr>
+      <p:grpSpPr>
+        <a:xfrm>
+          <a:off x="0" y="0"/>
+          <a:ext cx="0" cy="0"/>
+          <a:chOff x="0" y="0"/>
+          <a:chExt cx="0" cy="0"/>
+        </a:xfrm>
+      </p:grpSpPr>
+      <p:sp>
+        <p:nvSpPr>
+          <p:cNvPr id="4" name="사각형: 둥근 모서리 3">
+            <a:extLst>
+              <a:ext uri="{FF2B5EF4-FFF2-40B4-BE49-F238E27FC236}">
+                <a16:creationId xmlns:a16="http://schemas.microsoft.com/office/drawing/2014/main" id="{456F9688-54A2-6FBF-D082-3336D5382D67}"/>
+              </a:ext>
+            </a:extLst>
+          </p:cNvPr>
+          <p:cNvSpPr/>
+          <p:nvPr/>
+        </p:nvSpPr>
+        <p:spPr>
+          <a:xfrm>
+            <a:off x="35681" y="35681"/>
+            <a:ext cx="2448000" cy="2448000"/>
+          </a:xfrm>
+          <a:prstGeom prst="roundRect">
+            <a:avLst/>
+          </a:prstGeom>
+          <a:solidFill>
+            <a:schemeClr val="bg1"/>
+          </a:solidFill>
+          <a:ln w="76200">
+            <a:solidFill>
+              <a:schemeClr val="tx1">
+                <a:lumMod val="75000"/>
+                <a:lumOff val="25000"/>
+              </a:schemeClr>
+            </a:solidFill>
+          </a:ln>
+          <a:effectLst>
+            <a:outerShdw blurRad="44450" dist="27940" dir="5400000" algn="ctr">
+              <a:srgbClr val="000000">
+                <a:alpha val="32000"/>
+              </a:srgbClr>
+            </a:outerShdw>
+          </a:effectLst>
+          <a:scene3d>
+            <a:camera prst="orthographicFront">
+              <a:rot lat="0" lon="0" rev="0"/>
+            </a:camera>
+            <a:lightRig rig="balanced" dir="t">
+              <a:rot lat="0" lon="0" rev="8700000"/>
+            </a:lightRig>
+          </a:scene3d>
+          <a:sp3d>
+            <a:bevelT w="190500" h="38100"/>
+          </a:sp3d>
+        </p:spPr>
+        <p:style>
+          <a:lnRef idx="2">
+            <a:schemeClr val="accent1">
+              <a:shade val="15000"/>
+            </a:schemeClr>
+          </a:lnRef>
+          <a:fillRef idx="1">
+            <a:schemeClr val="accent1"/>
+          </a:fillRef>
+          <a:effectRef idx="0">
+            <a:schemeClr val="accent1"/>
+          </a:effectRef>
+          <a:fontRef idx="minor">
+            <a:schemeClr val="lt1"/>
+          </a:fontRef>
+        </p:style>
+        <p:txBody>
+          <a:bodyPr vert="horz" rtlCol="0" anchor="ctr">
+            <a:prstTxWarp prst="textPlain">
+              <a:avLst/>
+            </a:prstTxWarp>
+          </a:bodyPr>
+          <a:lstStyle/>
+          <a:p>
+            <a:pPr algn="ctr"/>
+            <a:endParaRPr lang="ko-KR" altLang="en-US" dirty="0">
+              <a:ln>
+                <a:solidFill>
+                  <a:schemeClr val="tx1"/>
+                </a:solidFill>
+              </a:ln>
+              <a:solidFill>
+                <a:schemeClr val="tx1"/>
+              </a:solidFill>
+              <a:latin typeface="HY중고딕" panose="02030600000101010101" pitchFamily="18" charset="-127"/>
+              <a:ea typeface="HY중고딕" panose="02030600000101010101" pitchFamily="18" charset="-127"/>
+            </a:endParaRPr>
+          </a:p>
+        </p:txBody>
+      </p:sp>
+      <p:sp>
+        <p:nvSpPr>
+          <p:cNvPr id="10" name="TextBox 9">
+            <a:extLst>
+              <a:ext uri="{FF2B5EF4-FFF2-40B4-BE49-F238E27FC236}">
+                <a16:creationId xmlns:a16="http://schemas.microsoft.com/office/drawing/2014/main" id="{E9EBC0C8-EDD2-CF91-7E4D-890C884A740B}"/>
+              </a:ext>
+            </a:extLst>
+          </p:cNvPr>
+          <p:cNvSpPr txBox="1"/>
+          <p:nvPr/>
+        </p:nvSpPr>
+        <p:spPr>
+          <a:xfrm>
+            <a:off x="1" y="267690"/>
+            <a:ext cx="2519362" cy="2215991"/>
+          </a:xfrm>
+          <a:prstGeom prst="rect">
+            <a:avLst/>
+          </a:prstGeom>
+          <a:noFill/>
+        </p:spPr>
+        <p:txBody>
+          <a:bodyPr wrap="square">
+            <a:spAutoFit/>
+          </a:bodyPr>
+          <a:lstStyle/>
+          <a:p>
+            <a:pPr algn="ctr"/>
+            <a:r>
+              <a:rPr lang="ja-JP" altLang="en-US" sz="13800" b="1" dirty="0">
+                <a:ln>
+                  <a:solidFill>
+                    <a:schemeClr val="accent5">
+                      <a:lumMod val="50000"/>
+                    </a:schemeClr>
+                  </a:solidFill>
+                </a:ln>
+                <a:solidFill>
+                  <a:schemeClr val="bg1">
+                    <a:lumMod val="50000"/>
+                  </a:schemeClr>
+                </a:solidFill>
+                <a:latin typeface="HY중고딕" panose="02030600000101010101" pitchFamily="18" charset="-127"/>
+                <a:ea typeface="HY중고딕" panose="02030600000101010101" pitchFamily="18" charset="-127"/>
+              </a:rPr>
+              <a:t>広</a:t>
+            </a:r>
+            <a:endParaRPr lang="ko-KR" altLang="en-US" sz="8000" dirty="0">
+              <a:ln>
+                <a:solidFill>
+                  <a:schemeClr val="accent5">
+                    <a:lumMod val="50000"/>
+                  </a:schemeClr>
+                </a:solidFill>
+              </a:ln>
+              <a:solidFill>
+                <a:schemeClr val="bg1">
+                  <a:lumMod val="50000"/>
+                </a:schemeClr>
+              </a:solidFill>
+            </a:endParaRPr>
+          </a:p>
+        </p:txBody>
+      </p:sp>
+    </p:spTree>
+    <p:extLst>
+      <p:ext uri="{BB962C8B-B14F-4D97-AF65-F5344CB8AC3E}">
+        <p14:creationId xmlns:p14="http://schemas.microsoft.com/office/powerpoint/2010/main" val="2430601126"/>
+      </p:ext>
+    </p:extLst>
+  </p:cSld>
+  <p:clrMapOvr>
+    <a:masterClrMapping/>
+  </p:clrMapOvr>
+</p:sld>
+</file>
+
 <file path=ppt/theme/theme1.xml><?xml version="1.0" encoding="utf-8"?>
 <a:theme xmlns:a="http://schemas.openxmlformats.org/drawingml/2006/main" name="Office 테마">
   <a:themeElements>

--- a/assets/icons/icons.pptx
+++ b/assets/icons/icons.pptx
@@ -14,6 +14,7 @@
     <p:sldId id="262" r:id="rId8"/>
     <p:sldId id="263" r:id="rId9"/>
     <p:sldId id="264" r:id="rId10"/>
+    <p:sldId id="265" r:id="rId11"/>
   </p:sldIdLst>
   <p:sldSz cx="2519363" cy="2519363"/>
   <p:notesSz cx="6858000" cy="9144000"/>
@@ -251,7 +252,7 @@
           <a:p>
             <a:fld id="{0D0BA784-F1F0-42FC-8C0B-86986BCEAFFF}" type="datetimeFigureOut">
               <a:rPr lang="ko-KR" altLang="en-US" smtClean="0"/>
-              <a:t>02-15(Sun)</a:t>
+              <a:t>2026-02-20</a:t>
             </a:fld>
             <a:endParaRPr lang="ko-KR" altLang="en-US"/>
           </a:p>
@@ -421,7 +422,7 @@
           <a:p>
             <a:fld id="{0D0BA784-F1F0-42FC-8C0B-86986BCEAFFF}" type="datetimeFigureOut">
               <a:rPr lang="ko-KR" altLang="en-US" smtClean="0"/>
-              <a:t>02-15(Sun)</a:t>
+              <a:t>2026-02-20</a:t>
             </a:fld>
             <a:endParaRPr lang="ko-KR" altLang="en-US"/>
           </a:p>
@@ -601,7 +602,7 @@
           <a:p>
             <a:fld id="{0D0BA784-F1F0-42FC-8C0B-86986BCEAFFF}" type="datetimeFigureOut">
               <a:rPr lang="ko-KR" altLang="en-US" smtClean="0"/>
-              <a:t>02-15(Sun)</a:t>
+              <a:t>2026-02-20</a:t>
             </a:fld>
             <a:endParaRPr lang="ko-KR" altLang="en-US"/>
           </a:p>
@@ -771,7 +772,7 @@
           <a:p>
             <a:fld id="{0D0BA784-F1F0-42FC-8C0B-86986BCEAFFF}" type="datetimeFigureOut">
               <a:rPr lang="ko-KR" altLang="en-US" smtClean="0"/>
-              <a:t>02-15(Sun)</a:t>
+              <a:t>2026-02-20</a:t>
             </a:fld>
             <a:endParaRPr lang="ko-KR" altLang="en-US"/>
           </a:p>
@@ -1017,7 +1018,7 @@
           <a:p>
             <a:fld id="{0D0BA784-F1F0-42FC-8C0B-86986BCEAFFF}" type="datetimeFigureOut">
               <a:rPr lang="ko-KR" altLang="en-US" smtClean="0"/>
-              <a:t>02-15(Sun)</a:t>
+              <a:t>2026-02-20</a:t>
             </a:fld>
             <a:endParaRPr lang="ko-KR" altLang="en-US"/>
           </a:p>
@@ -1249,7 +1250,7 @@
           <a:p>
             <a:fld id="{0D0BA784-F1F0-42FC-8C0B-86986BCEAFFF}" type="datetimeFigureOut">
               <a:rPr lang="ko-KR" altLang="en-US" smtClean="0"/>
-              <a:t>02-15(Sun)</a:t>
+              <a:t>2026-02-20</a:t>
             </a:fld>
             <a:endParaRPr lang="ko-KR" altLang="en-US"/>
           </a:p>
@@ -1616,7 +1617,7 @@
           <a:p>
             <a:fld id="{0D0BA784-F1F0-42FC-8C0B-86986BCEAFFF}" type="datetimeFigureOut">
               <a:rPr lang="ko-KR" altLang="en-US" smtClean="0"/>
-              <a:t>02-15(Sun)</a:t>
+              <a:t>2026-02-20</a:t>
             </a:fld>
             <a:endParaRPr lang="ko-KR" altLang="en-US"/>
           </a:p>
@@ -1734,7 +1735,7 @@
           <a:p>
             <a:fld id="{0D0BA784-F1F0-42FC-8C0B-86986BCEAFFF}" type="datetimeFigureOut">
               <a:rPr lang="ko-KR" altLang="en-US" smtClean="0"/>
-              <a:t>02-15(Sun)</a:t>
+              <a:t>2026-02-20</a:t>
             </a:fld>
             <a:endParaRPr lang="ko-KR" altLang="en-US"/>
           </a:p>
@@ -1829,7 +1830,7 @@
           <a:p>
             <a:fld id="{0D0BA784-F1F0-42FC-8C0B-86986BCEAFFF}" type="datetimeFigureOut">
               <a:rPr lang="ko-KR" altLang="en-US" smtClean="0"/>
-              <a:t>02-15(Sun)</a:t>
+              <a:t>2026-02-20</a:t>
             </a:fld>
             <a:endParaRPr lang="ko-KR" altLang="en-US"/>
           </a:p>
@@ -2106,7 +2107,7 @@
           <a:p>
             <a:fld id="{0D0BA784-F1F0-42FC-8C0B-86986BCEAFFF}" type="datetimeFigureOut">
               <a:rPr lang="ko-KR" altLang="en-US" smtClean="0"/>
-              <a:t>02-15(Sun)</a:t>
+              <a:t>2026-02-20</a:t>
             </a:fld>
             <a:endParaRPr lang="ko-KR" altLang="en-US"/>
           </a:p>
@@ -2363,7 +2364,7 @@
           <a:p>
             <a:fld id="{0D0BA784-F1F0-42FC-8C0B-86986BCEAFFF}" type="datetimeFigureOut">
               <a:rPr lang="ko-KR" altLang="en-US" smtClean="0"/>
-              <a:t>02-15(Sun)</a:t>
+              <a:t>2026-02-20</a:t>
             </a:fld>
             <a:endParaRPr lang="ko-KR" altLang="en-US"/>
           </a:p>
@@ -2576,7 +2577,7 @@
           <a:p>
             <a:fld id="{0D0BA784-F1F0-42FC-8C0B-86986BCEAFFF}" type="datetimeFigureOut">
               <a:rPr lang="ko-KR" altLang="en-US" smtClean="0"/>
-              <a:t>02-15(Sun)</a:t>
+              <a:t>2026-02-20</a:t>
             </a:fld>
             <a:endParaRPr lang="ko-KR" altLang="en-US"/>
           </a:p>
@@ -3099,6 +3100,215 @@
 </p:sld>
 </file>
 
+<file path=ppt/slides/slide10.xml><?xml version="1.0" encoding="utf-8"?>
+<p:sld xmlns:a="http://schemas.openxmlformats.org/drawingml/2006/main" xmlns:r="http://schemas.openxmlformats.org/officeDocument/2006/relationships" xmlns:p="http://schemas.openxmlformats.org/presentationml/2006/main">
+  <p:cSld>
+    <p:spTree>
+      <p:nvGrpSpPr>
+        <p:cNvPr id="1" name="">
+          <a:extLst>
+            <a:ext uri="{FF2B5EF4-FFF2-40B4-BE49-F238E27FC236}">
+              <a16:creationId xmlns:a16="http://schemas.microsoft.com/office/drawing/2014/main" id="{A145A5A8-E6E6-9B6B-1BB2-EC182EC59830}"/>
+            </a:ext>
+          </a:extLst>
+        </p:cNvPr>
+        <p:cNvGrpSpPr/>
+        <p:nvPr/>
+      </p:nvGrpSpPr>
+      <p:grpSpPr>
+        <a:xfrm>
+          <a:off x="0" y="0"/>
+          <a:ext cx="0" cy="0"/>
+          <a:chOff x="0" y="0"/>
+          <a:chExt cx="0" cy="0"/>
+        </a:xfrm>
+      </p:grpSpPr>
+      <p:grpSp>
+        <p:nvGrpSpPr>
+          <p:cNvPr id="13" name="그룹 12">
+            <a:extLst>
+              <a:ext uri="{FF2B5EF4-FFF2-40B4-BE49-F238E27FC236}">
+                <a16:creationId xmlns:a16="http://schemas.microsoft.com/office/drawing/2014/main" id="{976D9AF4-387D-92EA-5688-708695CECEE2}"/>
+              </a:ext>
+            </a:extLst>
+          </p:cNvPr>
+          <p:cNvGrpSpPr/>
+          <p:nvPr/>
+        </p:nvGrpSpPr>
+        <p:grpSpPr>
+          <a:xfrm>
+            <a:off x="1" y="35681"/>
+            <a:ext cx="2519362" cy="2448000"/>
+            <a:chOff x="1" y="35681"/>
+            <a:chExt cx="2519362" cy="2448000"/>
+          </a:xfrm>
+        </p:grpSpPr>
+        <p:sp>
+          <p:nvSpPr>
+            <p:cNvPr id="4" name="사각형: 둥근 모서리 3">
+              <a:extLst>
+                <a:ext uri="{FF2B5EF4-FFF2-40B4-BE49-F238E27FC236}">
+                  <a16:creationId xmlns:a16="http://schemas.microsoft.com/office/drawing/2014/main" id="{959F3FB2-6408-EC51-5E0B-8E1FDF92EBF6}"/>
+                </a:ext>
+              </a:extLst>
+            </p:cNvPr>
+            <p:cNvSpPr/>
+            <p:nvPr/>
+          </p:nvSpPr>
+          <p:spPr>
+            <a:xfrm>
+              <a:off x="35681" y="35681"/>
+              <a:ext cx="2448000" cy="2448000"/>
+            </a:xfrm>
+            <a:prstGeom prst="roundRect">
+              <a:avLst/>
+            </a:prstGeom>
+            <a:solidFill>
+              <a:schemeClr val="bg1"/>
+            </a:solidFill>
+            <a:ln w="76200">
+              <a:solidFill>
+                <a:srgbClr val="CC9B00"/>
+              </a:solidFill>
+            </a:ln>
+            <a:effectLst>
+              <a:outerShdw blurRad="44450" dist="27940" dir="5400000" algn="ctr">
+                <a:srgbClr val="000000">
+                  <a:alpha val="32000"/>
+                </a:srgbClr>
+              </a:outerShdw>
+            </a:effectLst>
+            <a:scene3d>
+              <a:camera prst="orthographicFront">
+                <a:rot lat="0" lon="0" rev="0"/>
+              </a:camera>
+              <a:lightRig rig="balanced" dir="t">
+                <a:rot lat="0" lon="0" rev="8700000"/>
+              </a:lightRig>
+            </a:scene3d>
+            <a:sp3d>
+              <a:bevelT w="190500" h="38100" prst="cross"/>
+            </a:sp3d>
+          </p:spPr>
+          <p:style>
+            <a:lnRef idx="2">
+              <a:schemeClr val="accent1">
+                <a:shade val="15000"/>
+              </a:schemeClr>
+            </a:lnRef>
+            <a:fillRef idx="1">
+              <a:schemeClr val="accent1"/>
+            </a:fillRef>
+            <a:effectRef idx="0">
+              <a:schemeClr val="accent1"/>
+            </a:effectRef>
+            <a:fontRef idx="minor">
+              <a:schemeClr val="lt1"/>
+            </a:fontRef>
+          </p:style>
+          <p:txBody>
+            <a:bodyPr vert="horz" rtlCol="0" anchor="ctr">
+              <a:prstTxWarp prst="textPlain">
+                <a:avLst/>
+              </a:prstTxWarp>
+            </a:bodyPr>
+            <a:lstStyle/>
+            <a:p>
+              <a:pPr algn="ctr"/>
+              <a:endParaRPr lang="ko-KR" altLang="en-US" dirty="0">
+                <a:ln>
+                  <a:solidFill>
+                    <a:schemeClr val="tx1"/>
+                  </a:solidFill>
+                </a:ln>
+                <a:solidFill>
+                  <a:schemeClr val="tx1"/>
+                </a:solidFill>
+                <a:latin typeface="HY중고딕" panose="02030600000101010101" pitchFamily="18" charset="-127"/>
+                <a:ea typeface="HY중고딕" panose="02030600000101010101" pitchFamily="18" charset="-127"/>
+              </a:endParaRPr>
+            </a:p>
+          </p:txBody>
+        </p:sp>
+        <p:sp>
+          <p:nvSpPr>
+            <p:cNvPr id="11" name="TextBox 10">
+              <a:extLst>
+                <a:ext uri="{FF2B5EF4-FFF2-40B4-BE49-F238E27FC236}">
+                  <a16:creationId xmlns:a16="http://schemas.microsoft.com/office/drawing/2014/main" id="{93576D45-1A15-E5B1-C2B3-966B783292C3}"/>
+                </a:ext>
+              </a:extLst>
+            </p:cNvPr>
+            <p:cNvSpPr txBox="1"/>
+            <p:nvPr/>
+          </p:nvSpPr>
+          <p:spPr>
+            <a:xfrm>
+              <a:off x="1" y="267690"/>
+              <a:ext cx="2519362" cy="2215991"/>
+            </a:xfrm>
+            <a:prstGeom prst="rect">
+              <a:avLst/>
+            </a:prstGeom>
+            <a:noFill/>
+          </p:spPr>
+          <p:txBody>
+            <a:bodyPr wrap="square">
+              <a:spAutoFit/>
+            </a:bodyPr>
+            <a:lstStyle/>
+            <a:p>
+              <a:pPr algn="ctr"/>
+              <a:r>
+                <a:rPr lang="en-US" altLang="ja-JP" sz="13800" b="1" dirty="0">
+                  <a:ln w="28575">
+                    <a:solidFill>
+                      <a:schemeClr val="accent2">
+                        <a:lumMod val="75000"/>
+                      </a:schemeClr>
+                    </a:solidFill>
+                  </a:ln>
+                  <a:solidFill>
+                    <a:srgbClr val="CC9B00"/>
+                  </a:solidFill>
+                  <a:latin typeface="Orbitron" panose="02000000000000000000" pitchFamily="2" charset="0"/>
+                  <a:ea typeface="HY목각파임B" panose="02030600000101010101" pitchFamily="18" charset="-127"/>
+                  <a:cs typeface="Cascadia Mono SemiLight" panose="020B0609020000020004" pitchFamily="49" charset="0"/>
+                </a:rPr>
+                <a:t>zi</a:t>
+              </a:r>
+              <a:endParaRPr lang="ko-KR" altLang="en-US" sz="8000" dirty="0">
+                <a:ln w="28575">
+                  <a:solidFill>
+                    <a:schemeClr val="accent2">
+                      <a:lumMod val="75000"/>
+                    </a:schemeClr>
+                  </a:solidFill>
+                </a:ln>
+                <a:solidFill>
+                  <a:srgbClr val="CC9B00"/>
+                </a:solidFill>
+                <a:latin typeface="Orbitron" panose="02000000000000000000" pitchFamily="2" charset="0"/>
+                <a:ea typeface="HY목각파임B" panose="02030600000101010101" pitchFamily="18" charset="-127"/>
+                <a:cs typeface="Cascadia Mono SemiLight" panose="020B0609020000020004" pitchFamily="49" charset="0"/>
+              </a:endParaRPr>
+            </a:p>
+          </p:txBody>
+        </p:sp>
+      </p:grpSp>
+    </p:spTree>
+    <p:extLst>
+      <p:ext uri="{BB962C8B-B14F-4D97-AF65-F5344CB8AC3E}">
+        <p14:creationId xmlns:p14="http://schemas.microsoft.com/office/powerpoint/2010/main" val="433329352"/>
+      </p:ext>
+    </p:extLst>
+  </p:cSld>
+  <p:clrMapOvr>
+    <a:masterClrMapping/>
+  </p:clrMapOvr>
+</p:sld>
+</file>
+
 <file path=ppt/slides/slide2.xml><?xml version="1.0" encoding="utf-8"?>
 <p:sld xmlns:a="http://schemas.openxmlformats.org/drawingml/2006/main" xmlns:r="http://schemas.openxmlformats.org/officeDocument/2006/relationships" xmlns:p="http://schemas.openxmlformats.org/presentationml/2006/main">
   <p:cSld>
@@ -3283,10 +3493,10 @@
         </p:nvGrpSpPr>
         <p:grpSpPr>
           <a:xfrm>
-            <a:off x="94129" y="98012"/>
-            <a:ext cx="2340000" cy="2340000"/>
-            <a:chOff x="8049744" y="1724420"/>
-            <a:chExt cx="2520000" cy="2520000"/>
+            <a:off x="94129" y="74054"/>
+            <a:ext cx="2340000" cy="2363959"/>
+            <a:chOff x="8049744" y="1698619"/>
+            <a:chExt cx="2520000" cy="2545801"/>
           </a:xfrm>
         </p:grpSpPr>
         <p:sp>
@@ -3953,8 +4163,8 @@
           </p:nvSpPr>
           <p:spPr>
             <a:xfrm>
-              <a:off x="8409754" y="1832628"/>
-              <a:ext cx="1799990" cy="2308324"/>
+              <a:off x="8409754" y="1698619"/>
+              <a:ext cx="1799990" cy="2308323"/>
             </a:xfrm>
             <a:prstGeom prst="rect">
               <a:avLst/>

--- a/assets/icons/icons.pptx
+++ b/assets/icons/icons.pptx
@@ -4,17 +4,22 @@
   <p:sldMasterIdLst>
     <p:sldMasterId id="2147483660" r:id="rId1"/>
   </p:sldMasterIdLst>
+  <p:notesMasterIdLst>
+    <p:notesMasterId r:id="rId14"/>
+  </p:notesMasterIdLst>
   <p:sldIdLst>
     <p:sldId id="256" r:id="rId2"/>
     <p:sldId id="258" r:id="rId3"/>
     <p:sldId id="259" r:id="rId4"/>
-    <p:sldId id="257" r:id="rId5"/>
-    <p:sldId id="260" r:id="rId6"/>
-    <p:sldId id="261" r:id="rId7"/>
-    <p:sldId id="262" r:id="rId8"/>
-    <p:sldId id="263" r:id="rId9"/>
-    <p:sldId id="264" r:id="rId10"/>
-    <p:sldId id="265" r:id="rId11"/>
+    <p:sldId id="267" r:id="rId5"/>
+    <p:sldId id="266" r:id="rId6"/>
+    <p:sldId id="257" r:id="rId7"/>
+    <p:sldId id="260" r:id="rId8"/>
+    <p:sldId id="261" r:id="rId9"/>
+    <p:sldId id="262" r:id="rId10"/>
+    <p:sldId id="263" r:id="rId11"/>
+    <p:sldId id="264" r:id="rId12"/>
+    <p:sldId id="265" r:id="rId13"/>
   </p:sldIdLst>
   <p:sldSz cx="2519363" cy="2519363"/>
   <p:notesSz cx="6858000" cy="9144000"/>
@@ -119,6 +124,631 @@
     </p:ext>
   </p:extLst>
 </p:presentation>
+</file>
+
+<file path=ppt/notesMasters/notesMaster1.xml><?xml version="1.0" encoding="utf-8"?>
+<p:notesMaster xmlns:a="http://schemas.openxmlformats.org/drawingml/2006/main" xmlns:r="http://schemas.openxmlformats.org/officeDocument/2006/relationships" xmlns:p="http://schemas.openxmlformats.org/presentationml/2006/main">
+  <p:cSld>
+    <p:bg>
+      <p:bgRef idx="1001">
+        <a:schemeClr val="bg1"/>
+      </p:bgRef>
+    </p:bg>
+    <p:spTree>
+      <p:nvGrpSpPr>
+        <p:cNvPr id="1" name=""/>
+        <p:cNvGrpSpPr/>
+        <p:nvPr/>
+      </p:nvGrpSpPr>
+      <p:grpSpPr>
+        <a:xfrm>
+          <a:off x="0" y="0"/>
+          <a:ext cx="0" cy="0"/>
+          <a:chOff x="0" y="0"/>
+          <a:chExt cx="0" cy="0"/>
+        </a:xfrm>
+      </p:grpSpPr>
+      <p:sp>
+        <p:nvSpPr>
+          <p:cNvPr id="2" name="머리글 개체 틀 1"/>
+          <p:cNvSpPr>
+            <a:spLocks noGrp="1"/>
+          </p:cNvSpPr>
+          <p:nvPr>
+            <p:ph type="hdr" sz="quarter"/>
+          </p:nvPr>
+        </p:nvSpPr>
+        <p:spPr>
+          <a:xfrm>
+            <a:off x="0" y="0"/>
+            <a:ext cx="2971800" cy="458788"/>
+          </a:xfrm>
+          <a:prstGeom prst="rect">
+            <a:avLst/>
+          </a:prstGeom>
+        </p:spPr>
+        <p:txBody>
+          <a:bodyPr vert="horz" lIns="91440" tIns="45720" rIns="91440" bIns="45720" rtlCol="0"/>
+          <a:lstStyle>
+            <a:lvl1pPr algn="l">
+              <a:defRPr sz="1200"/>
+            </a:lvl1pPr>
+          </a:lstStyle>
+          <a:p>
+            <a:endParaRPr lang="ko-KR" altLang="en-US"/>
+          </a:p>
+        </p:txBody>
+      </p:sp>
+      <p:sp>
+        <p:nvSpPr>
+          <p:cNvPr id="3" name="날짜 개체 틀 2"/>
+          <p:cNvSpPr>
+            <a:spLocks noGrp="1"/>
+          </p:cNvSpPr>
+          <p:nvPr>
+            <p:ph type="dt" idx="1"/>
+          </p:nvPr>
+        </p:nvSpPr>
+        <p:spPr>
+          <a:xfrm>
+            <a:off x="3884613" y="0"/>
+            <a:ext cx="2971800" cy="458788"/>
+          </a:xfrm>
+          <a:prstGeom prst="rect">
+            <a:avLst/>
+          </a:prstGeom>
+        </p:spPr>
+        <p:txBody>
+          <a:bodyPr vert="horz" lIns="91440" tIns="45720" rIns="91440" bIns="45720" rtlCol="0"/>
+          <a:lstStyle>
+            <a:lvl1pPr algn="r">
+              <a:defRPr sz="1200"/>
+            </a:lvl1pPr>
+          </a:lstStyle>
+          <a:p>
+            <a:fld id="{F5A72F13-1481-4CA2-9D11-40A68E70ACD8}" type="datetimeFigureOut">
+              <a:rPr lang="ko-KR" altLang="en-US" smtClean="0"/>
+              <a:t>2026-02-20</a:t>
+            </a:fld>
+            <a:endParaRPr lang="ko-KR" altLang="en-US"/>
+          </a:p>
+        </p:txBody>
+      </p:sp>
+      <p:sp>
+        <p:nvSpPr>
+          <p:cNvPr id="4" name="슬라이드 이미지 개체 틀 3"/>
+          <p:cNvSpPr>
+            <a:spLocks noGrp="1" noRot="1" noChangeAspect="1"/>
+          </p:cNvSpPr>
+          <p:nvPr>
+            <p:ph type="sldImg" idx="2"/>
+          </p:nvPr>
+        </p:nvSpPr>
+        <p:spPr>
+          <a:xfrm>
+            <a:off x="1885950" y="1143000"/>
+            <a:ext cx="3086100" cy="3086100"/>
+          </a:xfrm>
+          <a:prstGeom prst="rect">
+            <a:avLst/>
+          </a:prstGeom>
+          <a:noFill/>
+          <a:ln w="12700">
+            <a:solidFill>
+              <a:prstClr val="black"/>
+            </a:solidFill>
+          </a:ln>
+        </p:spPr>
+        <p:txBody>
+          <a:bodyPr vert="horz" lIns="91440" tIns="45720" rIns="91440" bIns="45720" rtlCol="0" anchor="ctr"/>
+          <a:lstStyle/>
+          <a:p>
+            <a:endParaRPr lang="ko-KR" altLang="en-US"/>
+          </a:p>
+        </p:txBody>
+      </p:sp>
+      <p:sp>
+        <p:nvSpPr>
+          <p:cNvPr id="5" name="슬라이드 노트 개체 틀 4"/>
+          <p:cNvSpPr>
+            <a:spLocks noGrp="1"/>
+          </p:cNvSpPr>
+          <p:nvPr>
+            <p:ph type="body" sz="quarter" idx="3"/>
+          </p:nvPr>
+        </p:nvSpPr>
+        <p:spPr>
+          <a:xfrm>
+            <a:off x="685800" y="4400550"/>
+            <a:ext cx="5486400" cy="3600450"/>
+          </a:xfrm>
+          <a:prstGeom prst="rect">
+            <a:avLst/>
+          </a:prstGeom>
+        </p:spPr>
+        <p:txBody>
+          <a:bodyPr vert="horz" lIns="91440" tIns="45720" rIns="91440" bIns="45720" rtlCol="0"/>
+          <a:lstStyle/>
+          <a:p>
+            <a:pPr lvl="0"/>
+            <a:r>
+              <a:rPr lang="ko-KR" altLang="en-US"/>
+              <a:t>마스터 텍스트 스타일을 편집하려면 클릭</a:t>
+            </a:r>
+          </a:p>
+          <a:p>
+            <a:pPr lvl="1"/>
+            <a:r>
+              <a:rPr lang="ko-KR" altLang="en-US"/>
+              <a:t>두 번째 수준</a:t>
+            </a:r>
+          </a:p>
+          <a:p>
+            <a:pPr lvl="2"/>
+            <a:r>
+              <a:rPr lang="ko-KR" altLang="en-US"/>
+              <a:t>세 번째 수준</a:t>
+            </a:r>
+          </a:p>
+          <a:p>
+            <a:pPr lvl="3"/>
+            <a:r>
+              <a:rPr lang="ko-KR" altLang="en-US"/>
+              <a:t>네 번째 수준</a:t>
+            </a:r>
+          </a:p>
+          <a:p>
+            <a:pPr lvl="4"/>
+            <a:r>
+              <a:rPr lang="ko-KR" altLang="en-US"/>
+              <a:t>다섯 번째 수준</a:t>
+            </a:r>
+          </a:p>
+        </p:txBody>
+      </p:sp>
+      <p:sp>
+        <p:nvSpPr>
+          <p:cNvPr id="6" name="바닥글 개체 틀 5"/>
+          <p:cNvSpPr>
+            <a:spLocks noGrp="1"/>
+          </p:cNvSpPr>
+          <p:nvPr>
+            <p:ph type="ftr" sz="quarter" idx="4"/>
+          </p:nvPr>
+        </p:nvSpPr>
+        <p:spPr>
+          <a:xfrm>
+            <a:off x="0" y="8685213"/>
+            <a:ext cx="2971800" cy="458787"/>
+          </a:xfrm>
+          <a:prstGeom prst="rect">
+            <a:avLst/>
+          </a:prstGeom>
+        </p:spPr>
+        <p:txBody>
+          <a:bodyPr vert="horz" lIns="91440" tIns="45720" rIns="91440" bIns="45720" rtlCol="0" anchor="b"/>
+          <a:lstStyle>
+            <a:lvl1pPr algn="l">
+              <a:defRPr sz="1200"/>
+            </a:lvl1pPr>
+          </a:lstStyle>
+          <a:p>
+            <a:endParaRPr lang="ko-KR" altLang="en-US"/>
+          </a:p>
+        </p:txBody>
+      </p:sp>
+      <p:sp>
+        <p:nvSpPr>
+          <p:cNvPr id="7" name="슬라이드 번호 개체 틀 6"/>
+          <p:cNvSpPr>
+            <a:spLocks noGrp="1"/>
+          </p:cNvSpPr>
+          <p:nvPr>
+            <p:ph type="sldNum" sz="quarter" idx="5"/>
+          </p:nvPr>
+        </p:nvSpPr>
+        <p:spPr>
+          <a:xfrm>
+            <a:off x="3884613" y="8685213"/>
+            <a:ext cx="2971800" cy="458787"/>
+          </a:xfrm>
+          <a:prstGeom prst="rect">
+            <a:avLst/>
+          </a:prstGeom>
+        </p:spPr>
+        <p:txBody>
+          <a:bodyPr vert="horz" lIns="91440" tIns="45720" rIns="91440" bIns="45720" rtlCol="0" anchor="b"/>
+          <a:lstStyle>
+            <a:lvl1pPr algn="r">
+              <a:defRPr sz="1200"/>
+            </a:lvl1pPr>
+          </a:lstStyle>
+          <a:p>
+            <a:fld id="{5E6C24C8-2112-44F0-A404-A24571ACB251}" type="slidenum">
+              <a:rPr lang="ko-KR" altLang="en-US" smtClean="0"/>
+              <a:t>‹#›</a:t>
+            </a:fld>
+            <a:endParaRPr lang="ko-KR" altLang="en-US"/>
+          </a:p>
+        </p:txBody>
+      </p:sp>
+    </p:spTree>
+    <p:extLst>
+      <p:ext uri="{BB962C8B-B14F-4D97-AF65-F5344CB8AC3E}">
+        <p14:creationId xmlns:p14="http://schemas.microsoft.com/office/powerpoint/2010/main" val="3574834952"/>
+      </p:ext>
+    </p:extLst>
+  </p:cSld>
+  <p:clrMap bg1="lt1" tx1="dk1" bg2="lt2" tx2="dk2" accent1="accent1" accent2="accent2" accent3="accent3" accent4="accent4" accent5="accent5" accent6="accent6" hlink="hlink" folHlink="folHlink"/>
+  <p:notesStyle>
+    <a:lvl1pPr marL="0" algn="l" defTabSz="914400" rtl="0" eaLnBrk="1" latinLnBrk="1" hangingPunct="1">
+      <a:defRPr sz="1200" kern="1200">
+        <a:solidFill>
+          <a:schemeClr val="tx1"/>
+        </a:solidFill>
+        <a:latin typeface="+mn-lt"/>
+        <a:ea typeface="+mn-ea"/>
+        <a:cs typeface="+mn-cs"/>
+      </a:defRPr>
+    </a:lvl1pPr>
+    <a:lvl2pPr marL="457200" algn="l" defTabSz="914400" rtl="0" eaLnBrk="1" latinLnBrk="1" hangingPunct="1">
+      <a:defRPr sz="1200" kern="1200">
+        <a:solidFill>
+          <a:schemeClr val="tx1"/>
+        </a:solidFill>
+        <a:latin typeface="+mn-lt"/>
+        <a:ea typeface="+mn-ea"/>
+        <a:cs typeface="+mn-cs"/>
+      </a:defRPr>
+    </a:lvl2pPr>
+    <a:lvl3pPr marL="914400" algn="l" defTabSz="914400" rtl="0" eaLnBrk="1" latinLnBrk="1" hangingPunct="1">
+      <a:defRPr sz="1200" kern="1200">
+        <a:solidFill>
+          <a:schemeClr val="tx1"/>
+        </a:solidFill>
+        <a:latin typeface="+mn-lt"/>
+        <a:ea typeface="+mn-ea"/>
+        <a:cs typeface="+mn-cs"/>
+      </a:defRPr>
+    </a:lvl3pPr>
+    <a:lvl4pPr marL="1371600" algn="l" defTabSz="914400" rtl="0" eaLnBrk="1" latinLnBrk="1" hangingPunct="1">
+      <a:defRPr sz="1200" kern="1200">
+        <a:solidFill>
+          <a:schemeClr val="tx1"/>
+        </a:solidFill>
+        <a:latin typeface="+mn-lt"/>
+        <a:ea typeface="+mn-ea"/>
+        <a:cs typeface="+mn-cs"/>
+      </a:defRPr>
+    </a:lvl4pPr>
+    <a:lvl5pPr marL="1828800" algn="l" defTabSz="914400" rtl="0" eaLnBrk="1" latinLnBrk="1" hangingPunct="1">
+      <a:defRPr sz="1200" kern="1200">
+        <a:solidFill>
+          <a:schemeClr val="tx1"/>
+        </a:solidFill>
+        <a:latin typeface="+mn-lt"/>
+        <a:ea typeface="+mn-ea"/>
+        <a:cs typeface="+mn-cs"/>
+      </a:defRPr>
+    </a:lvl5pPr>
+    <a:lvl6pPr marL="2286000" algn="l" defTabSz="914400" rtl="0" eaLnBrk="1" latinLnBrk="1" hangingPunct="1">
+      <a:defRPr sz="1200" kern="1200">
+        <a:solidFill>
+          <a:schemeClr val="tx1"/>
+        </a:solidFill>
+        <a:latin typeface="+mn-lt"/>
+        <a:ea typeface="+mn-ea"/>
+        <a:cs typeface="+mn-cs"/>
+      </a:defRPr>
+    </a:lvl6pPr>
+    <a:lvl7pPr marL="2743200" algn="l" defTabSz="914400" rtl="0" eaLnBrk="1" latinLnBrk="1" hangingPunct="1">
+      <a:defRPr sz="1200" kern="1200">
+        <a:solidFill>
+          <a:schemeClr val="tx1"/>
+        </a:solidFill>
+        <a:latin typeface="+mn-lt"/>
+        <a:ea typeface="+mn-ea"/>
+        <a:cs typeface="+mn-cs"/>
+      </a:defRPr>
+    </a:lvl7pPr>
+    <a:lvl8pPr marL="3200400" algn="l" defTabSz="914400" rtl="0" eaLnBrk="1" latinLnBrk="1" hangingPunct="1">
+      <a:defRPr sz="1200" kern="1200">
+        <a:solidFill>
+          <a:schemeClr val="tx1"/>
+        </a:solidFill>
+        <a:latin typeface="+mn-lt"/>
+        <a:ea typeface="+mn-ea"/>
+        <a:cs typeface="+mn-cs"/>
+      </a:defRPr>
+    </a:lvl8pPr>
+    <a:lvl9pPr marL="3657600" algn="l" defTabSz="914400" rtl="0" eaLnBrk="1" latinLnBrk="1" hangingPunct="1">
+      <a:defRPr sz="1200" kern="1200">
+        <a:solidFill>
+          <a:schemeClr val="tx1"/>
+        </a:solidFill>
+        <a:latin typeface="+mn-lt"/>
+        <a:ea typeface="+mn-ea"/>
+        <a:cs typeface="+mn-cs"/>
+      </a:defRPr>
+    </a:lvl9pPr>
+  </p:notesStyle>
+</p:notesMaster>
+</file>
+
+<file path=ppt/notesSlides/notesSlide1.xml><?xml version="1.0" encoding="utf-8"?>
+<p:notes xmlns:a="http://schemas.openxmlformats.org/drawingml/2006/main" xmlns:r="http://schemas.openxmlformats.org/officeDocument/2006/relationships" xmlns:p="http://schemas.openxmlformats.org/presentationml/2006/main">
+  <p:cSld>
+    <p:spTree>
+      <p:nvGrpSpPr>
+        <p:cNvPr id="1" name=""/>
+        <p:cNvGrpSpPr/>
+        <p:nvPr/>
+      </p:nvGrpSpPr>
+      <p:grpSpPr>
+        <a:xfrm>
+          <a:off x="0" y="0"/>
+          <a:ext cx="0" cy="0"/>
+          <a:chOff x="0" y="0"/>
+          <a:chExt cx="0" cy="0"/>
+        </a:xfrm>
+      </p:grpSpPr>
+      <p:sp>
+        <p:nvSpPr>
+          <p:cNvPr id="2" name="슬라이드 이미지 개체 틀 1"/>
+          <p:cNvSpPr>
+            <a:spLocks noGrp="1" noRot="1" noChangeAspect="1"/>
+          </p:cNvSpPr>
+          <p:nvPr>
+            <p:ph type="sldImg"/>
+          </p:nvPr>
+        </p:nvSpPr>
+        <p:spPr/>
+      </p:sp>
+      <p:sp>
+        <p:nvSpPr>
+          <p:cNvPr id="3" name="슬라이드 노트 개체 틀 2"/>
+          <p:cNvSpPr>
+            <a:spLocks noGrp="1"/>
+          </p:cNvSpPr>
+          <p:nvPr>
+            <p:ph type="body" idx="1"/>
+          </p:nvPr>
+        </p:nvSpPr>
+        <p:spPr/>
+        <p:txBody>
+          <a:bodyPr/>
+          <a:lstStyle/>
+          <a:p>
+            <a:endParaRPr lang="ko-KR" altLang="en-US" dirty="0"/>
+          </a:p>
+        </p:txBody>
+      </p:sp>
+      <p:sp>
+        <p:nvSpPr>
+          <p:cNvPr id="4" name="슬라이드 번호 개체 틀 3"/>
+          <p:cNvSpPr>
+            <a:spLocks noGrp="1"/>
+          </p:cNvSpPr>
+          <p:nvPr>
+            <p:ph type="sldNum" sz="quarter" idx="5"/>
+          </p:nvPr>
+        </p:nvSpPr>
+        <p:spPr/>
+        <p:txBody>
+          <a:bodyPr/>
+          <a:lstStyle/>
+          <a:p>
+            <a:fld id="{5E6C24C8-2112-44F0-A404-A24571ACB251}" type="slidenum">
+              <a:rPr lang="ko-KR" altLang="en-US" smtClean="0"/>
+              <a:t>3</a:t>
+            </a:fld>
+            <a:endParaRPr lang="ko-KR" altLang="en-US"/>
+          </a:p>
+        </p:txBody>
+      </p:sp>
+    </p:spTree>
+    <p:extLst>
+      <p:ext uri="{BB962C8B-B14F-4D97-AF65-F5344CB8AC3E}">
+        <p14:creationId xmlns:p14="http://schemas.microsoft.com/office/powerpoint/2010/main" val="2101524187"/>
+      </p:ext>
+    </p:extLst>
+  </p:cSld>
+  <p:clrMapOvr>
+    <a:masterClrMapping/>
+  </p:clrMapOvr>
+</p:notes>
+</file>
+
+<file path=ppt/notesSlides/notesSlide2.xml><?xml version="1.0" encoding="utf-8"?>
+<p:notes xmlns:a="http://schemas.openxmlformats.org/drawingml/2006/main" xmlns:r="http://schemas.openxmlformats.org/officeDocument/2006/relationships" xmlns:p="http://schemas.openxmlformats.org/presentationml/2006/main">
+  <p:cSld>
+    <p:spTree>
+      <p:nvGrpSpPr>
+        <p:cNvPr id="1" name="">
+          <a:extLst>
+            <a:ext uri="{FF2B5EF4-FFF2-40B4-BE49-F238E27FC236}">
+              <a16:creationId xmlns:a16="http://schemas.microsoft.com/office/drawing/2014/main" id="{92DF19A1-E5C1-03E6-8616-1F841896A1B3}"/>
+            </a:ext>
+          </a:extLst>
+        </p:cNvPr>
+        <p:cNvGrpSpPr/>
+        <p:nvPr/>
+      </p:nvGrpSpPr>
+      <p:grpSpPr>
+        <a:xfrm>
+          <a:off x="0" y="0"/>
+          <a:ext cx="0" cy="0"/>
+          <a:chOff x="0" y="0"/>
+          <a:chExt cx="0" cy="0"/>
+        </a:xfrm>
+      </p:grpSpPr>
+      <p:sp>
+        <p:nvSpPr>
+          <p:cNvPr id="2" name="슬라이드 이미지 개체 틀 1">
+            <a:extLst>
+              <a:ext uri="{FF2B5EF4-FFF2-40B4-BE49-F238E27FC236}">
+                <a16:creationId xmlns:a16="http://schemas.microsoft.com/office/drawing/2014/main" id="{394E8298-8A60-9616-3914-93BDCDB5DCF8}"/>
+              </a:ext>
+            </a:extLst>
+          </p:cNvPr>
+          <p:cNvSpPr>
+            <a:spLocks noGrp="1" noRot="1" noChangeAspect="1"/>
+          </p:cNvSpPr>
+          <p:nvPr>
+            <p:ph type="sldImg"/>
+          </p:nvPr>
+        </p:nvSpPr>
+        <p:spPr/>
+      </p:sp>
+      <p:sp>
+        <p:nvSpPr>
+          <p:cNvPr id="3" name="슬라이드 노트 개체 틀 2">
+            <a:extLst>
+              <a:ext uri="{FF2B5EF4-FFF2-40B4-BE49-F238E27FC236}">
+                <a16:creationId xmlns:a16="http://schemas.microsoft.com/office/drawing/2014/main" id="{27718216-86C0-A19F-A8EC-D5A4FA38413E}"/>
+              </a:ext>
+            </a:extLst>
+          </p:cNvPr>
+          <p:cNvSpPr>
+            <a:spLocks noGrp="1"/>
+          </p:cNvSpPr>
+          <p:nvPr>
+            <p:ph type="body" idx="1"/>
+          </p:nvPr>
+        </p:nvSpPr>
+        <p:spPr/>
+        <p:txBody>
+          <a:bodyPr/>
+          <a:lstStyle/>
+          <a:p>
+            <a:endParaRPr lang="ko-KR" altLang="en-US" dirty="0"/>
+          </a:p>
+        </p:txBody>
+      </p:sp>
+      <p:sp>
+        <p:nvSpPr>
+          <p:cNvPr id="4" name="슬라이드 번호 개체 틀 3">
+            <a:extLst>
+              <a:ext uri="{FF2B5EF4-FFF2-40B4-BE49-F238E27FC236}">
+                <a16:creationId xmlns:a16="http://schemas.microsoft.com/office/drawing/2014/main" id="{3829E593-C36A-31EB-1C23-45F4A6C0E4E2}"/>
+              </a:ext>
+            </a:extLst>
+          </p:cNvPr>
+          <p:cNvSpPr>
+            <a:spLocks noGrp="1"/>
+          </p:cNvSpPr>
+          <p:nvPr>
+            <p:ph type="sldNum" sz="quarter" idx="5"/>
+          </p:nvPr>
+        </p:nvSpPr>
+        <p:spPr/>
+        <p:txBody>
+          <a:bodyPr/>
+          <a:lstStyle/>
+          <a:p>
+            <a:fld id="{5E6C24C8-2112-44F0-A404-A24571ACB251}" type="slidenum">
+              <a:rPr lang="ko-KR" altLang="en-US" smtClean="0"/>
+              <a:t>4</a:t>
+            </a:fld>
+            <a:endParaRPr lang="ko-KR" altLang="en-US"/>
+          </a:p>
+        </p:txBody>
+      </p:sp>
+    </p:spTree>
+    <p:extLst>
+      <p:ext uri="{BB962C8B-B14F-4D97-AF65-F5344CB8AC3E}">
+        <p14:creationId xmlns:p14="http://schemas.microsoft.com/office/powerpoint/2010/main" val="6320145"/>
+      </p:ext>
+    </p:extLst>
+  </p:cSld>
+  <p:clrMapOvr>
+    <a:masterClrMapping/>
+  </p:clrMapOvr>
+</p:notes>
+</file>
+
+<file path=ppt/notesSlides/notesSlide3.xml><?xml version="1.0" encoding="utf-8"?>
+<p:notes xmlns:a="http://schemas.openxmlformats.org/drawingml/2006/main" xmlns:r="http://schemas.openxmlformats.org/officeDocument/2006/relationships" xmlns:p="http://schemas.openxmlformats.org/presentationml/2006/main">
+  <p:cSld>
+    <p:spTree>
+      <p:nvGrpSpPr>
+        <p:cNvPr id="1" name=""/>
+        <p:cNvGrpSpPr/>
+        <p:nvPr/>
+      </p:nvGrpSpPr>
+      <p:grpSpPr>
+        <a:xfrm>
+          <a:off x="0" y="0"/>
+          <a:ext cx="0" cy="0"/>
+          <a:chOff x="0" y="0"/>
+          <a:chExt cx="0" cy="0"/>
+        </a:xfrm>
+      </p:grpSpPr>
+      <p:sp>
+        <p:nvSpPr>
+          <p:cNvPr id="2" name="슬라이드 이미지 개체 틀 1"/>
+          <p:cNvSpPr>
+            <a:spLocks noGrp="1" noRot="1" noChangeAspect="1"/>
+          </p:cNvSpPr>
+          <p:nvPr>
+            <p:ph type="sldImg"/>
+          </p:nvPr>
+        </p:nvSpPr>
+        <p:spPr/>
+      </p:sp>
+      <p:sp>
+        <p:nvSpPr>
+          <p:cNvPr id="3" name="슬라이드 노트 개체 틀 2"/>
+          <p:cNvSpPr>
+            <a:spLocks noGrp="1"/>
+          </p:cNvSpPr>
+          <p:nvPr>
+            <p:ph type="body" idx="1"/>
+          </p:nvPr>
+        </p:nvSpPr>
+        <p:spPr/>
+        <p:txBody>
+          <a:bodyPr/>
+          <a:lstStyle/>
+          <a:p>
+            <a:endParaRPr lang="ko-KR" altLang="en-US" dirty="0"/>
+          </a:p>
+        </p:txBody>
+      </p:sp>
+      <p:sp>
+        <p:nvSpPr>
+          <p:cNvPr id="4" name="슬라이드 번호 개체 틀 3"/>
+          <p:cNvSpPr>
+            <a:spLocks noGrp="1"/>
+          </p:cNvSpPr>
+          <p:nvPr>
+            <p:ph type="sldNum" sz="quarter" idx="5"/>
+          </p:nvPr>
+        </p:nvSpPr>
+        <p:spPr/>
+        <p:txBody>
+          <a:bodyPr/>
+          <a:lstStyle/>
+          <a:p>
+            <a:fld id="{5E6C24C8-2112-44F0-A404-A24571ACB251}" type="slidenum">
+              <a:rPr lang="ko-KR" altLang="en-US" smtClean="0"/>
+              <a:t>5</a:t>
+            </a:fld>
+            <a:endParaRPr lang="ko-KR" altLang="en-US"/>
+          </a:p>
+        </p:txBody>
+      </p:sp>
+    </p:spTree>
+    <p:extLst>
+      <p:ext uri="{BB962C8B-B14F-4D97-AF65-F5344CB8AC3E}">
+        <p14:creationId xmlns:p14="http://schemas.microsoft.com/office/powerpoint/2010/main" val="3335822118"/>
+      </p:ext>
+    </p:extLst>
+  </p:cSld>
+  <p:clrMapOvr>
+    <a:masterClrMapping/>
+  </p:clrMapOvr>
+</p:notes>
 </file>
 
 <file path=ppt/slideLayouts/slideLayout1.xml><?xml version="1.0" encoding="utf-8"?>
@@ -3108,6 +3738,501 @@
         <p:cNvPr id="1" name="">
           <a:extLst>
             <a:ext uri="{FF2B5EF4-FFF2-40B4-BE49-F238E27FC236}">
+              <a16:creationId xmlns:a16="http://schemas.microsoft.com/office/drawing/2014/main" id="{7DAF7AF4-F129-3E92-36D8-D908D7C0C9ED}"/>
+            </a:ext>
+          </a:extLst>
+        </p:cNvPr>
+        <p:cNvGrpSpPr/>
+        <p:nvPr/>
+      </p:nvGrpSpPr>
+      <p:grpSpPr>
+        <a:xfrm>
+          <a:off x="0" y="0"/>
+          <a:ext cx="0" cy="0"/>
+          <a:chOff x="0" y="0"/>
+          <a:chExt cx="0" cy="0"/>
+        </a:xfrm>
+      </p:grpSpPr>
+      <p:sp>
+        <p:nvSpPr>
+          <p:cNvPr id="4" name="사각형: 둥근 모서리 3">
+            <a:extLst>
+              <a:ext uri="{FF2B5EF4-FFF2-40B4-BE49-F238E27FC236}">
+                <a16:creationId xmlns:a16="http://schemas.microsoft.com/office/drawing/2014/main" id="{86DB814C-93D6-4673-25C3-0BBB5F62A490}"/>
+              </a:ext>
+            </a:extLst>
+          </p:cNvPr>
+          <p:cNvSpPr/>
+          <p:nvPr/>
+        </p:nvSpPr>
+        <p:spPr>
+          <a:xfrm>
+            <a:off x="35681" y="35681"/>
+            <a:ext cx="2448000" cy="2448000"/>
+          </a:xfrm>
+          <a:prstGeom prst="roundRect">
+            <a:avLst/>
+          </a:prstGeom>
+          <a:solidFill>
+            <a:schemeClr val="bg1"/>
+          </a:solidFill>
+          <a:ln w="76200">
+            <a:solidFill>
+              <a:schemeClr val="accent5">
+                <a:lumMod val="60000"/>
+                <a:lumOff val="40000"/>
+              </a:schemeClr>
+            </a:solidFill>
+          </a:ln>
+          <a:effectLst>
+            <a:outerShdw blurRad="44450" dist="27940" dir="5400000" algn="ctr">
+              <a:srgbClr val="000000">
+                <a:alpha val="32000"/>
+              </a:srgbClr>
+            </a:outerShdw>
+          </a:effectLst>
+          <a:scene3d>
+            <a:camera prst="orthographicFront">
+              <a:rot lat="0" lon="0" rev="0"/>
+            </a:camera>
+            <a:lightRig rig="balanced" dir="t">
+              <a:rot lat="0" lon="0" rev="8700000"/>
+            </a:lightRig>
+          </a:scene3d>
+          <a:sp3d>
+            <a:bevelT w="190500" h="38100"/>
+          </a:sp3d>
+        </p:spPr>
+        <p:style>
+          <a:lnRef idx="2">
+            <a:schemeClr val="accent1">
+              <a:shade val="15000"/>
+            </a:schemeClr>
+          </a:lnRef>
+          <a:fillRef idx="1">
+            <a:schemeClr val="accent1"/>
+          </a:fillRef>
+          <a:effectRef idx="0">
+            <a:schemeClr val="accent1"/>
+          </a:effectRef>
+          <a:fontRef idx="minor">
+            <a:schemeClr val="lt1"/>
+          </a:fontRef>
+        </p:style>
+        <p:txBody>
+          <a:bodyPr vert="horz" rtlCol="0" anchor="ctr">
+            <a:prstTxWarp prst="textPlain">
+              <a:avLst/>
+            </a:prstTxWarp>
+          </a:bodyPr>
+          <a:lstStyle/>
+          <a:p>
+            <a:pPr algn="ctr"/>
+            <a:endParaRPr lang="ko-KR" altLang="en-US" dirty="0">
+              <a:ln>
+                <a:solidFill>
+                  <a:schemeClr val="tx1"/>
+                </a:solidFill>
+              </a:ln>
+              <a:solidFill>
+                <a:schemeClr val="tx1"/>
+              </a:solidFill>
+              <a:latin typeface="HY중고딕" panose="02030600000101010101" pitchFamily="18" charset="-127"/>
+              <a:ea typeface="HY중고딕" panose="02030600000101010101" pitchFamily="18" charset="-127"/>
+            </a:endParaRPr>
+          </a:p>
+        </p:txBody>
+      </p:sp>
+      <p:sp>
+        <p:nvSpPr>
+          <p:cNvPr id="8" name="TextBox 7">
+            <a:extLst>
+              <a:ext uri="{FF2B5EF4-FFF2-40B4-BE49-F238E27FC236}">
+                <a16:creationId xmlns:a16="http://schemas.microsoft.com/office/drawing/2014/main" id="{FF6968C8-3F71-F879-D728-21298FD22676}"/>
+              </a:ext>
+            </a:extLst>
+          </p:cNvPr>
+          <p:cNvSpPr txBox="1"/>
+          <p:nvPr/>
+        </p:nvSpPr>
+        <p:spPr>
+          <a:xfrm>
+            <a:off x="72368" y="-83218"/>
+            <a:ext cx="942130" cy="1323439"/>
+          </a:xfrm>
+          <a:prstGeom prst="rect">
+            <a:avLst/>
+          </a:prstGeom>
+          <a:noFill/>
+        </p:spPr>
+        <p:txBody>
+          <a:bodyPr wrap="square">
+            <a:spAutoFit/>
+          </a:bodyPr>
+          <a:lstStyle/>
+          <a:p>
+            <a:r>
+              <a:rPr lang="ko-KR" altLang="en-US" sz="8000" dirty="0">
+                <a:ln>
+                  <a:solidFill>
+                    <a:schemeClr val="accent5">
+                      <a:lumMod val="50000"/>
+                    </a:schemeClr>
+                  </a:solidFill>
+                </a:ln>
+                <a:solidFill>
+                  <a:schemeClr val="accent5">
+                    <a:lumMod val="75000"/>
+                  </a:schemeClr>
+                </a:solidFill>
+                <a:latin typeface="HY중고딕" panose="02030600000101010101" pitchFamily="18" charset="-127"/>
+                <a:ea typeface="HY중고딕" panose="02030600000101010101" pitchFamily="18" charset="-127"/>
+              </a:rPr>
+              <a:t>漢</a:t>
+            </a:r>
+          </a:p>
+        </p:txBody>
+      </p:sp>
+      <p:sp>
+        <p:nvSpPr>
+          <p:cNvPr id="10" name="TextBox 9">
+            <a:extLst>
+              <a:ext uri="{FF2B5EF4-FFF2-40B4-BE49-F238E27FC236}">
+                <a16:creationId xmlns:a16="http://schemas.microsoft.com/office/drawing/2014/main" id="{35A788DE-AF61-6988-180D-5EFA11E021BB}"/>
+              </a:ext>
+            </a:extLst>
+          </p:cNvPr>
+          <p:cNvSpPr txBox="1"/>
+          <p:nvPr/>
+        </p:nvSpPr>
+        <p:spPr>
+          <a:xfrm>
+            <a:off x="602964" y="674275"/>
+            <a:ext cx="1313434" cy="1323439"/>
+          </a:xfrm>
+          <a:prstGeom prst="rect">
+            <a:avLst/>
+          </a:prstGeom>
+          <a:noFill/>
+        </p:spPr>
+        <p:txBody>
+          <a:bodyPr wrap="square">
+            <a:spAutoFit/>
+          </a:bodyPr>
+          <a:lstStyle/>
+          <a:p>
+            <a:r>
+              <a:rPr lang="ko-KR" altLang="en-US" sz="8000" b="1" dirty="0">
+                <a:ln>
+                  <a:solidFill>
+                    <a:schemeClr val="accent5">
+                      <a:lumMod val="50000"/>
+                    </a:schemeClr>
+                  </a:solidFill>
+                </a:ln>
+                <a:solidFill>
+                  <a:schemeClr val="accent5">
+                    <a:lumMod val="75000"/>
+                  </a:schemeClr>
+                </a:solidFill>
+                <a:latin typeface="HY중고딕" panose="02030600000101010101" pitchFamily="18" charset="-127"/>
+                <a:ea typeface="HY중고딕" panose="02030600000101010101" pitchFamily="18" charset="-127"/>
+              </a:rPr>
+              <a:t>字</a:t>
+            </a:r>
+            <a:endParaRPr lang="ko-KR" altLang="en-US" sz="8000" dirty="0">
+              <a:ln>
+                <a:solidFill>
+                  <a:schemeClr val="accent5">
+                    <a:lumMod val="50000"/>
+                  </a:schemeClr>
+                </a:solidFill>
+              </a:ln>
+              <a:solidFill>
+                <a:schemeClr val="accent5">
+                  <a:lumMod val="75000"/>
+                </a:schemeClr>
+              </a:solidFill>
+            </a:endParaRPr>
+          </a:p>
+        </p:txBody>
+      </p:sp>
+      <p:sp>
+        <p:nvSpPr>
+          <p:cNvPr id="3" name="TextBox 2">
+            <a:extLst>
+              <a:ext uri="{FF2B5EF4-FFF2-40B4-BE49-F238E27FC236}">
+                <a16:creationId xmlns:a16="http://schemas.microsoft.com/office/drawing/2014/main" id="{98FB1599-02F1-2C81-56CC-36E18F3AF8CE}"/>
+              </a:ext>
+            </a:extLst>
+          </p:cNvPr>
+          <p:cNvSpPr txBox="1"/>
+          <p:nvPr/>
+        </p:nvSpPr>
+        <p:spPr>
+          <a:xfrm>
+            <a:off x="1259681" y="1240221"/>
+            <a:ext cx="1224000" cy="1323439"/>
+          </a:xfrm>
+          <a:prstGeom prst="rect">
+            <a:avLst/>
+          </a:prstGeom>
+          <a:noFill/>
+        </p:spPr>
+        <p:txBody>
+          <a:bodyPr wrap="square" anchor="ctr">
+            <a:spAutoFit/>
+          </a:bodyPr>
+          <a:lstStyle/>
+          <a:p>
+            <a:r>
+              <a:rPr lang="ko-KR" altLang="en-US" sz="8000" b="1" dirty="0">
+                <a:ln>
+                  <a:solidFill>
+                    <a:schemeClr val="accent5">
+                      <a:lumMod val="50000"/>
+                    </a:schemeClr>
+                  </a:solidFill>
+                </a:ln>
+                <a:solidFill>
+                  <a:schemeClr val="accent5">
+                    <a:lumMod val="75000"/>
+                  </a:schemeClr>
+                </a:solidFill>
+                <a:latin typeface="HY중고딕" panose="02030600000101010101" pitchFamily="18" charset="-127"/>
+                <a:ea typeface="HY중고딕" panose="02030600000101010101" pitchFamily="18" charset="-127"/>
+              </a:rPr>
+              <a:t>源</a:t>
+            </a:r>
+            <a:endParaRPr lang="ko-KR" altLang="en-US" sz="8000" b="1" dirty="0">
+              <a:ln>
+                <a:solidFill>
+                  <a:schemeClr val="accent5">
+                    <a:lumMod val="50000"/>
+                  </a:schemeClr>
+                </a:solidFill>
+              </a:ln>
+              <a:solidFill>
+                <a:schemeClr val="accent5">
+                  <a:lumMod val="75000"/>
+                </a:schemeClr>
+              </a:solidFill>
+            </a:endParaRPr>
+          </a:p>
+        </p:txBody>
+      </p:sp>
+    </p:spTree>
+    <p:extLst>
+      <p:ext uri="{BB962C8B-B14F-4D97-AF65-F5344CB8AC3E}">
+        <p14:creationId xmlns:p14="http://schemas.microsoft.com/office/powerpoint/2010/main" val="2373946299"/>
+      </p:ext>
+    </p:extLst>
+  </p:cSld>
+  <p:clrMapOvr>
+    <a:masterClrMapping/>
+  </p:clrMapOvr>
+</p:sld>
+</file>
+
+<file path=ppt/slides/slide11.xml><?xml version="1.0" encoding="utf-8"?>
+<p:sld xmlns:a="http://schemas.openxmlformats.org/drawingml/2006/main" xmlns:r="http://schemas.openxmlformats.org/officeDocument/2006/relationships" xmlns:p="http://schemas.openxmlformats.org/presentationml/2006/main">
+  <p:cSld>
+    <p:spTree>
+      <p:nvGrpSpPr>
+        <p:cNvPr id="1" name="">
+          <a:extLst>
+            <a:ext uri="{FF2B5EF4-FFF2-40B4-BE49-F238E27FC236}">
+              <a16:creationId xmlns:a16="http://schemas.microsoft.com/office/drawing/2014/main" id="{4CCE8FDF-CB90-B3CB-F987-CCC507B54496}"/>
+            </a:ext>
+          </a:extLst>
+        </p:cNvPr>
+        <p:cNvGrpSpPr/>
+        <p:nvPr/>
+      </p:nvGrpSpPr>
+      <p:grpSpPr>
+        <a:xfrm>
+          <a:off x="0" y="0"/>
+          <a:ext cx="0" cy="0"/>
+          <a:chOff x="0" y="0"/>
+          <a:chExt cx="0" cy="0"/>
+        </a:xfrm>
+      </p:grpSpPr>
+      <p:sp>
+        <p:nvSpPr>
+          <p:cNvPr id="4" name="사각형: 둥근 모서리 3">
+            <a:extLst>
+              <a:ext uri="{FF2B5EF4-FFF2-40B4-BE49-F238E27FC236}">
+                <a16:creationId xmlns:a16="http://schemas.microsoft.com/office/drawing/2014/main" id="{456F9688-54A2-6FBF-D082-3336D5382D67}"/>
+              </a:ext>
+            </a:extLst>
+          </p:cNvPr>
+          <p:cNvSpPr/>
+          <p:nvPr/>
+        </p:nvSpPr>
+        <p:spPr>
+          <a:xfrm>
+            <a:off x="35681" y="35681"/>
+            <a:ext cx="2448000" cy="2448000"/>
+          </a:xfrm>
+          <a:prstGeom prst="roundRect">
+            <a:avLst/>
+          </a:prstGeom>
+          <a:solidFill>
+            <a:schemeClr val="bg1"/>
+          </a:solidFill>
+          <a:ln w="76200">
+            <a:solidFill>
+              <a:schemeClr val="tx1">
+                <a:lumMod val="75000"/>
+                <a:lumOff val="25000"/>
+              </a:schemeClr>
+            </a:solidFill>
+          </a:ln>
+          <a:effectLst>
+            <a:outerShdw blurRad="44450" dist="27940" dir="5400000" algn="ctr">
+              <a:srgbClr val="000000">
+                <a:alpha val="32000"/>
+              </a:srgbClr>
+            </a:outerShdw>
+          </a:effectLst>
+          <a:scene3d>
+            <a:camera prst="orthographicFront">
+              <a:rot lat="0" lon="0" rev="0"/>
+            </a:camera>
+            <a:lightRig rig="balanced" dir="t">
+              <a:rot lat="0" lon="0" rev="8700000"/>
+            </a:lightRig>
+          </a:scene3d>
+          <a:sp3d>
+            <a:bevelT w="190500" h="38100"/>
+          </a:sp3d>
+        </p:spPr>
+        <p:style>
+          <a:lnRef idx="2">
+            <a:schemeClr val="accent1">
+              <a:shade val="15000"/>
+            </a:schemeClr>
+          </a:lnRef>
+          <a:fillRef idx="1">
+            <a:schemeClr val="accent1"/>
+          </a:fillRef>
+          <a:effectRef idx="0">
+            <a:schemeClr val="accent1"/>
+          </a:effectRef>
+          <a:fontRef idx="minor">
+            <a:schemeClr val="lt1"/>
+          </a:fontRef>
+        </p:style>
+        <p:txBody>
+          <a:bodyPr vert="horz" rtlCol="0" anchor="ctr">
+            <a:prstTxWarp prst="textPlain">
+              <a:avLst/>
+            </a:prstTxWarp>
+          </a:bodyPr>
+          <a:lstStyle/>
+          <a:p>
+            <a:pPr algn="ctr"/>
+            <a:endParaRPr lang="ko-KR" altLang="en-US" dirty="0">
+              <a:ln>
+                <a:solidFill>
+                  <a:schemeClr val="tx1"/>
+                </a:solidFill>
+              </a:ln>
+              <a:solidFill>
+                <a:schemeClr val="tx1"/>
+              </a:solidFill>
+              <a:latin typeface="HY중고딕" panose="02030600000101010101" pitchFamily="18" charset="-127"/>
+              <a:ea typeface="HY중고딕" panose="02030600000101010101" pitchFamily="18" charset="-127"/>
+            </a:endParaRPr>
+          </a:p>
+        </p:txBody>
+      </p:sp>
+      <p:sp>
+        <p:nvSpPr>
+          <p:cNvPr id="10" name="TextBox 9">
+            <a:extLst>
+              <a:ext uri="{FF2B5EF4-FFF2-40B4-BE49-F238E27FC236}">
+                <a16:creationId xmlns:a16="http://schemas.microsoft.com/office/drawing/2014/main" id="{E9EBC0C8-EDD2-CF91-7E4D-890C884A740B}"/>
+              </a:ext>
+            </a:extLst>
+          </p:cNvPr>
+          <p:cNvSpPr txBox="1"/>
+          <p:nvPr/>
+        </p:nvSpPr>
+        <p:spPr>
+          <a:xfrm>
+            <a:off x="1" y="267690"/>
+            <a:ext cx="2519362" cy="2215991"/>
+          </a:xfrm>
+          <a:prstGeom prst="rect">
+            <a:avLst/>
+          </a:prstGeom>
+          <a:noFill/>
+        </p:spPr>
+        <p:txBody>
+          <a:bodyPr wrap="square">
+            <a:spAutoFit/>
+          </a:bodyPr>
+          <a:lstStyle/>
+          <a:p>
+            <a:pPr algn="ctr"/>
+            <a:r>
+              <a:rPr lang="ja-JP" altLang="en-US" sz="13800" b="1" dirty="0">
+                <a:ln>
+                  <a:solidFill>
+                    <a:schemeClr val="accent5">
+                      <a:lumMod val="50000"/>
+                    </a:schemeClr>
+                  </a:solidFill>
+                </a:ln>
+                <a:solidFill>
+                  <a:schemeClr val="bg1">
+                    <a:lumMod val="50000"/>
+                  </a:schemeClr>
+                </a:solidFill>
+                <a:latin typeface="HY중고딕" panose="02030600000101010101" pitchFamily="18" charset="-127"/>
+                <a:ea typeface="HY중고딕" panose="02030600000101010101" pitchFamily="18" charset="-127"/>
+              </a:rPr>
+              <a:t>広</a:t>
+            </a:r>
+            <a:endParaRPr lang="ko-KR" altLang="en-US" sz="8000" dirty="0">
+              <a:ln>
+                <a:solidFill>
+                  <a:schemeClr val="accent5">
+                    <a:lumMod val="50000"/>
+                  </a:schemeClr>
+                </a:solidFill>
+              </a:ln>
+              <a:solidFill>
+                <a:schemeClr val="bg1">
+                  <a:lumMod val="50000"/>
+                </a:schemeClr>
+              </a:solidFill>
+            </a:endParaRPr>
+          </a:p>
+        </p:txBody>
+      </p:sp>
+    </p:spTree>
+    <p:extLst>
+      <p:ext uri="{BB962C8B-B14F-4D97-AF65-F5344CB8AC3E}">
+        <p14:creationId xmlns:p14="http://schemas.microsoft.com/office/powerpoint/2010/main" val="2430601126"/>
+      </p:ext>
+    </p:extLst>
+  </p:cSld>
+  <p:clrMapOvr>
+    <a:masterClrMapping/>
+  </p:clrMapOvr>
+</p:sld>
+</file>
+
+<file path=ppt/slides/slide12.xml><?xml version="1.0" encoding="utf-8"?>
+<p:sld xmlns:a="http://schemas.openxmlformats.org/drawingml/2006/main" xmlns:r="http://schemas.openxmlformats.org/officeDocument/2006/relationships" xmlns:p="http://schemas.openxmlformats.org/presentationml/2006/main">
+  <p:cSld>
+    <p:spTree>
+      <p:nvGrpSpPr>
+        <p:cNvPr id="1" name="">
+          <a:extLst>
+            <a:ext uri="{FF2B5EF4-FFF2-40B4-BE49-F238E27FC236}">
               <a16:creationId xmlns:a16="http://schemas.microsoft.com/office/drawing/2014/main" id="{A145A5A8-E6E6-9B6B-1BB2-EC182EC59830}"/>
             </a:ext>
           </a:extLst>
@@ -3481,10 +4606,10 @@
       </p:grpSpPr>
       <p:grpSp>
         <p:nvGrpSpPr>
-          <p:cNvPr id="20" name="그룹 19">
+          <p:cNvPr id="9" name="그룹 8">
             <a:extLst>
               <a:ext uri="{FF2B5EF4-FFF2-40B4-BE49-F238E27FC236}">
-                <a16:creationId xmlns:a16="http://schemas.microsoft.com/office/drawing/2014/main" id="{C7B13D25-A07D-A04D-4D63-C40C359EF65D}"/>
+                <a16:creationId xmlns:a16="http://schemas.microsoft.com/office/drawing/2014/main" id="{245D4A31-6BF5-B42E-2376-B3184A04382A}"/>
               </a:ext>
             </a:extLst>
           </p:cNvPr>
@@ -3493,10 +4618,10 @@
         </p:nvGrpSpPr>
         <p:grpSpPr>
           <a:xfrm>
-            <a:off x="94129" y="74054"/>
-            <a:ext cx="2340000" cy="2363959"/>
-            <a:chOff x="8049744" y="1698619"/>
-            <a:chExt cx="2520000" cy="2545801"/>
+            <a:off x="89681" y="41590"/>
+            <a:ext cx="2340000" cy="2385386"/>
+            <a:chOff x="89681" y="41590"/>
+            <a:chExt cx="2340000" cy="2385386"/>
           </a:xfrm>
         </p:grpSpPr>
         <p:sp>
@@ -3513,8 +4638,8 @@
           </p:nvSpPr>
           <p:spPr>
             <a:xfrm>
-              <a:off x="8049744" y="1724420"/>
-              <a:ext cx="2520000" cy="2520000"/>
+              <a:off x="89681" y="86975"/>
+              <a:ext cx="2340000" cy="2340001"/>
             </a:xfrm>
             <a:custGeom>
               <a:avLst/>
@@ -3861,294 +4986,315 @@
             </a:p>
           </p:txBody>
         </p:sp>
-        <p:sp>
-          <p:nvSpPr>
-            <p:cNvPr id="3" name="타원 2">
+        <p:grpSp>
+          <p:nvGrpSpPr>
+            <p:cNvPr id="6" name="그룹 5">
               <a:extLst>
                 <a:ext uri="{FF2B5EF4-FFF2-40B4-BE49-F238E27FC236}">
-                  <a16:creationId xmlns:a16="http://schemas.microsoft.com/office/drawing/2014/main" id="{FDE286E7-1051-FDE0-D888-589A3ABB752B}"/>
+                  <a16:creationId xmlns:a16="http://schemas.microsoft.com/office/drawing/2014/main" id="{5BB3FB4F-FB12-8FF6-FF6F-23E2EF16E79E}"/>
                 </a:ext>
               </a:extLst>
             </p:cNvPr>
-            <p:cNvSpPr/>
+            <p:cNvGrpSpPr/>
             <p:nvPr/>
-          </p:nvSpPr>
-          <p:spPr>
+          </p:nvGrpSpPr>
+          <p:grpSpPr>
             <a:xfrm>
-              <a:off x="8409744" y="2084420"/>
-              <a:ext cx="1800000" cy="1800000"/>
+              <a:off x="428415" y="432298"/>
+              <a:ext cx="1671429" cy="1671429"/>
+              <a:chOff x="428415" y="432298"/>
+              <a:chExt cx="1671429" cy="1671429"/>
             </a:xfrm>
-            <a:prstGeom prst="ellipse">
-              <a:avLst/>
-            </a:prstGeom>
-            <a:solidFill>
-              <a:schemeClr val="accent1">
-                <a:lumMod val="60000"/>
-                <a:lumOff val="40000"/>
-              </a:schemeClr>
-            </a:solidFill>
-            <a:ln w="57150">
+          </p:grpSpPr>
+          <p:sp>
+            <p:nvSpPr>
+              <p:cNvPr id="3" name="타원 2">
+                <a:extLst>
+                  <a:ext uri="{FF2B5EF4-FFF2-40B4-BE49-F238E27FC236}">
+                    <a16:creationId xmlns:a16="http://schemas.microsoft.com/office/drawing/2014/main" id="{FDE286E7-1051-FDE0-D888-589A3ABB752B}"/>
+                  </a:ext>
+                </a:extLst>
+              </p:cNvPr>
+              <p:cNvSpPr/>
+              <p:nvPr/>
+            </p:nvSpPr>
+            <p:spPr>
+              <a:xfrm>
+                <a:off x="428415" y="432298"/>
+                <a:ext cx="1671429" cy="1671429"/>
+              </a:xfrm>
+              <a:prstGeom prst="ellipse">
+                <a:avLst/>
+              </a:prstGeom>
               <a:solidFill>
-                <a:schemeClr val="bg1"/>
+                <a:schemeClr val="accent1">
+                  <a:lumMod val="60000"/>
+                  <a:lumOff val="40000"/>
+                </a:schemeClr>
               </a:solidFill>
-            </a:ln>
-          </p:spPr>
-          <p:style>
-            <a:lnRef idx="2">
-              <a:schemeClr val="accent1">
-                <a:shade val="15000"/>
-              </a:schemeClr>
-            </a:lnRef>
-            <a:fillRef idx="1">
-              <a:schemeClr val="accent1"/>
-            </a:fillRef>
-            <a:effectRef idx="0">
-              <a:schemeClr val="accent1"/>
-            </a:effectRef>
-            <a:fontRef idx="minor">
-              <a:schemeClr val="lt1"/>
-            </a:fontRef>
-          </p:style>
-          <p:txBody>
-            <a:bodyPr rtlCol="0" anchor="ctr"/>
-            <a:lstStyle/>
-            <a:p>
-              <a:pPr algn="ctr"/>
-              <a:endParaRPr lang="ko-KR" altLang="en-US" dirty="0"/>
-            </a:p>
-          </p:txBody>
-        </p:sp>
-        <p:sp>
-          <p:nvSpPr>
-            <p:cNvPr id="5" name="타원 4">
-              <a:extLst>
-                <a:ext uri="{FF2B5EF4-FFF2-40B4-BE49-F238E27FC236}">
-                  <a16:creationId xmlns:a16="http://schemas.microsoft.com/office/drawing/2014/main" id="{25EBAAF1-DB76-4954-105C-5D277537B8F3}"/>
-                </a:ext>
-              </a:extLst>
-            </p:cNvPr>
-            <p:cNvSpPr/>
-            <p:nvPr/>
-          </p:nvSpPr>
-          <p:spPr>
-            <a:xfrm>
-              <a:off x="8859744" y="2084420"/>
-              <a:ext cx="900000" cy="1799999"/>
-            </a:xfrm>
-            <a:prstGeom prst="ellipse">
-              <a:avLst/>
-            </a:prstGeom>
-            <a:noFill/>
-            <a:ln w="76200">
-              <a:solidFill>
-                <a:schemeClr val="bg1"/>
-              </a:solidFill>
-            </a:ln>
-          </p:spPr>
-          <p:style>
-            <a:lnRef idx="2">
-              <a:schemeClr val="accent1">
-                <a:shade val="15000"/>
-              </a:schemeClr>
-            </a:lnRef>
-            <a:fillRef idx="1">
-              <a:schemeClr val="accent1"/>
-            </a:fillRef>
-            <a:effectRef idx="0">
-              <a:schemeClr val="accent1"/>
-            </a:effectRef>
-            <a:fontRef idx="minor">
-              <a:schemeClr val="lt1"/>
-            </a:fontRef>
-          </p:style>
-          <p:txBody>
-            <a:bodyPr rtlCol="0" anchor="ctr"/>
-            <a:lstStyle/>
-            <a:p>
-              <a:pPr algn="ctr"/>
-              <a:endParaRPr lang="ko-KR" altLang="en-US"/>
-            </a:p>
-          </p:txBody>
-        </p:sp>
-        <p:cxnSp>
-          <p:nvCxnSpPr>
-            <p:cNvPr id="7" name="직선 연결선 6">
-              <a:extLst>
-                <a:ext uri="{FF2B5EF4-FFF2-40B4-BE49-F238E27FC236}">
-                  <a16:creationId xmlns:a16="http://schemas.microsoft.com/office/drawing/2014/main" id="{7C802082-961F-D766-E082-71A0C035BBD1}"/>
-                </a:ext>
-              </a:extLst>
-            </p:cNvPr>
-            <p:cNvCxnSpPr>
-              <a:stCxn id="5" idx="0"/>
-              <a:endCxn id="5" idx="4"/>
-            </p:cNvCxnSpPr>
-            <p:nvPr/>
-          </p:nvCxnSpPr>
-          <p:spPr>
-            <a:xfrm>
-              <a:off x="9309744" y="2084420"/>
-              <a:ext cx="0" cy="1799999"/>
-            </a:xfrm>
-            <a:prstGeom prst="line">
-              <a:avLst/>
-            </a:prstGeom>
-            <a:ln w="76200">
-              <a:solidFill>
-                <a:schemeClr val="bg1"/>
-              </a:solidFill>
-            </a:ln>
-          </p:spPr>
-          <p:style>
-            <a:lnRef idx="2">
-              <a:schemeClr val="accent1"/>
-            </a:lnRef>
-            <a:fillRef idx="0">
-              <a:schemeClr val="accent1"/>
-            </a:fillRef>
-            <a:effectRef idx="1">
-              <a:schemeClr val="accent1"/>
-            </a:effectRef>
-            <a:fontRef idx="minor">
-              <a:schemeClr val="tx1"/>
-            </a:fontRef>
-          </p:style>
-        </p:cxnSp>
-        <p:cxnSp>
-          <p:nvCxnSpPr>
-            <p:cNvPr id="8" name="직선 연결선 7">
-              <a:extLst>
-                <a:ext uri="{FF2B5EF4-FFF2-40B4-BE49-F238E27FC236}">
-                  <a16:creationId xmlns:a16="http://schemas.microsoft.com/office/drawing/2014/main" id="{45C5994F-4BA6-161B-DFFE-D647393898BD}"/>
-                </a:ext>
-              </a:extLst>
-            </p:cNvPr>
-            <p:cNvCxnSpPr>
-              <a:cxnSpLocks/>
-              <a:stCxn id="3" idx="1"/>
-              <a:endCxn id="3" idx="7"/>
-            </p:cNvCxnSpPr>
-            <p:nvPr/>
-          </p:nvCxnSpPr>
-          <p:spPr>
-            <a:xfrm>
-              <a:off x="8673348" y="2348024"/>
-              <a:ext cx="1272792" cy="0"/>
-            </a:xfrm>
-            <a:prstGeom prst="line">
-              <a:avLst/>
-            </a:prstGeom>
-            <a:ln w="76200">
-              <a:solidFill>
-                <a:schemeClr val="bg1"/>
-              </a:solidFill>
-            </a:ln>
-          </p:spPr>
-          <p:style>
-            <a:lnRef idx="2">
-              <a:schemeClr val="accent1"/>
-            </a:lnRef>
-            <a:fillRef idx="0">
-              <a:schemeClr val="accent1"/>
-            </a:fillRef>
-            <a:effectRef idx="1">
-              <a:schemeClr val="accent1"/>
-            </a:effectRef>
-            <a:fontRef idx="minor">
-              <a:schemeClr val="tx1"/>
-            </a:fontRef>
-          </p:style>
-        </p:cxnSp>
-        <p:cxnSp>
-          <p:nvCxnSpPr>
-            <p:cNvPr id="11" name="직선 연결선 10">
-              <a:extLst>
-                <a:ext uri="{FF2B5EF4-FFF2-40B4-BE49-F238E27FC236}">
-                  <a16:creationId xmlns:a16="http://schemas.microsoft.com/office/drawing/2014/main" id="{03E6D015-B85A-5C3E-D700-AFC5CB77ABCD}"/>
-                </a:ext>
-              </a:extLst>
-            </p:cNvPr>
-            <p:cNvCxnSpPr>
-              <a:cxnSpLocks/>
-              <a:stCxn id="3" idx="2"/>
-              <a:endCxn id="3" idx="6"/>
-            </p:cNvCxnSpPr>
-            <p:nvPr/>
-          </p:nvCxnSpPr>
-          <p:spPr>
-            <a:xfrm>
-              <a:off x="8409744" y="2984420"/>
-              <a:ext cx="1800000" cy="0"/>
-            </a:xfrm>
-            <a:prstGeom prst="line">
-              <a:avLst/>
-            </a:prstGeom>
-            <a:ln w="76200">
-              <a:solidFill>
-                <a:schemeClr val="bg1"/>
-              </a:solidFill>
-            </a:ln>
-          </p:spPr>
-          <p:style>
-            <a:lnRef idx="2">
-              <a:schemeClr val="accent1"/>
-            </a:lnRef>
-            <a:fillRef idx="0">
-              <a:schemeClr val="accent1"/>
-            </a:fillRef>
-            <a:effectRef idx="1">
-              <a:schemeClr val="accent1"/>
-            </a:effectRef>
-            <a:fontRef idx="minor">
-              <a:schemeClr val="tx1"/>
-            </a:fontRef>
-          </p:style>
-        </p:cxnSp>
-        <p:cxnSp>
-          <p:nvCxnSpPr>
-            <p:cNvPr id="15" name="직선 연결선 14">
-              <a:extLst>
-                <a:ext uri="{FF2B5EF4-FFF2-40B4-BE49-F238E27FC236}">
-                  <a16:creationId xmlns:a16="http://schemas.microsoft.com/office/drawing/2014/main" id="{25DFD62B-7C67-7832-35E7-4BB4F5197C74}"/>
-                </a:ext>
-              </a:extLst>
-            </p:cNvPr>
-            <p:cNvCxnSpPr>
-              <a:cxnSpLocks/>
-              <a:stCxn id="3" idx="3"/>
-              <a:endCxn id="3" idx="5"/>
-            </p:cNvCxnSpPr>
-            <p:nvPr/>
-          </p:nvCxnSpPr>
-          <p:spPr>
-            <a:xfrm>
-              <a:off x="8673348" y="3620816"/>
-              <a:ext cx="1272792" cy="0"/>
-            </a:xfrm>
-            <a:prstGeom prst="line">
-              <a:avLst/>
-            </a:prstGeom>
-            <a:ln w="76200">
-              <a:solidFill>
-                <a:schemeClr val="bg1"/>
-              </a:solidFill>
-            </a:ln>
-          </p:spPr>
-          <p:style>
-            <a:lnRef idx="2">
-              <a:schemeClr val="accent1"/>
-            </a:lnRef>
-            <a:fillRef idx="0">
-              <a:schemeClr val="accent1"/>
-            </a:fillRef>
-            <a:effectRef idx="1">
-              <a:schemeClr val="accent1"/>
-            </a:effectRef>
-            <a:fontRef idx="minor">
-              <a:schemeClr val="tx1"/>
-            </a:fontRef>
-          </p:style>
-        </p:cxnSp>
+              <a:ln w="57150">
+                <a:solidFill>
+                  <a:schemeClr val="bg1"/>
+                </a:solidFill>
+              </a:ln>
+            </p:spPr>
+            <p:style>
+              <a:lnRef idx="2">
+                <a:schemeClr val="accent1">
+                  <a:shade val="15000"/>
+                </a:schemeClr>
+              </a:lnRef>
+              <a:fillRef idx="1">
+                <a:schemeClr val="accent1"/>
+              </a:fillRef>
+              <a:effectRef idx="0">
+                <a:schemeClr val="accent1"/>
+              </a:effectRef>
+              <a:fontRef idx="minor">
+                <a:schemeClr val="lt1"/>
+              </a:fontRef>
+            </p:style>
+            <p:txBody>
+              <a:bodyPr rtlCol="0" anchor="ctr"/>
+              <a:lstStyle/>
+              <a:p>
+                <a:pPr algn="ctr"/>
+                <a:endParaRPr lang="ko-KR" altLang="en-US" dirty="0"/>
+              </a:p>
+            </p:txBody>
+          </p:sp>
+          <p:sp>
+            <p:nvSpPr>
+              <p:cNvPr id="5" name="타원 4">
+                <a:extLst>
+                  <a:ext uri="{FF2B5EF4-FFF2-40B4-BE49-F238E27FC236}">
+                    <a16:creationId xmlns:a16="http://schemas.microsoft.com/office/drawing/2014/main" id="{25EBAAF1-DB76-4954-105C-5D277537B8F3}"/>
+                  </a:ext>
+                </a:extLst>
+              </p:cNvPr>
+              <p:cNvSpPr/>
+              <p:nvPr/>
+            </p:nvSpPr>
+            <p:spPr>
+              <a:xfrm>
+                <a:off x="846272" y="432298"/>
+                <a:ext cx="835714" cy="1671428"/>
+              </a:xfrm>
+              <a:prstGeom prst="ellipse">
+                <a:avLst/>
+              </a:prstGeom>
+              <a:noFill/>
+              <a:ln w="76200">
+                <a:solidFill>
+                  <a:schemeClr val="bg1"/>
+                </a:solidFill>
+              </a:ln>
+            </p:spPr>
+            <p:style>
+              <a:lnRef idx="2">
+                <a:schemeClr val="accent1">
+                  <a:shade val="15000"/>
+                </a:schemeClr>
+              </a:lnRef>
+              <a:fillRef idx="1">
+                <a:schemeClr val="accent1"/>
+              </a:fillRef>
+              <a:effectRef idx="0">
+                <a:schemeClr val="accent1"/>
+              </a:effectRef>
+              <a:fontRef idx="minor">
+                <a:schemeClr val="lt1"/>
+              </a:fontRef>
+            </p:style>
+            <p:txBody>
+              <a:bodyPr rtlCol="0" anchor="ctr"/>
+              <a:lstStyle/>
+              <a:p>
+                <a:pPr algn="ctr"/>
+                <a:endParaRPr lang="ko-KR" altLang="en-US"/>
+              </a:p>
+            </p:txBody>
+          </p:sp>
+          <p:cxnSp>
+            <p:nvCxnSpPr>
+              <p:cNvPr id="7" name="직선 연결선 6">
+                <a:extLst>
+                  <a:ext uri="{FF2B5EF4-FFF2-40B4-BE49-F238E27FC236}">
+                    <a16:creationId xmlns:a16="http://schemas.microsoft.com/office/drawing/2014/main" id="{7C802082-961F-D766-E082-71A0C035BBD1}"/>
+                  </a:ext>
+                </a:extLst>
+              </p:cNvPr>
+              <p:cNvCxnSpPr>
+                <a:stCxn id="5" idx="0"/>
+                <a:endCxn id="5" idx="4"/>
+              </p:cNvCxnSpPr>
+              <p:nvPr/>
+            </p:nvCxnSpPr>
+            <p:spPr>
+              <a:xfrm>
+                <a:off x="1264129" y="432298"/>
+                <a:ext cx="0" cy="1671428"/>
+              </a:xfrm>
+              <a:prstGeom prst="line">
+                <a:avLst/>
+              </a:prstGeom>
+              <a:ln w="76200">
+                <a:solidFill>
+                  <a:schemeClr val="bg1"/>
+                </a:solidFill>
+              </a:ln>
+            </p:spPr>
+            <p:style>
+              <a:lnRef idx="2">
+                <a:schemeClr val="accent1"/>
+              </a:lnRef>
+              <a:fillRef idx="0">
+                <a:schemeClr val="accent1"/>
+              </a:fillRef>
+              <a:effectRef idx="1">
+                <a:schemeClr val="accent1"/>
+              </a:effectRef>
+              <a:fontRef idx="minor">
+                <a:schemeClr val="tx1"/>
+              </a:fontRef>
+            </p:style>
+          </p:cxnSp>
+          <p:cxnSp>
+            <p:nvCxnSpPr>
+              <p:cNvPr id="8" name="직선 연결선 7">
+                <a:extLst>
+                  <a:ext uri="{FF2B5EF4-FFF2-40B4-BE49-F238E27FC236}">
+                    <a16:creationId xmlns:a16="http://schemas.microsoft.com/office/drawing/2014/main" id="{45C5994F-4BA6-161B-DFFE-D647393898BD}"/>
+                  </a:ext>
+                </a:extLst>
+              </p:cNvPr>
+              <p:cNvCxnSpPr>
+                <a:cxnSpLocks/>
+                <a:stCxn id="3" idx="1"/>
+                <a:endCxn id="3" idx="7"/>
+              </p:cNvCxnSpPr>
+              <p:nvPr/>
+            </p:nvCxnSpPr>
+            <p:spPr>
+              <a:xfrm>
+                <a:off x="673190" y="677073"/>
+                <a:ext cx="1181878" cy="0"/>
+              </a:xfrm>
+              <a:prstGeom prst="line">
+                <a:avLst/>
+              </a:prstGeom>
+              <a:ln w="76200">
+                <a:solidFill>
+                  <a:schemeClr val="bg1"/>
+                </a:solidFill>
+              </a:ln>
+            </p:spPr>
+            <p:style>
+              <a:lnRef idx="2">
+                <a:schemeClr val="accent1"/>
+              </a:lnRef>
+              <a:fillRef idx="0">
+                <a:schemeClr val="accent1"/>
+              </a:fillRef>
+              <a:effectRef idx="1">
+                <a:schemeClr val="accent1"/>
+              </a:effectRef>
+              <a:fontRef idx="minor">
+                <a:schemeClr val="tx1"/>
+              </a:fontRef>
+            </p:style>
+          </p:cxnSp>
+          <p:cxnSp>
+            <p:nvCxnSpPr>
+              <p:cNvPr id="11" name="직선 연결선 10">
+                <a:extLst>
+                  <a:ext uri="{FF2B5EF4-FFF2-40B4-BE49-F238E27FC236}">
+                    <a16:creationId xmlns:a16="http://schemas.microsoft.com/office/drawing/2014/main" id="{03E6D015-B85A-5C3E-D700-AFC5CB77ABCD}"/>
+                  </a:ext>
+                </a:extLst>
+              </p:cNvPr>
+              <p:cNvCxnSpPr>
+                <a:cxnSpLocks/>
+                <a:stCxn id="3" idx="2"/>
+                <a:endCxn id="3" idx="6"/>
+              </p:cNvCxnSpPr>
+              <p:nvPr/>
+            </p:nvCxnSpPr>
+            <p:spPr>
+              <a:xfrm>
+                <a:off x="428415" y="1268012"/>
+                <a:ext cx="1671429" cy="0"/>
+              </a:xfrm>
+              <a:prstGeom prst="line">
+                <a:avLst/>
+              </a:prstGeom>
+              <a:ln w="76200">
+                <a:solidFill>
+                  <a:schemeClr val="bg1"/>
+                </a:solidFill>
+              </a:ln>
+            </p:spPr>
+            <p:style>
+              <a:lnRef idx="2">
+                <a:schemeClr val="accent1"/>
+              </a:lnRef>
+              <a:fillRef idx="0">
+                <a:schemeClr val="accent1"/>
+              </a:fillRef>
+              <a:effectRef idx="1">
+                <a:schemeClr val="accent1"/>
+              </a:effectRef>
+              <a:fontRef idx="minor">
+                <a:schemeClr val="tx1"/>
+              </a:fontRef>
+            </p:style>
+          </p:cxnSp>
+          <p:cxnSp>
+            <p:nvCxnSpPr>
+              <p:cNvPr id="15" name="직선 연결선 14">
+                <a:extLst>
+                  <a:ext uri="{FF2B5EF4-FFF2-40B4-BE49-F238E27FC236}">
+                    <a16:creationId xmlns:a16="http://schemas.microsoft.com/office/drawing/2014/main" id="{25DFD62B-7C67-7832-35E7-4BB4F5197C74}"/>
+                  </a:ext>
+                </a:extLst>
+              </p:cNvPr>
+              <p:cNvCxnSpPr>
+                <a:cxnSpLocks/>
+                <a:stCxn id="3" idx="3"/>
+                <a:endCxn id="3" idx="5"/>
+              </p:cNvCxnSpPr>
+              <p:nvPr/>
+            </p:nvCxnSpPr>
+            <p:spPr>
+              <a:xfrm>
+                <a:off x="673190" y="1858952"/>
+                <a:ext cx="1181878" cy="0"/>
+              </a:xfrm>
+              <a:prstGeom prst="line">
+                <a:avLst/>
+              </a:prstGeom>
+              <a:ln w="76200">
+                <a:solidFill>
+                  <a:schemeClr val="bg1"/>
+                </a:solidFill>
+              </a:ln>
+            </p:spPr>
+            <p:style>
+              <a:lnRef idx="2">
+                <a:schemeClr val="accent1"/>
+              </a:lnRef>
+              <a:fillRef idx="0">
+                <a:schemeClr val="accent1"/>
+              </a:fillRef>
+              <a:effectRef idx="1">
+                <a:schemeClr val="accent1"/>
+              </a:effectRef>
+              <a:fontRef idx="minor">
+                <a:schemeClr val="tx1"/>
+              </a:fontRef>
+            </p:style>
+          </p:cxnSp>
+        </p:grpSp>
         <p:sp>
           <p:nvSpPr>
             <p:cNvPr id="18" name="TextBox 17">
@@ -4163,8 +5309,8 @@
           </p:nvSpPr>
           <p:spPr>
             <a:xfrm>
-              <a:off x="8409754" y="1698619"/>
-              <a:ext cx="1799990" cy="2308323"/>
+              <a:off x="852970" y="41590"/>
+              <a:ext cx="662623" cy="2308324"/>
             </a:xfrm>
             <a:prstGeom prst="rect">
               <a:avLst/>
@@ -4222,6 +5368,949 @@
         <p:cNvPr id="1" name="">
           <a:extLst>
             <a:ext uri="{FF2B5EF4-FFF2-40B4-BE49-F238E27FC236}">
+              <a16:creationId xmlns:a16="http://schemas.microsoft.com/office/drawing/2014/main" id="{1E71C468-F76D-D70D-D91D-0FA8C75D9E0E}"/>
+            </a:ext>
+          </a:extLst>
+        </p:cNvPr>
+        <p:cNvGrpSpPr/>
+        <p:nvPr/>
+      </p:nvGrpSpPr>
+      <p:grpSpPr>
+        <a:xfrm>
+          <a:off x="0" y="0"/>
+          <a:ext cx="0" cy="0"/>
+          <a:chOff x="0" y="0"/>
+          <a:chExt cx="0" cy="0"/>
+        </a:xfrm>
+      </p:grpSpPr>
+      <p:pic>
+        <p:nvPicPr>
+          <p:cNvPr id="10" name="그림 9" descr="상징, 로고, 폰트, 그래픽이(가) 표시된 사진&#10;&#10;AI 생성 콘텐츠는 정확하지 않을 수 있습니다.">
+            <a:extLst>
+              <a:ext uri="{FF2B5EF4-FFF2-40B4-BE49-F238E27FC236}">
+                <a16:creationId xmlns:a16="http://schemas.microsoft.com/office/drawing/2014/main" id="{C53FEDA9-7910-E4E4-12FD-C96617BF3795}"/>
+              </a:ext>
+            </a:extLst>
+          </p:cNvPr>
+          <p:cNvPicPr>
+            <a:picLocks noChangeAspect="1"/>
+          </p:cNvPicPr>
+          <p:nvPr/>
+        </p:nvPicPr>
+        <p:blipFill>
+          <a:blip r:embed="rId3"/>
+          <a:stretch>
+            <a:fillRect/>
+          </a:stretch>
+        </p:blipFill>
+        <p:spPr>
+          <a:xfrm>
+            <a:off x="1357" y="0"/>
+            <a:ext cx="2516648" cy="2519363"/>
+          </a:xfrm>
+          <a:prstGeom prst="rect">
+            <a:avLst/>
+          </a:prstGeom>
+        </p:spPr>
+      </p:pic>
+    </p:spTree>
+    <p:extLst>
+      <p:ext uri="{BB962C8B-B14F-4D97-AF65-F5344CB8AC3E}">
+        <p14:creationId xmlns:p14="http://schemas.microsoft.com/office/powerpoint/2010/main" val="611507052"/>
+      </p:ext>
+    </p:extLst>
+  </p:cSld>
+  <p:clrMapOvr>
+    <a:masterClrMapping/>
+  </p:clrMapOvr>
+</p:sld>
+</file>
+
+<file path=ppt/slides/slide5.xml><?xml version="1.0" encoding="utf-8"?>
+<p:sld xmlns:a="http://schemas.openxmlformats.org/drawingml/2006/main" xmlns:r="http://schemas.openxmlformats.org/officeDocument/2006/relationships" xmlns:p="http://schemas.openxmlformats.org/presentationml/2006/main">
+  <p:cSld>
+    <p:spTree>
+      <p:nvGrpSpPr>
+        <p:cNvPr id="1" name="">
+          <a:extLst>
+            <a:ext uri="{FF2B5EF4-FFF2-40B4-BE49-F238E27FC236}">
+              <a16:creationId xmlns:a16="http://schemas.microsoft.com/office/drawing/2014/main" id="{FCB6ADE7-92F9-AEA1-1669-9077942423D4}"/>
+            </a:ext>
+          </a:extLst>
+        </p:cNvPr>
+        <p:cNvGrpSpPr/>
+        <p:nvPr/>
+      </p:nvGrpSpPr>
+      <p:grpSpPr>
+        <a:xfrm>
+          <a:off x="0" y="0"/>
+          <a:ext cx="0" cy="0"/>
+          <a:chOff x="0" y="0"/>
+          <a:chExt cx="0" cy="0"/>
+        </a:xfrm>
+      </p:grpSpPr>
+      <p:grpSp>
+        <p:nvGrpSpPr>
+          <p:cNvPr id="29" name="그룹 28">
+            <a:extLst>
+              <a:ext uri="{FF2B5EF4-FFF2-40B4-BE49-F238E27FC236}">
+                <a16:creationId xmlns:a16="http://schemas.microsoft.com/office/drawing/2014/main" id="{2259889E-7E2F-69D4-2157-2420BE342C57}"/>
+              </a:ext>
+            </a:extLst>
+          </p:cNvPr>
+          <p:cNvGrpSpPr/>
+          <p:nvPr/>
+        </p:nvGrpSpPr>
+        <p:grpSpPr>
+          <a:xfrm>
+            <a:off x="-637" y="-1"/>
+            <a:ext cx="2527200" cy="2527200"/>
+            <a:chOff x="-637" y="-1"/>
+            <a:chExt cx="2527200" cy="2527200"/>
+          </a:xfrm>
+        </p:grpSpPr>
+        <p:sp>
+          <p:nvSpPr>
+            <p:cNvPr id="4" name="사각형: 둥근 모서리 3">
+              <a:extLst>
+                <a:ext uri="{FF2B5EF4-FFF2-40B4-BE49-F238E27FC236}">
+                  <a16:creationId xmlns:a16="http://schemas.microsoft.com/office/drawing/2014/main" id="{0DE82538-5957-C593-89EC-F177503AF830}"/>
+                </a:ext>
+              </a:extLst>
+            </p:cNvPr>
+            <p:cNvSpPr/>
+            <p:nvPr/>
+          </p:nvSpPr>
+          <p:spPr>
+            <a:xfrm>
+              <a:off x="39398" y="40056"/>
+              <a:ext cx="2448000" cy="2448000"/>
+            </a:xfrm>
+            <a:prstGeom prst="roundRect">
+              <a:avLst/>
+            </a:prstGeom>
+            <a:solidFill>
+              <a:schemeClr val="bg1"/>
+            </a:solidFill>
+            <a:ln w="127000">
+              <a:solidFill>
+                <a:schemeClr val="tx1"/>
+              </a:solidFill>
+            </a:ln>
+            <a:effectLst>
+              <a:outerShdw blurRad="44450" dist="27940" dir="5400000" algn="ctr">
+                <a:srgbClr val="000000">
+                  <a:alpha val="32000"/>
+                </a:srgbClr>
+              </a:outerShdw>
+            </a:effectLst>
+          </p:spPr>
+          <p:style>
+            <a:lnRef idx="2">
+              <a:schemeClr val="accent1">
+                <a:shade val="15000"/>
+              </a:schemeClr>
+            </a:lnRef>
+            <a:fillRef idx="1">
+              <a:schemeClr val="accent1"/>
+            </a:fillRef>
+            <a:effectRef idx="0">
+              <a:schemeClr val="accent1"/>
+            </a:effectRef>
+            <a:fontRef idx="minor">
+              <a:schemeClr val="lt1"/>
+            </a:fontRef>
+          </p:style>
+          <p:txBody>
+            <a:bodyPr vert="horz" rtlCol="0" anchor="ctr"/>
+            <a:lstStyle/>
+            <a:p>
+              <a:pPr algn="ctr"/>
+              <a:endParaRPr lang="ko-KR" altLang="en-US" sz="4800" b="1" dirty="0">
+                <a:ln>
+                  <a:solidFill>
+                    <a:schemeClr val="tx1"/>
+                  </a:solidFill>
+                </a:ln>
+                <a:solidFill>
+                  <a:schemeClr val="tx1"/>
+                </a:solidFill>
+                <a:latin typeface="BIZ UDGothic" panose="020B0400000000000000" pitchFamily="33" charset="-128"/>
+                <a:ea typeface="HY견명조" panose="02030600000101010101" pitchFamily="18" charset="-127"/>
+              </a:endParaRPr>
+            </a:p>
+          </p:txBody>
+        </p:sp>
+        <p:grpSp>
+          <p:nvGrpSpPr>
+            <p:cNvPr id="6" name="그룹 5">
+              <a:extLst>
+                <a:ext uri="{FF2B5EF4-FFF2-40B4-BE49-F238E27FC236}">
+                  <a16:creationId xmlns:a16="http://schemas.microsoft.com/office/drawing/2014/main" id="{E0EC6A5C-67CC-918B-CC2F-D1679F90B61C}"/>
+                </a:ext>
+              </a:extLst>
+            </p:cNvPr>
+            <p:cNvGrpSpPr/>
+            <p:nvPr/>
+          </p:nvGrpSpPr>
+          <p:grpSpPr>
+            <a:xfrm>
+              <a:off x="-637" y="-1"/>
+              <a:ext cx="2527200" cy="2527200"/>
+              <a:chOff x="-637" y="-1"/>
+              <a:chExt cx="2527200" cy="2527200"/>
+            </a:xfrm>
+          </p:grpSpPr>
+          <p:sp>
+            <p:nvSpPr>
+              <p:cNvPr id="2" name="직사각형 1">
+                <a:extLst>
+                  <a:ext uri="{FF2B5EF4-FFF2-40B4-BE49-F238E27FC236}">
+                    <a16:creationId xmlns:a16="http://schemas.microsoft.com/office/drawing/2014/main" id="{562E2CA9-9777-443D-E663-549DBD55BDBB}"/>
+                  </a:ext>
+                </a:extLst>
+              </p:cNvPr>
+              <p:cNvSpPr/>
+              <p:nvPr/>
+            </p:nvSpPr>
+            <p:spPr>
+              <a:xfrm>
+                <a:off x="719681" y="-1"/>
+                <a:ext cx="1080000" cy="2527200"/>
+              </a:xfrm>
+              <a:prstGeom prst="rect">
+                <a:avLst/>
+              </a:prstGeom>
+              <a:solidFill>
+                <a:schemeClr val="bg1"/>
+              </a:solidFill>
+              <a:ln>
+                <a:noFill/>
+              </a:ln>
+            </p:spPr>
+            <p:style>
+              <a:lnRef idx="2">
+                <a:schemeClr val="accent1">
+                  <a:shade val="15000"/>
+                </a:schemeClr>
+              </a:lnRef>
+              <a:fillRef idx="1">
+                <a:schemeClr val="accent1"/>
+              </a:fillRef>
+              <a:effectRef idx="0">
+                <a:schemeClr val="accent1"/>
+              </a:effectRef>
+              <a:fontRef idx="minor">
+                <a:schemeClr val="lt1"/>
+              </a:fontRef>
+            </p:style>
+            <p:txBody>
+              <a:bodyPr rtlCol="0" anchor="ctr"/>
+              <a:lstStyle/>
+              <a:p>
+                <a:pPr algn="ctr"/>
+                <a:endParaRPr lang="ko-KR" altLang="en-US"/>
+              </a:p>
+            </p:txBody>
+          </p:sp>
+          <p:sp>
+            <p:nvSpPr>
+              <p:cNvPr id="3" name="직사각형 2">
+                <a:extLst>
+                  <a:ext uri="{FF2B5EF4-FFF2-40B4-BE49-F238E27FC236}">
+                    <a16:creationId xmlns:a16="http://schemas.microsoft.com/office/drawing/2014/main" id="{22DD73BF-C174-C829-20C0-0CC82E7AA179}"/>
+                  </a:ext>
+                </a:extLst>
+              </p:cNvPr>
+              <p:cNvSpPr/>
+              <p:nvPr/>
+            </p:nvSpPr>
+            <p:spPr>
+              <a:xfrm>
+                <a:off x="-637" y="719681"/>
+                <a:ext cx="2527200" cy="1080000"/>
+              </a:xfrm>
+              <a:prstGeom prst="rect">
+                <a:avLst/>
+              </a:prstGeom>
+              <a:solidFill>
+                <a:schemeClr val="bg1"/>
+              </a:solidFill>
+              <a:ln>
+                <a:noFill/>
+              </a:ln>
+            </p:spPr>
+            <p:style>
+              <a:lnRef idx="2">
+                <a:schemeClr val="accent1">
+                  <a:shade val="15000"/>
+                </a:schemeClr>
+              </a:lnRef>
+              <a:fillRef idx="1">
+                <a:schemeClr val="accent1"/>
+              </a:fillRef>
+              <a:effectRef idx="0">
+                <a:schemeClr val="accent1"/>
+              </a:effectRef>
+              <a:fontRef idx="minor">
+                <a:schemeClr val="lt1"/>
+              </a:fontRef>
+            </p:style>
+            <p:txBody>
+              <a:bodyPr rtlCol="0" anchor="ctr"/>
+              <a:lstStyle/>
+              <a:p>
+                <a:pPr algn="ctr"/>
+                <a:endParaRPr lang="ko-KR" altLang="en-US"/>
+              </a:p>
+            </p:txBody>
+          </p:sp>
+        </p:grpSp>
+        <p:grpSp>
+          <p:nvGrpSpPr>
+            <p:cNvPr id="20" name="그룹 19">
+              <a:extLst>
+                <a:ext uri="{FF2B5EF4-FFF2-40B4-BE49-F238E27FC236}">
+                  <a16:creationId xmlns:a16="http://schemas.microsoft.com/office/drawing/2014/main" id="{E216D1F8-4C5D-7583-0AB6-4BA314536AC6}"/>
+                </a:ext>
+              </a:extLst>
+            </p:cNvPr>
+            <p:cNvGrpSpPr/>
+            <p:nvPr/>
+          </p:nvGrpSpPr>
+          <p:grpSpPr>
+            <a:xfrm rot="20717809">
+              <a:off x="268208" y="413212"/>
+              <a:ext cx="1987550" cy="604129"/>
+              <a:chOff x="265907" y="921544"/>
+              <a:chExt cx="1987550" cy="676275"/>
+            </a:xfrm>
+          </p:grpSpPr>
+          <p:sp>
+            <p:nvSpPr>
+              <p:cNvPr id="7" name="사각형: 둥근 모서리 6">
+                <a:extLst>
+                  <a:ext uri="{FF2B5EF4-FFF2-40B4-BE49-F238E27FC236}">
+                    <a16:creationId xmlns:a16="http://schemas.microsoft.com/office/drawing/2014/main" id="{681495B4-0382-F3EE-D9A7-1A43DC85C5E7}"/>
+                  </a:ext>
+                </a:extLst>
+              </p:cNvPr>
+              <p:cNvSpPr/>
+              <p:nvPr/>
+            </p:nvSpPr>
+            <p:spPr>
+              <a:xfrm>
+                <a:off x="265907" y="921544"/>
+                <a:ext cx="1987550" cy="676275"/>
+              </a:xfrm>
+              <a:prstGeom prst="roundRect">
+                <a:avLst/>
+              </a:prstGeom>
+              <a:noFill/>
+              <a:ln w="76200">
+                <a:solidFill>
+                  <a:schemeClr val="tx1"/>
+                </a:solidFill>
+              </a:ln>
+            </p:spPr>
+            <p:style>
+              <a:lnRef idx="2">
+                <a:schemeClr val="accent1">
+                  <a:shade val="15000"/>
+                </a:schemeClr>
+              </a:lnRef>
+              <a:fillRef idx="1">
+                <a:schemeClr val="accent1"/>
+              </a:fillRef>
+              <a:effectRef idx="0">
+                <a:schemeClr val="accent1"/>
+              </a:effectRef>
+              <a:fontRef idx="minor">
+                <a:schemeClr val="lt1"/>
+              </a:fontRef>
+            </p:style>
+            <p:txBody>
+              <a:bodyPr rtlCol="0" anchor="ctr"/>
+              <a:lstStyle/>
+              <a:p>
+                <a:pPr algn="ctr"/>
+                <a:endParaRPr lang="ko-KR" altLang="en-US"/>
+              </a:p>
+            </p:txBody>
+          </p:sp>
+          <p:cxnSp>
+            <p:nvCxnSpPr>
+              <p:cNvPr id="11" name="직선 연결선 10">
+                <a:extLst>
+                  <a:ext uri="{FF2B5EF4-FFF2-40B4-BE49-F238E27FC236}">
+                    <a16:creationId xmlns:a16="http://schemas.microsoft.com/office/drawing/2014/main" id="{BE828A50-FD87-A223-629C-3EC5311A301A}"/>
+                  </a:ext>
+                </a:extLst>
+              </p:cNvPr>
+              <p:cNvCxnSpPr>
+                <a:cxnSpLocks/>
+              </p:cNvCxnSpPr>
+              <p:nvPr/>
+            </p:nvCxnSpPr>
+            <p:spPr>
+              <a:xfrm>
+                <a:off x="533400" y="921544"/>
+                <a:ext cx="0" cy="360000"/>
+              </a:xfrm>
+              <a:prstGeom prst="line">
+                <a:avLst/>
+              </a:prstGeom>
+              <a:ln w="76200">
+                <a:solidFill>
+                  <a:schemeClr val="tx1"/>
+                </a:solidFill>
+              </a:ln>
+            </p:spPr>
+            <p:style>
+              <a:lnRef idx="2">
+                <a:schemeClr val="accent1"/>
+              </a:lnRef>
+              <a:fillRef idx="0">
+                <a:schemeClr val="accent1"/>
+              </a:fillRef>
+              <a:effectRef idx="1">
+                <a:schemeClr val="accent1"/>
+              </a:effectRef>
+              <a:fontRef idx="minor">
+                <a:schemeClr val="tx1"/>
+              </a:fontRef>
+            </p:style>
+          </p:cxnSp>
+          <p:cxnSp>
+            <p:nvCxnSpPr>
+              <p:cNvPr id="12" name="직선 연결선 11">
+                <a:extLst>
+                  <a:ext uri="{FF2B5EF4-FFF2-40B4-BE49-F238E27FC236}">
+                    <a16:creationId xmlns:a16="http://schemas.microsoft.com/office/drawing/2014/main" id="{C4BECD36-3CE2-A8F9-2AB0-42F614B3BC7E}"/>
+                  </a:ext>
+                </a:extLst>
+              </p:cNvPr>
+              <p:cNvCxnSpPr>
+                <a:cxnSpLocks/>
+              </p:cNvCxnSpPr>
+              <p:nvPr/>
+            </p:nvCxnSpPr>
+            <p:spPr>
+              <a:xfrm>
+                <a:off x="889000" y="921544"/>
+                <a:ext cx="0" cy="252000"/>
+              </a:xfrm>
+              <a:prstGeom prst="line">
+                <a:avLst/>
+              </a:prstGeom>
+              <a:ln w="76200">
+                <a:solidFill>
+                  <a:schemeClr val="tx1"/>
+                </a:solidFill>
+              </a:ln>
+            </p:spPr>
+            <p:style>
+              <a:lnRef idx="2">
+                <a:schemeClr val="accent1"/>
+              </a:lnRef>
+              <a:fillRef idx="0">
+                <a:schemeClr val="accent1"/>
+              </a:fillRef>
+              <a:effectRef idx="1">
+                <a:schemeClr val="accent1"/>
+              </a:effectRef>
+              <a:fontRef idx="minor">
+                <a:schemeClr val="tx1"/>
+              </a:fontRef>
+            </p:style>
+          </p:cxnSp>
+          <p:cxnSp>
+            <p:nvCxnSpPr>
+              <p:cNvPr id="14" name="직선 연결선 13">
+                <a:extLst>
+                  <a:ext uri="{FF2B5EF4-FFF2-40B4-BE49-F238E27FC236}">
+                    <a16:creationId xmlns:a16="http://schemas.microsoft.com/office/drawing/2014/main" id="{F8C20F21-C903-11D5-ADC6-BAEF93D5A61A}"/>
+                  </a:ext>
+                </a:extLst>
+              </p:cNvPr>
+              <p:cNvCxnSpPr>
+                <a:cxnSpLocks/>
+              </p:cNvCxnSpPr>
+              <p:nvPr/>
+            </p:nvCxnSpPr>
+            <p:spPr>
+              <a:xfrm>
+                <a:off x="1625600" y="921544"/>
+                <a:ext cx="0" cy="252000"/>
+              </a:xfrm>
+              <a:prstGeom prst="line">
+                <a:avLst/>
+              </a:prstGeom>
+              <a:ln w="76200">
+                <a:solidFill>
+                  <a:schemeClr val="tx1"/>
+                </a:solidFill>
+              </a:ln>
+            </p:spPr>
+            <p:style>
+              <a:lnRef idx="2">
+                <a:schemeClr val="accent1"/>
+              </a:lnRef>
+              <a:fillRef idx="0">
+                <a:schemeClr val="accent1"/>
+              </a:fillRef>
+              <a:effectRef idx="1">
+                <a:schemeClr val="accent1"/>
+              </a:effectRef>
+              <a:fontRef idx="minor">
+                <a:schemeClr val="tx1"/>
+              </a:fontRef>
+            </p:style>
+          </p:cxnSp>
+          <p:cxnSp>
+            <p:nvCxnSpPr>
+              <p:cNvPr id="16" name="직선 연결선 15">
+                <a:extLst>
+                  <a:ext uri="{FF2B5EF4-FFF2-40B4-BE49-F238E27FC236}">
+                    <a16:creationId xmlns:a16="http://schemas.microsoft.com/office/drawing/2014/main" id="{213C0AD1-EA42-5FB1-A326-B357E49E3489}"/>
+                  </a:ext>
+                </a:extLst>
+              </p:cNvPr>
+              <p:cNvCxnSpPr/>
+              <p:nvPr/>
+            </p:nvCxnSpPr>
+            <p:spPr>
+              <a:xfrm>
+                <a:off x="1259681" y="921544"/>
+                <a:ext cx="0" cy="360000"/>
+              </a:xfrm>
+              <a:prstGeom prst="line">
+                <a:avLst/>
+              </a:prstGeom>
+              <a:ln w="76200">
+                <a:solidFill>
+                  <a:schemeClr val="tx1"/>
+                </a:solidFill>
+              </a:ln>
+            </p:spPr>
+            <p:style>
+              <a:lnRef idx="2">
+                <a:schemeClr val="accent1"/>
+              </a:lnRef>
+              <a:fillRef idx="0">
+                <a:schemeClr val="accent1"/>
+              </a:fillRef>
+              <a:effectRef idx="1">
+                <a:schemeClr val="accent1"/>
+              </a:effectRef>
+              <a:fontRef idx="minor">
+                <a:schemeClr val="tx1"/>
+              </a:fontRef>
+            </p:style>
+          </p:cxnSp>
+          <p:cxnSp>
+            <p:nvCxnSpPr>
+              <p:cNvPr id="17" name="직선 연결선 16">
+                <a:extLst>
+                  <a:ext uri="{FF2B5EF4-FFF2-40B4-BE49-F238E27FC236}">
+                    <a16:creationId xmlns:a16="http://schemas.microsoft.com/office/drawing/2014/main" id="{B7A9323E-ED0C-189D-FC67-5392DB7D50AA}"/>
+                  </a:ext>
+                </a:extLst>
+              </p:cNvPr>
+              <p:cNvCxnSpPr/>
+              <p:nvPr/>
+            </p:nvCxnSpPr>
+            <p:spPr>
+              <a:xfrm>
+                <a:off x="1952625" y="921544"/>
+                <a:ext cx="0" cy="360000"/>
+              </a:xfrm>
+              <a:prstGeom prst="line">
+                <a:avLst/>
+              </a:prstGeom>
+              <a:ln w="76200">
+                <a:solidFill>
+                  <a:schemeClr val="tx1"/>
+                </a:solidFill>
+              </a:ln>
+            </p:spPr>
+            <p:style>
+              <a:lnRef idx="2">
+                <a:schemeClr val="accent1"/>
+              </a:lnRef>
+              <a:fillRef idx="0">
+                <a:schemeClr val="accent1"/>
+              </a:fillRef>
+              <a:effectRef idx="1">
+                <a:schemeClr val="accent1"/>
+              </a:effectRef>
+              <a:fontRef idx="minor">
+                <a:schemeClr val="tx1"/>
+              </a:fontRef>
+            </p:style>
+          </p:cxnSp>
+        </p:grpSp>
+        <p:sp>
+          <p:nvSpPr>
+            <p:cNvPr id="22" name="타원 21">
+              <a:extLst>
+                <a:ext uri="{FF2B5EF4-FFF2-40B4-BE49-F238E27FC236}">
+                  <a16:creationId xmlns:a16="http://schemas.microsoft.com/office/drawing/2014/main" id="{DF3A26D8-B01A-496E-5C32-CAF97166A2C2}"/>
+                </a:ext>
+              </a:extLst>
+            </p:cNvPr>
+            <p:cNvSpPr/>
+            <p:nvPr/>
+          </p:nvSpPr>
+          <p:spPr>
+            <a:xfrm>
+              <a:off x="1527415" y="1243034"/>
+              <a:ext cx="360000" cy="360000"/>
+            </a:xfrm>
+            <a:prstGeom prst="ellipse">
+              <a:avLst/>
+            </a:prstGeom>
+            <a:solidFill>
+              <a:schemeClr val="bg1"/>
+            </a:solidFill>
+            <a:ln w="76200">
+              <a:solidFill>
+                <a:schemeClr val="tx1"/>
+              </a:solidFill>
+            </a:ln>
+          </p:spPr>
+          <p:style>
+            <a:lnRef idx="2">
+              <a:schemeClr val="accent1">
+                <a:shade val="15000"/>
+              </a:schemeClr>
+            </a:lnRef>
+            <a:fillRef idx="1">
+              <a:schemeClr val="accent1"/>
+            </a:fillRef>
+            <a:effectRef idx="0">
+              <a:schemeClr val="accent1"/>
+            </a:effectRef>
+            <a:fontRef idx="minor">
+              <a:schemeClr val="lt1"/>
+            </a:fontRef>
+          </p:style>
+          <p:txBody>
+            <a:bodyPr rtlCol="0" anchor="ctr"/>
+            <a:lstStyle/>
+            <a:p>
+              <a:pPr algn="ctr"/>
+              <a:endParaRPr lang="ko-KR" altLang="en-US"/>
+            </a:p>
+          </p:txBody>
+        </p:sp>
+        <p:sp>
+          <p:nvSpPr>
+            <p:cNvPr id="21" name="사다리꼴 20">
+              <a:extLst>
+                <a:ext uri="{FF2B5EF4-FFF2-40B4-BE49-F238E27FC236}">
+                  <a16:creationId xmlns:a16="http://schemas.microsoft.com/office/drawing/2014/main" id="{015E5529-0DD2-F758-0F75-317297BFF6BF}"/>
+                </a:ext>
+              </a:extLst>
+            </p:cNvPr>
+            <p:cNvSpPr/>
+            <p:nvPr/>
+          </p:nvSpPr>
+          <p:spPr>
+            <a:xfrm>
+              <a:off x="1114947" y="1462177"/>
+              <a:ext cx="1184937" cy="711698"/>
+            </a:xfrm>
+            <a:prstGeom prst="trapezoid">
+              <a:avLst/>
+            </a:prstGeom>
+            <a:solidFill>
+              <a:schemeClr val="bg1"/>
+            </a:solidFill>
+            <a:ln w="76200">
+              <a:solidFill>
+                <a:schemeClr val="tx1"/>
+              </a:solidFill>
+            </a:ln>
+          </p:spPr>
+          <p:style>
+            <a:lnRef idx="2">
+              <a:schemeClr val="accent1">
+                <a:shade val="15000"/>
+              </a:schemeClr>
+            </a:lnRef>
+            <a:fillRef idx="1">
+              <a:schemeClr val="accent1"/>
+            </a:fillRef>
+            <a:effectRef idx="0">
+              <a:schemeClr val="accent1"/>
+            </a:effectRef>
+            <a:fontRef idx="minor">
+              <a:schemeClr val="lt1"/>
+            </a:fontRef>
+          </p:style>
+          <p:txBody>
+            <a:bodyPr rtlCol="0" anchor="ctr"/>
+            <a:lstStyle/>
+            <a:p>
+              <a:pPr algn="ctr"/>
+              <a:endParaRPr lang="ko-KR" altLang="en-US"/>
+            </a:p>
+          </p:txBody>
+        </p:sp>
+        <p:sp>
+          <p:nvSpPr>
+            <p:cNvPr id="23" name="사다리꼴 22">
+              <a:extLst>
+                <a:ext uri="{FF2B5EF4-FFF2-40B4-BE49-F238E27FC236}">
+                  <a16:creationId xmlns:a16="http://schemas.microsoft.com/office/drawing/2014/main" id="{ED9E250F-010D-4FBF-145B-4968DF7C71E8}"/>
+                </a:ext>
+              </a:extLst>
+            </p:cNvPr>
+            <p:cNvSpPr/>
+            <p:nvPr/>
+          </p:nvSpPr>
+          <p:spPr>
+            <a:xfrm rot="10800000">
+              <a:off x="297647" y="1462177"/>
+              <a:ext cx="634193" cy="711698"/>
+            </a:xfrm>
+            <a:prstGeom prst="trapezoid">
+              <a:avLst/>
+            </a:prstGeom>
+            <a:solidFill>
+              <a:schemeClr val="bg1"/>
+            </a:solidFill>
+            <a:ln w="76200">
+              <a:solidFill>
+                <a:schemeClr val="tx1"/>
+              </a:solidFill>
+            </a:ln>
+          </p:spPr>
+          <p:style>
+            <a:lnRef idx="2">
+              <a:schemeClr val="accent1">
+                <a:shade val="15000"/>
+              </a:schemeClr>
+            </a:lnRef>
+            <a:fillRef idx="1">
+              <a:schemeClr val="accent1"/>
+            </a:fillRef>
+            <a:effectRef idx="0">
+              <a:schemeClr val="accent1"/>
+            </a:effectRef>
+            <a:fontRef idx="minor">
+              <a:schemeClr val="lt1"/>
+            </a:fontRef>
+          </p:style>
+          <p:txBody>
+            <a:bodyPr rtlCol="0" anchor="ctr"/>
+            <a:lstStyle/>
+            <a:p>
+              <a:pPr algn="ctr"/>
+              <a:endParaRPr lang="ko-KR" altLang="en-US"/>
+            </a:p>
+          </p:txBody>
+        </p:sp>
+        <p:sp>
+          <p:nvSpPr>
+            <p:cNvPr id="28" name="직사각형 27">
+              <a:extLst>
+                <a:ext uri="{FF2B5EF4-FFF2-40B4-BE49-F238E27FC236}">
+                  <a16:creationId xmlns:a16="http://schemas.microsoft.com/office/drawing/2014/main" id="{C1652B81-842C-92F8-EE2D-8B949739A0D8}"/>
+                </a:ext>
+              </a:extLst>
+            </p:cNvPr>
+            <p:cNvSpPr/>
+            <p:nvPr/>
+          </p:nvSpPr>
+          <p:spPr>
+            <a:xfrm>
+              <a:off x="288122" y="1462177"/>
+              <a:ext cx="595788" cy="711698"/>
+            </a:xfrm>
+            <a:prstGeom prst="rect">
+              <a:avLst/>
+            </a:prstGeom>
+            <a:solidFill>
+              <a:schemeClr val="bg1"/>
+            </a:solidFill>
+            <a:ln w="76200">
+              <a:solidFill>
+                <a:schemeClr val="tx1"/>
+              </a:solidFill>
+            </a:ln>
+          </p:spPr>
+          <p:style>
+            <a:lnRef idx="2">
+              <a:schemeClr val="accent1">
+                <a:shade val="15000"/>
+              </a:schemeClr>
+            </a:lnRef>
+            <a:fillRef idx="1">
+              <a:schemeClr val="accent1"/>
+            </a:fillRef>
+            <a:effectRef idx="0">
+              <a:schemeClr val="accent1"/>
+            </a:effectRef>
+            <a:fontRef idx="minor">
+              <a:schemeClr val="lt1"/>
+            </a:fontRef>
+          </p:style>
+          <p:txBody>
+            <a:bodyPr rtlCol="0" anchor="ctr"/>
+            <a:lstStyle/>
+            <a:p>
+              <a:pPr algn="ctr"/>
+              <a:endParaRPr lang="ko-KR" altLang="en-US"/>
+            </a:p>
+          </p:txBody>
+        </p:sp>
+        <p:cxnSp>
+          <p:nvCxnSpPr>
+            <p:cNvPr id="25" name="직선 연결선 24">
+              <a:extLst>
+                <a:ext uri="{FF2B5EF4-FFF2-40B4-BE49-F238E27FC236}">
+                  <a16:creationId xmlns:a16="http://schemas.microsoft.com/office/drawing/2014/main" id="{D34DBFCB-B2FE-840C-24EA-E2908D660D08}"/>
+                </a:ext>
+              </a:extLst>
+            </p:cNvPr>
+            <p:cNvCxnSpPr/>
+            <p:nvPr/>
+          </p:nvCxnSpPr>
+          <p:spPr>
+            <a:xfrm flipH="1">
+              <a:off x="687931" y="1634784"/>
+              <a:ext cx="164229" cy="0"/>
+            </a:xfrm>
+            <a:prstGeom prst="line">
+              <a:avLst/>
+            </a:prstGeom>
+            <a:ln w="76200">
+              <a:solidFill>
+                <a:schemeClr val="tx1"/>
+              </a:solidFill>
+            </a:ln>
+          </p:spPr>
+          <p:style>
+            <a:lnRef idx="2">
+              <a:schemeClr val="accent1"/>
+            </a:lnRef>
+            <a:fillRef idx="0">
+              <a:schemeClr val="accent1"/>
+            </a:fillRef>
+            <a:effectRef idx="1">
+              <a:schemeClr val="accent1"/>
+            </a:effectRef>
+            <a:fontRef idx="minor">
+              <a:schemeClr val="tx1"/>
+            </a:fontRef>
+          </p:style>
+        </p:cxnSp>
+        <p:cxnSp>
+          <p:nvCxnSpPr>
+            <p:cNvPr id="26" name="직선 연결선 25">
+              <a:extLst>
+                <a:ext uri="{FF2B5EF4-FFF2-40B4-BE49-F238E27FC236}">
+                  <a16:creationId xmlns:a16="http://schemas.microsoft.com/office/drawing/2014/main" id="{6556E7EC-FB54-B833-C732-9EDB7CFF5F63}"/>
+                </a:ext>
+              </a:extLst>
+            </p:cNvPr>
+            <p:cNvCxnSpPr/>
+            <p:nvPr/>
+          </p:nvCxnSpPr>
+          <p:spPr>
+            <a:xfrm flipH="1">
+              <a:off x="684762" y="1831431"/>
+              <a:ext cx="164229" cy="0"/>
+            </a:xfrm>
+            <a:prstGeom prst="line">
+              <a:avLst/>
+            </a:prstGeom>
+            <a:ln w="76200">
+              <a:solidFill>
+                <a:schemeClr val="tx1"/>
+              </a:solidFill>
+            </a:ln>
+          </p:spPr>
+          <p:style>
+            <a:lnRef idx="2">
+              <a:schemeClr val="accent1"/>
+            </a:lnRef>
+            <a:fillRef idx="0">
+              <a:schemeClr val="accent1"/>
+            </a:fillRef>
+            <a:effectRef idx="1">
+              <a:schemeClr val="accent1"/>
+            </a:effectRef>
+            <a:fontRef idx="minor">
+              <a:schemeClr val="tx1"/>
+            </a:fontRef>
+          </p:style>
+        </p:cxnSp>
+        <p:cxnSp>
+          <p:nvCxnSpPr>
+            <p:cNvPr id="27" name="직선 연결선 26">
+              <a:extLst>
+                <a:ext uri="{FF2B5EF4-FFF2-40B4-BE49-F238E27FC236}">
+                  <a16:creationId xmlns:a16="http://schemas.microsoft.com/office/drawing/2014/main" id="{1A178D4A-D202-5B45-A8E2-C0BDCFF330FB}"/>
+                </a:ext>
+              </a:extLst>
+            </p:cNvPr>
+            <p:cNvCxnSpPr/>
+            <p:nvPr/>
+          </p:nvCxnSpPr>
+          <p:spPr>
+            <a:xfrm flipH="1">
+              <a:off x="686887" y="2025309"/>
+              <a:ext cx="164229" cy="0"/>
+            </a:xfrm>
+            <a:prstGeom prst="line">
+              <a:avLst/>
+            </a:prstGeom>
+            <a:ln w="76200">
+              <a:solidFill>
+                <a:schemeClr val="tx1"/>
+              </a:solidFill>
+            </a:ln>
+          </p:spPr>
+          <p:style>
+            <a:lnRef idx="2">
+              <a:schemeClr val="accent1"/>
+            </a:lnRef>
+            <a:fillRef idx="0">
+              <a:schemeClr val="accent1"/>
+            </a:fillRef>
+            <a:effectRef idx="1">
+              <a:schemeClr val="accent1"/>
+            </a:effectRef>
+            <a:fontRef idx="minor">
+              <a:schemeClr val="tx1"/>
+            </a:fontRef>
+          </p:style>
+        </p:cxnSp>
+      </p:grpSp>
+    </p:spTree>
+    <p:extLst>
+      <p:ext uri="{BB962C8B-B14F-4D97-AF65-F5344CB8AC3E}">
+        <p14:creationId xmlns:p14="http://schemas.microsoft.com/office/powerpoint/2010/main" val="1049796729"/>
+      </p:ext>
+    </p:extLst>
+  </p:cSld>
+  <p:clrMapOvr>
+    <a:masterClrMapping/>
+  </p:clrMapOvr>
+</p:sld>
+</file>
+
+<file path=ppt/slides/slide6.xml><?xml version="1.0" encoding="utf-8"?>
+<p:sld xmlns:a="http://schemas.openxmlformats.org/drawingml/2006/main" xmlns:r="http://schemas.openxmlformats.org/officeDocument/2006/relationships" xmlns:p="http://schemas.openxmlformats.org/presentationml/2006/main">
+  <p:cSld>
+    <p:spTree>
+      <p:nvGrpSpPr>
+        <p:cNvPr id="1" name="">
+          <a:extLst>
+            <a:ext uri="{FF2B5EF4-FFF2-40B4-BE49-F238E27FC236}">
               <a16:creationId xmlns:a16="http://schemas.microsoft.com/office/drawing/2014/main" id="{205EE812-6D13-88F4-F357-F0D1BD75C93E}"/>
             </a:ext>
           </a:extLst>
@@ -4378,7 +6467,7 @@
 </p:sld>
 </file>
 
-<file path=ppt/slides/slide5.xml><?xml version="1.0" encoding="utf-8"?>
+<file path=ppt/slides/slide7.xml><?xml version="1.0" encoding="utf-8"?>
 <p:sld xmlns:a="http://schemas.openxmlformats.org/drawingml/2006/main" xmlns:r="http://schemas.openxmlformats.org/officeDocument/2006/relationships" xmlns:p="http://schemas.openxmlformats.org/presentationml/2006/main">
   <p:cSld>
     <p:spTree>
@@ -4506,7 +6595,7 @@
 </p:sld>
 </file>
 
-<file path=ppt/slides/slide6.xml><?xml version="1.0" encoding="utf-8"?>
+<file path=ppt/slides/slide8.xml><?xml version="1.0" encoding="utf-8"?>
 <p:sld xmlns:a="http://schemas.openxmlformats.org/drawingml/2006/main" xmlns:r="http://schemas.openxmlformats.org/officeDocument/2006/relationships" xmlns:p="http://schemas.openxmlformats.org/presentationml/2006/main">
   <p:cSld>
     <p:spTree>
@@ -4731,7 +6820,7 @@
 </p:sld>
 </file>
 
-<file path=ppt/slides/slide7.xml><?xml version="1.0" encoding="utf-8"?>
+<file path=ppt/slides/slide9.xml><?xml version="1.0" encoding="utf-8"?>
 <p:sld xmlns:a="http://schemas.openxmlformats.org/drawingml/2006/main" xmlns:r="http://schemas.openxmlformats.org/officeDocument/2006/relationships" xmlns:p="http://schemas.openxmlformats.org/presentationml/2006/main">
   <p:cSld>
     <p:spTree>
@@ -5004,501 +7093,6 @@
     <p:extLst>
       <p:ext uri="{BB962C8B-B14F-4D97-AF65-F5344CB8AC3E}">
         <p14:creationId xmlns:p14="http://schemas.microsoft.com/office/powerpoint/2010/main" val="1897177749"/>
-      </p:ext>
-    </p:extLst>
-  </p:cSld>
-  <p:clrMapOvr>
-    <a:masterClrMapping/>
-  </p:clrMapOvr>
-</p:sld>
-</file>
-
-<file path=ppt/slides/slide8.xml><?xml version="1.0" encoding="utf-8"?>
-<p:sld xmlns:a="http://schemas.openxmlformats.org/drawingml/2006/main" xmlns:r="http://schemas.openxmlformats.org/officeDocument/2006/relationships" xmlns:p="http://schemas.openxmlformats.org/presentationml/2006/main">
-  <p:cSld>
-    <p:spTree>
-      <p:nvGrpSpPr>
-        <p:cNvPr id="1" name="">
-          <a:extLst>
-            <a:ext uri="{FF2B5EF4-FFF2-40B4-BE49-F238E27FC236}">
-              <a16:creationId xmlns:a16="http://schemas.microsoft.com/office/drawing/2014/main" id="{7DAF7AF4-F129-3E92-36D8-D908D7C0C9ED}"/>
-            </a:ext>
-          </a:extLst>
-        </p:cNvPr>
-        <p:cNvGrpSpPr/>
-        <p:nvPr/>
-      </p:nvGrpSpPr>
-      <p:grpSpPr>
-        <a:xfrm>
-          <a:off x="0" y="0"/>
-          <a:ext cx="0" cy="0"/>
-          <a:chOff x="0" y="0"/>
-          <a:chExt cx="0" cy="0"/>
-        </a:xfrm>
-      </p:grpSpPr>
-      <p:sp>
-        <p:nvSpPr>
-          <p:cNvPr id="4" name="사각형: 둥근 모서리 3">
-            <a:extLst>
-              <a:ext uri="{FF2B5EF4-FFF2-40B4-BE49-F238E27FC236}">
-                <a16:creationId xmlns:a16="http://schemas.microsoft.com/office/drawing/2014/main" id="{86DB814C-93D6-4673-25C3-0BBB5F62A490}"/>
-              </a:ext>
-            </a:extLst>
-          </p:cNvPr>
-          <p:cNvSpPr/>
-          <p:nvPr/>
-        </p:nvSpPr>
-        <p:spPr>
-          <a:xfrm>
-            <a:off x="35681" y="35681"/>
-            <a:ext cx="2448000" cy="2448000"/>
-          </a:xfrm>
-          <a:prstGeom prst="roundRect">
-            <a:avLst/>
-          </a:prstGeom>
-          <a:solidFill>
-            <a:schemeClr val="bg1"/>
-          </a:solidFill>
-          <a:ln w="76200">
-            <a:solidFill>
-              <a:schemeClr val="accent5">
-                <a:lumMod val="60000"/>
-                <a:lumOff val="40000"/>
-              </a:schemeClr>
-            </a:solidFill>
-          </a:ln>
-          <a:effectLst>
-            <a:outerShdw blurRad="44450" dist="27940" dir="5400000" algn="ctr">
-              <a:srgbClr val="000000">
-                <a:alpha val="32000"/>
-              </a:srgbClr>
-            </a:outerShdw>
-          </a:effectLst>
-          <a:scene3d>
-            <a:camera prst="orthographicFront">
-              <a:rot lat="0" lon="0" rev="0"/>
-            </a:camera>
-            <a:lightRig rig="balanced" dir="t">
-              <a:rot lat="0" lon="0" rev="8700000"/>
-            </a:lightRig>
-          </a:scene3d>
-          <a:sp3d>
-            <a:bevelT w="190500" h="38100"/>
-          </a:sp3d>
-        </p:spPr>
-        <p:style>
-          <a:lnRef idx="2">
-            <a:schemeClr val="accent1">
-              <a:shade val="15000"/>
-            </a:schemeClr>
-          </a:lnRef>
-          <a:fillRef idx="1">
-            <a:schemeClr val="accent1"/>
-          </a:fillRef>
-          <a:effectRef idx="0">
-            <a:schemeClr val="accent1"/>
-          </a:effectRef>
-          <a:fontRef idx="minor">
-            <a:schemeClr val="lt1"/>
-          </a:fontRef>
-        </p:style>
-        <p:txBody>
-          <a:bodyPr vert="horz" rtlCol="0" anchor="ctr">
-            <a:prstTxWarp prst="textPlain">
-              <a:avLst/>
-            </a:prstTxWarp>
-          </a:bodyPr>
-          <a:lstStyle/>
-          <a:p>
-            <a:pPr algn="ctr"/>
-            <a:endParaRPr lang="ko-KR" altLang="en-US" dirty="0">
-              <a:ln>
-                <a:solidFill>
-                  <a:schemeClr val="tx1"/>
-                </a:solidFill>
-              </a:ln>
-              <a:solidFill>
-                <a:schemeClr val="tx1"/>
-              </a:solidFill>
-              <a:latin typeface="HY중고딕" panose="02030600000101010101" pitchFamily="18" charset="-127"/>
-              <a:ea typeface="HY중고딕" panose="02030600000101010101" pitchFamily="18" charset="-127"/>
-            </a:endParaRPr>
-          </a:p>
-        </p:txBody>
-      </p:sp>
-      <p:sp>
-        <p:nvSpPr>
-          <p:cNvPr id="8" name="TextBox 7">
-            <a:extLst>
-              <a:ext uri="{FF2B5EF4-FFF2-40B4-BE49-F238E27FC236}">
-                <a16:creationId xmlns:a16="http://schemas.microsoft.com/office/drawing/2014/main" id="{FF6968C8-3F71-F879-D728-21298FD22676}"/>
-              </a:ext>
-            </a:extLst>
-          </p:cNvPr>
-          <p:cNvSpPr txBox="1"/>
-          <p:nvPr/>
-        </p:nvSpPr>
-        <p:spPr>
-          <a:xfrm>
-            <a:off x="72368" y="-83218"/>
-            <a:ext cx="942130" cy="1323439"/>
-          </a:xfrm>
-          <a:prstGeom prst="rect">
-            <a:avLst/>
-          </a:prstGeom>
-          <a:noFill/>
-        </p:spPr>
-        <p:txBody>
-          <a:bodyPr wrap="square">
-            <a:spAutoFit/>
-          </a:bodyPr>
-          <a:lstStyle/>
-          <a:p>
-            <a:r>
-              <a:rPr lang="ko-KR" altLang="en-US" sz="8000" dirty="0">
-                <a:ln>
-                  <a:solidFill>
-                    <a:schemeClr val="accent5">
-                      <a:lumMod val="50000"/>
-                    </a:schemeClr>
-                  </a:solidFill>
-                </a:ln>
-                <a:solidFill>
-                  <a:schemeClr val="accent5">
-                    <a:lumMod val="75000"/>
-                  </a:schemeClr>
-                </a:solidFill>
-                <a:latin typeface="HY중고딕" panose="02030600000101010101" pitchFamily="18" charset="-127"/>
-                <a:ea typeface="HY중고딕" panose="02030600000101010101" pitchFamily="18" charset="-127"/>
-              </a:rPr>
-              <a:t>漢</a:t>
-            </a:r>
-          </a:p>
-        </p:txBody>
-      </p:sp>
-      <p:sp>
-        <p:nvSpPr>
-          <p:cNvPr id="10" name="TextBox 9">
-            <a:extLst>
-              <a:ext uri="{FF2B5EF4-FFF2-40B4-BE49-F238E27FC236}">
-                <a16:creationId xmlns:a16="http://schemas.microsoft.com/office/drawing/2014/main" id="{35A788DE-AF61-6988-180D-5EFA11E021BB}"/>
-              </a:ext>
-            </a:extLst>
-          </p:cNvPr>
-          <p:cNvSpPr txBox="1"/>
-          <p:nvPr/>
-        </p:nvSpPr>
-        <p:spPr>
-          <a:xfrm>
-            <a:off x="602964" y="674275"/>
-            <a:ext cx="1313434" cy="1323439"/>
-          </a:xfrm>
-          <a:prstGeom prst="rect">
-            <a:avLst/>
-          </a:prstGeom>
-          <a:noFill/>
-        </p:spPr>
-        <p:txBody>
-          <a:bodyPr wrap="square">
-            <a:spAutoFit/>
-          </a:bodyPr>
-          <a:lstStyle/>
-          <a:p>
-            <a:r>
-              <a:rPr lang="ko-KR" altLang="en-US" sz="8000" b="1" dirty="0">
-                <a:ln>
-                  <a:solidFill>
-                    <a:schemeClr val="accent5">
-                      <a:lumMod val="50000"/>
-                    </a:schemeClr>
-                  </a:solidFill>
-                </a:ln>
-                <a:solidFill>
-                  <a:schemeClr val="accent5">
-                    <a:lumMod val="75000"/>
-                  </a:schemeClr>
-                </a:solidFill>
-                <a:latin typeface="HY중고딕" panose="02030600000101010101" pitchFamily="18" charset="-127"/>
-                <a:ea typeface="HY중고딕" panose="02030600000101010101" pitchFamily="18" charset="-127"/>
-              </a:rPr>
-              <a:t>字</a:t>
-            </a:r>
-            <a:endParaRPr lang="ko-KR" altLang="en-US" sz="8000" dirty="0">
-              <a:ln>
-                <a:solidFill>
-                  <a:schemeClr val="accent5">
-                    <a:lumMod val="50000"/>
-                  </a:schemeClr>
-                </a:solidFill>
-              </a:ln>
-              <a:solidFill>
-                <a:schemeClr val="accent5">
-                  <a:lumMod val="75000"/>
-                </a:schemeClr>
-              </a:solidFill>
-            </a:endParaRPr>
-          </a:p>
-        </p:txBody>
-      </p:sp>
-      <p:sp>
-        <p:nvSpPr>
-          <p:cNvPr id="3" name="TextBox 2">
-            <a:extLst>
-              <a:ext uri="{FF2B5EF4-FFF2-40B4-BE49-F238E27FC236}">
-                <a16:creationId xmlns:a16="http://schemas.microsoft.com/office/drawing/2014/main" id="{98FB1599-02F1-2C81-56CC-36E18F3AF8CE}"/>
-              </a:ext>
-            </a:extLst>
-          </p:cNvPr>
-          <p:cNvSpPr txBox="1"/>
-          <p:nvPr/>
-        </p:nvSpPr>
-        <p:spPr>
-          <a:xfrm>
-            <a:off x="1259681" y="1240221"/>
-            <a:ext cx="1224000" cy="1323439"/>
-          </a:xfrm>
-          <a:prstGeom prst="rect">
-            <a:avLst/>
-          </a:prstGeom>
-          <a:noFill/>
-        </p:spPr>
-        <p:txBody>
-          <a:bodyPr wrap="square" anchor="ctr">
-            <a:spAutoFit/>
-          </a:bodyPr>
-          <a:lstStyle/>
-          <a:p>
-            <a:r>
-              <a:rPr lang="ko-KR" altLang="en-US" sz="8000" b="1" dirty="0">
-                <a:ln>
-                  <a:solidFill>
-                    <a:schemeClr val="accent5">
-                      <a:lumMod val="50000"/>
-                    </a:schemeClr>
-                  </a:solidFill>
-                </a:ln>
-                <a:solidFill>
-                  <a:schemeClr val="accent5">
-                    <a:lumMod val="75000"/>
-                  </a:schemeClr>
-                </a:solidFill>
-                <a:latin typeface="HY중고딕" panose="02030600000101010101" pitchFamily="18" charset="-127"/>
-                <a:ea typeface="HY중고딕" panose="02030600000101010101" pitchFamily="18" charset="-127"/>
-              </a:rPr>
-              <a:t>源</a:t>
-            </a:r>
-            <a:endParaRPr lang="ko-KR" altLang="en-US" sz="8000" b="1" dirty="0">
-              <a:ln>
-                <a:solidFill>
-                  <a:schemeClr val="accent5">
-                    <a:lumMod val="50000"/>
-                  </a:schemeClr>
-                </a:solidFill>
-              </a:ln>
-              <a:solidFill>
-                <a:schemeClr val="accent5">
-                  <a:lumMod val="75000"/>
-                </a:schemeClr>
-              </a:solidFill>
-            </a:endParaRPr>
-          </a:p>
-        </p:txBody>
-      </p:sp>
-    </p:spTree>
-    <p:extLst>
-      <p:ext uri="{BB962C8B-B14F-4D97-AF65-F5344CB8AC3E}">
-        <p14:creationId xmlns:p14="http://schemas.microsoft.com/office/powerpoint/2010/main" val="2373946299"/>
-      </p:ext>
-    </p:extLst>
-  </p:cSld>
-  <p:clrMapOvr>
-    <a:masterClrMapping/>
-  </p:clrMapOvr>
-</p:sld>
-</file>
-
-<file path=ppt/slides/slide9.xml><?xml version="1.0" encoding="utf-8"?>
-<p:sld xmlns:a="http://schemas.openxmlformats.org/drawingml/2006/main" xmlns:r="http://schemas.openxmlformats.org/officeDocument/2006/relationships" xmlns:p="http://schemas.openxmlformats.org/presentationml/2006/main">
-  <p:cSld>
-    <p:spTree>
-      <p:nvGrpSpPr>
-        <p:cNvPr id="1" name="">
-          <a:extLst>
-            <a:ext uri="{FF2B5EF4-FFF2-40B4-BE49-F238E27FC236}">
-              <a16:creationId xmlns:a16="http://schemas.microsoft.com/office/drawing/2014/main" id="{4CCE8FDF-CB90-B3CB-F987-CCC507B54496}"/>
-            </a:ext>
-          </a:extLst>
-        </p:cNvPr>
-        <p:cNvGrpSpPr/>
-        <p:nvPr/>
-      </p:nvGrpSpPr>
-      <p:grpSpPr>
-        <a:xfrm>
-          <a:off x="0" y="0"/>
-          <a:ext cx="0" cy="0"/>
-          <a:chOff x="0" y="0"/>
-          <a:chExt cx="0" cy="0"/>
-        </a:xfrm>
-      </p:grpSpPr>
-      <p:sp>
-        <p:nvSpPr>
-          <p:cNvPr id="4" name="사각형: 둥근 모서리 3">
-            <a:extLst>
-              <a:ext uri="{FF2B5EF4-FFF2-40B4-BE49-F238E27FC236}">
-                <a16:creationId xmlns:a16="http://schemas.microsoft.com/office/drawing/2014/main" id="{456F9688-54A2-6FBF-D082-3336D5382D67}"/>
-              </a:ext>
-            </a:extLst>
-          </p:cNvPr>
-          <p:cNvSpPr/>
-          <p:nvPr/>
-        </p:nvSpPr>
-        <p:spPr>
-          <a:xfrm>
-            <a:off x="35681" y="35681"/>
-            <a:ext cx="2448000" cy="2448000"/>
-          </a:xfrm>
-          <a:prstGeom prst="roundRect">
-            <a:avLst/>
-          </a:prstGeom>
-          <a:solidFill>
-            <a:schemeClr val="bg1"/>
-          </a:solidFill>
-          <a:ln w="76200">
-            <a:solidFill>
-              <a:schemeClr val="tx1">
-                <a:lumMod val="75000"/>
-                <a:lumOff val="25000"/>
-              </a:schemeClr>
-            </a:solidFill>
-          </a:ln>
-          <a:effectLst>
-            <a:outerShdw blurRad="44450" dist="27940" dir="5400000" algn="ctr">
-              <a:srgbClr val="000000">
-                <a:alpha val="32000"/>
-              </a:srgbClr>
-            </a:outerShdw>
-          </a:effectLst>
-          <a:scene3d>
-            <a:camera prst="orthographicFront">
-              <a:rot lat="0" lon="0" rev="0"/>
-            </a:camera>
-            <a:lightRig rig="balanced" dir="t">
-              <a:rot lat="0" lon="0" rev="8700000"/>
-            </a:lightRig>
-          </a:scene3d>
-          <a:sp3d>
-            <a:bevelT w="190500" h="38100"/>
-          </a:sp3d>
-        </p:spPr>
-        <p:style>
-          <a:lnRef idx="2">
-            <a:schemeClr val="accent1">
-              <a:shade val="15000"/>
-            </a:schemeClr>
-          </a:lnRef>
-          <a:fillRef idx="1">
-            <a:schemeClr val="accent1"/>
-          </a:fillRef>
-          <a:effectRef idx="0">
-            <a:schemeClr val="accent1"/>
-          </a:effectRef>
-          <a:fontRef idx="minor">
-            <a:schemeClr val="lt1"/>
-          </a:fontRef>
-        </p:style>
-        <p:txBody>
-          <a:bodyPr vert="horz" rtlCol="0" anchor="ctr">
-            <a:prstTxWarp prst="textPlain">
-              <a:avLst/>
-            </a:prstTxWarp>
-          </a:bodyPr>
-          <a:lstStyle/>
-          <a:p>
-            <a:pPr algn="ctr"/>
-            <a:endParaRPr lang="ko-KR" altLang="en-US" dirty="0">
-              <a:ln>
-                <a:solidFill>
-                  <a:schemeClr val="tx1"/>
-                </a:solidFill>
-              </a:ln>
-              <a:solidFill>
-                <a:schemeClr val="tx1"/>
-              </a:solidFill>
-              <a:latin typeface="HY중고딕" panose="02030600000101010101" pitchFamily="18" charset="-127"/>
-              <a:ea typeface="HY중고딕" panose="02030600000101010101" pitchFamily="18" charset="-127"/>
-            </a:endParaRPr>
-          </a:p>
-        </p:txBody>
-      </p:sp>
-      <p:sp>
-        <p:nvSpPr>
-          <p:cNvPr id="10" name="TextBox 9">
-            <a:extLst>
-              <a:ext uri="{FF2B5EF4-FFF2-40B4-BE49-F238E27FC236}">
-                <a16:creationId xmlns:a16="http://schemas.microsoft.com/office/drawing/2014/main" id="{E9EBC0C8-EDD2-CF91-7E4D-890C884A740B}"/>
-              </a:ext>
-            </a:extLst>
-          </p:cNvPr>
-          <p:cNvSpPr txBox="1"/>
-          <p:nvPr/>
-        </p:nvSpPr>
-        <p:spPr>
-          <a:xfrm>
-            <a:off x="1" y="267690"/>
-            <a:ext cx="2519362" cy="2215991"/>
-          </a:xfrm>
-          <a:prstGeom prst="rect">
-            <a:avLst/>
-          </a:prstGeom>
-          <a:noFill/>
-        </p:spPr>
-        <p:txBody>
-          <a:bodyPr wrap="square">
-            <a:spAutoFit/>
-          </a:bodyPr>
-          <a:lstStyle/>
-          <a:p>
-            <a:pPr algn="ctr"/>
-            <a:r>
-              <a:rPr lang="ja-JP" altLang="en-US" sz="13800" b="1" dirty="0">
-                <a:ln>
-                  <a:solidFill>
-                    <a:schemeClr val="accent5">
-                      <a:lumMod val="50000"/>
-                    </a:schemeClr>
-                  </a:solidFill>
-                </a:ln>
-                <a:solidFill>
-                  <a:schemeClr val="bg1">
-                    <a:lumMod val="50000"/>
-                  </a:schemeClr>
-                </a:solidFill>
-                <a:latin typeface="HY중고딕" panose="02030600000101010101" pitchFamily="18" charset="-127"/>
-                <a:ea typeface="HY중고딕" panose="02030600000101010101" pitchFamily="18" charset="-127"/>
-              </a:rPr>
-              <a:t>広</a:t>
-            </a:r>
-            <a:endParaRPr lang="ko-KR" altLang="en-US" sz="8000" dirty="0">
-              <a:ln>
-                <a:solidFill>
-                  <a:schemeClr val="accent5">
-                    <a:lumMod val="50000"/>
-                  </a:schemeClr>
-                </a:solidFill>
-              </a:ln>
-              <a:solidFill>
-                <a:schemeClr val="bg1">
-                  <a:lumMod val="50000"/>
-                </a:schemeClr>
-              </a:solidFill>
-            </a:endParaRPr>
-          </a:p>
-        </p:txBody>
-      </p:sp>
-    </p:spTree>
-    <p:extLst>
-      <p:ext uri="{BB962C8B-B14F-4D97-AF65-F5344CB8AC3E}">
-        <p14:creationId xmlns:p14="http://schemas.microsoft.com/office/powerpoint/2010/main" val="2430601126"/>
       </p:ext>
     </p:extLst>
   </p:cSld>
@@ -5821,4 +7415,319 @@
     </a:ext>
   </a:extLst>
 </a:theme>
+</file>
+
+<file path=ppt/theme/theme2.xml><?xml version="1.0" encoding="utf-8"?>
+<a:theme xmlns:a="http://schemas.openxmlformats.org/drawingml/2006/main" name="Office 테마">
+  <a:themeElements>
+    <a:clrScheme name="Office">
+      <a:dk1>
+        <a:sysClr val="windowText" lastClr="000000"/>
+      </a:dk1>
+      <a:lt1>
+        <a:sysClr val="window" lastClr="FFFFFF"/>
+      </a:lt1>
+      <a:dk2>
+        <a:srgbClr val="0E2841"/>
+      </a:dk2>
+      <a:lt2>
+        <a:srgbClr val="E8E8E8"/>
+      </a:lt2>
+      <a:accent1>
+        <a:srgbClr val="156082"/>
+      </a:accent1>
+      <a:accent2>
+        <a:srgbClr val="E97132"/>
+      </a:accent2>
+      <a:accent3>
+        <a:srgbClr val="196B24"/>
+      </a:accent3>
+      <a:accent4>
+        <a:srgbClr val="0F9ED5"/>
+      </a:accent4>
+      <a:accent5>
+        <a:srgbClr val="A02B93"/>
+      </a:accent5>
+      <a:accent6>
+        <a:srgbClr val="4EA72E"/>
+      </a:accent6>
+      <a:hlink>
+        <a:srgbClr val="467886"/>
+      </a:hlink>
+      <a:folHlink>
+        <a:srgbClr val="96607D"/>
+      </a:folHlink>
+    </a:clrScheme>
+    <a:fontScheme name="Office">
+      <a:majorFont>
+        <a:latin typeface="맑은 고딕" panose="02110004020202020204"/>
+        <a:ea typeface=""/>
+        <a:cs typeface=""/>
+        <a:font script="Jpan" typeface="游ゴシック Light"/>
+        <a:font script="Hang" typeface="맑은 고딕"/>
+        <a:font script="Hans" typeface="等线 Light"/>
+        <a:font script="Hant" typeface="新細明體"/>
+        <a:font script="Arab" typeface="Times New Roman"/>
+        <a:font script="Hebr" typeface="Times New Roman"/>
+        <a:font script="Thai" typeface="Angsana New"/>
+        <a:font script="Ethi" typeface="Nyala"/>
+        <a:font script="Beng" typeface="Vrinda"/>
+        <a:font script="Gujr" typeface="Shruti"/>
+        <a:font script="Khmr" typeface="MoolBoran"/>
+        <a:font script="Knda" typeface="Tunga"/>
+        <a:font script="Guru" typeface="Raavi"/>
+        <a:font script="Cans" typeface="Euphemia"/>
+        <a:font script="Cher" typeface="Plantagenet Cherokee"/>
+        <a:font script="Yiii" typeface="Microsoft Yi Baiti"/>
+        <a:font script="Tibt" typeface="Microsoft Himalaya"/>
+        <a:font script="Thaa" typeface="MV Boli"/>
+        <a:font script="Deva" typeface="Mangal"/>
+        <a:font script="Telu" typeface="Gautami"/>
+        <a:font script="Taml" typeface="Latha"/>
+        <a:font script="Syrc" typeface="Estrangelo Edessa"/>
+        <a:font script="Orya" typeface="Kalinga"/>
+        <a:font script="Mlym" typeface="Kartika"/>
+        <a:font script="Laoo" typeface="DokChampa"/>
+        <a:font script="Sinh" typeface="Iskoola Pota"/>
+        <a:font script="Mong" typeface="Mongolian Baiti"/>
+        <a:font script="Viet" typeface="Times New Roman"/>
+        <a:font script="Uigh" typeface="Microsoft Uighur"/>
+        <a:font script="Geor" typeface="Sylfaen"/>
+        <a:font script="Armn" typeface="Arial"/>
+        <a:font script="Bugi" typeface="Leelawadee UI"/>
+        <a:font script="Bopo" typeface="Microsoft JhengHei"/>
+        <a:font script="Java" typeface="Javanese Text"/>
+        <a:font script="Lisu" typeface="Segoe UI"/>
+        <a:font script="Mymr" typeface="Myanmar Text"/>
+        <a:font script="Nkoo" typeface="Ebrima"/>
+        <a:font script="Olck" typeface="Nirmala UI"/>
+        <a:font script="Osma" typeface="Ebrima"/>
+        <a:font script="Phag" typeface="Phagspa"/>
+        <a:font script="Syrn" typeface="Estrangelo Edessa"/>
+        <a:font script="Syrj" typeface="Estrangelo Edessa"/>
+        <a:font script="Syre" typeface="Estrangelo Edessa"/>
+        <a:font script="Sora" typeface="Nirmala UI"/>
+        <a:font script="Tale" typeface="Microsoft Tai Le"/>
+        <a:font script="Talu" typeface="Microsoft New Tai Lue"/>
+        <a:font script="Tfng" typeface="Ebrima"/>
+      </a:majorFont>
+      <a:minorFont>
+        <a:latin typeface="맑은 고딕" panose="02110004020202020204"/>
+        <a:ea typeface=""/>
+        <a:cs typeface=""/>
+        <a:font script="Jpan" typeface="游ゴシック"/>
+        <a:font script="Hang" typeface="맑은 고딕"/>
+        <a:font script="Hans" typeface="等线"/>
+        <a:font script="Hant" typeface="新細明體"/>
+        <a:font script="Arab" typeface="Arial"/>
+        <a:font script="Hebr" typeface="Arial"/>
+        <a:font script="Thai" typeface="Cordia New"/>
+        <a:font script="Ethi" typeface="Nyala"/>
+        <a:font script="Beng" typeface="Vrinda"/>
+        <a:font script="Gujr" typeface="Shruti"/>
+        <a:font script="Khmr" typeface="DaunPenh"/>
+        <a:font script="Knda" typeface="Tunga"/>
+        <a:font script="Guru" typeface="Raavi"/>
+        <a:font script="Cans" typeface="Euphemia"/>
+        <a:font script="Cher" typeface="Plantagenet Cherokee"/>
+        <a:font script="Yiii" typeface="Microsoft Yi Baiti"/>
+        <a:font script="Tibt" typeface="Microsoft Himalaya"/>
+        <a:font script="Thaa" typeface="MV Boli"/>
+        <a:font script="Deva" typeface="Mangal"/>
+        <a:font script="Telu" typeface="Gautami"/>
+        <a:font script="Taml" typeface="Latha"/>
+        <a:font script="Syrc" typeface="Estrangelo Edessa"/>
+        <a:font script="Orya" typeface="Kalinga"/>
+        <a:font script="Mlym" typeface="Kartika"/>
+        <a:font script="Laoo" typeface="DokChampa"/>
+        <a:font script="Sinh" typeface="Iskoola Pota"/>
+        <a:font script="Mong" typeface="Mongolian Baiti"/>
+        <a:font script="Viet" typeface="Arial"/>
+        <a:font script="Uigh" typeface="Microsoft Uighur"/>
+        <a:font script="Geor" typeface="Sylfaen"/>
+        <a:font script="Armn" typeface="Arial"/>
+        <a:font script="Bugi" typeface="Leelawadee UI"/>
+        <a:font script="Bopo" typeface="Microsoft JhengHei"/>
+        <a:font script="Java" typeface="Javanese Text"/>
+        <a:font script="Lisu" typeface="Segoe UI"/>
+        <a:font script="Mymr" typeface="Myanmar Text"/>
+        <a:font script="Nkoo" typeface="Ebrima"/>
+        <a:font script="Olck" typeface="Nirmala UI"/>
+        <a:font script="Osma" typeface="Ebrima"/>
+        <a:font script="Phag" typeface="Phagspa"/>
+        <a:font script="Syrn" typeface="Estrangelo Edessa"/>
+        <a:font script="Syrj" typeface="Estrangelo Edessa"/>
+        <a:font script="Syre" typeface="Estrangelo Edessa"/>
+        <a:font script="Sora" typeface="Nirmala UI"/>
+        <a:font script="Tale" typeface="Microsoft Tai Le"/>
+        <a:font script="Talu" typeface="Microsoft New Tai Lue"/>
+        <a:font script="Tfng" typeface="Ebrima"/>
+      </a:minorFont>
+    </a:fontScheme>
+    <a:fmtScheme name="Office">
+      <a:fillStyleLst>
+        <a:solidFill>
+          <a:schemeClr val="phClr"/>
+        </a:solidFill>
+        <a:gradFill rotWithShape="1">
+          <a:gsLst>
+            <a:gs pos="0">
+              <a:schemeClr val="phClr">
+                <a:lumMod val="110000"/>
+                <a:satMod val="105000"/>
+                <a:tint val="67000"/>
+              </a:schemeClr>
+            </a:gs>
+            <a:gs pos="50000">
+              <a:schemeClr val="phClr">
+                <a:lumMod val="105000"/>
+                <a:satMod val="103000"/>
+                <a:tint val="73000"/>
+              </a:schemeClr>
+            </a:gs>
+            <a:gs pos="100000">
+              <a:schemeClr val="phClr">
+                <a:lumMod val="105000"/>
+                <a:satMod val="109000"/>
+                <a:tint val="81000"/>
+              </a:schemeClr>
+            </a:gs>
+          </a:gsLst>
+          <a:lin ang="5400000" scaled="0"/>
+        </a:gradFill>
+        <a:gradFill rotWithShape="1">
+          <a:gsLst>
+            <a:gs pos="0">
+              <a:schemeClr val="phClr">
+                <a:satMod val="103000"/>
+                <a:lumMod val="102000"/>
+                <a:tint val="94000"/>
+              </a:schemeClr>
+            </a:gs>
+            <a:gs pos="50000">
+              <a:schemeClr val="phClr">
+                <a:satMod val="110000"/>
+                <a:lumMod val="100000"/>
+                <a:shade val="100000"/>
+              </a:schemeClr>
+            </a:gs>
+            <a:gs pos="100000">
+              <a:schemeClr val="phClr">
+                <a:lumMod val="99000"/>
+                <a:satMod val="120000"/>
+                <a:shade val="78000"/>
+              </a:schemeClr>
+            </a:gs>
+          </a:gsLst>
+          <a:lin ang="5400000" scaled="0"/>
+        </a:gradFill>
+      </a:fillStyleLst>
+      <a:lnStyleLst>
+        <a:ln w="12700" cap="flat" cmpd="sng" algn="ctr">
+          <a:solidFill>
+            <a:schemeClr val="phClr"/>
+          </a:solidFill>
+          <a:prstDash val="solid"/>
+          <a:miter lim="800000"/>
+        </a:ln>
+        <a:ln w="19050" cap="flat" cmpd="sng" algn="ctr">
+          <a:solidFill>
+            <a:schemeClr val="phClr"/>
+          </a:solidFill>
+          <a:prstDash val="solid"/>
+          <a:miter lim="800000"/>
+        </a:ln>
+        <a:ln w="25400" cap="flat" cmpd="sng" algn="ctr">
+          <a:solidFill>
+            <a:schemeClr val="phClr"/>
+          </a:solidFill>
+          <a:prstDash val="solid"/>
+          <a:miter lim="800000"/>
+        </a:ln>
+      </a:lnStyleLst>
+      <a:effectStyleLst>
+        <a:effectStyle>
+          <a:effectLst/>
+        </a:effectStyle>
+        <a:effectStyle>
+          <a:effectLst/>
+        </a:effectStyle>
+        <a:effectStyle>
+          <a:effectLst>
+            <a:outerShdw blurRad="57150" dist="19050" dir="5400000" algn="ctr" rotWithShape="0">
+              <a:srgbClr val="000000">
+                <a:alpha val="63000"/>
+              </a:srgbClr>
+            </a:outerShdw>
+          </a:effectLst>
+        </a:effectStyle>
+      </a:effectStyleLst>
+      <a:bgFillStyleLst>
+        <a:solidFill>
+          <a:schemeClr val="phClr"/>
+        </a:solidFill>
+        <a:solidFill>
+          <a:schemeClr val="phClr">
+            <a:tint val="95000"/>
+            <a:satMod val="170000"/>
+          </a:schemeClr>
+        </a:solidFill>
+        <a:gradFill rotWithShape="1">
+          <a:gsLst>
+            <a:gs pos="0">
+              <a:schemeClr val="phClr">
+                <a:tint val="93000"/>
+                <a:satMod val="150000"/>
+                <a:shade val="98000"/>
+                <a:lumMod val="102000"/>
+              </a:schemeClr>
+            </a:gs>
+            <a:gs pos="50000">
+              <a:schemeClr val="phClr">
+                <a:tint val="98000"/>
+                <a:satMod val="130000"/>
+                <a:shade val="90000"/>
+                <a:lumMod val="103000"/>
+              </a:schemeClr>
+            </a:gs>
+            <a:gs pos="100000">
+              <a:schemeClr val="phClr">
+                <a:shade val="63000"/>
+                <a:satMod val="120000"/>
+              </a:schemeClr>
+            </a:gs>
+          </a:gsLst>
+          <a:lin ang="5400000" scaled="0"/>
+        </a:gradFill>
+      </a:bgFillStyleLst>
+    </a:fmtScheme>
+  </a:themeElements>
+  <a:objectDefaults>
+    <a:lnDef>
+      <a:spPr/>
+      <a:bodyPr/>
+      <a:lstStyle/>
+      <a:style>
+        <a:lnRef idx="2">
+          <a:schemeClr val="accent1"/>
+        </a:lnRef>
+        <a:fillRef idx="0">
+          <a:schemeClr val="accent1"/>
+        </a:fillRef>
+        <a:effectRef idx="1">
+          <a:schemeClr val="accent1"/>
+        </a:effectRef>
+        <a:fontRef idx="minor">
+          <a:schemeClr val="tx1"/>
+        </a:fontRef>
+      </a:style>
+    </a:lnDef>
+  </a:objectDefaults>
+  <a:extraClrSchemeLst/>
+  <a:extLst>
+    <a:ext uri="{05A4C25C-085E-4340-85A3-A5531E510DB2}">
+      <thm15:themeFamily xmlns:thm15="http://schemas.microsoft.com/office/thememl/2012/main" name="Office Theme" id="{2E142A2C-CD16-42D6-873A-C26D2A0506FA}" vid="{1BDDFF52-6CD6-40A5-AB3C-68EB2F1E4D0A}"/>
+    </a:ext>
+  </a:extLst>
+</a:theme>
 </file>